--- a/teaching-materials/vcd-vce/powerpoint/Unit4-Design-Development-and-Presentation.pptx
+++ b/teaching-materials/vcd-vce/powerpoint/Unit4-Design-Development-and-Presentation.pptx
@@ -20,6 +20,7 @@
     <p:sldId id="268" r:id="rId19"/>
     <p:sldId id="269" r:id="rId20"/>
     <p:sldId id="270" r:id="rId21"/>
+    <p:sldId id="271" r:id="rId22"/>
   </p:sldIdLst>
   <p:sldSz cx="12191695" cy="6858000" type="screen4x3"/>
   <p:notesSz cx="6858000" cy="9144000"/>
@@ -3095,6 +3096,14 @@
 <file path=ppt/slides/slide1.xml><?xml version="1.0" encoding="utf-8"?>
 <p:sld xmlns:a="http://schemas.openxmlformats.org/drawingml/2006/main" xmlns:p="http://schemas.openxmlformats.org/presentationml/2006/main" xmlns:r="http://schemas.openxmlformats.org/officeDocument/2006/relationships">
   <p:cSld>
+    <p:bg>
+      <p:bgPr>
+        <a:solidFill>
+          <a:srgbClr val="F8F6FB"/>
+        </a:solidFill>
+        <a:effectLst/>
+      </p:bgPr>
+    </p:bg>
     <p:spTree>
       <p:nvGrpSpPr>
         <p:cNvPr id="1" name=""/>
@@ -3104,74 +3113,22 @@
       <p:grpSpPr/>
       <p:sp>
         <p:nvSpPr>
-          <p:cNvPr id="2" name="Title 1"/>
-          <p:cNvSpPr>
-            <a:spLocks noGrp="1"/>
-          </p:cNvSpPr>
-          <p:nvPr>
-            <p:ph type="ctrTitle"/>
-          </p:nvPr>
-        </p:nvSpPr>
-        <p:spPr/>
-        <p:txBody>
-          <a:bodyPr/>
-          <a:lstStyle/>
-          <a:p>
-            <a:r>
-              <a:rPr b="1">
-                <a:solidFill>
-                  <a:srgbClr val="3B2F4A"/>
-                </a:solidFill>
-                <a:latin typeface="Cambria"/>
-              </a:rPr>
-              <a:t>Unit 4: Design, Development and Presentation</a:t>
-            </a:r>
-          </a:p>
-        </p:txBody>
-      </p:sp>
-      <p:sp>
-        <p:nvSpPr>
-          <p:cNvPr id="3" name="Subtitle 2"/>
-          <p:cNvSpPr>
-            <a:spLocks noGrp="1"/>
-          </p:cNvSpPr>
-          <p:nvPr>
-            <p:ph type="subTitle" idx="1"/>
-          </p:nvPr>
-        </p:nvSpPr>
-        <p:spPr/>
-        <p:txBody>
-          <a:bodyPr/>
-          <a:lstStyle/>
-          <a:p>
-            <a:r>
-              <a:rPr sz="2000">
-                <a:solidFill>
-                  <a:srgbClr val="595959"/>
-                </a:solidFill>
-                <a:latin typeface="Calibri"/>
-              </a:rPr>
-              <a:t>VCE Visual Communication Design — Year 12</a:t>
-            </a:r>
-          </a:p>
-        </p:txBody>
-      </p:sp>
-      <p:sp>
-        <p:nvSpPr>
-          <p:cNvPr id="4" name="Rectangle 3"/>
+          <p:cNvPr id="2" name="Rounded Rectangle 1"/>
           <p:cNvSpPr/>
           <p:nvPr/>
         </p:nvSpPr>
         <p:spPr>
-          <a:xfrm>
-            <a:off x="548640" y="3063240"/>
-            <a:ext cx="1645920" cy="38100"/>
-          </a:xfrm>
-          <a:prstGeom prst="rect">
-            <a:avLst/>
+          <a:xfrm rot="21420000">
+            <a:off x="-1188720" y="-1005840"/>
+            <a:ext cx="7863840" cy="6766560"/>
+          </a:xfrm>
+          <a:prstGeom prst="roundRect">
+            <a:avLst>
+              <a:gd name="adj" fmla="val 32000"/>
+            </a:avLst>
           </a:prstGeom>
           <a:solidFill>
-            <a:srgbClr val="3B2F4A"/>
+            <a:srgbClr val="2B2A4A"/>
           </a:solidFill>
           <a:ln>
             <a:noFill/>
@@ -3197,6 +3154,254 @@
           <a:lstStyle/>
           <a:p>
             <a:pPr algn="ctr"/>
+          </a:p>
+        </p:txBody>
+      </p:sp>
+      <p:sp>
+        <p:nvSpPr>
+          <p:cNvPr id="3" name="Oval 2"/>
+          <p:cNvSpPr/>
+          <p:nvPr/>
+        </p:nvSpPr>
+        <p:spPr>
+          <a:xfrm>
+            <a:off x="10332720" y="-640080"/>
+            <a:ext cx="2194560" cy="2194560"/>
+          </a:xfrm>
+          <a:prstGeom prst="ellipse">
+            <a:avLst/>
+          </a:prstGeom>
+          <a:solidFill>
+            <a:srgbClr val="D9A441"/>
+          </a:solidFill>
+          <a:ln>
+            <a:noFill/>
+          </a:ln>
+          <a:effectLst/>
+        </p:spPr>
+        <p:style>
+          <a:lnRef idx="1">
+            <a:schemeClr val="accent1"/>
+          </a:lnRef>
+          <a:fillRef idx="3">
+            <a:schemeClr val="accent1"/>
+          </a:fillRef>
+          <a:effectRef idx="2">
+            <a:schemeClr val="accent1"/>
+          </a:effectRef>
+          <a:fontRef idx="minor">
+            <a:schemeClr val="lt1"/>
+          </a:fontRef>
+        </p:style>
+        <p:txBody>
+          <a:bodyPr rtlCol="0" anchor="ctr"/>
+          <a:lstStyle/>
+          <a:p>
+            <a:pPr algn="ctr"/>
+          </a:p>
+        </p:txBody>
+      </p:sp>
+      <p:sp>
+        <p:nvSpPr>
+          <p:cNvPr id="4" name="Oval 3"/>
+          <p:cNvSpPr/>
+          <p:nvPr/>
+        </p:nvSpPr>
+        <p:spPr>
+          <a:xfrm>
+            <a:off x="365760" y="5623560"/>
+            <a:ext cx="1371600" cy="1371600"/>
+          </a:xfrm>
+          <a:prstGeom prst="ellipse">
+            <a:avLst/>
+          </a:prstGeom>
+          <a:solidFill>
+            <a:srgbClr val="C97B9E"/>
+          </a:solidFill>
+          <a:ln>
+            <a:noFill/>
+          </a:ln>
+          <a:effectLst/>
+        </p:spPr>
+        <p:style>
+          <a:lnRef idx="1">
+            <a:schemeClr val="accent1"/>
+          </a:lnRef>
+          <a:fillRef idx="3">
+            <a:schemeClr val="accent1"/>
+          </a:fillRef>
+          <a:effectRef idx="2">
+            <a:schemeClr val="accent1"/>
+          </a:effectRef>
+          <a:fontRef idx="minor">
+            <a:schemeClr val="lt1"/>
+          </a:fontRef>
+        </p:style>
+        <p:txBody>
+          <a:bodyPr rtlCol="0" anchor="ctr"/>
+          <a:lstStyle/>
+          <a:p>
+            <a:pPr algn="ctr"/>
+          </a:p>
+        </p:txBody>
+      </p:sp>
+      <p:sp>
+        <p:nvSpPr>
+          <p:cNvPr id="5" name="TextBox 4"/>
+          <p:cNvSpPr txBox="1"/>
+          <p:nvPr/>
+        </p:nvSpPr>
+        <p:spPr>
+          <a:xfrm>
+            <a:off x="8503920" y="3566160"/>
+            <a:ext cx="3291840" cy="3108960"/>
+          </a:xfrm>
+          <a:prstGeom prst="rect">
+            <a:avLst/>
+          </a:prstGeom>
+          <a:noFill/>
+        </p:spPr>
+        <p:txBody>
+          <a:bodyPr wrap="none" anchor="ctr">
+            <a:spAutoFit/>
+          </a:bodyPr>
+          <a:lstStyle/>
+          <a:p>
+            <a:pPr algn="ctr"/>
+            <a:r>
+              <a:rPr sz="22000" b="1" i="0">
+                <a:solidFill>
+                  <a:srgbClr val="D8D8DE"/>
+                </a:solidFill>
+                <a:latin typeface="Cambria"/>
+              </a:rPr>
+              <a:t>4</a:t>
+            </a:r>
+          </a:p>
+        </p:txBody>
+      </p:sp>
+      <p:sp>
+        <p:nvSpPr>
+          <p:cNvPr id="6" name="Rounded Rectangle 5"/>
+          <p:cNvSpPr/>
+          <p:nvPr/>
+        </p:nvSpPr>
+        <p:spPr>
+          <a:xfrm>
+            <a:off x="731520" y="640080"/>
+            <a:ext cx="4114800" cy="502920"/>
+          </a:xfrm>
+          <a:prstGeom prst="roundRect">
+            <a:avLst>
+              <a:gd name="adj" fmla="val 50000"/>
+            </a:avLst>
+          </a:prstGeom>
+          <a:solidFill>
+            <a:srgbClr val="FFFFFF"/>
+          </a:solidFill>
+          <a:ln>
+            <a:noFill/>
+          </a:ln>
+          <a:effectLst/>
+        </p:spPr>
+        <p:style>
+          <a:lnRef idx="1">
+            <a:schemeClr val="accent1"/>
+          </a:lnRef>
+          <a:fillRef idx="3">
+            <a:schemeClr val="accent1"/>
+          </a:fillRef>
+          <a:effectRef idx="2">
+            <a:schemeClr val="accent1"/>
+          </a:effectRef>
+          <a:fontRef idx="minor">
+            <a:schemeClr val="lt1"/>
+          </a:fontRef>
+        </p:style>
+        <p:txBody>
+          <a:bodyPr rtlCol="0" anchor="ctr" wrap="none" lIns="50800" rIns="50800"/>
+          <a:lstStyle/>
+          <a:p>
+            <a:pPr algn="ctr"/>
+            <a:r>
+              <a:rPr sz="1150" b="1">
+                <a:solidFill>
+                  <a:srgbClr val="2B2A4A"/>
+                </a:solidFill>
+                <a:latin typeface="Calibri"/>
+              </a:rPr>
+              <a:t>VCE VISUAL COMMUNICATION DESIGN</a:t>
+            </a:r>
+          </a:p>
+        </p:txBody>
+      </p:sp>
+      <p:sp>
+        <p:nvSpPr>
+          <p:cNvPr id="7" name="TextBox 6"/>
+          <p:cNvSpPr txBox="1"/>
+          <p:nvPr/>
+        </p:nvSpPr>
+        <p:spPr>
+          <a:xfrm>
+            <a:off x="685800" y="1417320"/>
+            <a:ext cx="5669280" cy="2377440"/>
+          </a:xfrm>
+          <a:prstGeom prst="rect">
+            <a:avLst/>
+          </a:prstGeom>
+          <a:noFill/>
+        </p:spPr>
+        <p:txBody>
+          <a:bodyPr wrap="square" anchor="t">
+            <a:spAutoFit/>
+          </a:bodyPr>
+          <a:lstStyle/>
+          <a:p>
+            <a:pPr algn="l"/>
+            <a:r>
+              <a:rPr sz="3400" b="1" i="0">
+                <a:solidFill>
+                  <a:srgbClr val="FFFFFF"/>
+                </a:solidFill>
+                <a:latin typeface="Cambria"/>
+              </a:rPr>
+              <a:t>Unit 4: Design, Development and Presentation</a:t>
+            </a:r>
+          </a:p>
+        </p:txBody>
+      </p:sp>
+      <p:sp>
+        <p:nvSpPr>
+          <p:cNvPr id="8" name="TextBox 7"/>
+          <p:cNvSpPr txBox="1"/>
+          <p:nvPr/>
+        </p:nvSpPr>
+        <p:spPr>
+          <a:xfrm>
+            <a:off x="731520" y="3794760"/>
+            <a:ext cx="5486400" cy="731520"/>
+          </a:xfrm>
+          <a:prstGeom prst="rect">
+            <a:avLst/>
+          </a:prstGeom>
+          <a:noFill/>
+        </p:spPr>
+        <p:txBody>
+          <a:bodyPr wrap="square" anchor="t">
+            <a:spAutoFit/>
+          </a:bodyPr>
+          <a:lstStyle/>
+          <a:p>
+            <a:pPr algn="l"/>
+            <a:r>
+              <a:rPr sz="1600" b="0" i="0">
+                <a:solidFill>
+                  <a:srgbClr val="E9E9EC"/>
+                </a:solidFill>
+                <a:latin typeface="Calibri"/>
+              </a:rPr>
+              <a:t>VCE Visual Communication Design — Year 12</a:t>
+            </a:r>
           </a:p>
         </p:txBody>
       </p:sp>
@@ -3211,6 +3416,14 @@
 <file path=ppt/slides/slide10.xml><?xml version="1.0" encoding="utf-8"?>
 <p:sld xmlns:a="http://schemas.openxmlformats.org/drawingml/2006/main" xmlns:p="http://schemas.openxmlformats.org/presentationml/2006/main" xmlns:r="http://schemas.openxmlformats.org/officeDocument/2006/relationships">
   <p:cSld>
+    <p:bg>
+      <p:bgPr>
+        <a:solidFill>
+          <a:srgbClr val="F8F6FB"/>
+        </a:solidFill>
+        <a:effectLst/>
+      </p:bgPr>
+    </p:bg>
     <p:spTree>
       <p:nvGrpSpPr>
         <p:cNvPr id="1" name=""/>
@@ -3220,227 +3433,386 @@
       <p:grpSpPr/>
       <p:sp>
         <p:nvSpPr>
-          <p:cNvPr id="2" name="Title 1"/>
-          <p:cNvSpPr>
-            <a:spLocks noGrp="1"/>
-          </p:cNvSpPr>
-          <p:nvPr>
-            <p:ph type="title"/>
-          </p:nvPr>
-        </p:nvSpPr>
-        <p:spPr/>
-        <p:txBody>
-          <a:bodyPr wrap="square"/>
-          <a:lstStyle/>
-          <a:p>
-            <a:r>
-              <a:rPr sz="3200" b="1">
-                <a:solidFill>
-                  <a:srgbClr val="3B2F4A"/>
-                </a:solidFill>
-                <a:latin typeface="Cambria"/>
-              </a:rPr>
-              <a:t>From Resolution to Final Presentation</a:t>
-            </a:r>
-          </a:p>
-        </p:txBody>
-      </p:sp>
-      <p:sp>
-        <p:nvSpPr>
-          <p:cNvPr id="3" name="Content Placeholder 2"/>
-          <p:cNvSpPr>
-            <a:spLocks noGrp="1"/>
-          </p:cNvSpPr>
-          <p:nvPr>
-            <p:ph idx="1" sz="half"/>
-          </p:nvPr>
-        </p:nvSpPr>
-        <p:spPr/>
-        <p:txBody>
-          <a:bodyPr wrap="square"/>
-          <a:lstStyle/>
-          <a:p>
-            <a:pPr>
-              <a:spcAft>
-                <a:spcPts val="1000"/>
-              </a:spcAft>
-            </a:pPr>
-            <a:r>
-              <a:rPr sz="2000" b="0" i="0">
-                <a:solidFill>
-                  <a:srgbClr val="333333"/>
-                </a:solidFill>
-                <a:latin typeface="Calibri"/>
-              </a:rPr>
-              <a:t>Once a concept is resolved, it undergoes </a:t>
-            </a:r>
-            <a:r>
-              <a:rPr sz="2000" b="1" i="0">
-                <a:solidFill>
-                  <a:srgbClr val="3B2F4A"/>
-                </a:solidFill>
-                <a:latin typeface="Calibri"/>
-              </a:rPr>
-              <a:t>final refinement</a:t>
-            </a:r>
-            <a:r>
-              <a:rPr sz="2000" b="0" i="0">
-                <a:solidFill>
-                  <a:srgbClr val="333333"/>
-                </a:solidFill>
-                <a:latin typeface="Calibri"/>
-              </a:rPr>
-              <a:t> — small, precise adjustments — before being presented to a professional standard.</a:t>
-            </a:r>
-          </a:p>
-          <a:p>
-            <a:pPr>
-              <a:spcAft>
-                <a:spcPts val="1000"/>
-              </a:spcAft>
-            </a:pPr>
-            <a:r>
-              <a:rPr sz="2000" b="0" i="0">
-                <a:solidFill>
-                  <a:srgbClr val="333333"/>
-                </a:solidFill>
-                <a:latin typeface="Calibri"/>
-              </a:rPr>
-              <a:t>The finished design is then </a:t>
-            </a:r>
-            <a:r>
-              <a:rPr sz="2000" b="1" i="0">
-                <a:solidFill>
-                  <a:srgbClr val="3B2F4A"/>
-                </a:solidFill>
-                <a:latin typeface="Calibri"/>
-              </a:rPr>
-              <a:t>evaluated</a:t>
-            </a:r>
-            <a:r>
-              <a:rPr sz="2000" b="0" i="0">
-                <a:solidFill>
-                  <a:srgbClr val="333333"/>
-                </a:solidFill>
-                <a:latin typeface="Calibri"/>
-              </a:rPr>
-              <a:t> against the original brief to determine its success.</a:t>
-            </a:r>
-          </a:p>
-        </p:txBody>
-      </p:sp>
-      <p:sp>
-        <p:nvSpPr>
-          <p:cNvPr id="4" name="Content Placeholder 3"/>
-          <p:cNvSpPr>
-            <a:spLocks noGrp="1"/>
-          </p:cNvSpPr>
-          <p:nvPr>
-            <p:ph idx="2" sz="half"/>
-          </p:nvPr>
-        </p:nvSpPr>
-        <p:spPr/>
-        <p:txBody>
-          <a:bodyPr wrap="square"/>
-          <a:lstStyle/>
-          <a:p>
-            <a:pPr>
-              <a:spcAft>
-                <a:spcPts val="1000"/>
-              </a:spcAft>
-            </a:pPr>
-            <a:r>
-              <a:rPr sz="2000" b="0" i="0">
-                <a:solidFill>
-                  <a:srgbClr val="333333"/>
-                </a:solidFill>
-                <a:latin typeface="Calibri"/>
-              </a:rPr>
-              <a:t>This AOS Covers</a:t>
-            </a:r>
-          </a:p>
-          <a:p>
-            <a:pPr lvl="1">
-              <a:spcAft>
-                <a:spcPts val="1000"/>
-              </a:spcAft>
-            </a:pPr>
-            <a:r>
-              <a:rPr sz="1800" b="0" i="0">
-                <a:solidFill>
-                  <a:srgbClr val="333333"/>
-                </a:solidFill>
-                <a:latin typeface="Calibri"/>
-              </a:rPr>
-              <a:t>Final refinement techniques</a:t>
-            </a:r>
-          </a:p>
-          <a:p>
-            <a:pPr lvl="1">
-              <a:spcAft>
-                <a:spcPts val="1000"/>
-              </a:spcAft>
-            </a:pPr>
-            <a:r>
-              <a:rPr sz="1800" b="0" i="0">
-                <a:solidFill>
-                  <a:srgbClr val="333333"/>
-                </a:solidFill>
-                <a:latin typeface="Calibri"/>
-              </a:rPr>
-              <a:t>Presentation drawing standards</a:t>
-            </a:r>
-          </a:p>
-          <a:p>
-            <a:pPr lvl="1">
-              <a:spcAft>
-                <a:spcPts val="1000"/>
-              </a:spcAft>
-            </a:pPr>
-            <a:r>
-              <a:rPr sz="1800" b="0" i="0">
-                <a:solidFill>
-                  <a:srgbClr val="333333"/>
-                </a:solidFill>
-                <a:latin typeface="Calibri"/>
-              </a:rPr>
-              <a:t>Folio layout and clarity</a:t>
-            </a:r>
-          </a:p>
-          <a:p>
-            <a:pPr lvl="1">
-              <a:spcAft>
-                <a:spcPts val="1000"/>
-              </a:spcAft>
-            </a:pPr>
-            <a:r>
-              <a:rPr sz="1800" b="0" i="0">
-                <a:solidFill>
-                  <a:srgbClr val="333333"/>
-                </a:solidFill>
-                <a:latin typeface="Calibri"/>
-              </a:rPr>
-              <a:t>Evaluating against the brief</a:t>
-            </a:r>
-          </a:p>
-        </p:txBody>
-      </p:sp>
-      <p:sp>
-        <p:nvSpPr>
-          <p:cNvPr id="5" name="Rectangle 4"/>
+          <p:cNvPr id="2" name="Rounded Rectangle 1"/>
           <p:cNvSpPr/>
           <p:nvPr/>
         </p:nvSpPr>
         <p:spPr>
           <a:xfrm>
-            <a:off x="548640" y="1234440"/>
-            <a:ext cx="1463040" cy="38100"/>
+            <a:off x="685800" y="502920"/>
+            <a:ext cx="3291840" cy="457200"/>
+          </a:xfrm>
+          <a:prstGeom prst="roundRect">
+            <a:avLst>
+              <a:gd name="adj" fmla="val 50000"/>
+            </a:avLst>
+          </a:prstGeom>
+          <a:solidFill>
+            <a:srgbClr val="2B2A4A"/>
+          </a:solidFill>
+          <a:ln>
+            <a:noFill/>
+          </a:ln>
+          <a:effectLst/>
+        </p:spPr>
+        <p:style>
+          <a:lnRef idx="1">
+            <a:schemeClr val="accent1"/>
+          </a:lnRef>
+          <a:fillRef idx="3">
+            <a:schemeClr val="accent1"/>
+          </a:fillRef>
+          <a:effectRef idx="2">
+            <a:schemeClr val="accent1"/>
+          </a:effectRef>
+          <a:fontRef idx="minor">
+            <a:schemeClr val="lt1"/>
+          </a:fontRef>
+        </p:style>
+        <p:txBody>
+          <a:bodyPr rtlCol="0" anchor="ctr" wrap="none" lIns="50800" rIns="50800"/>
+          <a:lstStyle/>
+          <a:p>
+            <a:pPr algn="ctr"/>
+            <a:r>
+              <a:rPr sz="1100" b="1">
+                <a:solidFill>
+                  <a:srgbClr val="FFFFFF"/>
+                </a:solidFill>
+                <a:latin typeface="Calibri"/>
+              </a:rPr>
+              <a:t>EVALUATION &amp; PRESENTATION</a:t>
+            </a:r>
+          </a:p>
+        </p:txBody>
+      </p:sp>
+      <p:sp>
+        <p:nvSpPr>
+          <p:cNvPr id="3" name="TextBox 2"/>
+          <p:cNvSpPr txBox="1"/>
+          <p:nvPr/>
+        </p:nvSpPr>
+        <p:spPr>
+          <a:xfrm>
+            <a:off x="685800" y="1051560"/>
+            <a:ext cx="10607040" cy="822960"/>
           </a:xfrm>
           <a:prstGeom prst="rect">
             <a:avLst/>
           </a:prstGeom>
+          <a:noFill/>
+        </p:spPr>
+        <p:txBody>
+          <a:bodyPr wrap="square" anchor="t">
+            <a:spAutoFit/>
+          </a:bodyPr>
+          <a:lstStyle/>
+          <a:p>
+            <a:pPr algn="l"/>
+            <a:r>
+              <a:rPr sz="2700" b="1" i="0">
+                <a:solidFill>
+                  <a:srgbClr val="201F33"/>
+                </a:solidFill>
+                <a:latin typeface="Cambria"/>
+              </a:rPr>
+              <a:t>From Resolution to Final Presentation</a:t>
+            </a:r>
+          </a:p>
+        </p:txBody>
+      </p:sp>
+      <p:sp>
+        <p:nvSpPr>
+          <p:cNvPr id="4" name="Rounded Rectangle 3"/>
+          <p:cNvSpPr/>
+          <p:nvPr/>
+        </p:nvSpPr>
+        <p:spPr>
+          <a:xfrm>
+            <a:off x="685800" y="1874519"/>
+            <a:ext cx="5166360" cy="4526280"/>
+          </a:xfrm>
+          <a:prstGeom prst="roundRect">
+            <a:avLst>
+              <a:gd name="adj" fmla="val 6000"/>
+            </a:avLst>
+          </a:prstGeom>
           <a:solidFill>
-            <a:srgbClr val="3B2F4A"/>
+            <a:srgbClr val="E5E5E9"/>
+          </a:solidFill>
+          <a:ln>
+            <a:noFill/>
+          </a:ln>
+          <a:effectLst/>
+        </p:spPr>
+        <p:style>
+          <a:lnRef idx="1">
+            <a:schemeClr val="accent1"/>
+          </a:lnRef>
+          <a:fillRef idx="3">
+            <a:schemeClr val="accent1"/>
+          </a:fillRef>
+          <a:effectRef idx="2">
+            <a:schemeClr val="accent1"/>
+          </a:effectRef>
+          <a:fontRef idx="minor">
+            <a:schemeClr val="lt1"/>
+          </a:fontRef>
+        </p:style>
+        <p:txBody>
+          <a:bodyPr rtlCol="0" anchor="ctr" lIns="279400" rIns="279400" tIns="228600" bIns="228600" wrap="square"/>
+          <a:lstStyle/>
+          <a:p>
+            <a:pPr algn="ctr" indent="-203200" marL="203200">
+              <a:spcAft>
+                <a:spcPts val="900"/>
+              </a:spcAft>
+              <a:buClr>
+                <a:srgbClr val="2B2A4A"/>
+              </a:buClr>
+              <a:buSzPct val="90000"/>
+              <a:buFont typeface="Arial"/>
+              <a:buChar char="●"/>
+            </a:pPr>
+            <a:r>
+              <a:rPr sz="1400" b="0" i="0">
+                <a:solidFill>
+                  <a:srgbClr val="201F33"/>
+                </a:solidFill>
+                <a:latin typeface="Calibri"/>
+              </a:rPr>
+              <a:t>Once a concept is resolved, it undergoes </a:t>
+            </a:r>
+            <a:r>
+              <a:rPr sz="1400" b="1" i="0">
+                <a:solidFill>
+                  <a:srgbClr val="24233E"/>
+                </a:solidFill>
+                <a:latin typeface="Calibri"/>
+              </a:rPr>
+              <a:t>final refinement</a:t>
+            </a:r>
+            <a:r>
+              <a:rPr sz="1400" b="0" i="0">
+                <a:solidFill>
+                  <a:srgbClr val="201F33"/>
+                </a:solidFill>
+                <a:latin typeface="Calibri"/>
+              </a:rPr>
+              <a:t> — small, precise adjustments — before being presented to a professional standard.</a:t>
+            </a:r>
+          </a:p>
+          <a:p>
+            <a:pPr indent="-203200" marL="203200">
+              <a:spcAft>
+                <a:spcPts val="900"/>
+              </a:spcAft>
+              <a:buClr>
+                <a:srgbClr val="2B2A4A"/>
+              </a:buClr>
+              <a:buSzPct val="90000"/>
+              <a:buFont typeface="Arial"/>
+              <a:buChar char="●"/>
+            </a:pPr>
+            <a:r>
+              <a:rPr sz="1400" b="0" i="0">
+                <a:solidFill>
+                  <a:srgbClr val="201F33"/>
+                </a:solidFill>
+                <a:latin typeface="Calibri"/>
+              </a:rPr>
+              <a:t>The finished design is then </a:t>
+            </a:r>
+            <a:r>
+              <a:rPr sz="1400" b="1" i="0">
+                <a:solidFill>
+                  <a:srgbClr val="24233E"/>
+                </a:solidFill>
+                <a:latin typeface="Calibri"/>
+              </a:rPr>
+              <a:t>evaluated</a:t>
+            </a:r>
+            <a:r>
+              <a:rPr sz="1400" b="0" i="0">
+                <a:solidFill>
+                  <a:srgbClr val="201F33"/>
+                </a:solidFill>
+                <a:latin typeface="Calibri"/>
+              </a:rPr>
+              <a:t> against the original brief to determine its success.</a:t>
+            </a:r>
+          </a:p>
+        </p:txBody>
+      </p:sp>
+      <p:sp>
+        <p:nvSpPr>
+          <p:cNvPr id="5" name="Rounded Rectangle 4"/>
+          <p:cNvSpPr/>
+          <p:nvPr/>
+        </p:nvSpPr>
+        <p:spPr>
+          <a:xfrm>
+            <a:off x="6080760" y="1874519"/>
+            <a:ext cx="5166360" cy="4526280"/>
+          </a:xfrm>
+          <a:prstGeom prst="roundRect">
+            <a:avLst>
+              <a:gd name="adj" fmla="val 6000"/>
+            </a:avLst>
+          </a:prstGeom>
+          <a:solidFill>
+            <a:srgbClr val="EFDAE3"/>
+          </a:solidFill>
+          <a:ln>
+            <a:noFill/>
+          </a:ln>
+          <a:effectLst/>
+        </p:spPr>
+        <p:style>
+          <a:lnRef idx="1">
+            <a:schemeClr val="accent1"/>
+          </a:lnRef>
+          <a:fillRef idx="3">
+            <a:schemeClr val="accent1"/>
+          </a:fillRef>
+          <a:effectRef idx="2">
+            <a:schemeClr val="accent1"/>
+          </a:effectRef>
+          <a:fontRef idx="minor">
+            <a:schemeClr val="lt1"/>
+          </a:fontRef>
+        </p:style>
+        <p:txBody>
+          <a:bodyPr rtlCol="0" anchor="ctr" lIns="279400" rIns="279400" tIns="228600" bIns="228600" wrap="square"/>
+          <a:lstStyle/>
+          <a:p>
+            <a:pPr algn="ctr" indent="-203200" marL="203200">
+              <a:spcAft>
+                <a:spcPts val="900"/>
+              </a:spcAft>
+              <a:buClr>
+                <a:srgbClr val="C97B9E"/>
+              </a:buClr>
+              <a:buSzPct val="90000"/>
+              <a:buFont typeface="Arial"/>
+              <a:buChar char="●"/>
+            </a:pPr>
+            <a:r>
+              <a:rPr sz="1400" b="0" i="0">
+                <a:solidFill>
+                  <a:srgbClr val="201F33"/>
+                </a:solidFill>
+                <a:latin typeface="Calibri"/>
+              </a:rPr>
+              <a:t>This AOS Covers</a:t>
+            </a:r>
+          </a:p>
+          <a:p>
+            <a:pPr indent="-203200" marL="203200">
+              <a:spcAft>
+                <a:spcPts val="900"/>
+              </a:spcAft>
+              <a:buClr>
+                <a:srgbClr val="C97B9E"/>
+              </a:buClr>
+              <a:buSzPct val="90000"/>
+              <a:buFont typeface="Arial"/>
+              <a:buChar char="–"/>
+            </a:pPr>
+            <a:r>
+              <a:rPr sz="1250" b="0" i="0">
+                <a:solidFill>
+                  <a:srgbClr val="201F33"/>
+                </a:solidFill>
+                <a:latin typeface="Calibri"/>
+              </a:rPr>
+              <a:t>Final refinement techniques</a:t>
+            </a:r>
+          </a:p>
+          <a:p>
+            <a:pPr indent="-203200" marL="203200">
+              <a:spcAft>
+                <a:spcPts val="900"/>
+              </a:spcAft>
+              <a:buClr>
+                <a:srgbClr val="C97B9E"/>
+              </a:buClr>
+              <a:buSzPct val="90000"/>
+              <a:buFont typeface="Arial"/>
+              <a:buChar char="–"/>
+            </a:pPr>
+            <a:r>
+              <a:rPr sz="1250" b="0" i="0">
+                <a:solidFill>
+                  <a:srgbClr val="201F33"/>
+                </a:solidFill>
+                <a:latin typeface="Calibri"/>
+              </a:rPr>
+              <a:t>Presentation drawing standards</a:t>
+            </a:r>
+          </a:p>
+          <a:p>
+            <a:pPr indent="-203200" marL="203200">
+              <a:spcAft>
+                <a:spcPts val="900"/>
+              </a:spcAft>
+              <a:buClr>
+                <a:srgbClr val="C97B9E"/>
+              </a:buClr>
+              <a:buSzPct val="90000"/>
+              <a:buFont typeface="Arial"/>
+              <a:buChar char="–"/>
+            </a:pPr>
+            <a:r>
+              <a:rPr sz="1250" b="0" i="0">
+                <a:solidFill>
+                  <a:srgbClr val="201F33"/>
+                </a:solidFill>
+                <a:latin typeface="Calibri"/>
+              </a:rPr>
+              <a:t>Folio layout and clarity</a:t>
+            </a:r>
+          </a:p>
+          <a:p>
+            <a:pPr indent="-203200" marL="203200">
+              <a:spcAft>
+                <a:spcPts val="900"/>
+              </a:spcAft>
+              <a:buClr>
+                <a:srgbClr val="C97B9E"/>
+              </a:buClr>
+              <a:buSzPct val="90000"/>
+              <a:buFont typeface="Arial"/>
+              <a:buChar char="–"/>
+            </a:pPr>
+            <a:r>
+              <a:rPr sz="1250" b="0" i="0">
+                <a:solidFill>
+                  <a:srgbClr val="201F33"/>
+                </a:solidFill>
+                <a:latin typeface="Calibri"/>
+              </a:rPr>
+              <a:t>Evaluating against the brief</a:t>
+            </a:r>
+          </a:p>
+        </p:txBody>
+      </p:sp>
+      <p:sp>
+        <p:nvSpPr>
+          <p:cNvPr id="6" name="Oval 5"/>
+          <p:cNvSpPr/>
+          <p:nvPr/>
+        </p:nvSpPr>
+        <p:spPr>
+          <a:xfrm>
+            <a:off x="5532120" y="3840480"/>
+            <a:ext cx="685800" cy="685800"/>
+          </a:xfrm>
+          <a:prstGeom prst="ellipse">
+            <a:avLst/>
+          </a:prstGeom>
+          <a:solidFill>
+            <a:srgbClr val="D9A441"/>
           </a:solidFill>
           <a:ln>
             <a:noFill/>
@@ -3480,6 +3852,14 @@
 <file path=ppt/slides/slide11.xml><?xml version="1.0" encoding="utf-8"?>
 <p:sld xmlns:a="http://schemas.openxmlformats.org/drawingml/2006/main" xmlns:p="http://schemas.openxmlformats.org/presentationml/2006/main" xmlns:r="http://schemas.openxmlformats.org/officeDocument/2006/relationships">
   <p:cSld>
+    <p:bg>
+      <p:bgPr>
+        <a:solidFill>
+          <a:srgbClr val="F8F6FB"/>
+        </a:solidFill>
+        <a:effectLst/>
+      </p:bgPr>
+    </p:bg>
     <p:spTree>
       <p:nvGrpSpPr>
         <p:cNvPr id="1" name=""/>
@@ -3489,247 +3869,400 @@
       <p:grpSpPr/>
       <p:sp>
         <p:nvSpPr>
-          <p:cNvPr id="2" name="Title 1"/>
-          <p:cNvSpPr>
-            <a:spLocks noGrp="1"/>
-          </p:cNvSpPr>
-          <p:nvPr>
-            <p:ph type="title"/>
-          </p:nvPr>
-        </p:nvSpPr>
-        <p:spPr/>
-        <p:txBody>
-          <a:bodyPr wrap="square"/>
-          <a:lstStyle/>
-          <a:p>
-            <a:r>
-              <a:rPr sz="3200" b="1">
-                <a:solidFill>
-                  <a:srgbClr val="3B2F4A"/>
-                </a:solidFill>
-                <a:latin typeface="Cambria"/>
-              </a:rPr>
-              <a:t>Presentation Standards</a:t>
-            </a:r>
-          </a:p>
-        </p:txBody>
-      </p:sp>
-      <p:sp>
-        <p:nvSpPr>
-          <p:cNvPr id="3" name="Content Placeholder 2"/>
-          <p:cNvSpPr>
-            <a:spLocks noGrp="1"/>
-          </p:cNvSpPr>
-          <p:nvPr>
-            <p:ph idx="1" sz="half"/>
-          </p:nvPr>
-        </p:nvSpPr>
-        <p:spPr/>
-        <p:txBody>
-          <a:bodyPr wrap="square"/>
-          <a:lstStyle/>
-          <a:p>
-            <a:pPr>
-              <a:spcAft>
-                <a:spcPts val="1000"/>
-              </a:spcAft>
-            </a:pPr>
-            <a:r>
-              <a:rPr sz="2000" b="0" i="0">
-                <a:solidFill>
-                  <a:srgbClr val="333333"/>
-                </a:solidFill>
-                <a:latin typeface="Calibri"/>
-              </a:rPr>
-              <a:t>The final design must be presented using an appropriate method to a professional standard, clearly communicating the resolved concept.</a:t>
-            </a:r>
-          </a:p>
-          <a:p>
-            <a:pPr lvl="1">
-              <a:spcAft>
-                <a:spcPts val="1000"/>
-              </a:spcAft>
-            </a:pPr>
-            <a:r>
-              <a:rPr sz="1800" b="1" i="0">
-                <a:solidFill>
-                  <a:srgbClr val="3B2F4A"/>
-                </a:solidFill>
-                <a:latin typeface="Calibri"/>
-              </a:rPr>
-              <a:t>Accuracy</a:t>
-            </a:r>
-            <a:r>
-              <a:rPr sz="1800" b="0" i="0">
-                <a:solidFill>
-                  <a:srgbClr val="333333"/>
-                </a:solidFill>
-                <a:latin typeface="Calibri"/>
-              </a:rPr>
-              <a:t> — correct use of orthogonal, isometric or perspective methods</a:t>
-            </a:r>
-          </a:p>
-          <a:p>
-            <a:pPr lvl="1">
-              <a:spcAft>
-                <a:spcPts val="1000"/>
-              </a:spcAft>
-            </a:pPr>
-            <a:r>
-              <a:rPr sz="1800" b="1" i="0">
-                <a:solidFill>
-                  <a:srgbClr val="3B2F4A"/>
-                </a:solidFill>
-                <a:latin typeface="Calibri"/>
-              </a:rPr>
-              <a:t>Rendering</a:t>
-            </a:r>
-            <a:r>
-              <a:rPr sz="1800" b="0" i="0">
-                <a:solidFill>
-                  <a:srgbClr val="333333"/>
-                </a:solidFill>
-                <a:latin typeface="Calibri"/>
-              </a:rPr>
-              <a:t> — colour, tone and material communicated clearly</a:t>
-            </a:r>
-          </a:p>
-          <a:p>
-            <a:pPr lvl="1">
-              <a:spcAft>
-                <a:spcPts val="1000"/>
-              </a:spcAft>
-            </a:pPr>
-            <a:r>
-              <a:rPr sz="1800" b="1" i="0">
-                <a:solidFill>
-                  <a:srgbClr val="3B2F4A"/>
-                </a:solidFill>
-                <a:latin typeface="Calibri"/>
-              </a:rPr>
-              <a:t>Context</a:t>
-            </a:r>
-            <a:r>
-              <a:rPr sz="1800" b="0" i="0">
-                <a:solidFill>
-                  <a:srgbClr val="333333"/>
-                </a:solidFill>
-                <a:latin typeface="Calibri"/>
-              </a:rPr>
-              <a:t> — mockups or environment shown where relevant</a:t>
-            </a:r>
-          </a:p>
-          <a:p>
-            <a:pPr lvl="1">
-              <a:spcAft>
-                <a:spcPts val="1000"/>
-              </a:spcAft>
-            </a:pPr>
-            <a:r>
-              <a:rPr sz="1800" b="1" i="0">
-                <a:solidFill>
-                  <a:srgbClr val="3B2F4A"/>
-                </a:solidFill>
-                <a:latin typeface="Calibri"/>
-              </a:rPr>
-              <a:t>Craftsmanship</a:t>
-            </a:r>
-            <a:r>
-              <a:rPr sz="1800" b="0" i="0">
-                <a:solidFill>
-                  <a:srgbClr val="333333"/>
-                </a:solidFill>
-                <a:latin typeface="Calibri"/>
-              </a:rPr>
-              <a:t> — clean linework, consistent scale, legible annotation</a:t>
-            </a:r>
-          </a:p>
-        </p:txBody>
-      </p:sp>
-      <p:sp>
-        <p:nvSpPr>
-          <p:cNvPr id="4" name="Content Placeholder 3"/>
-          <p:cNvSpPr>
-            <a:spLocks noGrp="1"/>
-          </p:cNvSpPr>
-          <p:nvPr>
-            <p:ph idx="2" sz="half"/>
-          </p:nvPr>
-        </p:nvSpPr>
-        <p:spPr/>
-        <p:txBody>
-          <a:bodyPr wrap="square"/>
-          <a:lstStyle/>
-          <a:p>
-            <a:pPr>
-              <a:spcAft>
-                <a:spcPts val="1000"/>
-              </a:spcAft>
-            </a:pPr>
-            <a:r>
-              <a:rPr sz="2000" b="0" i="0">
-                <a:solidFill>
-                  <a:srgbClr val="333333"/>
-                </a:solidFill>
-                <a:latin typeface="Calibri"/>
-              </a:rPr>
-              <a:t>See the </a:t>
-            </a:r>
-            <a:r>
-              <a:rPr sz="2000" b="1" i="0">
-                <a:solidFill>
-                  <a:srgbClr val="3B2F4A"/>
-                </a:solidFill>
-                <a:latin typeface="Calibri"/>
-              </a:rPr>
-              <a:t>Technical Drawing</a:t>
-            </a:r>
-            <a:r>
-              <a:rPr sz="2000" b="0" i="0">
-                <a:solidFill>
-                  <a:srgbClr val="333333"/>
-                </a:solidFill>
-                <a:latin typeface="Calibri"/>
-              </a:rPr>
-              <a:t> and </a:t>
-            </a:r>
-            <a:r>
-              <a:rPr sz="2000" b="1" i="0">
-                <a:solidFill>
-                  <a:srgbClr val="3B2F4A"/>
-                </a:solidFill>
-                <a:latin typeface="Calibri"/>
-              </a:rPr>
-              <a:t>Visualisation Drawing</a:t>
-            </a:r>
-            <a:r>
-              <a:rPr sz="2000" b="0" i="0">
-                <a:solidFill>
-                  <a:srgbClr val="333333"/>
-                </a:solidFill>
-                <a:latin typeface="Calibri"/>
-              </a:rPr>
-              <a:t> handouts (Unit 1 AOS 2) for a full recap of drawing methods.</a:t>
-            </a:r>
-          </a:p>
-        </p:txBody>
-      </p:sp>
-      <p:sp>
-        <p:nvSpPr>
-          <p:cNvPr id="5" name="Rectangle 4"/>
+          <p:cNvPr id="2" name="Rounded Rectangle 1"/>
           <p:cNvSpPr/>
           <p:nvPr/>
         </p:nvSpPr>
         <p:spPr>
           <a:xfrm>
-            <a:off x="548640" y="1234440"/>
-            <a:ext cx="1463040" cy="38100"/>
+            <a:off x="685800" y="502920"/>
+            <a:ext cx="3291840" cy="457200"/>
+          </a:xfrm>
+          <a:prstGeom prst="roundRect">
+            <a:avLst>
+              <a:gd name="adj" fmla="val 50000"/>
+            </a:avLst>
+          </a:prstGeom>
+          <a:solidFill>
+            <a:srgbClr val="2B2A4A"/>
+          </a:solidFill>
+          <a:ln>
+            <a:noFill/>
+          </a:ln>
+          <a:effectLst/>
+        </p:spPr>
+        <p:style>
+          <a:lnRef idx="1">
+            <a:schemeClr val="accent1"/>
+          </a:lnRef>
+          <a:fillRef idx="3">
+            <a:schemeClr val="accent1"/>
+          </a:fillRef>
+          <a:effectRef idx="2">
+            <a:schemeClr val="accent1"/>
+          </a:effectRef>
+          <a:fontRef idx="minor">
+            <a:schemeClr val="lt1"/>
+          </a:fontRef>
+        </p:style>
+        <p:txBody>
+          <a:bodyPr rtlCol="0" anchor="ctr" wrap="none" lIns="50800" rIns="50800"/>
+          <a:lstStyle/>
+          <a:p>
+            <a:pPr algn="ctr"/>
+            <a:r>
+              <a:rPr sz="1100" b="1">
+                <a:solidFill>
+                  <a:srgbClr val="FFFFFF"/>
+                </a:solidFill>
+                <a:latin typeface="Calibri"/>
+              </a:rPr>
+              <a:t>EVALUATION &amp; PRESENTATION</a:t>
+            </a:r>
+          </a:p>
+        </p:txBody>
+      </p:sp>
+      <p:sp>
+        <p:nvSpPr>
+          <p:cNvPr id="3" name="TextBox 2"/>
+          <p:cNvSpPr txBox="1"/>
+          <p:nvPr/>
+        </p:nvSpPr>
+        <p:spPr>
+          <a:xfrm>
+            <a:off x="685800" y="1051560"/>
+            <a:ext cx="10607040" cy="822960"/>
           </a:xfrm>
           <a:prstGeom prst="rect">
             <a:avLst/>
           </a:prstGeom>
+          <a:noFill/>
+        </p:spPr>
+        <p:txBody>
+          <a:bodyPr wrap="square" anchor="t">
+            <a:spAutoFit/>
+          </a:bodyPr>
+          <a:lstStyle/>
+          <a:p>
+            <a:pPr algn="l"/>
+            <a:r>
+              <a:rPr sz="2700" b="1" i="0">
+                <a:solidFill>
+                  <a:srgbClr val="201F33"/>
+                </a:solidFill>
+                <a:latin typeface="Cambria"/>
+              </a:rPr>
+              <a:t>Presentation Standards</a:t>
+            </a:r>
+          </a:p>
+        </p:txBody>
+      </p:sp>
+      <p:sp>
+        <p:nvSpPr>
+          <p:cNvPr id="4" name="Rounded Rectangle 3"/>
+          <p:cNvSpPr/>
+          <p:nvPr/>
+        </p:nvSpPr>
+        <p:spPr>
+          <a:xfrm>
+            <a:off x="685800" y="1874519"/>
+            <a:ext cx="5166360" cy="4526280"/>
+          </a:xfrm>
+          <a:prstGeom prst="roundRect">
+            <a:avLst>
+              <a:gd name="adj" fmla="val 6000"/>
+            </a:avLst>
+          </a:prstGeom>
           <a:solidFill>
-            <a:srgbClr val="3B2F4A"/>
+            <a:srgbClr val="E5E5E9"/>
+          </a:solidFill>
+          <a:ln>
+            <a:noFill/>
+          </a:ln>
+          <a:effectLst/>
+        </p:spPr>
+        <p:style>
+          <a:lnRef idx="1">
+            <a:schemeClr val="accent1"/>
+          </a:lnRef>
+          <a:fillRef idx="3">
+            <a:schemeClr val="accent1"/>
+          </a:fillRef>
+          <a:effectRef idx="2">
+            <a:schemeClr val="accent1"/>
+          </a:effectRef>
+          <a:fontRef idx="minor">
+            <a:schemeClr val="lt1"/>
+          </a:fontRef>
+        </p:style>
+        <p:txBody>
+          <a:bodyPr rtlCol="0" anchor="ctr" lIns="279400" rIns="279400" tIns="228600" bIns="228600" wrap="square"/>
+          <a:lstStyle/>
+          <a:p>
+            <a:pPr algn="ctr" indent="-203200" marL="203200">
+              <a:spcAft>
+                <a:spcPts val="900"/>
+              </a:spcAft>
+              <a:buClr>
+                <a:srgbClr val="2B2A4A"/>
+              </a:buClr>
+              <a:buSzPct val="90000"/>
+              <a:buFont typeface="Arial"/>
+              <a:buChar char="●"/>
+            </a:pPr>
+            <a:r>
+              <a:rPr sz="1400" b="0" i="0">
+                <a:solidFill>
+                  <a:srgbClr val="201F33"/>
+                </a:solidFill>
+                <a:latin typeface="Calibri"/>
+              </a:rPr>
+              <a:t>The final design must be presented using an appropriate method to a professional standard, clearly communicating the resolved concept.</a:t>
+            </a:r>
+          </a:p>
+          <a:p>
+            <a:pPr indent="-203200" marL="203200">
+              <a:spcAft>
+                <a:spcPts val="900"/>
+              </a:spcAft>
+              <a:buClr>
+                <a:srgbClr val="2B2A4A"/>
+              </a:buClr>
+              <a:buSzPct val="90000"/>
+              <a:buFont typeface="Arial"/>
+              <a:buChar char="–"/>
+            </a:pPr>
+            <a:r>
+              <a:rPr sz="1250" b="1" i="0">
+                <a:solidFill>
+                  <a:srgbClr val="24233E"/>
+                </a:solidFill>
+                <a:latin typeface="Calibri"/>
+              </a:rPr>
+              <a:t>Accuracy</a:t>
+            </a:r>
+            <a:r>
+              <a:rPr sz="1250" b="0" i="0">
+                <a:solidFill>
+                  <a:srgbClr val="201F33"/>
+                </a:solidFill>
+                <a:latin typeface="Calibri"/>
+              </a:rPr>
+              <a:t> — correct use of orthogonal, isometric or perspective methods</a:t>
+            </a:r>
+          </a:p>
+          <a:p>
+            <a:pPr indent="-203200" marL="203200">
+              <a:spcAft>
+                <a:spcPts val="900"/>
+              </a:spcAft>
+              <a:buClr>
+                <a:srgbClr val="2B2A4A"/>
+              </a:buClr>
+              <a:buSzPct val="90000"/>
+              <a:buFont typeface="Arial"/>
+              <a:buChar char="–"/>
+            </a:pPr>
+            <a:r>
+              <a:rPr sz="1250" b="1" i="0">
+                <a:solidFill>
+                  <a:srgbClr val="24233E"/>
+                </a:solidFill>
+                <a:latin typeface="Calibri"/>
+              </a:rPr>
+              <a:t>Rendering</a:t>
+            </a:r>
+            <a:r>
+              <a:rPr sz="1250" b="0" i="0">
+                <a:solidFill>
+                  <a:srgbClr val="201F33"/>
+                </a:solidFill>
+                <a:latin typeface="Calibri"/>
+              </a:rPr>
+              <a:t> — colour, tone and material communicated clearly</a:t>
+            </a:r>
+          </a:p>
+          <a:p>
+            <a:pPr indent="-203200" marL="203200">
+              <a:spcAft>
+                <a:spcPts val="900"/>
+              </a:spcAft>
+              <a:buClr>
+                <a:srgbClr val="2B2A4A"/>
+              </a:buClr>
+              <a:buSzPct val="90000"/>
+              <a:buFont typeface="Arial"/>
+              <a:buChar char="–"/>
+            </a:pPr>
+            <a:r>
+              <a:rPr sz="1250" b="1" i="0">
+                <a:solidFill>
+                  <a:srgbClr val="24233E"/>
+                </a:solidFill>
+                <a:latin typeface="Calibri"/>
+              </a:rPr>
+              <a:t>Context</a:t>
+            </a:r>
+            <a:r>
+              <a:rPr sz="1250" b="0" i="0">
+                <a:solidFill>
+                  <a:srgbClr val="201F33"/>
+                </a:solidFill>
+                <a:latin typeface="Calibri"/>
+              </a:rPr>
+              <a:t> — mockups or environment shown where relevant</a:t>
+            </a:r>
+          </a:p>
+          <a:p>
+            <a:pPr indent="-203200" marL="203200">
+              <a:spcAft>
+                <a:spcPts val="900"/>
+              </a:spcAft>
+              <a:buClr>
+                <a:srgbClr val="2B2A4A"/>
+              </a:buClr>
+              <a:buSzPct val="90000"/>
+              <a:buFont typeface="Arial"/>
+              <a:buChar char="–"/>
+            </a:pPr>
+            <a:r>
+              <a:rPr sz="1250" b="1" i="0">
+                <a:solidFill>
+                  <a:srgbClr val="24233E"/>
+                </a:solidFill>
+                <a:latin typeface="Calibri"/>
+              </a:rPr>
+              <a:t>Craftsmanship</a:t>
+            </a:r>
+            <a:r>
+              <a:rPr sz="1250" b="0" i="0">
+                <a:solidFill>
+                  <a:srgbClr val="201F33"/>
+                </a:solidFill>
+                <a:latin typeface="Calibri"/>
+              </a:rPr>
+              <a:t> — clean linework, consistent scale, legible annotation</a:t>
+            </a:r>
+          </a:p>
+        </p:txBody>
+      </p:sp>
+      <p:sp>
+        <p:nvSpPr>
+          <p:cNvPr id="5" name="Rounded Rectangle 4"/>
+          <p:cNvSpPr/>
+          <p:nvPr/>
+        </p:nvSpPr>
+        <p:spPr>
+          <a:xfrm>
+            <a:off x="6080760" y="1874519"/>
+            <a:ext cx="5166360" cy="4526280"/>
+          </a:xfrm>
+          <a:prstGeom prst="roundRect">
+            <a:avLst>
+              <a:gd name="adj" fmla="val 6000"/>
+            </a:avLst>
+          </a:prstGeom>
+          <a:solidFill>
+            <a:srgbClr val="EFDAE3"/>
+          </a:solidFill>
+          <a:ln>
+            <a:noFill/>
+          </a:ln>
+          <a:effectLst/>
+        </p:spPr>
+        <p:style>
+          <a:lnRef idx="1">
+            <a:schemeClr val="accent1"/>
+          </a:lnRef>
+          <a:fillRef idx="3">
+            <a:schemeClr val="accent1"/>
+          </a:fillRef>
+          <a:effectRef idx="2">
+            <a:schemeClr val="accent1"/>
+          </a:effectRef>
+          <a:fontRef idx="minor">
+            <a:schemeClr val="lt1"/>
+          </a:fontRef>
+        </p:style>
+        <p:txBody>
+          <a:bodyPr rtlCol="0" anchor="ctr" lIns="279400" rIns="279400" tIns="228600" bIns="228600" wrap="square"/>
+          <a:lstStyle/>
+          <a:p>
+            <a:pPr algn="ctr" indent="-203200" marL="203200">
+              <a:spcAft>
+                <a:spcPts val="900"/>
+              </a:spcAft>
+              <a:buClr>
+                <a:srgbClr val="C97B9E"/>
+              </a:buClr>
+              <a:buSzPct val="90000"/>
+              <a:buFont typeface="Arial"/>
+              <a:buChar char="●"/>
+            </a:pPr>
+            <a:r>
+              <a:rPr sz="1400" b="0" i="0">
+                <a:solidFill>
+                  <a:srgbClr val="201F33"/>
+                </a:solidFill>
+                <a:latin typeface="Calibri"/>
+              </a:rPr>
+              <a:t>See the </a:t>
+            </a:r>
+            <a:r>
+              <a:rPr sz="1400" b="1" i="0">
+                <a:solidFill>
+                  <a:srgbClr val="AA6886"/>
+                </a:solidFill>
+                <a:latin typeface="Calibri"/>
+              </a:rPr>
+              <a:t>Technical Drawing</a:t>
+            </a:r>
+            <a:r>
+              <a:rPr sz="1400" b="0" i="0">
+                <a:solidFill>
+                  <a:srgbClr val="201F33"/>
+                </a:solidFill>
+                <a:latin typeface="Calibri"/>
+              </a:rPr>
+              <a:t> and </a:t>
+            </a:r>
+            <a:r>
+              <a:rPr sz="1400" b="1" i="0">
+                <a:solidFill>
+                  <a:srgbClr val="AA6886"/>
+                </a:solidFill>
+                <a:latin typeface="Calibri"/>
+              </a:rPr>
+              <a:t>Visualisation Drawing</a:t>
+            </a:r>
+            <a:r>
+              <a:rPr sz="1400" b="0" i="0">
+                <a:solidFill>
+                  <a:srgbClr val="201F33"/>
+                </a:solidFill>
+                <a:latin typeface="Calibri"/>
+              </a:rPr>
+              <a:t> handouts (Unit 1 AOS 2) for a full recap of drawing methods.</a:t>
+            </a:r>
+          </a:p>
+        </p:txBody>
+      </p:sp>
+      <p:sp>
+        <p:nvSpPr>
+          <p:cNvPr id="6" name="Oval 5"/>
+          <p:cNvSpPr/>
+          <p:nvPr/>
+        </p:nvSpPr>
+        <p:spPr>
+          <a:xfrm>
+            <a:off x="5532120" y="3840480"/>
+            <a:ext cx="685800" cy="685800"/>
+          </a:xfrm>
+          <a:prstGeom prst="ellipse">
+            <a:avLst/>
+          </a:prstGeom>
+          <a:solidFill>
+            <a:srgbClr val="D9A441"/>
           </a:solidFill>
           <a:ln>
             <a:noFill/>
@@ -3769,6 +4302,14 @@
 <file path=ppt/slides/slide12.xml><?xml version="1.0" encoding="utf-8"?>
 <p:sld xmlns:a="http://schemas.openxmlformats.org/drawingml/2006/main" xmlns:p="http://schemas.openxmlformats.org/presentationml/2006/main" xmlns:r="http://schemas.openxmlformats.org/officeDocument/2006/relationships">
   <p:cSld>
+    <p:bg>
+      <p:bgPr>
+        <a:solidFill>
+          <a:srgbClr val="F8F6FB"/>
+        </a:solidFill>
+        <a:effectLst/>
+      </p:bgPr>
+    </p:bg>
     <p:spTree>
       <p:nvGrpSpPr>
         <p:cNvPr id="1" name=""/>
@@ -3778,225 +4319,22 @@
       <p:grpSpPr/>
       <p:sp>
         <p:nvSpPr>
-          <p:cNvPr id="2" name="Title 1"/>
-          <p:cNvSpPr>
-            <a:spLocks noGrp="1"/>
-          </p:cNvSpPr>
-          <p:nvPr>
-            <p:ph type="title"/>
-          </p:nvPr>
-        </p:nvSpPr>
-        <p:spPr/>
-        <p:txBody>
-          <a:bodyPr wrap="square"/>
-          <a:lstStyle/>
-          <a:p>
-            <a:r>
-              <a:rPr sz="3200" b="1">
-                <a:solidFill>
-                  <a:srgbClr val="3B2F4A"/>
-                </a:solidFill>
-                <a:latin typeface="Cambria"/>
-              </a:rPr>
-              <a:t>Evaluating Against the Brief</a:t>
-            </a:r>
-          </a:p>
-        </p:txBody>
-      </p:sp>
-      <p:sp>
-        <p:nvSpPr>
-          <p:cNvPr id="3" name="Content Placeholder 2"/>
-          <p:cNvSpPr>
-            <a:spLocks noGrp="1"/>
-          </p:cNvSpPr>
-          <p:nvPr>
-            <p:ph idx="1"/>
-          </p:nvPr>
-        </p:nvSpPr>
-        <p:spPr/>
-        <p:txBody>
-          <a:bodyPr wrap="square"/>
-          <a:lstStyle/>
-          <a:p>
-            <a:pPr lvl="1">
-              <a:spcAft>
-                <a:spcPts val="1000"/>
-              </a:spcAft>
-            </a:pPr>
-            <a:r>
-              <a:rPr sz="1800" b="0" i="0">
-                <a:solidFill>
-                  <a:srgbClr val="333333"/>
-                </a:solidFill>
-                <a:latin typeface="Calibri"/>
-              </a:rPr>
-              <a:t>Purpose</a:t>
-            </a:r>
-          </a:p>
-          <a:p>
-            <a:pPr lvl="1">
-              <a:spcAft>
-                <a:spcPts val="1000"/>
-              </a:spcAft>
-            </a:pPr>
-            <a:r>
-              <a:rPr sz="1800" b="0" i="0">
-                <a:solidFill>
-                  <a:srgbClr val="333333"/>
-                </a:solidFill>
-                <a:latin typeface="Calibri"/>
-              </a:rPr>
-              <a:t>Does the design achieve its communication objective?</a:t>
-            </a:r>
-          </a:p>
-          <a:p>
-            <a:pPr lvl="1">
-              <a:spcAft>
-                <a:spcPts val="1000"/>
-              </a:spcAft>
-            </a:pPr>
-            <a:r>
-              <a:rPr sz="1800" b="0" i="0">
-                <a:solidFill>
-                  <a:srgbClr val="333333"/>
-                </a:solidFill>
-                <a:latin typeface="Calibri"/>
-              </a:rPr>
-              <a:t>Audience</a:t>
-            </a:r>
-          </a:p>
-          <a:p>
-            <a:pPr lvl="1">
-              <a:spcAft>
-                <a:spcPts val="1000"/>
-              </a:spcAft>
-            </a:pPr>
-            <a:r>
-              <a:rPr sz="1800" b="0" i="0">
-                <a:solidFill>
-                  <a:srgbClr val="333333"/>
-                </a:solidFill>
-                <a:latin typeface="Calibri"/>
-              </a:rPr>
-              <a:t>Is it appropriate and effective for the target audience?</a:t>
-            </a:r>
-          </a:p>
-          <a:p>
-            <a:pPr lvl="1">
-              <a:spcAft>
-                <a:spcPts val="1000"/>
-              </a:spcAft>
-            </a:pPr>
-            <a:r>
-              <a:rPr sz="1800" b="0" i="0">
-                <a:solidFill>
-                  <a:srgbClr val="333333"/>
-                </a:solidFill>
-                <a:latin typeface="Calibri"/>
-              </a:rPr>
-              <a:t>Constraints</a:t>
-            </a:r>
-          </a:p>
-          <a:p>
-            <a:pPr lvl="1">
-              <a:spcAft>
-                <a:spcPts val="1000"/>
-              </a:spcAft>
-            </a:pPr>
-            <a:r>
-              <a:rPr sz="1800" b="0" i="0">
-                <a:solidFill>
-                  <a:srgbClr val="333333"/>
-                </a:solidFill>
-                <a:latin typeface="Calibri"/>
-              </a:rPr>
-              <a:t>Were the stated constraints respected (materials, time, format)?</a:t>
-            </a:r>
-          </a:p>
-          <a:p>
-            <a:pPr lvl="1">
-              <a:spcAft>
-                <a:spcPts val="1000"/>
-              </a:spcAft>
-            </a:pPr>
-            <a:r>
-              <a:rPr sz="1800" b="0" i="0">
-                <a:solidFill>
-                  <a:srgbClr val="333333"/>
-                </a:solidFill>
-                <a:latin typeface="Calibri"/>
-              </a:rPr>
-              <a:t>Obligatory Fields</a:t>
-            </a:r>
-          </a:p>
-          <a:p>
-            <a:pPr lvl="1">
-              <a:spcAft>
-                <a:spcPts val="1000"/>
-              </a:spcAft>
-            </a:pPr>
-            <a:r>
-              <a:rPr sz="1800" b="0" i="0">
-                <a:solidFill>
-                  <a:srgbClr val="333333"/>
-                </a:solidFill>
-                <a:latin typeface="Calibri"/>
-              </a:rPr>
-              <a:t>Were all required design outcomes delivered?</a:t>
-            </a:r>
-          </a:p>
-          <a:p>
-            <a:pPr>
-              <a:spcAft>
-                <a:spcPts val="1000"/>
-              </a:spcAft>
-            </a:pPr>
-            <a:r>
-              <a:rPr sz="2000" b="0" i="0">
-                <a:solidFill>
-                  <a:srgbClr val="333333"/>
-                </a:solidFill>
-                <a:latin typeface="Calibri"/>
-              </a:rPr>
-              <a:t> A strong evaluation is </a:t>
-            </a:r>
-            <a:r>
-              <a:rPr sz="2000" b="1" i="0">
-                <a:solidFill>
-                  <a:srgbClr val="3B2F4A"/>
-                </a:solidFill>
-                <a:latin typeface="Calibri"/>
-              </a:rPr>
-              <a:t>specific and balanced</a:t>
-            </a:r>
-            <a:r>
-              <a:rPr sz="2000" b="0" i="0">
-                <a:solidFill>
-                  <a:srgbClr val="333333"/>
-                </a:solidFill>
-                <a:latin typeface="Calibri"/>
-              </a:rPr>
-              <a:t> — identify genuine strengths and any limitations, not just praise. </a:t>
-            </a:r>
-          </a:p>
-        </p:txBody>
-      </p:sp>
-      <p:sp>
-        <p:nvSpPr>
-          <p:cNvPr id="4" name="Rectangle 3"/>
+          <p:cNvPr id="2" name="Rounded Rectangle 1"/>
           <p:cNvSpPr/>
           <p:nvPr/>
         </p:nvSpPr>
         <p:spPr>
           <a:xfrm>
-            <a:off x="548640" y="1234440"/>
-            <a:ext cx="1463040" cy="38100"/>
-          </a:xfrm>
-          <a:prstGeom prst="rect">
-            <a:avLst/>
+            <a:off x="685800" y="502920"/>
+            <a:ext cx="3291840" cy="457200"/>
+          </a:xfrm>
+          <a:prstGeom prst="roundRect">
+            <a:avLst>
+              <a:gd name="adj" fmla="val 50000"/>
+            </a:avLst>
           </a:prstGeom>
           <a:solidFill>
-            <a:srgbClr val="3B2F4A"/>
+            <a:srgbClr val="2B2A4A"/>
           </a:solidFill>
           <a:ln>
             <a:noFill/>
@@ -4018,10 +4356,401 @@
           </a:fontRef>
         </p:style>
         <p:txBody>
-          <a:bodyPr rtlCol="0" anchor="ctr"/>
+          <a:bodyPr rtlCol="0" anchor="ctr" wrap="none" lIns="50800" rIns="50800"/>
           <a:lstStyle/>
           <a:p>
             <a:pPr algn="ctr"/>
+            <a:r>
+              <a:rPr sz="1100" b="1">
+                <a:solidFill>
+                  <a:srgbClr val="FFFFFF"/>
+                </a:solidFill>
+                <a:latin typeface="Calibri"/>
+              </a:rPr>
+              <a:t>EVALUATION &amp; PRESENTATION</a:t>
+            </a:r>
+          </a:p>
+        </p:txBody>
+      </p:sp>
+      <p:sp>
+        <p:nvSpPr>
+          <p:cNvPr id="3" name="TextBox 2"/>
+          <p:cNvSpPr txBox="1"/>
+          <p:nvPr/>
+        </p:nvSpPr>
+        <p:spPr>
+          <a:xfrm>
+            <a:off x="685800" y="1051560"/>
+            <a:ext cx="10607040" cy="822960"/>
+          </a:xfrm>
+          <a:prstGeom prst="rect">
+            <a:avLst/>
+          </a:prstGeom>
+          <a:noFill/>
+        </p:spPr>
+        <p:txBody>
+          <a:bodyPr wrap="square" anchor="t">
+            <a:spAutoFit/>
+          </a:bodyPr>
+          <a:lstStyle/>
+          <a:p>
+            <a:pPr algn="l"/>
+            <a:r>
+              <a:rPr sz="2700" b="1" i="0">
+                <a:solidFill>
+                  <a:srgbClr val="201F33"/>
+                </a:solidFill>
+                <a:latin typeface="Cambria"/>
+              </a:rPr>
+              <a:t>Evaluating Against the Brief</a:t>
+            </a:r>
+          </a:p>
+        </p:txBody>
+      </p:sp>
+      <p:sp>
+        <p:nvSpPr>
+          <p:cNvPr id="4" name="Rounded Rectangle 3"/>
+          <p:cNvSpPr/>
+          <p:nvPr/>
+        </p:nvSpPr>
+        <p:spPr>
+          <a:xfrm>
+            <a:off x="685800" y="1874519"/>
+            <a:ext cx="2500884" cy="1554480"/>
+          </a:xfrm>
+          <a:prstGeom prst="roundRect">
+            <a:avLst>
+              <a:gd name="adj" fmla="val 12000"/>
+            </a:avLst>
+          </a:prstGeom>
+          <a:solidFill>
+            <a:srgbClr val="DFDFE3"/>
+          </a:solidFill>
+          <a:ln>
+            <a:noFill/>
+          </a:ln>
+          <a:effectLst/>
+        </p:spPr>
+        <p:style>
+          <a:lnRef idx="1">
+            <a:schemeClr val="accent1"/>
+          </a:lnRef>
+          <a:fillRef idx="3">
+            <a:schemeClr val="accent1"/>
+          </a:fillRef>
+          <a:effectRef idx="2">
+            <a:schemeClr val="accent1"/>
+          </a:effectRef>
+          <a:fontRef idx="minor">
+            <a:schemeClr val="lt1"/>
+          </a:fontRef>
+        </p:style>
+        <p:txBody>
+          <a:bodyPr rtlCol="0" anchor="ctr" wrap="square" lIns="127000" rIns="127000" tIns="101600" bIns="101600"/>
+          <a:lstStyle/>
+          <a:p>
+            <a:pPr algn="ctr"/>
+            <a:r>
+              <a:rPr b="1" sz="1300">
+                <a:solidFill>
+                  <a:srgbClr val="22213B"/>
+                </a:solidFill>
+                <a:latin typeface="Calibri"/>
+              </a:rPr>
+              <a:t>Purpose</a:t>
+            </a:r>
+          </a:p>
+          <a:p>
+            <a:r>
+              <a:rPr sz="1050">
+                <a:solidFill>
+                  <a:srgbClr val="201F33"/>
+                </a:solidFill>
+                <a:latin typeface="Calibri"/>
+              </a:rPr>
+              <a:t>Does the design achieve its communication objective?</a:t>
+            </a:r>
+          </a:p>
+        </p:txBody>
+      </p:sp>
+      <p:sp>
+        <p:nvSpPr>
+          <p:cNvPr id="5" name="Rounded Rectangle 4"/>
+          <p:cNvSpPr/>
+          <p:nvPr/>
+        </p:nvSpPr>
+        <p:spPr>
+          <a:xfrm>
+            <a:off x="3387852" y="1874519"/>
+            <a:ext cx="2500884" cy="1554480"/>
+          </a:xfrm>
+          <a:prstGeom prst="roundRect">
+            <a:avLst>
+              <a:gd name="adj" fmla="val 12000"/>
+            </a:avLst>
+          </a:prstGeom>
+          <a:solidFill>
+            <a:srgbClr val="F9F1E2"/>
+          </a:solidFill>
+          <a:ln>
+            <a:noFill/>
+          </a:ln>
+          <a:effectLst/>
+        </p:spPr>
+        <p:style>
+          <a:lnRef idx="1">
+            <a:schemeClr val="accent1"/>
+          </a:lnRef>
+          <a:fillRef idx="3">
+            <a:schemeClr val="accent1"/>
+          </a:fillRef>
+          <a:effectRef idx="2">
+            <a:schemeClr val="accent1"/>
+          </a:effectRef>
+          <a:fontRef idx="minor">
+            <a:schemeClr val="lt1"/>
+          </a:fontRef>
+        </p:style>
+        <p:txBody>
+          <a:bodyPr rtlCol="0" anchor="ctr" wrap="square" lIns="127000" rIns="127000" tIns="101600" bIns="101600"/>
+          <a:lstStyle/>
+          <a:p>
+            <a:pPr algn="ctr"/>
+            <a:r>
+              <a:rPr b="1" sz="1300">
+                <a:solidFill>
+                  <a:srgbClr val="AD8334"/>
+                </a:solidFill>
+                <a:latin typeface="Calibri"/>
+              </a:rPr>
+              <a:t>Audience</a:t>
+            </a:r>
+          </a:p>
+          <a:p>
+            <a:r>
+              <a:rPr sz="1050">
+                <a:solidFill>
+                  <a:srgbClr val="201F33"/>
+                </a:solidFill>
+                <a:latin typeface="Calibri"/>
+              </a:rPr>
+              <a:t>Is it appropriate and effective for the target audience?</a:t>
+            </a:r>
+          </a:p>
+        </p:txBody>
+      </p:sp>
+      <p:sp>
+        <p:nvSpPr>
+          <p:cNvPr id="6" name="Rounded Rectangle 5"/>
+          <p:cNvSpPr/>
+          <p:nvPr/>
+        </p:nvSpPr>
+        <p:spPr>
+          <a:xfrm>
+            <a:off x="6089904" y="1874519"/>
+            <a:ext cx="2500884" cy="1554480"/>
+          </a:xfrm>
+          <a:prstGeom prst="roundRect">
+            <a:avLst>
+              <a:gd name="adj" fmla="val 12000"/>
+            </a:avLst>
+          </a:prstGeom>
+          <a:solidFill>
+            <a:srgbClr val="F6EBF0"/>
+          </a:solidFill>
+          <a:ln>
+            <a:noFill/>
+          </a:ln>
+          <a:effectLst/>
+        </p:spPr>
+        <p:style>
+          <a:lnRef idx="1">
+            <a:schemeClr val="accent1"/>
+          </a:lnRef>
+          <a:fillRef idx="3">
+            <a:schemeClr val="accent1"/>
+          </a:fillRef>
+          <a:effectRef idx="2">
+            <a:schemeClr val="accent1"/>
+          </a:effectRef>
+          <a:fontRef idx="minor">
+            <a:schemeClr val="lt1"/>
+          </a:fontRef>
+        </p:style>
+        <p:txBody>
+          <a:bodyPr rtlCol="0" anchor="ctr" wrap="square" lIns="127000" rIns="127000" tIns="101600" bIns="101600"/>
+          <a:lstStyle/>
+          <a:p>
+            <a:pPr algn="ctr"/>
+            <a:r>
+              <a:rPr b="1" sz="1300">
+                <a:solidFill>
+                  <a:srgbClr val="A0627E"/>
+                </a:solidFill>
+                <a:latin typeface="Calibri"/>
+              </a:rPr>
+              <a:t>Constraints</a:t>
+            </a:r>
+          </a:p>
+          <a:p>
+            <a:r>
+              <a:rPr sz="1050">
+                <a:solidFill>
+                  <a:srgbClr val="201F33"/>
+                </a:solidFill>
+                <a:latin typeface="Calibri"/>
+              </a:rPr>
+              <a:t>Were the stated constraints respected (materials, time, format)?</a:t>
+            </a:r>
+          </a:p>
+        </p:txBody>
+      </p:sp>
+      <p:sp>
+        <p:nvSpPr>
+          <p:cNvPr id="7" name="Rounded Rectangle 6"/>
+          <p:cNvSpPr/>
+          <p:nvPr/>
+        </p:nvSpPr>
+        <p:spPr>
+          <a:xfrm>
+            <a:off x="8791956" y="1874519"/>
+            <a:ext cx="2500884" cy="1554480"/>
+          </a:xfrm>
+          <a:prstGeom prst="roundRect">
+            <a:avLst>
+              <a:gd name="adj" fmla="val 12000"/>
+            </a:avLst>
+          </a:prstGeom>
+          <a:solidFill>
+            <a:srgbClr val="DFDFE3"/>
+          </a:solidFill>
+          <a:ln>
+            <a:noFill/>
+          </a:ln>
+          <a:effectLst/>
+        </p:spPr>
+        <p:style>
+          <a:lnRef idx="1">
+            <a:schemeClr val="accent1"/>
+          </a:lnRef>
+          <a:fillRef idx="3">
+            <a:schemeClr val="accent1"/>
+          </a:fillRef>
+          <a:effectRef idx="2">
+            <a:schemeClr val="accent1"/>
+          </a:effectRef>
+          <a:fontRef idx="minor">
+            <a:schemeClr val="lt1"/>
+          </a:fontRef>
+        </p:style>
+        <p:txBody>
+          <a:bodyPr rtlCol="0" anchor="ctr" wrap="square" lIns="127000" rIns="127000" tIns="101600" bIns="101600"/>
+          <a:lstStyle/>
+          <a:p>
+            <a:pPr algn="ctr"/>
+            <a:r>
+              <a:rPr b="1" sz="1300">
+                <a:solidFill>
+                  <a:srgbClr val="22213B"/>
+                </a:solidFill>
+                <a:latin typeface="Calibri"/>
+              </a:rPr>
+              <a:t>Obligatory Fields</a:t>
+            </a:r>
+          </a:p>
+          <a:p>
+            <a:r>
+              <a:rPr sz="1050">
+                <a:solidFill>
+                  <a:srgbClr val="201F33"/>
+                </a:solidFill>
+                <a:latin typeface="Calibri"/>
+              </a:rPr>
+              <a:t>Were all required design outcomes delivered?</a:t>
+            </a:r>
+          </a:p>
+        </p:txBody>
+      </p:sp>
+      <p:sp>
+        <p:nvSpPr>
+          <p:cNvPr id="8" name="Rounded Rectangle 7"/>
+          <p:cNvSpPr/>
+          <p:nvPr/>
+        </p:nvSpPr>
+        <p:spPr>
+          <a:xfrm>
+            <a:off x="685800" y="3675887"/>
+            <a:ext cx="10607040" cy="2862073"/>
+          </a:xfrm>
+          <a:prstGeom prst="roundRect">
+            <a:avLst>
+              <a:gd name="adj" fmla="val 10000"/>
+            </a:avLst>
+          </a:prstGeom>
+          <a:solidFill>
+            <a:srgbClr val="F9F1E2"/>
+          </a:solidFill>
+          <a:ln>
+            <a:noFill/>
+          </a:ln>
+          <a:effectLst/>
+        </p:spPr>
+        <p:style>
+          <a:lnRef idx="1">
+            <a:schemeClr val="accent1"/>
+          </a:lnRef>
+          <a:fillRef idx="3">
+            <a:schemeClr val="accent1"/>
+          </a:fillRef>
+          <a:effectRef idx="2">
+            <a:schemeClr val="accent1"/>
+          </a:effectRef>
+          <a:fontRef idx="minor">
+            <a:schemeClr val="lt1"/>
+          </a:fontRef>
+        </p:style>
+        <p:txBody>
+          <a:bodyPr rtlCol="0" anchor="ctr" lIns="203200" rIns="203200" tIns="101600" bIns="101600" wrap="square"/>
+          <a:lstStyle/>
+          <a:p>
+            <a:pPr algn="ctr" indent="-203200" marL="203200">
+              <a:spcAft>
+                <a:spcPts val="900"/>
+              </a:spcAft>
+              <a:buClr>
+                <a:srgbClr val="D9A441"/>
+              </a:buClr>
+              <a:buSzPct val="90000"/>
+              <a:buFont typeface="Arial"/>
+              <a:buChar char="●"/>
+            </a:pPr>
+            <a:r>
+              <a:rPr sz="1200" b="0" i="0">
+                <a:solidFill>
+                  <a:srgbClr val="201F33"/>
+                </a:solidFill>
+                <a:latin typeface="Calibri"/>
+              </a:rPr>
+              <a:t> A strong evaluation is </a:t>
+            </a:r>
+            <a:r>
+              <a:rPr sz="1200" b="1" i="0">
+                <a:solidFill>
+                  <a:srgbClr val="B88B37"/>
+                </a:solidFill>
+                <a:latin typeface="Calibri"/>
+              </a:rPr>
+              <a:t>specific and balanced</a:t>
+            </a:r>
+            <a:r>
+              <a:rPr sz="1200" b="0" i="0">
+                <a:solidFill>
+                  <a:srgbClr val="201F33"/>
+                </a:solidFill>
+                <a:latin typeface="Calibri"/>
+              </a:rPr>
+              <a:t> — identify genuine strengths and any limitations, not just praise. </a:t>
+            </a:r>
           </a:p>
         </p:txBody>
       </p:sp>
@@ -4036,6 +4765,14 @@
 <file path=ppt/slides/slide13.xml><?xml version="1.0" encoding="utf-8"?>
 <p:sld xmlns:a="http://schemas.openxmlformats.org/drawingml/2006/main" xmlns:p="http://schemas.openxmlformats.org/presentationml/2006/main" xmlns:r="http://schemas.openxmlformats.org/officeDocument/2006/relationships">
   <p:cSld>
+    <p:bg>
+      <p:bgPr>
+        <a:solidFill>
+          <a:srgbClr val="F8F6FB"/>
+        </a:solidFill>
+        <a:effectLst/>
+      </p:bgPr>
+    </p:bg>
     <p:spTree>
       <p:nvGrpSpPr>
         <p:cNvPr id="1" name=""/>
@@ -4045,202 +4782,355 @@
       <p:grpSpPr/>
       <p:sp>
         <p:nvSpPr>
-          <p:cNvPr id="2" name="Title 1"/>
-          <p:cNvSpPr>
-            <a:spLocks noGrp="1"/>
-          </p:cNvSpPr>
-          <p:nvPr>
-            <p:ph type="title"/>
-          </p:nvPr>
-        </p:nvSpPr>
-        <p:spPr/>
-        <p:txBody>
-          <a:bodyPr wrap="square"/>
-          <a:lstStyle/>
-          <a:p>
-            <a:r>
-              <a:rPr sz="3200" b="1">
-                <a:solidFill>
-                  <a:srgbClr val="3B2F4A"/>
-                </a:solidFill>
-                <a:latin typeface="Cambria"/>
-              </a:rPr>
-              <a:t>Folio Layout &amp; Clarity</a:t>
-            </a:r>
-          </a:p>
-        </p:txBody>
-      </p:sp>
-      <p:sp>
-        <p:nvSpPr>
-          <p:cNvPr id="3" name="Content Placeholder 2"/>
-          <p:cNvSpPr>
-            <a:spLocks noGrp="1"/>
-          </p:cNvSpPr>
-          <p:nvPr>
-            <p:ph idx="1" sz="half"/>
-          </p:nvPr>
-        </p:nvSpPr>
-        <p:spPr/>
-        <p:txBody>
-          <a:bodyPr wrap="square"/>
-          <a:lstStyle/>
-          <a:p>
-            <a:pPr>
-              <a:spcAft>
-                <a:spcPts val="1000"/>
-              </a:spcAft>
-            </a:pPr>
-            <a:r>
-              <a:rPr sz="2000" b="0" i="0">
-                <a:solidFill>
-                  <a:srgbClr val="333333"/>
-                </a:solidFill>
-                <a:latin typeface="Calibri"/>
-              </a:rPr>
-              <a:t>How your folio is organised affects how clearly your design thinking can be assessed.</a:t>
-            </a:r>
-          </a:p>
-          <a:p>
-            <a:pPr lvl="1">
-              <a:spcAft>
-                <a:spcPts val="1000"/>
-              </a:spcAft>
-            </a:pPr>
-            <a:r>
-              <a:rPr sz="1800" b="1" i="0">
-                <a:solidFill>
-                  <a:srgbClr val="3B2F4A"/>
-                </a:solidFill>
-                <a:latin typeface="Calibri"/>
-              </a:rPr>
-              <a:t>Sequence</a:t>
-            </a:r>
-            <a:r>
-              <a:rPr sz="1800" b="0" i="0">
-                <a:solidFill>
-                  <a:srgbClr val="333333"/>
-                </a:solidFill>
-                <a:latin typeface="Calibri"/>
-              </a:rPr>
-              <a:t> — brief → research → generation → development → resolution → evaluation</a:t>
-            </a:r>
-          </a:p>
-          <a:p>
-            <a:pPr lvl="1">
-              <a:spcAft>
-                <a:spcPts val="1000"/>
-              </a:spcAft>
-            </a:pPr>
-            <a:r>
-              <a:rPr sz="1800" b="1" i="0">
-                <a:solidFill>
-                  <a:srgbClr val="3B2F4A"/>
-                </a:solidFill>
-                <a:latin typeface="Calibri"/>
-              </a:rPr>
-              <a:t>Labelling</a:t>
-            </a:r>
-            <a:r>
-              <a:rPr sz="1800" b="0" i="0">
-                <a:solidFill>
-                  <a:srgbClr val="333333"/>
-                </a:solidFill>
-                <a:latin typeface="Calibri"/>
-              </a:rPr>
-              <a:t> — clearly label the brief, each concept, and final design</a:t>
-            </a:r>
-          </a:p>
-          <a:p>
-            <a:pPr lvl="1">
-              <a:spcAft>
-                <a:spcPts val="1000"/>
-              </a:spcAft>
-            </a:pPr>
-            <a:r>
-              <a:rPr sz="1800" b="1" i="0">
-                <a:solidFill>
-                  <a:srgbClr val="3B2F4A"/>
-                </a:solidFill>
-                <a:latin typeface="Calibri"/>
-              </a:rPr>
-              <a:t>Consistency</a:t>
-            </a:r>
-            <a:r>
-              <a:rPr sz="1800" b="0" i="0">
-                <a:solidFill>
-                  <a:srgbClr val="333333"/>
-                </a:solidFill>
-                <a:latin typeface="Calibri"/>
-              </a:rPr>
-              <a:t> — consistent visual presentation across pages</a:t>
-            </a:r>
-          </a:p>
-        </p:txBody>
-      </p:sp>
-      <p:sp>
-        <p:nvSpPr>
-          <p:cNvPr id="4" name="Content Placeholder 3"/>
-          <p:cNvSpPr>
-            <a:spLocks noGrp="1"/>
-          </p:cNvSpPr>
-          <p:nvPr>
-            <p:ph idx="2" sz="half"/>
-          </p:nvPr>
-        </p:nvSpPr>
-        <p:spPr/>
-        <p:txBody>
-          <a:bodyPr wrap="square"/>
-          <a:lstStyle/>
-          <a:p>
-            <a:pPr>
-              <a:spcAft>
-                <a:spcPts val="1000"/>
-              </a:spcAft>
-            </a:pPr>
-            <a:r>
-              <a:rPr sz="2000" b="0" i="0">
-                <a:solidFill>
-                  <a:srgbClr val="333333"/>
-                </a:solidFill>
-                <a:latin typeface="Calibri"/>
-              </a:rPr>
-              <a:t>Exam Tip</a:t>
-            </a:r>
-          </a:p>
-          <a:p>
-            <a:pPr>
-              <a:spcAft>
-                <a:spcPts val="1000"/>
-              </a:spcAft>
-            </a:pPr>
-            <a:r>
-              <a:rPr sz="2000" b="0" i="0">
-                <a:solidFill>
-                  <a:srgbClr val="333333"/>
-                </a:solidFill>
-                <a:latin typeface="Calibri"/>
-              </a:rPr>
-              <a:t>Exam questions may show a folio excerpt and ask you to identify which stage of the process it represents — know the full sequence well.</a:t>
-            </a:r>
-          </a:p>
-        </p:txBody>
-      </p:sp>
-      <p:sp>
-        <p:nvSpPr>
-          <p:cNvPr id="5" name="Rectangle 4"/>
+          <p:cNvPr id="2" name="Rounded Rectangle 1"/>
           <p:cNvSpPr/>
           <p:nvPr/>
         </p:nvSpPr>
         <p:spPr>
           <a:xfrm>
-            <a:off x="548640" y="1234440"/>
-            <a:ext cx="1463040" cy="38100"/>
+            <a:off x="685800" y="502920"/>
+            <a:ext cx="3291840" cy="457200"/>
+          </a:xfrm>
+          <a:prstGeom prst="roundRect">
+            <a:avLst>
+              <a:gd name="adj" fmla="val 50000"/>
+            </a:avLst>
+          </a:prstGeom>
+          <a:solidFill>
+            <a:srgbClr val="2B2A4A"/>
+          </a:solidFill>
+          <a:ln>
+            <a:noFill/>
+          </a:ln>
+          <a:effectLst/>
+        </p:spPr>
+        <p:style>
+          <a:lnRef idx="1">
+            <a:schemeClr val="accent1"/>
+          </a:lnRef>
+          <a:fillRef idx="3">
+            <a:schemeClr val="accent1"/>
+          </a:fillRef>
+          <a:effectRef idx="2">
+            <a:schemeClr val="accent1"/>
+          </a:effectRef>
+          <a:fontRef idx="minor">
+            <a:schemeClr val="lt1"/>
+          </a:fontRef>
+        </p:style>
+        <p:txBody>
+          <a:bodyPr rtlCol="0" anchor="ctr" wrap="none" lIns="50800" rIns="50800"/>
+          <a:lstStyle/>
+          <a:p>
+            <a:pPr algn="ctr"/>
+            <a:r>
+              <a:rPr sz="1100" b="1">
+                <a:solidFill>
+                  <a:srgbClr val="FFFFFF"/>
+                </a:solidFill>
+                <a:latin typeface="Calibri"/>
+              </a:rPr>
+              <a:t>EVALUATION &amp; PRESENTATION</a:t>
+            </a:r>
+          </a:p>
+        </p:txBody>
+      </p:sp>
+      <p:sp>
+        <p:nvSpPr>
+          <p:cNvPr id="3" name="TextBox 2"/>
+          <p:cNvSpPr txBox="1"/>
+          <p:nvPr/>
+        </p:nvSpPr>
+        <p:spPr>
+          <a:xfrm>
+            <a:off x="685800" y="1051560"/>
+            <a:ext cx="10607040" cy="822960"/>
           </a:xfrm>
           <a:prstGeom prst="rect">
             <a:avLst/>
           </a:prstGeom>
+          <a:noFill/>
+        </p:spPr>
+        <p:txBody>
+          <a:bodyPr wrap="square" anchor="t">
+            <a:spAutoFit/>
+          </a:bodyPr>
+          <a:lstStyle/>
+          <a:p>
+            <a:pPr algn="l"/>
+            <a:r>
+              <a:rPr sz="2700" b="1" i="0">
+                <a:solidFill>
+                  <a:srgbClr val="201F33"/>
+                </a:solidFill>
+                <a:latin typeface="Cambria"/>
+              </a:rPr>
+              <a:t>Folio Layout &amp; Clarity</a:t>
+            </a:r>
+          </a:p>
+        </p:txBody>
+      </p:sp>
+      <p:sp>
+        <p:nvSpPr>
+          <p:cNvPr id="4" name="Rounded Rectangle 3"/>
+          <p:cNvSpPr/>
+          <p:nvPr/>
+        </p:nvSpPr>
+        <p:spPr>
+          <a:xfrm>
+            <a:off x="685800" y="1874519"/>
+            <a:ext cx="5166360" cy="4526280"/>
+          </a:xfrm>
+          <a:prstGeom prst="roundRect">
+            <a:avLst>
+              <a:gd name="adj" fmla="val 6000"/>
+            </a:avLst>
+          </a:prstGeom>
           <a:solidFill>
-            <a:srgbClr val="3B2F4A"/>
+            <a:srgbClr val="E5E5E9"/>
+          </a:solidFill>
+          <a:ln>
+            <a:noFill/>
+          </a:ln>
+          <a:effectLst/>
+        </p:spPr>
+        <p:style>
+          <a:lnRef idx="1">
+            <a:schemeClr val="accent1"/>
+          </a:lnRef>
+          <a:fillRef idx="3">
+            <a:schemeClr val="accent1"/>
+          </a:fillRef>
+          <a:effectRef idx="2">
+            <a:schemeClr val="accent1"/>
+          </a:effectRef>
+          <a:fontRef idx="minor">
+            <a:schemeClr val="lt1"/>
+          </a:fontRef>
+        </p:style>
+        <p:txBody>
+          <a:bodyPr rtlCol="0" anchor="ctr" lIns="279400" rIns="279400" tIns="228600" bIns="228600" wrap="square"/>
+          <a:lstStyle/>
+          <a:p>
+            <a:pPr algn="ctr" indent="-203200" marL="203200">
+              <a:spcAft>
+                <a:spcPts val="900"/>
+              </a:spcAft>
+              <a:buClr>
+                <a:srgbClr val="2B2A4A"/>
+              </a:buClr>
+              <a:buSzPct val="90000"/>
+              <a:buFont typeface="Arial"/>
+              <a:buChar char="●"/>
+            </a:pPr>
+            <a:r>
+              <a:rPr sz="1400" b="0" i="0">
+                <a:solidFill>
+                  <a:srgbClr val="201F33"/>
+                </a:solidFill>
+                <a:latin typeface="Calibri"/>
+              </a:rPr>
+              <a:t>How your folio is organised affects how clearly your design thinking can be assessed.</a:t>
+            </a:r>
+          </a:p>
+          <a:p>
+            <a:pPr indent="-203200" marL="203200">
+              <a:spcAft>
+                <a:spcPts val="900"/>
+              </a:spcAft>
+              <a:buClr>
+                <a:srgbClr val="2B2A4A"/>
+              </a:buClr>
+              <a:buSzPct val="90000"/>
+              <a:buFont typeface="Arial"/>
+              <a:buChar char="–"/>
+            </a:pPr>
+            <a:r>
+              <a:rPr sz="1250" b="1" i="0">
+                <a:solidFill>
+                  <a:srgbClr val="24233E"/>
+                </a:solidFill>
+                <a:latin typeface="Calibri"/>
+              </a:rPr>
+              <a:t>Sequence</a:t>
+            </a:r>
+            <a:r>
+              <a:rPr sz="1250" b="0" i="0">
+                <a:solidFill>
+                  <a:srgbClr val="201F33"/>
+                </a:solidFill>
+                <a:latin typeface="Calibri"/>
+              </a:rPr>
+              <a:t> — brief → research → generation → development → resolution → evaluation</a:t>
+            </a:r>
+          </a:p>
+          <a:p>
+            <a:pPr indent="-203200" marL="203200">
+              <a:spcAft>
+                <a:spcPts val="900"/>
+              </a:spcAft>
+              <a:buClr>
+                <a:srgbClr val="2B2A4A"/>
+              </a:buClr>
+              <a:buSzPct val="90000"/>
+              <a:buFont typeface="Arial"/>
+              <a:buChar char="–"/>
+            </a:pPr>
+            <a:r>
+              <a:rPr sz="1250" b="1" i="0">
+                <a:solidFill>
+                  <a:srgbClr val="24233E"/>
+                </a:solidFill>
+                <a:latin typeface="Calibri"/>
+              </a:rPr>
+              <a:t>Labelling</a:t>
+            </a:r>
+            <a:r>
+              <a:rPr sz="1250" b="0" i="0">
+                <a:solidFill>
+                  <a:srgbClr val="201F33"/>
+                </a:solidFill>
+                <a:latin typeface="Calibri"/>
+              </a:rPr>
+              <a:t> — clearly label the brief, each concept, and final design</a:t>
+            </a:r>
+          </a:p>
+          <a:p>
+            <a:pPr indent="-203200" marL="203200">
+              <a:spcAft>
+                <a:spcPts val="900"/>
+              </a:spcAft>
+              <a:buClr>
+                <a:srgbClr val="2B2A4A"/>
+              </a:buClr>
+              <a:buSzPct val="90000"/>
+              <a:buFont typeface="Arial"/>
+              <a:buChar char="–"/>
+            </a:pPr>
+            <a:r>
+              <a:rPr sz="1250" b="1" i="0">
+                <a:solidFill>
+                  <a:srgbClr val="24233E"/>
+                </a:solidFill>
+                <a:latin typeface="Calibri"/>
+              </a:rPr>
+              <a:t>Consistency</a:t>
+            </a:r>
+            <a:r>
+              <a:rPr sz="1250" b="0" i="0">
+                <a:solidFill>
+                  <a:srgbClr val="201F33"/>
+                </a:solidFill>
+                <a:latin typeface="Calibri"/>
+              </a:rPr>
+              <a:t> — consistent visual presentation across pages</a:t>
+            </a:r>
+          </a:p>
+        </p:txBody>
+      </p:sp>
+      <p:sp>
+        <p:nvSpPr>
+          <p:cNvPr id="5" name="Rounded Rectangle 4"/>
+          <p:cNvSpPr/>
+          <p:nvPr/>
+        </p:nvSpPr>
+        <p:spPr>
+          <a:xfrm>
+            <a:off x="6080760" y="1874519"/>
+            <a:ext cx="5166360" cy="4526280"/>
+          </a:xfrm>
+          <a:prstGeom prst="roundRect">
+            <a:avLst>
+              <a:gd name="adj" fmla="val 6000"/>
+            </a:avLst>
+          </a:prstGeom>
+          <a:solidFill>
+            <a:srgbClr val="EFDAE3"/>
+          </a:solidFill>
+          <a:ln>
+            <a:noFill/>
+          </a:ln>
+          <a:effectLst/>
+        </p:spPr>
+        <p:style>
+          <a:lnRef idx="1">
+            <a:schemeClr val="accent1"/>
+          </a:lnRef>
+          <a:fillRef idx="3">
+            <a:schemeClr val="accent1"/>
+          </a:fillRef>
+          <a:effectRef idx="2">
+            <a:schemeClr val="accent1"/>
+          </a:effectRef>
+          <a:fontRef idx="minor">
+            <a:schemeClr val="lt1"/>
+          </a:fontRef>
+        </p:style>
+        <p:txBody>
+          <a:bodyPr rtlCol="0" anchor="ctr" lIns="279400" rIns="279400" tIns="228600" bIns="228600" wrap="square"/>
+          <a:lstStyle/>
+          <a:p>
+            <a:pPr algn="ctr" indent="-203200" marL="203200">
+              <a:spcAft>
+                <a:spcPts val="900"/>
+              </a:spcAft>
+              <a:buClr>
+                <a:srgbClr val="C97B9E"/>
+              </a:buClr>
+              <a:buSzPct val="90000"/>
+              <a:buFont typeface="Arial"/>
+              <a:buChar char="●"/>
+            </a:pPr>
+            <a:r>
+              <a:rPr sz="1400" b="0" i="0">
+                <a:solidFill>
+                  <a:srgbClr val="201F33"/>
+                </a:solidFill>
+                <a:latin typeface="Calibri"/>
+              </a:rPr>
+              <a:t>Exam Tip</a:t>
+            </a:r>
+          </a:p>
+          <a:p>
+            <a:pPr indent="-203200" marL="203200">
+              <a:spcAft>
+                <a:spcPts val="900"/>
+              </a:spcAft>
+              <a:buClr>
+                <a:srgbClr val="C97B9E"/>
+              </a:buClr>
+              <a:buSzPct val="90000"/>
+              <a:buFont typeface="Arial"/>
+              <a:buChar char="●"/>
+            </a:pPr>
+            <a:r>
+              <a:rPr sz="1400" b="0" i="0">
+                <a:solidFill>
+                  <a:srgbClr val="201F33"/>
+                </a:solidFill>
+                <a:latin typeface="Calibri"/>
+              </a:rPr>
+              <a:t>Exam questions may show a folio excerpt and ask you to identify which stage of the process it represents — know the full sequence well.</a:t>
+            </a:r>
+          </a:p>
+        </p:txBody>
+      </p:sp>
+      <p:sp>
+        <p:nvSpPr>
+          <p:cNvPr id="6" name="Oval 5"/>
+          <p:cNvSpPr/>
+          <p:nvPr/>
+        </p:nvSpPr>
+        <p:spPr>
+          <a:xfrm>
+            <a:off x="5532120" y="3840480"/>
+            <a:ext cx="685800" cy="685800"/>
+          </a:xfrm>
+          <a:prstGeom prst="ellipse">
+            <a:avLst/>
+          </a:prstGeom>
+          <a:solidFill>
+            <a:srgbClr val="D9A441"/>
           </a:solidFill>
           <a:ln>
             <a:noFill/>
@@ -4280,6 +5170,14 @@
 <file path=ppt/slides/slide14.xml><?xml version="1.0" encoding="utf-8"?>
 <p:sld xmlns:a="http://schemas.openxmlformats.org/drawingml/2006/main" xmlns:p="http://schemas.openxmlformats.org/presentationml/2006/main" xmlns:r="http://schemas.openxmlformats.org/officeDocument/2006/relationships">
   <p:cSld>
+    <p:bg>
+      <p:bgPr>
+        <a:solidFill>
+          <a:srgbClr val="F8F6FB"/>
+        </a:solidFill>
+        <a:effectLst/>
+      </p:bgPr>
+    </p:bg>
     <p:spTree>
       <p:nvGrpSpPr>
         <p:cNvPr id="1" name=""/>
@@ -4289,207 +5187,367 @@
       <p:grpSpPr/>
       <p:sp>
         <p:nvSpPr>
-          <p:cNvPr id="2" name="Title 1"/>
-          <p:cNvSpPr>
-            <a:spLocks noGrp="1"/>
-          </p:cNvSpPr>
-          <p:nvPr>
-            <p:ph type="title"/>
-          </p:nvPr>
-        </p:nvSpPr>
-        <p:spPr/>
-        <p:txBody>
-          <a:bodyPr wrap="square"/>
-          <a:lstStyle/>
-          <a:p>
-            <a:r>
-              <a:rPr sz="3200" b="1">
-                <a:solidFill>
-                  <a:srgbClr val="3B2F4A"/>
-                </a:solidFill>
-                <a:latin typeface="Cambria"/>
-              </a:rPr>
-              <a:t>Writing an Evaluation</a:t>
-            </a:r>
-          </a:p>
-        </p:txBody>
-      </p:sp>
-      <p:sp>
-        <p:nvSpPr>
-          <p:cNvPr id="3" name="Content Placeholder 2"/>
-          <p:cNvSpPr>
-            <a:spLocks noGrp="1"/>
-          </p:cNvSpPr>
-          <p:nvPr>
-            <p:ph idx="1" sz="half"/>
-          </p:nvPr>
-        </p:nvSpPr>
-        <p:spPr/>
-        <p:txBody>
-          <a:bodyPr wrap="square"/>
-          <a:lstStyle/>
-          <a:p>
-            <a:pPr lvl="1">
-              <a:spcAft>
-                <a:spcPts val="1000"/>
-              </a:spcAft>
-            </a:pPr>
-            <a:r>
-              <a:rPr sz="1800" b="0" i="0">
-                <a:solidFill>
-                  <a:srgbClr val="333333"/>
-                </a:solidFill>
-                <a:latin typeface="Calibri"/>
-              </a:rPr>
-              <a:t>Criterion → Evidence → Judgement</a:t>
-            </a:r>
-          </a:p>
-          <a:p>
-            <a:pPr lvl="1">
-              <a:spcAft>
-                <a:spcPts val="1000"/>
-              </a:spcAft>
-            </a:pPr>
-            <a:r>
-              <a:rPr sz="1800" b="0" i="0">
-                <a:solidFill>
-                  <a:srgbClr val="333333"/>
-                </a:solidFill>
-                <a:latin typeface="Calibri"/>
-              </a:rPr>
-              <a:t>1. State the brief criterion being evaluated</a:t>
-            </a:r>
-          </a:p>
-          <a:p>
-            <a:pPr lvl="1">
-              <a:spcAft>
-                <a:spcPts val="1000"/>
-              </a:spcAft>
-            </a:pPr>
-            <a:r>
-              <a:rPr sz="1800" b="0" i="0">
-                <a:solidFill>
-                  <a:srgbClr val="333333"/>
-                </a:solidFill>
-                <a:latin typeface="Calibri"/>
-              </a:rPr>
-              <a:t>2. Give evidence from the final design</a:t>
-            </a:r>
-          </a:p>
-          <a:p>
-            <a:pPr lvl="1">
-              <a:spcAft>
-                <a:spcPts val="1000"/>
-              </a:spcAft>
-            </a:pPr>
-            <a:r>
-              <a:rPr sz="1800" b="0" i="0">
-                <a:solidFill>
-                  <a:srgbClr val="333333"/>
-                </a:solidFill>
-                <a:latin typeface="Calibri"/>
-              </a:rPr>
-              <a:t>3. Judge whether it succeeds, with reasoning</a:t>
-            </a:r>
-          </a:p>
-        </p:txBody>
-      </p:sp>
-      <p:sp>
-        <p:nvSpPr>
-          <p:cNvPr id="4" name="Content Placeholder 3"/>
-          <p:cNvSpPr>
-            <a:spLocks noGrp="1"/>
-          </p:cNvSpPr>
-          <p:nvPr>
-            <p:ph idx="2" sz="half"/>
-          </p:nvPr>
-        </p:nvSpPr>
-        <p:spPr/>
-        <p:txBody>
-          <a:bodyPr wrap="square"/>
-          <a:lstStyle/>
-          <a:p>
-            <a:pPr>
-              <a:spcAft>
-                <a:spcPts val="1000"/>
-              </a:spcAft>
-            </a:pPr>
-            <a:r>
-              <a:rPr sz="1800" b="0" i="1">
-                <a:solidFill>
-                  <a:srgbClr val="333333"/>
-                </a:solidFill>
-                <a:latin typeface="Calibri"/>
-              </a:rPr>
-              <a:t>Sentence Starters</a:t>
-            </a:r>
-          </a:p>
-          <a:p>
-            <a:pPr lvl="1">
-              <a:spcAft>
-                <a:spcPts val="1000"/>
-              </a:spcAft>
-            </a:pPr>
-            <a:r>
-              <a:rPr sz="1800" b="0" i="0">
-                <a:solidFill>
-                  <a:srgbClr val="333333"/>
-                </a:solidFill>
-                <a:latin typeface="Calibri"/>
-              </a:rPr>
-              <a:t>"The brief required [X]; the final design achieves this by..."</a:t>
-            </a:r>
-          </a:p>
-          <a:p>
-            <a:pPr lvl="1">
-              <a:spcAft>
-                <a:spcPts val="1000"/>
-              </a:spcAft>
-            </a:pPr>
-            <a:r>
-              <a:rPr sz="1800" b="0" i="0">
-                <a:solidFill>
-                  <a:srgbClr val="333333"/>
-                </a:solidFill>
-                <a:latin typeface="Calibri"/>
-              </a:rPr>
-              <a:t>"This effectively meets the needs of [audience] because..."</a:t>
-            </a:r>
-          </a:p>
-          <a:p>
-            <a:pPr lvl="1">
-              <a:spcAft>
-                <a:spcPts val="1000"/>
-              </a:spcAft>
-            </a:pPr>
-            <a:r>
-              <a:rPr sz="1800" b="0" i="0">
-                <a:solidFill>
-                  <a:srgbClr val="333333"/>
-                </a:solidFill>
-                <a:latin typeface="Calibri"/>
-              </a:rPr>
-              <a:t>"One limitation of the final design is..."</a:t>
-            </a:r>
-          </a:p>
-        </p:txBody>
-      </p:sp>
-      <p:sp>
-        <p:nvSpPr>
-          <p:cNvPr id="5" name="Rectangle 4"/>
+          <p:cNvPr id="2" name="Rounded Rectangle 1"/>
           <p:cNvSpPr/>
           <p:nvPr/>
         </p:nvSpPr>
         <p:spPr>
           <a:xfrm>
-            <a:off x="548640" y="1234440"/>
-            <a:ext cx="1463040" cy="38100"/>
+            <a:off x="685800" y="502920"/>
+            <a:ext cx="3291840" cy="457200"/>
+          </a:xfrm>
+          <a:prstGeom prst="roundRect">
+            <a:avLst>
+              <a:gd name="adj" fmla="val 50000"/>
+            </a:avLst>
+          </a:prstGeom>
+          <a:solidFill>
+            <a:srgbClr val="2B2A4A"/>
+          </a:solidFill>
+          <a:ln>
+            <a:noFill/>
+          </a:ln>
+          <a:effectLst/>
+        </p:spPr>
+        <p:style>
+          <a:lnRef idx="1">
+            <a:schemeClr val="accent1"/>
+          </a:lnRef>
+          <a:fillRef idx="3">
+            <a:schemeClr val="accent1"/>
+          </a:fillRef>
+          <a:effectRef idx="2">
+            <a:schemeClr val="accent1"/>
+          </a:effectRef>
+          <a:fontRef idx="minor">
+            <a:schemeClr val="lt1"/>
+          </a:fontRef>
+        </p:style>
+        <p:txBody>
+          <a:bodyPr rtlCol="0" anchor="ctr" wrap="none" lIns="50800" rIns="50800"/>
+          <a:lstStyle/>
+          <a:p>
+            <a:pPr algn="ctr"/>
+            <a:r>
+              <a:rPr sz="1100" b="1">
+                <a:solidFill>
+                  <a:srgbClr val="FFFFFF"/>
+                </a:solidFill>
+                <a:latin typeface="Calibri"/>
+              </a:rPr>
+              <a:t>EVALUATION &amp; PRESENTATION</a:t>
+            </a:r>
+          </a:p>
+        </p:txBody>
+      </p:sp>
+      <p:sp>
+        <p:nvSpPr>
+          <p:cNvPr id="3" name="TextBox 2"/>
+          <p:cNvSpPr txBox="1"/>
+          <p:nvPr/>
+        </p:nvSpPr>
+        <p:spPr>
+          <a:xfrm>
+            <a:off x="685800" y="1051560"/>
+            <a:ext cx="10607040" cy="822960"/>
           </a:xfrm>
           <a:prstGeom prst="rect">
             <a:avLst/>
           </a:prstGeom>
+          <a:noFill/>
+        </p:spPr>
+        <p:txBody>
+          <a:bodyPr wrap="square" anchor="t">
+            <a:spAutoFit/>
+          </a:bodyPr>
+          <a:lstStyle/>
+          <a:p>
+            <a:pPr algn="l"/>
+            <a:r>
+              <a:rPr sz="2700" b="1" i="0">
+                <a:solidFill>
+                  <a:srgbClr val="201F33"/>
+                </a:solidFill>
+                <a:latin typeface="Cambria"/>
+              </a:rPr>
+              <a:t>Writing an Evaluation</a:t>
+            </a:r>
+          </a:p>
+        </p:txBody>
+      </p:sp>
+      <p:sp>
+        <p:nvSpPr>
+          <p:cNvPr id="4" name="Rounded Rectangle 3"/>
+          <p:cNvSpPr/>
+          <p:nvPr/>
+        </p:nvSpPr>
+        <p:spPr>
+          <a:xfrm>
+            <a:off x="685800" y="1874519"/>
+            <a:ext cx="5166360" cy="4526280"/>
+          </a:xfrm>
+          <a:prstGeom prst="roundRect">
+            <a:avLst>
+              <a:gd name="adj" fmla="val 6000"/>
+            </a:avLst>
+          </a:prstGeom>
           <a:solidFill>
-            <a:srgbClr val="3B2F4A"/>
+            <a:srgbClr val="E5E5E9"/>
+          </a:solidFill>
+          <a:ln>
+            <a:noFill/>
+          </a:ln>
+          <a:effectLst/>
+        </p:spPr>
+        <p:style>
+          <a:lnRef idx="1">
+            <a:schemeClr val="accent1"/>
+          </a:lnRef>
+          <a:fillRef idx="3">
+            <a:schemeClr val="accent1"/>
+          </a:fillRef>
+          <a:effectRef idx="2">
+            <a:schemeClr val="accent1"/>
+          </a:effectRef>
+          <a:fontRef idx="minor">
+            <a:schemeClr val="lt1"/>
+          </a:fontRef>
+        </p:style>
+        <p:txBody>
+          <a:bodyPr rtlCol="0" anchor="ctr" lIns="279400" rIns="279400" tIns="228600" bIns="228600" wrap="square"/>
+          <a:lstStyle/>
+          <a:p>
+            <a:pPr algn="ctr" indent="-203200" marL="203200">
+              <a:spcAft>
+                <a:spcPts val="900"/>
+              </a:spcAft>
+              <a:buClr>
+                <a:srgbClr val="2B2A4A"/>
+              </a:buClr>
+              <a:buSzPct val="90000"/>
+              <a:buFont typeface="Arial"/>
+              <a:buChar char="–"/>
+            </a:pPr>
+            <a:r>
+              <a:rPr sz="1250" b="0" i="0">
+                <a:solidFill>
+                  <a:srgbClr val="201F33"/>
+                </a:solidFill>
+                <a:latin typeface="Calibri"/>
+              </a:rPr>
+              <a:t>Criterion → Evidence → Judgement</a:t>
+            </a:r>
+          </a:p>
+          <a:p>
+            <a:pPr indent="-203200" marL="203200">
+              <a:spcAft>
+                <a:spcPts val="900"/>
+              </a:spcAft>
+              <a:buClr>
+                <a:srgbClr val="2B2A4A"/>
+              </a:buClr>
+              <a:buSzPct val="90000"/>
+              <a:buFont typeface="Arial"/>
+              <a:buChar char="–"/>
+            </a:pPr>
+            <a:r>
+              <a:rPr sz="1250" b="0" i="0">
+                <a:solidFill>
+                  <a:srgbClr val="201F33"/>
+                </a:solidFill>
+                <a:latin typeface="Calibri"/>
+              </a:rPr>
+              <a:t>1. State the brief criterion being evaluated</a:t>
+            </a:r>
+          </a:p>
+          <a:p>
+            <a:pPr indent="-203200" marL="203200">
+              <a:spcAft>
+                <a:spcPts val="900"/>
+              </a:spcAft>
+              <a:buClr>
+                <a:srgbClr val="2B2A4A"/>
+              </a:buClr>
+              <a:buSzPct val="90000"/>
+              <a:buFont typeface="Arial"/>
+              <a:buChar char="–"/>
+            </a:pPr>
+            <a:r>
+              <a:rPr sz="1250" b="0" i="0">
+                <a:solidFill>
+                  <a:srgbClr val="201F33"/>
+                </a:solidFill>
+                <a:latin typeface="Calibri"/>
+              </a:rPr>
+              <a:t>2. Give evidence from the final design</a:t>
+            </a:r>
+          </a:p>
+          <a:p>
+            <a:pPr indent="-203200" marL="203200">
+              <a:spcAft>
+                <a:spcPts val="900"/>
+              </a:spcAft>
+              <a:buClr>
+                <a:srgbClr val="2B2A4A"/>
+              </a:buClr>
+              <a:buSzPct val="90000"/>
+              <a:buFont typeface="Arial"/>
+              <a:buChar char="–"/>
+            </a:pPr>
+            <a:r>
+              <a:rPr sz="1250" b="0" i="0">
+                <a:solidFill>
+                  <a:srgbClr val="201F33"/>
+                </a:solidFill>
+                <a:latin typeface="Calibri"/>
+              </a:rPr>
+              <a:t>3. Judge whether it succeeds, with reasoning</a:t>
+            </a:r>
+          </a:p>
+        </p:txBody>
+      </p:sp>
+      <p:sp>
+        <p:nvSpPr>
+          <p:cNvPr id="5" name="Rounded Rectangle 4"/>
+          <p:cNvSpPr/>
+          <p:nvPr/>
+        </p:nvSpPr>
+        <p:spPr>
+          <a:xfrm>
+            <a:off x="6080760" y="1874519"/>
+            <a:ext cx="5166360" cy="4526280"/>
+          </a:xfrm>
+          <a:prstGeom prst="roundRect">
+            <a:avLst>
+              <a:gd name="adj" fmla="val 6000"/>
+            </a:avLst>
+          </a:prstGeom>
+          <a:solidFill>
+            <a:srgbClr val="EFDAE3"/>
+          </a:solidFill>
+          <a:ln>
+            <a:noFill/>
+          </a:ln>
+          <a:effectLst/>
+        </p:spPr>
+        <p:style>
+          <a:lnRef idx="1">
+            <a:schemeClr val="accent1"/>
+          </a:lnRef>
+          <a:fillRef idx="3">
+            <a:schemeClr val="accent1"/>
+          </a:fillRef>
+          <a:effectRef idx="2">
+            <a:schemeClr val="accent1"/>
+          </a:effectRef>
+          <a:fontRef idx="minor">
+            <a:schemeClr val="lt1"/>
+          </a:fontRef>
+        </p:style>
+        <p:txBody>
+          <a:bodyPr rtlCol="0" anchor="ctr" lIns="279400" rIns="279400" tIns="228600" bIns="228600" wrap="square"/>
+          <a:lstStyle/>
+          <a:p>
+            <a:pPr algn="ctr">
+              <a:spcAft>
+                <a:spcPts val="900"/>
+              </a:spcAft>
+              <a:buNone/>
+            </a:pPr>
+            <a:r>
+              <a:rPr sz="1250" b="0" i="1">
+                <a:solidFill>
+                  <a:srgbClr val="201F33"/>
+                </a:solidFill>
+                <a:latin typeface="Calibri"/>
+              </a:rPr>
+              <a:t>Sentence Starters</a:t>
+            </a:r>
+          </a:p>
+          <a:p>
+            <a:pPr indent="-203200" marL="203200">
+              <a:spcAft>
+                <a:spcPts val="900"/>
+              </a:spcAft>
+              <a:buClr>
+                <a:srgbClr val="C97B9E"/>
+              </a:buClr>
+              <a:buSzPct val="90000"/>
+              <a:buFont typeface="Arial"/>
+              <a:buChar char="–"/>
+            </a:pPr>
+            <a:r>
+              <a:rPr sz="1250" b="0" i="0">
+                <a:solidFill>
+                  <a:srgbClr val="201F33"/>
+                </a:solidFill>
+                <a:latin typeface="Calibri"/>
+              </a:rPr>
+              <a:t>"The brief required [X]; the final design achieves this by..."</a:t>
+            </a:r>
+          </a:p>
+          <a:p>
+            <a:pPr indent="-203200" marL="203200">
+              <a:spcAft>
+                <a:spcPts val="900"/>
+              </a:spcAft>
+              <a:buClr>
+                <a:srgbClr val="C97B9E"/>
+              </a:buClr>
+              <a:buSzPct val="90000"/>
+              <a:buFont typeface="Arial"/>
+              <a:buChar char="–"/>
+            </a:pPr>
+            <a:r>
+              <a:rPr sz="1250" b="0" i="0">
+                <a:solidFill>
+                  <a:srgbClr val="201F33"/>
+                </a:solidFill>
+                <a:latin typeface="Calibri"/>
+              </a:rPr>
+              <a:t>"This effectively meets the needs of [audience] because..."</a:t>
+            </a:r>
+          </a:p>
+          <a:p>
+            <a:pPr indent="-203200" marL="203200">
+              <a:spcAft>
+                <a:spcPts val="900"/>
+              </a:spcAft>
+              <a:buClr>
+                <a:srgbClr val="C97B9E"/>
+              </a:buClr>
+              <a:buSzPct val="90000"/>
+              <a:buFont typeface="Arial"/>
+              <a:buChar char="–"/>
+            </a:pPr>
+            <a:r>
+              <a:rPr sz="1250" b="0" i="0">
+                <a:solidFill>
+                  <a:srgbClr val="201F33"/>
+                </a:solidFill>
+                <a:latin typeface="Calibri"/>
+              </a:rPr>
+              <a:t>"One limitation of the final design is..."</a:t>
+            </a:r>
+          </a:p>
+        </p:txBody>
+      </p:sp>
+      <p:sp>
+        <p:nvSpPr>
+          <p:cNvPr id="6" name="Oval 5"/>
+          <p:cNvSpPr/>
+          <p:nvPr/>
+        </p:nvSpPr>
+        <p:spPr>
+          <a:xfrm>
+            <a:off x="5532120" y="3840480"/>
+            <a:ext cx="685800" cy="685800"/>
+          </a:xfrm>
+          <a:prstGeom prst="ellipse">
+            <a:avLst/>
+          </a:prstGeom>
+          <a:solidFill>
+            <a:srgbClr val="D9A441"/>
           </a:solidFill>
           <a:ln>
             <a:noFill/>
@@ -4529,6 +5587,14 @@
 <file path=ppt/slides/slide15.xml><?xml version="1.0" encoding="utf-8"?>
 <p:sld xmlns:a="http://schemas.openxmlformats.org/drawingml/2006/main" xmlns:p="http://schemas.openxmlformats.org/presentationml/2006/main" xmlns:r="http://schemas.openxmlformats.org/officeDocument/2006/relationships">
   <p:cSld>
+    <p:bg>
+      <p:bgPr>
+        <a:solidFill>
+          <a:srgbClr val="F8F6FB"/>
+        </a:solidFill>
+        <a:effectLst/>
+      </p:bgPr>
+    </p:bg>
     <p:spTree>
       <p:nvGrpSpPr>
         <p:cNvPr id="1" name=""/>
@@ -4538,225 +5604,22 @@
       <p:grpSpPr/>
       <p:sp>
         <p:nvSpPr>
-          <p:cNvPr id="2" name="Title 1"/>
-          <p:cNvSpPr>
-            <a:spLocks noGrp="1"/>
-          </p:cNvSpPr>
-          <p:nvPr>
-            <p:ph type="title"/>
-          </p:nvPr>
-        </p:nvSpPr>
-        <p:spPr/>
-        <p:txBody>
-          <a:bodyPr wrap="square"/>
-          <a:lstStyle/>
-          <a:p>
-            <a:r>
-              <a:rPr sz="3200" b="1">
-                <a:solidFill>
-                  <a:srgbClr val="3B2F4A"/>
-                </a:solidFill>
-                <a:latin typeface="Cambria"/>
-              </a:rPr>
-              <a:t>Evaluation &amp; Presentation — Quick Reference</a:t>
-            </a:r>
-          </a:p>
-        </p:txBody>
-      </p:sp>
-      <p:sp>
-        <p:nvSpPr>
-          <p:cNvPr id="3" name="Content Placeholder 2"/>
-          <p:cNvSpPr>
-            <a:spLocks noGrp="1"/>
-          </p:cNvSpPr>
-          <p:nvPr>
-            <p:ph idx="1"/>
-          </p:nvPr>
-        </p:nvSpPr>
-        <p:spPr/>
-        <p:txBody>
-          <a:bodyPr wrap="square"/>
-          <a:lstStyle/>
-          <a:p>
-            <a:pPr lvl="1">
-              <a:spcAft>
-                <a:spcPts val="1000"/>
-              </a:spcAft>
-            </a:pPr>
-            <a:r>
-              <a:rPr sz="1800" b="0" i="0">
-                <a:solidFill>
-                  <a:srgbClr val="333333"/>
-                </a:solidFill>
-                <a:latin typeface="Calibri"/>
-              </a:rPr>
-              <a:t>Refinement</a:t>
-            </a:r>
-          </a:p>
-          <a:p>
-            <a:pPr lvl="1">
-              <a:spcAft>
-                <a:spcPts val="1000"/>
-              </a:spcAft>
-            </a:pPr>
-            <a:r>
-              <a:rPr sz="1800" b="0" i="0">
-                <a:solidFill>
-                  <a:srgbClr val="333333"/>
-                </a:solidFill>
-                <a:latin typeface="Calibri"/>
-              </a:rPr>
-              <a:t>Small, precise final adjustments.</a:t>
-            </a:r>
-          </a:p>
-          <a:p>
-            <a:pPr lvl="1">
-              <a:spcAft>
-                <a:spcPts val="1000"/>
-              </a:spcAft>
-            </a:pPr>
-            <a:r>
-              <a:rPr sz="1800" b="0" i="0">
-                <a:solidFill>
-                  <a:srgbClr val="333333"/>
-                </a:solidFill>
-                <a:latin typeface="Calibri"/>
-              </a:rPr>
-              <a:t>Presentation</a:t>
-            </a:r>
-          </a:p>
-          <a:p>
-            <a:pPr lvl="1">
-              <a:spcAft>
-                <a:spcPts val="1000"/>
-              </a:spcAft>
-            </a:pPr>
-            <a:r>
-              <a:rPr sz="1800" b="0" i="0">
-                <a:solidFill>
-                  <a:srgbClr val="333333"/>
-                </a:solidFill>
-                <a:latin typeface="Calibri"/>
-              </a:rPr>
-              <a:t>Accurate, rendered, professional standard.</a:t>
-            </a:r>
-          </a:p>
-          <a:p>
-            <a:pPr lvl="1">
-              <a:spcAft>
-                <a:spcPts val="1000"/>
-              </a:spcAft>
-            </a:pPr>
-            <a:r>
-              <a:rPr sz="1800" b="0" i="0">
-                <a:solidFill>
-                  <a:srgbClr val="333333"/>
-                </a:solidFill>
-                <a:latin typeface="Calibri"/>
-              </a:rPr>
-              <a:t>Evaluation</a:t>
-            </a:r>
-          </a:p>
-          <a:p>
-            <a:pPr lvl="1">
-              <a:spcAft>
-                <a:spcPts val="1000"/>
-              </a:spcAft>
-            </a:pPr>
-            <a:r>
-              <a:rPr sz="1800" b="0" i="0">
-                <a:solidFill>
-                  <a:srgbClr val="333333"/>
-                </a:solidFill>
-                <a:latin typeface="Calibri"/>
-              </a:rPr>
-              <a:t>Purpose, audience, constraints, obligatory fields.</a:t>
-            </a:r>
-          </a:p>
-          <a:p>
-            <a:pPr lvl="1">
-              <a:spcAft>
-                <a:spcPts val="1000"/>
-              </a:spcAft>
-            </a:pPr>
-            <a:r>
-              <a:rPr sz="1800" b="0" i="0">
-                <a:solidFill>
-                  <a:srgbClr val="333333"/>
-                </a:solidFill>
-                <a:latin typeface="Calibri"/>
-              </a:rPr>
-              <a:t>Folio Layout</a:t>
-            </a:r>
-          </a:p>
-          <a:p>
-            <a:pPr lvl="1">
-              <a:spcAft>
-                <a:spcPts val="1000"/>
-              </a:spcAft>
-            </a:pPr>
-            <a:r>
-              <a:rPr sz="1800" b="0" i="0">
-                <a:solidFill>
-                  <a:srgbClr val="333333"/>
-                </a:solidFill>
-                <a:latin typeface="Calibri"/>
-              </a:rPr>
-              <a:t>Clear sequence and consistent presentation.</a:t>
-            </a:r>
-          </a:p>
-          <a:p>
-            <a:pPr>
-              <a:spcAft>
-                <a:spcPts val="1000"/>
-              </a:spcAft>
-            </a:pPr>
-            <a:r>
-              <a:rPr sz="2000" b="0" i="0">
-                <a:solidFill>
-                  <a:srgbClr val="333333"/>
-                </a:solidFill>
-                <a:latin typeface="Calibri"/>
-              </a:rPr>
-              <a:t> Reminder: a strong evaluation is </a:t>
-            </a:r>
-            <a:r>
-              <a:rPr sz="2000" b="1" i="0">
-                <a:solidFill>
-                  <a:srgbClr val="3B2F4A"/>
-                </a:solidFill>
-                <a:latin typeface="Calibri"/>
-              </a:rPr>
-              <a:t>specific and balanced</a:t>
-            </a:r>
-            <a:r>
-              <a:rPr sz="2000" b="0" i="0">
-                <a:solidFill>
-                  <a:srgbClr val="333333"/>
-                </a:solidFill>
-                <a:latin typeface="Calibri"/>
-              </a:rPr>
-              <a:t> — not just "the design looks good." </a:t>
-            </a:r>
-          </a:p>
-        </p:txBody>
-      </p:sp>
-      <p:sp>
-        <p:nvSpPr>
-          <p:cNvPr id="4" name="Rectangle 3"/>
+          <p:cNvPr id="2" name="Rounded Rectangle 1"/>
           <p:cNvSpPr/>
           <p:nvPr/>
         </p:nvSpPr>
         <p:spPr>
           <a:xfrm>
-            <a:off x="548640" y="1234440"/>
-            <a:ext cx="1463040" cy="38100"/>
-          </a:xfrm>
-          <a:prstGeom prst="rect">
-            <a:avLst/>
+            <a:off x="685800" y="502920"/>
+            <a:ext cx="3291840" cy="457200"/>
+          </a:xfrm>
+          <a:prstGeom prst="roundRect">
+            <a:avLst>
+              <a:gd name="adj" fmla="val 50000"/>
+            </a:avLst>
           </a:prstGeom>
           <a:solidFill>
-            <a:srgbClr val="3B2F4A"/>
+            <a:srgbClr val="2B2A4A"/>
           </a:solidFill>
           <a:ln>
             <a:noFill/>
@@ -4778,10 +5641,581 @@
           </a:fontRef>
         </p:style>
         <p:txBody>
+          <a:bodyPr rtlCol="0" anchor="ctr" wrap="none" lIns="50800" rIns="50800"/>
+          <a:lstStyle/>
+          <a:p>
+            <a:pPr algn="ctr"/>
+            <a:r>
+              <a:rPr sz="1100" b="1">
+                <a:solidFill>
+                  <a:srgbClr val="FFFFFF"/>
+                </a:solidFill>
+                <a:latin typeface="Calibri"/>
+              </a:rPr>
+              <a:t>EVALUATION &amp; PRESENTATION</a:t>
+            </a:r>
+          </a:p>
+        </p:txBody>
+      </p:sp>
+      <p:sp>
+        <p:nvSpPr>
+          <p:cNvPr id="3" name="TextBox 2"/>
+          <p:cNvSpPr txBox="1"/>
+          <p:nvPr/>
+        </p:nvSpPr>
+        <p:spPr>
+          <a:xfrm>
+            <a:off x="685800" y="1051560"/>
+            <a:ext cx="10607040" cy="822960"/>
+          </a:xfrm>
+          <a:prstGeom prst="rect">
+            <a:avLst/>
+          </a:prstGeom>
+          <a:noFill/>
+        </p:spPr>
+        <p:txBody>
+          <a:bodyPr wrap="square" anchor="t">
+            <a:spAutoFit/>
+          </a:bodyPr>
+          <a:lstStyle/>
+          <a:p>
+            <a:pPr algn="l"/>
+            <a:r>
+              <a:rPr sz="2700" b="1" i="0">
+                <a:solidFill>
+                  <a:srgbClr val="201F33"/>
+                </a:solidFill>
+                <a:latin typeface="Cambria"/>
+              </a:rPr>
+              <a:t>Evaluation &amp; Presentation — Quick Reference</a:t>
+            </a:r>
+          </a:p>
+        </p:txBody>
+      </p:sp>
+      <p:sp>
+        <p:nvSpPr>
+          <p:cNvPr id="4" name="Rounded Rectangle 3"/>
+          <p:cNvSpPr/>
+          <p:nvPr/>
+        </p:nvSpPr>
+        <p:spPr>
+          <a:xfrm>
+            <a:off x="685800" y="1874519"/>
+            <a:ext cx="2500884" cy="1554480"/>
+          </a:xfrm>
+          <a:prstGeom prst="roundRect">
+            <a:avLst>
+              <a:gd name="adj" fmla="val 12000"/>
+            </a:avLst>
+          </a:prstGeom>
+          <a:solidFill>
+            <a:srgbClr val="DFDFE3"/>
+          </a:solidFill>
+          <a:ln>
+            <a:noFill/>
+          </a:ln>
+          <a:effectLst/>
+        </p:spPr>
+        <p:style>
+          <a:lnRef idx="1">
+            <a:schemeClr val="accent1"/>
+          </a:lnRef>
+          <a:fillRef idx="3">
+            <a:schemeClr val="accent1"/>
+          </a:fillRef>
+          <a:effectRef idx="2">
+            <a:schemeClr val="accent1"/>
+          </a:effectRef>
+          <a:fontRef idx="minor">
+            <a:schemeClr val="lt1"/>
+          </a:fontRef>
+        </p:style>
+        <p:txBody>
+          <a:bodyPr rtlCol="0" anchor="ctr" wrap="square" lIns="127000" rIns="127000" tIns="101600" bIns="101600"/>
+          <a:lstStyle/>
+          <a:p>
+            <a:pPr algn="ctr"/>
+            <a:r>
+              <a:rPr b="1" sz="1300">
+                <a:solidFill>
+                  <a:srgbClr val="22213B"/>
+                </a:solidFill>
+                <a:latin typeface="Calibri"/>
+              </a:rPr>
+              <a:t>Refinement</a:t>
+            </a:r>
+          </a:p>
+          <a:p>
+            <a:r>
+              <a:rPr sz="1050">
+                <a:solidFill>
+                  <a:srgbClr val="201F33"/>
+                </a:solidFill>
+                <a:latin typeface="Calibri"/>
+              </a:rPr>
+              <a:t>Small, precise final adjustments.</a:t>
+            </a:r>
+          </a:p>
+        </p:txBody>
+      </p:sp>
+      <p:sp>
+        <p:nvSpPr>
+          <p:cNvPr id="5" name="Rounded Rectangle 4"/>
+          <p:cNvSpPr/>
+          <p:nvPr/>
+        </p:nvSpPr>
+        <p:spPr>
+          <a:xfrm>
+            <a:off x="3387852" y="1874519"/>
+            <a:ext cx="2500884" cy="1554480"/>
+          </a:xfrm>
+          <a:prstGeom prst="roundRect">
+            <a:avLst>
+              <a:gd name="adj" fmla="val 12000"/>
+            </a:avLst>
+          </a:prstGeom>
+          <a:solidFill>
+            <a:srgbClr val="F9F1E2"/>
+          </a:solidFill>
+          <a:ln>
+            <a:noFill/>
+          </a:ln>
+          <a:effectLst/>
+        </p:spPr>
+        <p:style>
+          <a:lnRef idx="1">
+            <a:schemeClr val="accent1"/>
+          </a:lnRef>
+          <a:fillRef idx="3">
+            <a:schemeClr val="accent1"/>
+          </a:fillRef>
+          <a:effectRef idx="2">
+            <a:schemeClr val="accent1"/>
+          </a:effectRef>
+          <a:fontRef idx="minor">
+            <a:schemeClr val="lt1"/>
+          </a:fontRef>
+        </p:style>
+        <p:txBody>
+          <a:bodyPr rtlCol="0" anchor="ctr" wrap="square" lIns="127000" rIns="127000" tIns="101600" bIns="101600"/>
+          <a:lstStyle/>
+          <a:p>
+            <a:pPr algn="ctr"/>
+            <a:r>
+              <a:rPr b="1" sz="1300">
+                <a:solidFill>
+                  <a:srgbClr val="AD8334"/>
+                </a:solidFill>
+                <a:latin typeface="Calibri"/>
+              </a:rPr>
+              <a:t>Presentation</a:t>
+            </a:r>
+          </a:p>
+          <a:p>
+            <a:r>
+              <a:rPr sz="1050">
+                <a:solidFill>
+                  <a:srgbClr val="201F33"/>
+                </a:solidFill>
+                <a:latin typeface="Calibri"/>
+              </a:rPr>
+              <a:t>Accurate, rendered, professional standard.</a:t>
+            </a:r>
+          </a:p>
+        </p:txBody>
+      </p:sp>
+      <p:sp>
+        <p:nvSpPr>
+          <p:cNvPr id="6" name="Rounded Rectangle 5"/>
+          <p:cNvSpPr/>
+          <p:nvPr/>
+        </p:nvSpPr>
+        <p:spPr>
+          <a:xfrm>
+            <a:off x="6089904" y="1874519"/>
+            <a:ext cx="2500884" cy="1554480"/>
+          </a:xfrm>
+          <a:prstGeom prst="roundRect">
+            <a:avLst>
+              <a:gd name="adj" fmla="val 12000"/>
+            </a:avLst>
+          </a:prstGeom>
+          <a:solidFill>
+            <a:srgbClr val="F6EBF0"/>
+          </a:solidFill>
+          <a:ln>
+            <a:noFill/>
+          </a:ln>
+          <a:effectLst/>
+        </p:spPr>
+        <p:style>
+          <a:lnRef idx="1">
+            <a:schemeClr val="accent1"/>
+          </a:lnRef>
+          <a:fillRef idx="3">
+            <a:schemeClr val="accent1"/>
+          </a:fillRef>
+          <a:effectRef idx="2">
+            <a:schemeClr val="accent1"/>
+          </a:effectRef>
+          <a:fontRef idx="minor">
+            <a:schemeClr val="lt1"/>
+          </a:fontRef>
+        </p:style>
+        <p:txBody>
+          <a:bodyPr rtlCol="0" anchor="ctr" wrap="square" lIns="127000" rIns="127000" tIns="101600" bIns="101600"/>
+          <a:lstStyle/>
+          <a:p>
+            <a:pPr algn="ctr"/>
+            <a:r>
+              <a:rPr b="1" sz="1300">
+                <a:solidFill>
+                  <a:srgbClr val="A0627E"/>
+                </a:solidFill>
+                <a:latin typeface="Calibri"/>
+              </a:rPr>
+              <a:t>Evaluation</a:t>
+            </a:r>
+          </a:p>
+          <a:p>
+            <a:r>
+              <a:rPr sz="1050">
+                <a:solidFill>
+                  <a:srgbClr val="201F33"/>
+                </a:solidFill>
+                <a:latin typeface="Calibri"/>
+              </a:rPr>
+              <a:t>Purpose, audience, constraints, obligatory fields.</a:t>
+            </a:r>
+          </a:p>
+        </p:txBody>
+      </p:sp>
+      <p:sp>
+        <p:nvSpPr>
+          <p:cNvPr id="7" name="Rounded Rectangle 6"/>
+          <p:cNvSpPr/>
+          <p:nvPr/>
+        </p:nvSpPr>
+        <p:spPr>
+          <a:xfrm>
+            <a:off x="8791956" y="1874519"/>
+            <a:ext cx="2500884" cy="1554480"/>
+          </a:xfrm>
+          <a:prstGeom prst="roundRect">
+            <a:avLst>
+              <a:gd name="adj" fmla="val 12000"/>
+            </a:avLst>
+          </a:prstGeom>
+          <a:solidFill>
+            <a:srgbClr val="DFDFE3"/>
+          </a:solidFill>
+          <a:ln>
+            <a:noFill/>
+          </a:ln>
+          <a:effectLst/>
+        </p:spPr>
+        <p:style>
+          <a:lnRef idx="1">
+            <a:schemeClr val="accent1"/>
+          </a:lnRef>
+          <a:fillRef idx="3">
+            <a:schemeClr val="accent1"/>
+          </a:fillRef>
+          <a:effectRef idx="2">
+            <a:schemeClr val="accent1"/>
+          </a:effectRef>
+          <a:fontRef idx="minor">
+            <a:schemeClr val="lt1"/>
+          </a:fontRef>
+        </p:style>
+        <p:txBody>
+          <a:bodyPr rtlCol="0" anchor="ctr" wrap="square" lIns="127000" rIns="127000" tIns="101600" bIns="101600"/>
+          <a:lstStyle/>
+          <a:p>
+            <a:pPr algn="ctr"/>
+            <a:r>
+              <a:rPr b="1" sz="1300">
+                <a:solidFill>
+                  <a:srgbClr val="22213B"/>
+                </a:solidFill>
+                <a:latin typeface="Calibri"/>
+              </a:rPr>
+              <a:t>Folio Layout</a:t>
+            </a:r>
+          </a:p>
+          <a:p>
+            <a:r>
+              <a:rPr sz="1050">
+                <a:solidFill>
+                  <a:srgbClr val="201F33"/>
+                </a:solidFill>
+                <a:latin typeface="Calibri"/>
+              </a:rPr>
+              <a:t>Clear sequence and consistent presentation.</a:t>
+            </a:r>
+          </a:p>
+        </p:txBody>
+      </p:sp>
+      <p:sp>
+        <p:nvSpPr>
+          <p:cNvPr id="8" name="Rounded Rectangle 7"/>
+          <p:cNvSpPr/>
+          <p:nvPr/>
+        </p:nvSpPr>
+        <p:spPr>
+          <a:xfrm>
+            <a:off x="685800" y="3675887"/>
+            <a:ext cx="10607040" cy="2862073"/>
+          </a:xfrm>
+          <a:prstGeom prst="roundRect">
+            <a:avLst>
+              <a:gd name="adj" fmla="val 10000"/>
+            </a:avLst>
+          </a:prstGeom>
+          <a:solidFill>
+            <a:srgbClr val="F9F1E2"/>
+          </a:solidFill>
+          <a:ln>
+            <a:noFill/>
+          </a:ln>
+          <a:effectLst/>
+        </p:spPr>
+        <p:style>
+          <a:lnRef idx="1">
+            <a:schemeClr val="accent1"/>
+          </a:lnRef>
+          <a:fillRef idx="3">
+            <a:schemeClr val="accent1"/>
+          </a:fillRef>
+          <a:effectRef idx="2">
+            <a:schemeClr val="accent1"/>
+          </a:effectRef>
+          <a:fontRef idx="minor">
+            <a:schemeClr val="lt1"/>
+          </a:fontRef>
+        </p:style>
+        <p:txBody>
+          <a:bodyPr rtlCol="0" anchor="ctr" lIns="203200" rIns="203200" tIns="101600" bIns="101600" wrap="square"/>
+          <a:lstStyle/>
+          <a:p>
+            <a:pPr algn="ctr" indent="-203200" marL="203200">
+              <a:spcAft>
+                <a:spcPts val="900"/>
+              </a:spcAft>
+              <a:buClr>
+                <a:srgbClr val="D9A441"/>
+              </a:buClr>
+              <a:buSzPct val="90000"/>
+              <a:buFont typeface="Arial"/>
+              <a:buChar char="●"/>
+            </a:pPr>
+            <a:r>
+              <a:rPr sz="1200" b="0" i="0">
+                <a:solidFill>
+                  <a:srgbClr val="201F33"/>
+                </a:solidFill>
+                <a:latin typeface="Calibri"/>
+              </a:rPr>
+              <a:t> Reminder: a strong evaluation is </a:t>
+            </a:r>
+            <a:r>
+              <a:rPr sz="1200" b="1" i="0">
+                <a:solidFill>
+                  <a:srgbClr val="B88B37"/>
+                </a:solidFill>
+                <a:latin typeface="Calibri"/>
+              </a:rPr>
+              <a:t>specific and balanced</a:t>
+            </a:r>
+            <a:r>
+              <a:rPr sz="1200" b="0" i="0">
+                <a:solidFill>
+                  <a:srgbClr val="201F33"/>
+                </a:solidFill>
+                <a:latin typeface="Calibri"/>
+              </a:rPr>
+              <a:t> — not just "the design looks good." </a:t>
+            </a:r>
+          </a:p>
+        </p:txBody>
+      </p:sp>
+    </p:spTree>
+  </p:cSld>
+  <p:clrMapOvr>
+    <a:masterClrMapping/>
+  </p:clrMapOvr>
+</p:sld>
+</file>
+
+<file path=ppt/slides/slide16.xml><?xml version="1.0" encoding="utf-8"?>
+<p:sld xmlns:a="http://schemas.openxmlformats.org/drawingml/2006/main" xmlns:p="http://schemas.openxmlformats.org/presentationml/2006/main" xmlns:r="http://schemas.openxmlformats.org/officeDocument/2006/relationships">
+  <p:cSld>
+    <p:bg>
+      <p:bgPr>
+        <a:solidFill>
+          <a:srgbClr val="2B2A4A"/>
+        </a:solidFill>
+        <a:effectLst/>
+      </p:bgPr>
+    </p:bg>
+    <p:spTree>
+      <p:nvGrpSpPr>
+        <p:cNvPr id="1" name=""/>
+        <p:cNvGrpSpPr/>
+        <p:nvPr/>
+      </p:nvGrpSpPr>
+      <p:grpSpPr/>
+      <p:sp>
+        <p:nvSpPr>
+          <p:cNvPr id="2" name="Oval 1"/>
+          <p:cNvSpPr/>
+          <p:nvPr/>
+        </p:nvSpPr>
+        <p:spPr>
+          <a:xfrm>
+            <a:off x="-1097280" y="4114800"/>
+            <a:ext cx="3108960" cy="3108960"/>
+          </a:xfrm>
+          <a:prstGeom prst="ellipse">
+            <a:avLst/>
+          </a:prstGeom>
+          <a:solidFill>
+            <a:srgbClr val="252441"/>
+          </a:solidFill>
+          <a:ln>
+            <a:noFill/>
+          </a:ln>
+          <a:effectLst/>
+        </p:spPr>
+        <p:style>
+          <a:lnRef idx="1">
+            <a:schemeClr val="accent1"/>
+          </a:lnRef>
+          <a:fillRef idx="3">
+            <a:schemeClr val="accent1"/>
+          </a:fillRef>
+          <a:effectRef idx="2">
+            <a:schemeClr val="accent1"/>
+          </a:effectRef>
+          <a:fontRef idx="minor">
+            <a:schemeClr val="lt1"/>
+          </a:fontRef>
+        </p:style>
+        <p:txBody>
           <a:bodyPr rtlCol="0" anchor="ctr"/>
           <a:lstStyle/>
           <a:p>
             <a:pPr algn="ctr"/>
+          </a:p>
+        </p:txBody>
+      </p:sp>
+      <p:sp>
+        <p:nvSpPr>
+          <p:cNvPr id="3" name="Oval 2"/>
+          <p:cNvSpPr/>
+          <p:nvPr/>
+        </p:nvSpPr>
+        <p:spPr>
+          <a:xfrm>
+            <a:off x="9875520" y="-1188720"/>
+            <a:ext cx="2743200" cy="2743200"/>
+          </a:xfrm>
+          <a:prstGeom prst="ellipse">
+            <a:avLst/>
+          </a:prstGeom>
+          <a:solidFill>
+            <a:srgbClr val="D9A441"/>
+          </a:solidFill>
+          <a:ln>
+            <a:noFill/>
+          </a:ln>
+          <a:effectLst/>
+        </p:spPr>
+        <p:style>
+          <a:lnRef idx="1">
+            <a:schemeClr val="accent1"/>
+          </a:lnRef>
+          <a:fillRef idx="3">
+            <a:schemeClr val="accent1"/>
+          </a:fillRef>
+          <a:effectRef idx="2">
+            <a:schemeClr val="accent1"/>
+          </a:effectRef>
+          <a:fontRef idx="minor">
+            <a:schemeClr val="lt1"/>
+          </a:fontRef>
+        </p:style>
+        <p:txBody>
+          <a:bodyPr rtlCol="0" anchor="ctr"/>
+          <a:lstStyle/>
+          <a:p>
+            <a:pPr algn="ctr"/>
+          </a:p>
+        </p:txBody>
+      </p:sp>
+      <p:sp>
+        <p:nvSpPr>
+          <p:cNvPr id="4" name="Rounded Rectangle 3"/>
+          <p:cNvSpPr/>
+          <p:nvPr/>
+        </p:nvSpPr>
+        <p:spPr>
+          <a:xfrm>
+            <a:off x="1920240" y="2286000"/>
+            <a:ext cx="8321040" cy="2377440"/>
+          </a:xfrm>
+          <a:prstGeom prst="roundRect">
+            <a:avLst>
+              <a:gd name="adj" fmla="val 20000"/>
+            </a:avLst>
+          </a:prstGeom>
+          <a:solidFill>
+            <a:srgbClr val="FFFFFF"/>
+          </a:solidFill>
+          <a:ln>
+            <a:noFill/>
+          </a:ln>
+          <a:effectLst/>
+        </p:spPr>
+        <p:style>
+          <a:lnRef idx="1">
+            <a:schemeClr val="accent1"/>
+          </a:lnRef>
+          <a:fillRef idx="3">
+            <a:schemeClr val="accent1"/>
+          </a:fillRef>
+          <a:effectRef idx="2">
+            <a:schemeClr val="accent1"/>
+          </a:effectRef>
+          <a:fontRef idx="minor">
+            <a:schemeClr val="lt1"/>
+          </a:fontRef>
+        </p:style>
+        <p:txBody>
+          <a:bodyPr rtlCol="0" anchor="ctr"/>
+          <a:lstStyle/>
+          <a:p>
+            <a:pPr algn="ctr"/>
+            <a:r>
+              <a:rPr b="1" sz="3000">
+                <a:solidFill>
+                  <a:srgbClr val="2B2A4A"/>
+                </a:solidFill>
+                <a:latin typeface="Cambria"/>
+              </a:rPr>
+              <a:t>End of Unit 4</a:t>
+            </a:r>
+          </a:p>
+          <a:p>
+            <a:pPr algn="ctr"/>
+            <a:r>
+              <a:rPr sz="1400">
+                <a:solidFill>
+                  <a:srgbClr val="595959"/>
+                </a:solidFill>
+              </a:rPr>
+              <a:t>Review the matching workbook to consolidate what you have learnt.</a:t>
+            </a:r>
           </a:p>
         </p:txBody>
       </p:sp>
@@ -4799,7 +6233,7 @@
     <p:bg>
       <p:bgPr>
         <a:solidFill>
-          <a:srgbClr val="3B2F4A"/>
+          <a:srgbClr val="D9A441"/>
         </a:solidFill>
         <a:effectLst/>
       </p:bgPr>
@@ -4813,23 +6247,220 @@
       <p:grpSpPr/>
       <p:sp>
         <p:nvSpPr>
-          <p:cNvPr id="2" name="Title 1"/>
-          <p:cNvSpPr>
-            <a:spLocks noGrp="1"/>
-          </p:cNvSpPr>
-          <p:nvPr>
-            <p:ph type="title"/>
-          </p:nvPr>
-        </p:nvSpPr>
-        <p:spPr/>
-        <p:txBody>
-          <a:bodyPr/>
-          <a:lstStyle/>
-          <a:p>
-            <a:r>
-              <a:rPr sz="4000" b="1">
-                <a:solidFill>
-                  <a:srgbClr val="FFFFFF"/>
+          <p:cNvPr id="2" name="Oval 1"/>
+          <p:cNvSpPr/>
+          <p:nvPr/>
+        </p:nvSpPr>
+        <p:spPr>
+          <a:xfrm>
+            <a:off x="9692640" y="-914400"/>
+            <a:ext cx="2926080" cy="2926080"/>
+          </a:xfrm>
+          <a:prstGeom prst="ellipse">
+            <a:avLst/>
+          </a:prstGeom>
+          <a:solidFill>
+            <a:srgbClr val="BE9039"/>
+          </a:solidFill>
+          <a:ln>
+            <a:noFill/>
+          </a:ln>
+          <a:effectLst/>
+        </p:spPr>
+        <p:style>
+          <a:lnRef idx="1">
+            <a:schemeClr val="accent1"/>
+          </a:lnRef>
+          <a:fillRef idx="3">
+            <a:schemeClr val="accent1"/>
+          </a:fillRef>
+          <a:effectRef idx="2">
+            <a:schemeClr val="accent1"/>
+          </a:effectRef>
+          <a:fontRef idx="minor">
+            <a:schemeClr val="lt1"/>
+          </a:fontRef>
+        </p:style>
+        <p:txBody>
+          <a:bodyPr rtlCol="0" anchor="ctr"/>
+          <a:lstStyle/>
+          <a:p>
+            <a:pPr algn="ctr"/>
+          </a:p>
+        </p:txBody>
+      </p:sp>
+      <p:sp>
+        <p:nvSpPr>
+          <p:cNvPr id="3" name="Oval 2"/>
+          <p:cNvSpPr/>
+          <p:nvPr/>
+        </p:nvSpPr>
+        <p:spPr>
+          <a:xfrm>
+            <a:off x="-914400" y="4937760"/>
+            <a:ext cx="2377440" cy="2377440"/>
+          </a:xfrm>
+          <a:prstGeom prst="ellipse">
+            <a:avLst/>
+          </a:prstGeom>
+          <a:solidFill>
+            <a:srgbClr val="BE9039"/>
+          </a:solidFill>
+          <a:ln>
+            <a:noFill/>
+          </a:ln>
+          <a:effectLst/>
+        </p:spPr>
+        <p:style>
+          <a:lnRef idx="1">
+            <a:schemeClr val="accent1"/>
+          </a:lnRef>
+          <a:fillRef idx="3">
+            <a:schemeClr val="accent1"/>
+          </a:fillRef>
+          <a:effectRef idx="2">
+            <a:schemeClr val="accent1"/>
+          </a:effectRef>
+          <a:fontRef idx="minor">
+            <a:schemeClr val="lt1"/>
+          </a:fontRef>
+        </p:style>
+        <p:txBody>
+          <a:bodyPr rtlCol="0" anchor="ctr"/>
+          <a:lstStyle/>
+          <a:p>
+            <a:pPr algn="ctr"/>
+          </a:p>
+        </p:txBody>
+      </p:sp>
+      <p:sp>
+        <p:nvSpPr>
+          <p:cNvPr id="4" name="Rounded Rectangle 3"/>
+          <p:cNvSpPr/>
+          <p:nvPr/>
+        </p:nvSpPr>
+        <p:spPr>
+          <a:xfrm>
+            <a:off x="822960" y="1051560"/>
+            <a:ext cx="1188720" cy="502920"/>
+          </a:xfrm>
+          <a:prstGeom prst="roundRect">
+            <a:avLst>
+              <a:gd name="adj" fmla="val 50000"/>
+            </a:avLst>
+          </a:prstGeom>
+          <a:solidFill>
+            <a:srgbClr val="FFFFFF"/>
+          </a:solidFill>
+          <a:ln>
+            <a:noFill/>
+          </a:ln>
+          <a:effectLst/>
+        </p:spPr>
+        <p:style>
+          <a:lnRef idx="1">
+            <a:schemeClr val="accent1"/>
+          </a:lnRef>
+          <a:fillRef idx="3">
+            <a:schemeClr val="accent1"/>
+          </a:fillRef>
+          <a:effectRef idx="2">
+            <a:schemeClr val="accent1"/>
+          </a:effectRef>
+          <a:fontRef idx="minor">
+            <a:schemeClr val="lt1"/>
+          </a:fontRef>
+        </p:style>
+        <p:txBody>
+          <a:bodyPr rtlCol="0" anchor="ctr" wrap="none" lIns="50800" rIns="50800"/>
+          <a:lstStyle/>
+          <a:p>
+            <a:pPr algn="ctr"/>
+            <a:r>
+              <a:rPr sz="1400" b="1">
+                <a:solidFill>
+                  <a:srgbClr val="AD8334"/>
+                </a:solidFill>
+                <a:latin typeface="Calibri"/>
+              </a:rPr>
+              <a:t>01</a:t>
+            </a:r>
+          </a:p>
+        </p:txBody>
+      </p:sp>
+      <p:sp>
+        <p:nvSpPr>
+          <p:cNvPr id="5" name="Rounded Rectangle 4"/>
+          <p:cNvSpPr/>
+          <p:nvPr/>
+        </p:nvSpPr>
+        <p:spPr>
+          <a:xfrm>
+            <a:off x="822960" y="2011680"/>
+            <a:ext cx="10515600" cy="2834640"/>
+          </a:xfrm>
+          <a:prstGeom prst="roundRect">
+            <a:avLst>
+              <a:gd name="adj" fmla="val 18000"/>
+            </a:avLst>
+          </a:prstGeom>
+          <a:solidFill>
+            <a:srgbClr val="FFFFFF"/>
+          </a:solidFill>
+          <a:ln>
+            <a:noFill/>
+          </a:ln>
+          <a:effectLst/>
+        </p:spPr>
+        <p:style>
+          <a:lnRef idx="1">
+            <a:schemeClr val="accent1"/>
+          </a:lnRef>
+          <a:fillRef idx="3">
+            <a:schemeClr val="accent1"/>
+          </a:fillRef>
+          <a:effectRef idx="2">
+            <a:schemeClr val="accent1"/>
+          </a:effectRef>
+          <a:fontRef idx="minor">
+            <a:schemeClr val="lt1"/>
+          </a:fontRef>
+        </p:style>
+        <p:txBody>
+          <a:bodyPr rtlCol="0" anchor="ctr"/>
+          <a:lstStyle/>
+          <a:p>
+            <a:pPr algn="ctr"/>
+          </a:p>
+        </p:txBody>
+      </p:sp>
+      <p:sp>
+        <p:nvSpPr>
+          <p:cNvPr id="6" name="TextBox 5"/>
+          <p:cNvSpPr txBox="1"/>
+          <p:nvPr/>
+        </p:nvSpPr>
+        <p:spPr>
+          <a:xfrm>
+            <a:off x="1280160" y="2697480"/>
+            <a:ext cx="9601200" cy="1097280"/>
+          </a:xfrm>
+          <a:prstGeom prst="rect">
+            <a:avLst/>
+          </a:prstGeom>
+          <a:noFill/>
+        </p:spPr>
+        <p:txBody>
+          <a:bodyPr wrap="square" anchor="t">
+            <a:spAutoFit/>
+          </a:bodyPr>
+          <a:lstStyle/>
+          <a:p>
+            <a:pPr algn="l"/>
+            <a:r>
+              <a:rPr sz="3400" b="1" i="0">
+                <a:solidFill>
+                  <a:srgbClr val="B88B37"/>
                 </a:solidFill>
                 <a:latin typeface="Cambria"/>
               </a:rPr>
@@ -4840,27 +6471,35 @@
       </p:sp>
       <p:sp>
         <p:nvSpPr>
-          <p:cNvPr id="3" name="Text Placeholder 2"/>
-          <p:cNvSpPr>
-            <a:spLocks noGrp="1"/>
-          </p:cNvSpPr>
-          <p:nvPr>
-            <p:ph type="body" idx="1"/>
-          </p:nvPr>
-        </p:nvSpPr>
-        <p:spPr/>
-        <p:txBody>
-          <a:bodyPr/>
-          <a:lstStyle/>
-          <a:p>
-            <a:r>
-              <a:rPr sz="1800">
-                <a:solidFill>
-                  <a:srgbClr val="E5E5E5"/>
-                </a:solidFill>
-                <a:latin typeface="Calibri"/>
-              </a:rPr>
-              <a:t>AOS 1 · Development and Resolution of Designs</a:t>
+          <p:cNvPr id="7" name="TextBox 6"/>
+          <p:cNvSpPr txBox="1"/>
+          <p:nvPr/>
+        </p:nvSpPr>
+        <p:spPr>
+          <a:xfrm>
+            <a:off x="1280160" y="3657600"/>
+            <a:ext cx="9601200" cy="548640"/>
+          </a:xfrm>
+          <a:prstGeom prst="rect">
+            <a:avLst/>
+          </a:prstGeom>
+          <a:noFill/>
+        </p:spPr>
+        <p:txBody>
+          <a:bodyPr wrap="square" anchor="t">
+            <a:spAutoFit/>
+          </a:bodyPr>
+          <a:lstStyle/>
+          <a:p>
+            <a:pPr algn="l"/>
+            <a:r>
+              <a:rPr sz="1500" b="0" i="0">
+                <a:solidFill>
+                  <a:srgbClr val="6B6B6B"/>
+                </a:solidFill>
+                <a:latin typeface="Calibri"/>
+              </a:rPr>
+              <a:t>AOS 1 - Development and Resolution of Designs</a:t>
             </a:r>
           </a:p>
         </p:txBody>
@@ -4876,6 +6515,14 @@
 <file path=ppt/slides/slide3.xml><?xml version="1.0" encoding="utf-8"?>
 <p:sld xmlns:a="http://schemas.openxmlformats.org/drawingml/2006/main" xmlns:p="http://schemas.openxmlformats.org/presentationml/2006/main" xmlns:r="http://schemas.openxmlformats.org/officeDocument/2006/relationships">
   <p:cSld>
+    <p:bg>
+      <p:bgPr>
+        <a:solidFill>
+          <a:srgbClr val="F8F6FB"/>
+        </a:solidFill>
+        <a:effectLst/>
+      </p:bgPr>
+    </p:bg>
     <p:spTree>
       <p:nvGrpSpPr>
         <p:cNvPr id="1" name=""/>
@@ -4885,209 +6532,368 @@
       <p:grpSpPr/>
       <p:sp>
         <p:nvSpPr>
-          <p:cNvPr id="2" name="Title 1"/>
-          <p:cNvSpPr>
-            <a:spLocks noGrp="1"/>
-          </p:cNvSpPr>
-          <p:nvPr>
-            <p:ph type="title"/>
-          </p:nvPr>
-        </p:nvSpPr>
-        <p:spPr/>
-        <p:txBody>
-          <a:bodyPr wrap="square"/>
-          <a:lstStyle/>
-          <a:p>
-            <a:r>
-              <a:rPr sz="3200" b="1">
-                <a:solidFill>
-                  <a:srgbClr val="3B2F4A"/>
-                </a:solidFill>
-                <a:latin typeface="Cambria"/>
-              </a:rPr>
-              <a:t>Developing Your Two Concepts</a:t>
-            </a:r>
-          </a:p>
-        </p:txBody>
-      </p:sp>
-      <p:sp>
-        <p:nvSpPr>
-          <p:cNvPr id="3" name="Content Placeholder 2"/>
-          <p:cNvSpPr>
-            <a:spLocks noGrp="1"/>
-          </p:cNvSpPr>
-          <p:nvPr>
-            <p:ph idx="1" sz="half"/>
-          </p:nvPr>
-        </p:nvSpPr>
-        <p:spPr/>
-        <p:txBody>
-          <a:bodyPr wrap="square"/>
-          <a:lstStyle/>
-          <a:p>
-            <a:pPr>
-              <a:spcAft>
-                <a:spcPts val="1000"/>
-              </a:spcAft>
-            </a:pPr>
-            <a:r>
-              <a:rPr sz="2000" b="0" i="0">
-                <a:solidFill>
-                  <a:srgbClr val="333333"/>
-                </a:solidFill>
-                <a:latin typeface="Calibri"/>
-              </a:rPr>
-              <a:t>In Unit 4, you take the </a:t>
-            </a:r>
-            <a:r>
-              <a:rPr sz="2000" b="1" i="0">
-                <a:solidFill>
-                  <a:srgbClr val="3B2F4A"/>
-                </a:solidFill>
-                <a:latin typeface="Calibri"/>
-              </a:rPr>
-              <a:t>two distinct concepts</a:t>
-            </a:r>
-            <a:r>
-              <a:rPr sz="2000" b="0" i="0">
-                <a:solidFill>
-                  <a:srgbClr val="333333"/>
-                </a:solidFill>
-                <a:latin typeface="Calibri"/>
-              </a:rPr>
-              <a:t> generated in Unit 3 and develop each one further through testing, refinement and feedback.</a:t>
-            </a:r>
-          </a:p>
-          <a:p>
-            <a:pPr>
-              <a:spcAft>
-                <a:spcPts val="1000"/>
-              </a:spcAft>
-            </a:pPr>
-            <a:r>
-              <a:rPr sz="2000" b="0" i="0">
-                <a:solidFill>
-                  <a:srgbClr val="333333"/>
-                </a:solidFill>
-                <a:latin typeface="Calibri"/>
-              </a:rPr>
-              <a:t>One concept is ultimately selected and resolved into a final presentation — but both must show visible development.</a:t>
-            </a:r>
-          </a:p>
-        </p:txBody>
-      </p:sp>
-      <p:sp>
-        <p:nvSpPr>
-          <p:cNvPr id="4" name="Content Placeholder 3"/>
-          <p:cNvSpPr>
-            <a:spLocks noGrp="1"/>
-          </p:cNvSpPr>
-          <p:nvPr>
-            <p:ph idx="2" sz="half"/>
-          </p:nvPr>
-        </p:nvSpPr>
-        <p:spPr/>
-        <p:txBody>
-          <a:bodyPr wrap="square"/>
-          <a:lstStyle/>
-          <a:p>
-            <a:pPr>
-              <a:spcAft>
-                <a:spcPts val="1000"/>
-              </a:spcAft>
-            </a:pPr>
-            <a:r>
-              <a:rPr sz="2000" b="0" i="0">
-                <a:solidFill>
-                  <a:srgbClr val="333333"/>
-                </a:solidFill>
-                <a:latin typeface="Calibri"/>
-              </a:rPr>
-              <a:t>Development Shows</a:t>
-            </a:r>
-          </a:p>
-          <a:p>
-            <a:pPr lvl="1">
-              <a:spcAft>
-                <a:spcPts val="1000"/>
-              </a:spcAft>
-            </a:pPr>
-            <a:r>
-              <a:rPr sz="1800" b="0" i="0">
-                <a:solidFill>
-                  <a:srgbClr val="333333"/>
-                </a:solidFill>
-                <a:latin typeface="Calibri"/>
-              </a:rPr>
-              <a:t>Testing of options (type, colour, material)</a:t>
-            </a:r>
-          </a:p>
-          <a:p>
-            <a:pPr lvl="1">
-              <a:spcAft>
-                <a:spcPts val="1000"/>
-              </a:spcAft>
-            </a:pPr>
-            <a:r>
-              <a:rPr sz="1800" b="0" i="0">
-                <a:solidFill>
-                  <a:srgbClr val="333333"/>
-                </a:solidFill>
-                <a:latin typeface="Calibri"/>
-              </a:rPr>
-              <a:t>Annotated decision-making</a:t>
-            </a:r>
-          </a:p>
-          <a:p>
-            <a:pPr lvl="1">
-              <a:spcAft>
-                <a:spcPts val="1000"/>
-              </a:spcAft>
-            </a:pPr>
-            <a:r>
-              <a:rPr sz="1800" b="0" i="0">
-                <a:solidFill>
-                  <a:srgbClr val="333333"/>
-                </a:solidFill>
-                <a:latin typeface="Calibri"/>
-              </a:rPr>
-              <a:t>Response to feedback</a:t>
-            </a:r>
-          </a:p>
-          <a:p>
-            <a:pPr lvl="1">
-              <a:spcAft>
-                <a:spcPts val="1000"/>
-              </a:spcAft>
-            </a:pPr>
-            <a:r>
-              <a:rPr sz="1800" b="0" i="0">
-                <a:solidFill>
-                  <a:srgbClr val="333333"/>
-                </a:solidFill>
-                <a:latin typeface="Calibri"/>
-              </a:rPr>
-              <a:t>Progress toward a resolved final design</a:t>
-            </a:r>
-          </a:p>
-        </p:txBody>
-      </p:sp>
-      <p:sp>
-        <p:nvSpPr>
-          <p:cNvPr id="5" name="Rectangle 4"/>
+          <p:cNvPr id="2" name="Rounded Rectangle 1"/>
           <p:cNvSpPr/>
           <p:nvPr/>
         </p:nvSpPr>
         <p:spPr>
           <a:xfrm>
-            <a:off x="548640" y="1234440"/>
-            <a:ext cx="1463040" cy="38100"/>
+            <a:off x="685800" y="502920"/>
+            <a:ext cx="3291840" cy="457200"/>
+          </a:xfrm>
+          <a:prstGeom prst="roundRect">
+            <a:avLst>
+              <a:gd name="adj" fmla="val 50000"/>
+            </a:avLst>
+          </a:prstGeom>
+          <a:solidFill>
+            <a:srgbClr val="2B2A4A"/>
+          </a:solidFill>
+          <a:ln>
+            <a:noFill/>
+          </a:ln>
+          <a:effectLst/>
+        </p:spPr>
+        <p:style>
+          <a:lnRef idx="1">
+            <a:schemeClr val="accent1"/>
+          </a:lnRef>
+          <a:fillRef idx="3">
+            <a:schemeClr val="accent1"/>
+          </a:fillRef>
+          <a:effectRef idx="2">
+            <a:schemeClr val="accent1"/>
+          </a:effectRef>
+          <a:fontRef idx="minor">
+            <a:schemeClr val="lt1"/>
+          </a:fontRef>
+        </p:style>
+        <p:txBody>
+          <a:bodyPr rtlCol="0" anchor="ctr" wrap="none" lIns="50800" rIns="50800"/>
+          <a:lstStyle/>
+          <a:p>
+            <a:pPr algn="ctr"/>
+            <a:r>
+              <a:rPr sz="1100" b="1">
+                <a:solidFill>
+                  <a:srgbClr val="FFFFFF"/>
+                </a:solidFill>
+                <a:latin typeface="Calibri"/>
+              </a:rPr>
+              <a:t>DEVELOPMENT &amp; RESOLUTION</a:t>
+            </a:r>
+          </a:p>
+        </p:txBody>
+      </p:sp>
+      <p:sp>
+        <p:nvSpPr>
+          <p:cNvPr id="3" name="TextBox 2"/>
+          <p:cNvSpPr txBox="1"/>
+          <p:nvPr/>
+        </p:nvSpPr>
+        <p:spPr>
+          <a:xfrm>
+            <a:off x="685800" y="1051560"/>
+            <a:ext cx="10607040" cy="822960"/>
           </a:xfrm>
           <a:prstGeom prst="rect">
             <a:avLst/>
           </a:prstGeom>
+          <a:noFill/>
+        </p:spPr>
+        <p:txBody>
+          <a:bodyPr wrap="square" anchor="t">
+            <a:spAutoFit/>
+          </a:bodyPr>
+          <a:lstStyle/>
+          <a:p>
+            <a:pPr algn="l"/>
+            <a:r>
+              <a:rPr sz="2700" b="1" i="0">
+                <a:solidFill>
+                  <a:srgbClr val="201F33"/>
+                </a:solidFill>
+                <a:latin typeface="Cambria"/>
+              </a:rPr>
+              <a:t>Developing Your Two Concepts</a:t>
+            </a:r>
+          </a:p>
+        </p:txBody>
+      </p:sp>
+      <p:sp>
+        <p:nvSpPr>
+          <p:cNvPr id="4" name="Rounded Rectangle 3"/>
+          <p:cNvSpPr/>
+          <p:nvPr/>
+        </p:nvSpPr>
+        <p:spPr>
+          <a:xfrm>
+            <a:off x="685800" y="1874519"/>
+            <a:ext cx="5166360" cy="4526280"/>
+          </a:xfrm>
+          <a:prstGeom prst="roundRect">
+            <a:avLst>
+              <a:gd name="adj" fmla="val 6000"/>
+            </a:avLst>
+          </a:prstGeom>
           <a:solidFill>
-            <a:srgbClr val="3B2F4A"/>
+            <a:srgbClr val="E5E5E9"/>
+          </a:solidFill>
+          <a:ln>
+            <a:noFill/>
+          </a:ln>
+          <a:effectLst/>
+        </p:spPr>
+        <p:style>
+          <a:lnRef idx="1">
+            <a:schemeClr val="accent1"/>
+          </a:lnRef>
+          <a:fillRef idx="3">
+            <a:schemeClr val="accent1"/>
+          </a:fillRef>
+          <a:effectRef idx="2">
+            <a:schemeClr val="accent1"/>
+          </a:effectRef>
+          <a:fontRef idx="minor">
+            <a:schemeClr val="lt1"/>
+          </a:fontRef>
+        </p:style>
+        <p:txBody>
+          <a:bodyPr rtlCol="0" anchor="ctr" lIns="279400" rIns="279400" tIns="228600" bIns="228600" wrap="square"/>
+          <a:lstStyle/>
+          <a:p>
+            <a:pPr algn="ctr" indent="-203200" marL="203200">
+              <a:spcAft>
+                <a:spcPts val="900"/>
+              </a:spcAft>
+              <a:buClr>
+                <a:srgbClr val="2B2A4A"/>
+              </a:buClr>
+              <a:buSzPct val="90000"/>
+              <a:buFont typeface="Arial"/>
+              <a:buChar char="●"/>
+            </a:pPr>
+            <a:r>
+              <a:rPr sz="1400" b="0" i="0">
+                <a:solidFill>
+                  <a:srgbClr val="201F33"/>
+                </a:solidFill>
+                <a:latin typeface="Calibri"/>
+              </a:rPr>
+              <a:t>In Unit 4, you take the </a:t>
+            </a:r>
+            <a:r>
+              <a:rPr sz="1400" b="1" i="0">
+                <a:solidFill>
+                  <a:srgbClr val="24233E"/>
+                </a:solidFill>
+                <a:latin typeface="Calibri"/>
+              </a:rPr>
+              <a:t>two distinct concepts</a:t>
+            </a:r>
+            <a:r>
+              <a:rPr sz="1400" b="0" i="0">
+                <a:solidFill>
+                  <a:srgbClr val="201F33"/>
+                </a:solidFill>
+                <a:latin typeface="Calibri"/>
+              </a:rPr>
+              <a:t> generated in Unit 3 and develop each one further through testing, refinement and feedback.</a:t>
+            </a:r>
+          </a:p>
+          <a:p>
+            <a:pPr indent="-203200" marL="203200">
+              <a:spcAft>
+                <a:spcPts val="900"/>
+              </a:spcAft>
+              <a:buClr>
+                <a:srgbClr val="2B2A4A"/>
+              </a:buClr>
+              <a:buSzPct val="90000"/>
+              <a:buFont typeface="Arial"/>
+              <a:buChar char="●"/>
+            </a:pPr>
+            <a:r>
+              <a:rPr sz="1400" b="0" i="0">
+                <a:solidFill>
+                  <a:srgbClr val="201F33"/>
+                </a:solidFill>
+                <a:latin typeface="Calibri"/>
+              </a:rPr>
+              <a:t>One concept is ultimately selected and resolved into a final presentation — but both must show visible development.</a:t>
+            </a:r>
+          </a:p>
+        </p:txBody>
+      </p:sp>
+      <p:sp>
+        <p:nvSpPr>
+          <p:cNvPr id="5" name="Rounded Rectangle 4"/>
+          <p:cNvSpPr/>
+          <p:nvPr/>
+        </p:nvSpPr>
+        <p:spPr>
+          <a:xfrm>
+            <a:off x="6080760" y="1874519"/>
+            <a:ext cx="5166360" cy="4526280"/>
+          </a:xfrm>
+          <a:prstGeom prst="roundRect">
+            <a:avLst>
+              <a:gd name="adj" fmla="val 6000"/>
+            </a:avLst>
+          </a:prstGeom>
+          <a:solidFill>
+            <a:srgbClr val="EFDAE3"/>
+          </a:solidFill>
+          <a:ln>
+            <a:noFill/>
+          </a:ln>
+          <a:effectLst/>
+        </p:spPr>
+        <p:style>
+          <a:lnRef idx="1">
+            <a:schemeClr val="accent1"/>
+          </a:lnRef>
+          <a:fillRef idx="3">
+            <a:schemeClr val="accent1"/>
+          </a:fillRef>
+          <a:effectRef idx="2">
+            <a:schemeClr val="accent1"/>
+          </a:effectRef>
+          <a:fontRef idx="minor">
+            <a:schemeClr val="lt1"/>
+          </a:fontRef>
+        </p:style>
+        <p:txBody>
+          <a:bodyPr rtlCol="0" anchor="ctr" lIns="279400" rIns="279400" tIns="228600" bIns="228600" wrap="square"/>
+          <a:lstStyle/>
+          <a:p>
+            <a:pPr algn="ctr" indent="-203200" marL="203200">
+              <a:spcAft>
+                <a:spcPts val="900"/>
+              </a:spcAft>
+              <a:buClr>
+                <a:srgbClr val="C97B9E"/>
+              </a:buClr>
+              <a:buSzPct val="90000"/>
+              <a:buFont typeface="Arial"/>
+              <a:buChar char="●"/>
+            </a:pPr>
+            <a:r>
+              <a:rPr sz="1400" b="0" i="0">
+                <a:solidFill>
+                  <a:srgbClr val="201F33"/>
+                </a:solidFill>
+                <a:latin typeface="Calibri"/>
+              </a:rPr>
+              <a:t>Development Shows</a:t>
+            </a:r>
+          </a:p>
+          <a:p>
+            <a:pPr indent="-203200" marL="203200">
+              <a:spcAft>
+                <a:spcPts val="900"/>
+              </a:spcAft>
+              <a:buClr>
+                <a:srgbClr val="C97B9E"/>
+              </a:buClr>
+              <a:buSzPct val="90000"/>
+              <a:buFont typeface="Arial"/>
+              <a:buChar char="–"/>
+            </a:pPr>
+            <a:r>
+              <a:rPr sz="1250" b="0" i="0">
+                <a:solidFill>
+                  <a:srgbClr val="201F33"/>
+                </a:solidFill>
+                <a:latin typeface="Calibri"/>
+              </a:rPr>
+              <a:t>Testing of options (type, colour, material)</a:t>
+            </a:r>
+          </a:p>
+          <a:p>
+            <a:pPr indent="-203200" marL="203200">
+              <a:spcAft>
+                <a:spcPts val="900"/>
+              </a:spcAft>
+              <a:buClr>
+                <a:srgbClr val="C97B9E"/>
+              </a:buClr>
+              <a:buSzPct val="90000"/>
+              <a:buFont typeface="Arial"/>
+              <a:buChar char="–"/>
+            </a:pPr>
+            <a:r>
+              <a:rPr sz="1250" b="0" i="0">
+                <a:solidFill>
+                  <a:srgbClr val="201F33"/>
+                </a:solidFill>
+                <a:latin typeface="Calibri"/>
+              </a:rPr>
+              <a:t>Annotated decision-making</a:t>
+            </a:r>
+          </a:p>
+          <a:p>
+            <a:pPr indent="-203200" marL="203200">
+              <a:spcAft>
+                <a:spcPts val="900"/>
+              </a:spcAft>
+              <a:buClr>
+                <a:srgbClr val="C97B9E"/>
+              </a:buClr>
+              <a:buSzPct val="90000"/>
+              <a:buFont typeface="Arial"/>
+              <a:buChar char="–"/>
+            </a:pPr>
+            <a:r>
+              <a:rPr sz="1250" b="0" i="0">
+                <a:solidFill>
+                  <a:srgbClr val="201F33"/>
+                </a:solidFill>
+                <a:latin typeface="Calibri"/>
+              </a:rPr>
+              <a:t>Response to feedback</a:t>
+            </a:r>
+          </a:p>
+          <a:p>
+            <a:pPr indent="-203200" marL="203200">
+              <a:spcAft>
+                <a:spcPts val="900"/>
+              </a:spcAft>
+              <a:buClr>
+                <a:srgbClr val="C97B9E"/>
+              </a:buClr>
+              <a:buSzPct val="90000"/>
+              <a:buFont typeface="Arial"/>
+              <a:buChar char="–"/>
+            </a:pPr>
+            <a:r>
+              <a:rPr sz="1250" b="0" i="0">
+                <a:solidFill>
+                  <a:srgbClr val="201F33"/>
+                </a:solidFill>
+                <a:latin typeface="Calibri"/>
+              </a:rPr>
+              <a:t>Progress toward a resolved final design</a:t>
+            </a:r>
+          </a:p>
+        </p:txBody>
+      </p:sp>
+      <p:sp>
+        <p:nvSpPr>
+          <p:cNvPr id="6" name="Oval 5"/>
+          <p:cNvSpPr/>
+          <p:nvPr/>
+        </p:nvSpPr>
+        <p:spPr>
+          <a:xfrm>
+            <a:off x="5532120" y="3840480"/>
+            <a:ext cx="685800" cy="685800"/>
+          </a:xfrm>
+          <a:prstGeom prst="ellipse">
+            <a:avLst/>
+          </a:prstGeom>
+          <a:solidFill>
+            <a:srgbClr val="D9A441"/>
           </a:solidFill>
           <a:ln>
             <a:noFill/>
@@ -5127,6 +6933,14 @@
 <file path=ppt/slides/slide4.xml><?xml version="1.0" encoding="utf-8"?>
 <p:sld xmlns:a="http://schemas.openxmlformats.org/drawingml/2006/main" xmlns:p="http://schemas.openxmlformats.org/presentationml/2006/main" xmlns:r="http://schemas.openxmlformats.org/officeDocument/2006/relationships">
   <p:cSld>
+    <p:bg>
+      <p:bgPr>
+        <a:solidFill>
+          <a:srgbClr val="F8F6FB"/>
+        </a:solidFill>
+        <a:effectLst/>
+      </p:bgPr>
+    </p:bg>
     <p:spTree>
       <p:nvGrpSpPr>
         <p:cNvPr id="1" name=""/>
@@ -5136,225 +6950,22 @@
       <p:grpSpPr/>
       <p:sp>
         <p:nvSpPr>
-          <p:cNvPr id="2" name="Title 1"/>
-          <p:cNvSpPr>
-            <a:spLocks noGrp="1"/>
-          </p:cNvSpPr>
-          <p:nvPr>
-            <p:ph type="title"/>
-          </p:nvPr>
-        </p:nvSpPr>
-        <p:spPr/>
-        <p:txBody>
-          <a:bodyPr wrap="square"/>
-          <a:lstStyle/>
-          <a:p>
-            <a:r>
-              <a:rPr sz="3200" b="1">
-                <a:solidFill>
-                  <a:srgbClr val="3B2F4A"/>
-                </a:solidFill>
-                <a:latin typeface="Cambria"/>
-              </a:rPr>
-              <a:t>Methods of Development</a:t>
-            </a:r>
-          </a:p>
-        </p:txBody>
-      </p:sp>
-      <p:sp>
-        <p:nvSpPr>
-          <p:cNvPr id="3" name="Content Placeholder 2"/>
-          <p:cNvSpPr>
-            <a:spLocks noGrp="1"/>
-          </p:cNvSpPr>
-          <p:nvPr>
-            <p:ph idx="1"/>
-          </p:nvPr>
-        </p:nvSpPr>
-        <p:spPr/>
-        <p:txBody>
-          <a:bodyPr wrap="square"/>
-          <a:lstStyle/>
-          <a:p>
-            <a:pPr lvl="1">
-              <a:spcAft>
-                <a:spcPts val="1000"/>
-              </a:spcAft>
-            </a:pPr>
-            <a:r>
-              <a:rPr sz="1800" b="0" i="0">
-                <a:solidFill>
-                  <a:srgbClr val="333333"/>
-                </a:solidFill>
-                <a:latin typeface="Calibri"/>
-              </a:rPr>
-              <a:t>Type Trials</a:t>
-            </a:r>
-          </a:p>
-          <a:p>
-            <a:pPr lvl="1">
-              <a:spcAft>
-                <a:spcPts val="1000"/>
-              </a:spcAft>
-            </a:pPr>
-            <a:r>
-              <a:rPr sz="1800" b="0" i="0">
-                <a:solidFill>
-                  <a:srgbClr val="333333"/>
-                </a:solidFill>
-                <a:latin typeface="Calibri"/>
-              </a:rPr>
-              <a:t>Testing typefaces, weights and sizes for the strongest hierarchy and tone.</a:t>
-            </a:r>
-          </a:p>
-          <a:p>
-            <a:pPr lvl="1">
-              <a:spcAft>
-                <a:spcPts val="1000"/>
-              </a:spcAft>
-            </a:pPr>
-            <a:r>
-              <a:rPr sz="1800" b="0" i="0">
-                <a:solidFill>
-                  <a:srgbClr val="333333"/>
-                </a:solidFill>
-                <a:latin typeface="Calibri"/>
-              </a:rPr>
-              <a:t>Colour Trials</a:t>
-            </a:r>
-          </a:p>
-          <a:p>
-            <a:pPr lvl="1">
-              <a:spcAft>
-                <a:spcPts val="1000"/>
-              </a:spcAft>
-            </a:pPr>
-            <a:r>
-              <a:rPr sz="1800" b="0" i="0">
-                <a:solidFill>
-                  <a:srgbClr val="333333"/>
-                </a:solidFill>
-                <a:latin typeface="Calibri"/>
-              </a:rPr>
-              <a:t>Testing palettes for mood, contrast and audience appropriateness.</a:t>
-            </a:r>
-          </a:p>
-          <a:p>
-            <a:pPr lvl="1">
-              <a:spcAft>
-                <a:spcPts val="1000"/>
-              </a:spcAft>
-            </a:pPr>
-            <a:r>
-              <a:rPr sz="1800" b="0" i="0">
-                <a:solidFill>
-                  <a:srgbClr val="333333"/>
-                </a:solidFill>
-                <a:latin typeface="Calibri"/>
-              </a:rPr>
-              <a:t>Material/Scale Trials</a:t>
-            </a:r>
-          </a:p>
-          <a:p>
-            <a:pPr lvl="1">
-              <a:spcAft>
-                <a:spcPts val="1000"/>
-              </a:spcAft>
-            </a:pPr>
-            <a:r>
-              <a:rPr sz="1800" b="0" i="0">
-                <a:solidFill>
-                  <a:srgbClr val="333333"/>
-                </a:solidFill>
-                <a:latin typeface="Calibri"/>
-              </a:rPr>
-              <a:t>Testing physical materials, surface finishes or scale relationships.</a:t>
-            </a:r>
-          </a:p>
-          <a:p>
-            <a:pPr lvl="1">
-              <a:spcAft>
-                <a:spcPts val="1000"/>
-              </a:spcAft>
-            </a:pPr>
-            <a:r>
-              <a:rPr sz="1800" b="0" i="0">
-                <a:solidFill>
-                  <a:srgbClr val="333333"/>
-                </a:solidFill>
-                <a:latin typeface="Calibri"/>
-              </a:rPr>
-              <a:t>Layout Trials</a:t>
-            </a:r>
-          </a:p>
-          <a:p>
-            <a:pPr lvl="1">
-              <a:spcAft>
-                <a:spcPts val="1000"/>
-              </a:spcAft>
-            </a:pPr>
-            <a:r>
-              <a:rPr sz="1800" b="0" i="0">
-                <a:solidFill>
-                  <a:srgbClr val="333333"/>
-                </a:solidFill>
-                <a:latin typeface="Calibri"/>
-              </a:rPr>
-              <a:t>Testing composition, grid structure and hierarchy arrangements.</a:t>
-            </a:r>
-          </a:p>
-          <a:p>
-            <a:pPr>
-              <a:spcAft>
-                <a:spcPts val="1000"/>
-              </a:spcAft>
-            </a:pPr>
-            <a:r>
-              <a:rPr sz="2000" b="0" i="0">
-                <a:solidFill>
-                  <a:srgbClr val="333333"/>
-                </a:solidFill>
-                <a:latin typeface="Calibri"/>
-              </a:rPr>
-              <a:t> Every trial should be </a:t>
-            </a:r>
-            <a:r>
-              <a:rPr sz="2000" b="1" i="0">
-                <a:solidFill>
-                  <a:srgbClr val="3B2F4A"/>
-                </a:solidFill>
-                <a:latin typeface="Calibri"/>
-              </a:rPr>
-              <a:t>annotated</a:t>
-            </a:r>
-            <a:r>
-              <a:rPr sz="2000" b="0" i="0">
-                <a:solidFill>
-                  <a:srgbClr val="333333"/>
-                </a:solidFill>
-                <a:latin typeface="Calibri"/>
-              </a:rPr>
-              <a:t> — explain why an option was chosen or rejected, referencing the brief. </a:t>
-            </a:r>
-          </a:p>
-        </p:txBody>
-      </p:sp>
-      <p:sp>
-        <p:nvSpPr>
-          <p:cNvPr id="4" name="Rectangle 3"/>
+          <p:cNvPr id="2" name="Rounded Rectangle 1"/>
           <p:cNvSpPr/>
           <p:nvPr/>
         </p:nvSpPr>
         <p:spPr>
           <a:xfrm>
-            <a:off x="548640" y="1234440"/>
-            <a:ext cx="1463040" cy="38100"/>
-          </a:xfrm>
-          <a:prstGeom prst="rect">
-            <a:avLst/>
+            <a:off x="685800" y="502920"/>
+            <a:ext cx="3291840" cy="457200"/>
+          </a:xfrm>
+          <a:prstGeom prst="roundRect">
+            <a:avLst>
+              <a:gd name="adj" fmla="val 50000"/>
+            </a:avLst>
           </a:prstGeom>
           <a:solidFill>
-            <a:srgbClr val="3B2F4A"/>
+            <a:srgbClr val="2B2A4A"/>
           </a:solidFill>
           <a:ln>
             <a:noFill/>
@@ -5376,10 +6987,401 @@
           </a:fontRef>
         </p:style>
         <p:txBody>
-          <a:bodyPr rtlCol="0" anchor="ctr"/>
+          <a:bodyPr rtlCol="0" anchor="ctr" wrap="none" lIns="50800" rIns="50800"/>
           <a:lstStyle/>
           <a:p>
             <a:pPr algn="ctr"/>
+            <a:r>
+              <a:rPr sz="1100" b="1">
+                <a:solidFill>
+                  <a:srgbClr val="FFFFFF"/>
+                </a:solidFill>
+                <a:latin typeface="Calibri"/>
+              </a:rPr>
+              <a:t>DEVELOPMENT &amp; RESOLUTION</a:t>
+            </a:r>
+          </a:p>
+        </p:txBody>
+      </p:sp>
+      <p:sp>
+        <p:nvSpPr>
+          <p:cNvPr id="3" name="TextBox 2"/>
+          <p:cNvSpPr txBox="1"/>
+          <p:nvPr/>
+        </p:nvSpPr>
+        <p:spPr>
+          <a:xfrm>
+            <a:off x="685800" y="1051560"/>
+            <a:ext cx="10607040" cy="822960"/>
+          </a:xfrm>
+          <a:prstGeom prst="rect">
+            <a:avLst/>
+          </a:prstGeom>
+          <a:noFill/>
+        </p:spPr>
+        <p:txBody>
+          <a:bodyPr wrap="square" anchor="t">
+            <a:spAutoFit/>
+          </a:bodyPr>
+          <a:lstStyle/>
+          <a:p>
+            <a:pPr algn="l"/>
+            <a:r>
+              <a:rPr sz="2700" b="1" i="0">
+                <a:solidFill>
+                  <a:srgbClr val="201F33"/>
+                </a:solidFill>
+                <a:latin typeface="Cambria"/>
+              </a:rPr>
+              <a:t>Methods of Development</a:t>
+            </a:r>
+          </a:p>
+        </p:txBody>
+      </p:sp>
+      <p:sp>
+        <p:nvSpPr>
+          <p:cNvPr id="4" name="Rounded Rectangle 3"/>
+          <p:cNvSpPr/>
+          <p:nvPr/>
+        </p:nvSpPr>
+        <p:spPr>
+          <a:xfrm>
+            <a:off x="685800" y="1874519"/>
+            <a:ext cx="2500884" cy="1554480"/>
+          </a:xfrm>
+          <a:prstGeom prst="roundRect">
+            <a:avLst>
+              <a:gd name="adj" fmla="val 12000"/>
+            </a:avLst>
+          </a:prstGeom>
+          <a:solidFill>
+            <a:srgbClr val="DFDFE3"/>
+          </a:solidFill>
+          <a:ln>
+            <a:noFill/>
+          </a:ln>
+          <a:effectLst/>
+        </p:spPr>
+        <p:style>
+          <a:lnRef idx="1">
+            <a:schemeClr val="accent1"/>
+          </a:lnRef>
+          <a:fillRef idx="3">
+            <a:schemeClr val="accent1"/>
+          </a:fillRef>
+          <a:effectRef idx="2">
+            <a:schemeClr val="accent1"/>
+          </a:effectRef>
+          <a:fontRef idx="minor">
+            <a:schemeClr val="lt1"/>
+          </a:fontRef>
+        </p:style>
+        <p:txBody>
+          <a:bodyPr rtlCol="0" anchor="ctr" wrap="square" lIns="127000" rIns="127000" tIns="101600" bIns="101600"/>
+          <a:lstStyle/>
+          <a:p>
+            <a:pPr algn="ctr"/>
+            <a:r>
+              <a:rPr b="1" sz="1300">
+                <a:solidFill>
+                  <a:srgbClr val="22213B"/>
+                </a:solidFill>
+                <a:latin typeface="Calibri"/>
+              </a:rPr>
+              <a:t>Type Trials</a:t>
+            </a:r>
+          </a:p>
+          <a:p>
+            <a:r>
+              <a:rPr sz="1050">
+                <a:solidFill>
+                  <a:srgbClr val="201F33"/>
+                </a:solidFill>
+                <a:latin typeface="Calibri"/>
+              </a:rPr>
+              <a:t>Testing typefaces, weights and sizes for the strongest hierarchy and tone.</a:t>
+            </a:r>
+          </a:p>
+        </p:txBody>
+      </p:sp>
+      <p:sp>
+        <p:nvSpPr>
+          <p:cNvPr id="5" name="Rounded Rectangle 4"/>
+          <p:cNvSpPr/>
+          <p:nvPr/>
+        </p:nvSpPr>
+        <p:spPr>
+          <a:xfrm>
+            <a:off x="3387852" y="1874519"/>
+            <a:ext cx="2500884" cy="1554480"/>
+          </a:xfrm>
+          <a:prstGeom prst="roundRect">
+            <a:avLst>
+              <a:gd name="adj" fmla="val 12000"/>
+            </a:avLst>
+          </a:prstGeom>
+          <a:solidFill>
+            <a:srgbClr val="F9F1E2"/>
+          </a:solidFill>
+          <a:ln>
+            <a:noFill/>
+          </a:ln>
+          <a:effectLst/>
+        </p:spPr>
+        <p:style>
+          <a:lnRef idx="1">
+            <a:schemeClr val="accent1"/>
+          </a:lnRef>
+          <a:fillRef idx="3">
+            <a:schemeClr val="accent1"/>
+          </a:fillRef>
+          <a:effectRef idx="2">
+            <a:schemeClr val="accent1"/>
+          </a:effectRef>
+          <a:fontRef idx="minor">
+            <a:schemeClr val="lt1"/>
+          </a:fontRef>
+        </p:style>
+        <p:txBody>
+          <a:bodyPr rtlCol="0" anchor="ctr" wrap="square" lIns="127000" rIns="127000" tIns="101600" bIns="101600"/>
+          <a:lstStyle/>
+          <a:p>
+            <a:pPr algn="ctr"/>
+            <a:r>
+              <a:rPr b="1" sz="1300">
+                <a:solidFill>
+                  <a:srgbClr val="AD8334"/>
+                </a:solidFill>
+                <a:latin typeface="Calibri"/>
+              </a:rPr>
+              <a:t>Colour Trials</a:t>
+            </a:r>
+          </a:p>
+          <a:p>
+            <a:r>
+              <a:rPr sz="1050">
+                <a:solidFill>
+                  <a:srgbClr val="201F33"/>
+                </a:solidFill>
+                <a:latin typeface="Calibri"/>
+              </a:rPr>
+              <a:t>Testing palettes for mood, contrast and audience appropriateness.</a:t>
+            </a:r>
+          </a:p>
+        </p:txBody>
+      </p:sp>
+      <p:sp>
+        <p:nvSpPr>
+          <p:cNvPr id="6" name="Rounded Rectangle 5"/>
+          <p:cNvSpPr/>
+          <p:nvPr/>
+        </p:nvSpPr>
+        <p:spPr>
+          <a:xfrm>
+            <a:off x="6089904" y="1874519"/>
+            <a:ext cx="2500884" cy="1554480"/>
+          </a:xfrm>
+          <a:prstGeom prst="roundRect">
+            <a:avLst>
+              <a:gd name="adj" fmla="val 12000"/>
+            </a:avLst>
+          </a:prstGeom>
+          <a:solidFill>
+            <a:srgbClr val="F6EBF0"/>
+          </a:solidFill>
+          <a:ln>
+            <a:noFill/>
+          </a:ln>
+          <a:effectLst/>
+        </p:spPr>
+        <p:style>
+          <a:lnRef idx="1">
+            <a:schemeClr val="accent1"/>
+          </a:lnRef>
+          <a:fillRef idx="3">
+            <a:schemeClr val="accent1"/>
+          </a:fillRef>
+          <a:effectRef idx="2">
+            <a:schemeClr val="accent1"/>
+          </a:effectRef>
+          <a:fontRef idx="minor">
+            <a:schemeClr val="lt1"/>
+          </a:fontRef>
+        </p:style>
+        <p:txBody>
+          <a:bodyPr rtlCol="0" anchor="ctr" wrap="square" lIns="127000" rIns="127000" tIns="101600" bIns="101600"/>
+          <a:lstStyle/>
+          <a:p>
+            <a:pPr algn="ctr"/>
+            <a:r>
+              <a:rPr b="1" sz="1300">
+                <a:solidFill>
+                  <a:srgbClr val="A0627E"/>
+                </a:solidFill>
+                <a:latin typeface="Calibri"/>
+              </a:rPr>
+              <a:t>Material/Scale Trials</a:t>
+            </a:r>
+          </a:p>
+          <a:p>
+            <a:r>
+              <a:rPr sz="1050">
+                <a:solidFill>
+                  <a:srgbClr val="201F33"/>
+                </a:solidFill>
+                <a:latin typeface="Calibri"/>
+              </a:rPr>
+              <a:t>Testing physical materials, surface finishes or scale relationships.</a:t>
+            </a:r>
+          </a:p>
+        </p:txBody>
+      </p:sp>
+      <p:sp>
+        <p:nvSpPr>
+          <p:cNvPr id="7" name="Rounded Rectangle 6"/>
+          <p:cNvSpPr/>
+          <p:nvPr/>
+        </p:nvSpPr>
+        <p:spPr>
+          <a:xfrm>
+            <a:off x="8791956" y="1874519"/>
+            <a:ext cx="2500884" cy="1554480"/>
+          </a:xfrm>
+          <a:prstGeom prst="roundRect">
+            <a:avLst>
+              <a:gd name="adj" fmla="val 12000"/>
+            </a:avLst>
+          </a:prstGeom>
+          <a:solidFill>
+            <a:srgbClr val="DFDFE3"/>
+          </a:solidFill>
+          <a:ln>
+            <a:noFill/>
+          </a:ln>
+          <a:effectLst/>
+        </p:spPr>
+        <p:style>
+          <a:lnRef idx="1">
+            <a:schemeClr val="accent1"/>
+          </a:lnRef>
+          <a:fillRef idx="3">
+            <a:schemeClr val="accent1"/>
+          </a:fillRef>
+          <a:effectRef idx="2">
+            <a:schemeClr val="accent1"/>
+          </a:effectRef>
+          <a:fontRef idx="minor">
+            <a:schemeClr val="lt1"/>
+          </a:fontRef>
+        </p:style>
+        <p:txBody>
+          <a:bodyPr rtlCol="0" anchor="ctr" wrap="square" lIns="127000" rIns="127000" tIns="101600" bIns="101600"/>
+          <a:lstStyle/>
+          <a:p>
+            <a:pPr algn="ctr"/>
+            <a:r>
+              <a:rPr b="1" sz="1300">
+                <a:solidFill>
+                  <a:srgbClr val="22213B"/>
+                </a:solidFill>
+                <a:latin typeface="Calibri"/>
+              </a:rPr>
+              <a:t>Layout Trials</a:t>
+            </a:r>
+          </a:p>
+          <a:p>
+            <a:r>
+              <a:rPr sz="1050">
+                <a:solidFill>
+                  <a:srgbClr val="201F33"/>
+                </a:solidFill>
+                <a:latin typeface="Calibri"/>
+              </a:rPr>
+              <a:t>Testing composition, grid structure and hierarchy arrangements.</a:t>
+            </a:r>
+          </a:p>
+        </p:txBody>
+      </p:sp>
+      <p:sp>
+        <p:nvSpPr>
+          <p:cNvPr id="8" name="Rounded Rectangle 7"/>
+          <p:cNvSpPr/>
+          <p:nvPr/>
+        </p:nvSpPr>
+        <p:spPr>
+          <a:xfrm>
+            <a:off x="685800" y="3675887"/>
+            <a:ext cx="10607040" cy="2862073"/>
+          </a:xfrm>
+          <a:prstGeom prst="roundRect">
+            <a:avLst>
+              <a:gd name="adj" fmla="val 10000"/>
+            </a:avLst>
+          </a:prstGeom>
+          <a:solidFill>
+            <a:srgbClr val="F9F1E2"/>
+          </a:solidFill>
+          <a:ln>
+            <a:noFill/>
+          </a:ln>
+          <a:effectLst/>
+        </p:spPr>
+        <p:style>
+          <a:lnRef idx="1">
+            <a:schemeClr val="accent1"/>
+          </a:lnRef>
+          <a:fillRef idx="3">
+            <a:schemeClr val="accent1"/>
+          </a:fillRef>
+          <a:effectRef idx="2">
+            <a:schemeClr val="accent1"/>
+          </a:effectRef>
+          <a:fontRef idx="minor">
+            <a:schemeClr val="lt1"/>
+          </a:fontRef>
+        </p:style>
+        <p:txBody>
+          <a:bodyPr rtlCol="0" anchor="ctr" lIns="203200" rIns="203200" tIns="101600" bIns="101600" wrap="square"/>
+          <a:lstStyle/>
+          <a:p>
+            <a:pPr algn="ctr" indent="-203200" marL="203200">
+              <a:spcAft>
+                <a:spcPts val="900"/>
+              </a:spcAft>
+              <a:buClr>
+                <a:srgbClr val="D9A441"/>
+              </a:buClr>
+              <a:buSzPct val="90000"/>
+              <a:buFont typeface="Arial"/>
+              <a:buChar char="●"/>
+            </a:pPr>
+            <a:r>
+              <a:rPr sz="1200" b="0" i="0">
+                <a:solidFill>
+                  <a:srgbClr val="201F33"/>
+                </a:solidFill>
+                <a:latin typeface="Calibri"/>
+              </a:rPr>
+              <a:t> Every trial should be </a:t>
+            </a:r>
+            <a:r>
+              <a:rPr sz="1200" b="1" i="0">
+                <a:solidFill>
+                  <a:srgbClr val="B88B37"/>
+                </a:solidFill>
+                <a:latin typeface="Calibri"/>
+              </a:rPr>
+              <a:t>annotated</a:t>
+            </a:r>
+            <a:r>
+              <a:rPr sz="1200" b="0" i="0">
+                <a:solidFill>
+                  <a:srgbClr val="201F33"/>
+                </a:solidFill>
+                <a:latin typeface="Calibri"/>
+              </a:rPr>
+              <a:t> — explain why an option was chosen or rejected, referencing the brief. </a:t>
+            </a:r>
           </a:p>
         </p:txBody>
       </p:sp>
@@ -5394,6 +7396,14 @@
 <file path=ppt/slides/slide5.xml><?xml version="1.0" encoding="utf-8"?>
 <p:sld xmlns:a="http://schemas.openxmlformats.org/drawingml/2006/main" xmlns:p="http://schemas.openxmlformats.org/presentationml/2006/main" xmlns:r="http://schemas.openxmlformats.org/officeDocument/2006/relationships">
   <p:cSld>
+    <p:bg>
+      <p:bgPr>
+        <a:solidFill>
+          <a:srgbClr val="F8F6FB"/>
+        </a:solidFill>
+        <a:effectLst/>
+      </p:bgPr>
+    </p:bg>
     <p:spTree>
       <p:nvGrpSpPr>
         <p:cNvPr id="1" name=""/>
@@ -5403,220 +7413,373 @@
       <p:grpSpPr/>
       <p:sp>
         <p:nvSpPr>
-          <p:cNvPr id="2" name="Title 1"/>
-          <p:cNvSpPr>
-            <a:spLocks noGrp="1"/>
-          </p:cNvSpPr>
-          <p:nvPr>
-            <p:ph type="title"/>
-          </p:nvPr>
-        </p:nvSpPr>
-        <p:spPr/>
-        <p:txBody>
-          <a:bodyPr wrap="square"/>
-          <a:lstStyle/>
-          <a:p>
-            <a:r>
-              <a:rPr sz="3200" b="1">
-                <a:solidFill>
-                  <a:srgbClr val="3B2F4A"/>
-                </a:solidFill>
-                <a:latin typeface="Cambria"/>
-              </a:rPr>
-              <a:t>Feedback &amp; Testing Against the Brief</a:t>
-            </a:r>
-          </a:p>
-        </p:txBody>
-      </p:sp>
-      <p:sp>
-        <p:nvSpPr>
-          <p:cNvPr id="3" name="Content Placeholder 2"/>
-          <p:cNvSpPr>
-            <a:spLocks noGrp="1"/>
-          </p:cNvSpPr>
-          <p:nvPr>
-            <p:ph idx="1" sz="half"/>
-          </p:nvPr>
-        </p:nvSpPr>
-        <p:spPr/>
-        <p:txBody>
-          <a:bodyPr wrap="square"/>
-          <a:lstStyle/>
-          <a:p>
-            <a:pPr>
-              <a:spcAft>
-                <a:spcPts val="1000"/>
-              </a:spcAft>
-            </a:pPr>
-            <a:r>
-              <a:rPr sz="2000" b="0" i="0">
-                <a:solidFill>
-                  <a:srgbClr val="333333"/>
-                </a:solidFill>
-                <a:latin typeface="Calibri"/>
-              </a:rPr>
-              <a:t>Development is not just personal preference — it is an iterative process of testing ideas against the brief and gathering feedback.</a:t>
-            </a:r>
-          </a:p>
-          <a:p>
-            <a:pPr lvl="1">
-              <a:spcAft>
-                <a:spcPts val="1000"/>
-              </a:spcAft>
-            </a:pPr>
-            <a:r>
-              <a:rPr sz="1800" b="1" i="0">
-                <a:solidFill>
-                  <a:srgbClr val="3B2F4A"/>
-                </a:solidFill>
-                <a:latin typeface="Calibri"/>
-              </a:rPr>
-              <a:t>Peer feedback</a:t>
-            </a:r>
-            <a:r>
-              <a:rPr sz="1800" b="0" i="0">
-                <a:solidFill>
-                  <a:srgbClr val="333333"/>
-                </a:solidFill>
-                <a:latin typeface="Calibri"/>
-              </a:rPr>
-              <a:t> — classmates critique clarity and effectiveness</a:t>
-            </a:r>
-          </a:p>
-          <a:p>
-            <a:pPr lvl="1">
-              <a:spcAft>
-                <a:spcPts val="1000"/>
-              </a:spcAft>
-            </a:pPr>
-            <a:r>
-              <a:rPr sz="1800" b="1" i="0">
-                <a:solidFill>
-                  <a:srgbClr val="3B2F4A"/>
-                </a:solidFill>
-                <a:latin typeface="Calibri"/>
-              </a:rPr>
-              <a:t>Teacher feedback</a:t>
-            </a:r>
-            <a:r>
-              <a:rPr sz="1800" b="0" i="0">
-                <a:solidFill>
-                  <a:srgbClr val="333333"/>
-                </a:solidFill>
-                <a:latin typeface="Calibri"/>
-              </a:rPr>
-              <a:t> — checks against assessment criteria</a:t>
-            </a:r>
-          </a:p>
-          <a:p>
-            <a:pPr lvl="1">
-              <a:spcAft>
-                <a:spcPts val="1000"/>
-              </a:spcAft>
-            </a:pPr>
-            <a:r>
-              <a:rPr sz="1800" b="1" i="0">
-                <a:solidFill>
-                  <a:srgbClr val="3B2F4A"/>
-                </a:solidFill>
-                <a:latin typeface="Calibri"/>
-              </a:rPr>
-              <a:t>Self-testing</a:t>
-            </a:r>
-            <a:r>
-              <a:rPr sz="1800" b="0" i="0">
-                <a:solidFill>
-                  <a:srgbClr val="333333"/>
-                </a:solidFill>
-                <a:latin typeface="Calibri"/>
-              </a:rPr>
-              <a:t> — does it meet the audience, purpose and constraints?</a:t>
-            </a:r>
-          </a:p>
-        </p:txBody>
-      </p:sp>
-      <p:sp>
-        <p:nvSpPr>
-          <p:cNvPr id="4" name="Content Placeholder 3"/>
-          <p:cNvSpPr>
-            <a:spLocks noGrp="1"/>
-          </p:cNvSpPr>
-          <p:nvPr>
-            <p:ph idx="2" sz="half"/>
-          </p:nvPr>
-        </p:nvSpPr>
-        <p:spPr/>
-        <p:txBody>
-          <a:bodyPr wrap="square"/>
-          <a:lstStyle/>
-          <a:p>
-            <a:pPr>
-              <a:spcAft>
-                <a:spcPts val="1000"/>
-              </a:spcAft>
-            </a:pPr>
-            <a:r>
-              <a:rPr sz="2000" b="0" i="0">
-                <a:solidFill>
-                  <a:srgbClr val="333333"/>
-                </a:solidFill>
-                <a:latin typeface="Calibri"/>
-              </a:rPr>
-              <a:t>Exam Tip</a:t>
-            </a:r>
-          </a:p>
-          <a:p>
-            <a:pPr>
-              <a:spcAft>
-                <a:spcPts val="1000"/>
-              </a:spcAft>
-            </a:pPr>
-            <a:r>
-              <a:rPr sz="2000" b="0" i="0">
-                <a:solidFill>
-                  <a:srgbClr val="333333"/>
-                </a:solidFill>
-                <a:latin typeface="Calibri"/>
-              </a:rPr>
-              <a:t>When describing development, always show the </a:t>
-            </a:r>
-            <a:r>
-              <a:rPr sz="2000" b="1" i="0">
-                <a:solidFill>
-                  <a:srgbClr val="3B2F4A"/>
-                </a:solidFill>
-                <a:latin typeface="Calibri"/>
-              </a:rPr>
-              <a:t>before → feedback/testing → after</a:t>
-            </a:r>
-            <a:r>
-              <a:rPr sz="2000" b="0" i="0">
-                <a:solidFill>
-                  <a:srgbClr val="333333"/>
-                </a:solidFill>
-                <a:latin typeface="Calibri"/>
-              </a:rPr>
-              <a:t> sequence, not just the final result.</a:t>
-            </a:r>
-          </a:p>
-        </p:txBody>
-      </p:sp>
-      <p:sp>
-        <p:nvSpPr>
-          <p:cNvPr id="5" name="Rectangle 4"/>
+          <p:cNvPr id="2" name="Rounded Rectangle 1"/>
           <p:cNvSpPr/>
           <p:nvPr/>
         </p:nvSpPr>
         <p:spPr>
           <a:xfrm>
-            <a:off x="548640" y="1234440"/>
-            <a:ext cx="1463040" cy="38100"/>
+            <a:off x="685800" y="502920"/>
+            <a:ext cx="3291840" cy="457200"/>
+          </a:xfrm>
+          <a:prstGeom prst="roundRect">
+            <a:avLst>
+              <a:gd name="adj" fmla="val 50000"/>
+            </a:avLst>
+          </a:prstGeom>
+          <a:solidFill>
+            <a:srgbClr val="2B2A4A"/>
+          </a:solidFill>
+          <a:ln>
+            <a:noFill/>
+          </a:ln>
+          <a:effectLst/>
+        </p:spPr>
+        <p:style>
+          <a:lnRef idx="1">
+            <a:schemeClr val="accent1"/>
+          </a:lnRef>
+          <a:fillRef idx="3">
+            <a:schemeClr val="accent1"/>
+          </a:fillRef>
+          <a:effectRef idx="2">
+            <a:schemeClr val="accent1"/>
+          </a:effectRef>
+          <a:fontRef idx="minor">
+            <a:schemeClr val="lt1"/>
+          </a:fontRef>
+        </p:style>
+        <p:txBody>
+          <a:bodyPr rtlCol="0" anchor="ctr" wrap="none" lIns="50800" rIns="50800"/>
+          <a:lstStyle/>
+          <a:p>
+            <a:pPr algn="ctr"/>
+            <a:r>
+              <a:rPr sz="1100" b="1">
+                <a:solidFill>
+                  <a:srgbClr val="FFFFFF"/>
+                </a:solidFill>
+                <a:latin typeface="Calibri"/>
+              </a:rPr>
+              <a:t>DEVELOPMENT &amp; RESOLUTION</a:t>
+            </a:r>
+          </a:p>
+        </p:txBody>
+      </p:sp>
+      <p:sp>
+        <p:nvSpPr>
+          <p:cNvPr id="3" name="TextBox 2"/>
+          <p:cNvSpPr txBox="1"/>
+          <p:nvPr/>
+        </p:nvSpPr>
+        <p:spPr>
+          <a:xfrm>
+            <a:off x="685800" y="1051560"/>
+            <a:ext cx="10607040" cy="822960"/>
           </a:xfrm>
           <a:prstGeom prst="rect">
             <a:avLst/>
           </a:prstGeom>
+          <a:noFill/>
+        </p:spPr>
+        <p:txBody>
+          <a:bodyPr wrap="square" anchor="t">
+            <a:spAutoFit/>
+          </a:bodyPr>
+          <a:lstStyle/>
+          <a:p>
+            <a:pPr algn="l"/>
+            <a:r>
+              <a:rPr sz="2700" b="1" i="0">
+                <a:solidFill>
+                  <a:srgbClr val="201F33"/>
+                </a:solidFill>
+                <a:latin typeface="Cambria"/>
+              </a:rPr>
+              <a:t>Feedback &amp; Testing Against the Brief</a:t>
+            </a:r>
+          </a:p>
+        </p:txBody>
+      </p:sp>
+      <p:sp>
+        <p:nvSpPr>
+          <p:cNvPr id="4" name="Rounded Rectangle 3"/>
+          <p:cNvSpPr/>
+          <p:nvPr/>
+        </p:nvSpPr>
+        <p:spPr>
+          <a:xfrm>
+            <a:off x="685800" y="1874519"/>
+            <a:ext cx="5166360" cy="4526280"/>
+          </a:xfrm>
+          <a:prstGeom prst="roundRect">
+            <a:avLst>
+              <a:gd name="adj" fmla="val 6000"/>
+            </a:avLst>
+          </a:prstGeom>
           <a:solidFill>
-            <a:srgbClr val="3B2F4A"/>
+            <a:srgbClr val="E5E5E9"/>
+          </a:solidFill>
+          <a:ln>
+            <a:noFill/>
+          </a:ln>
+          <a:effectLst/>
+        </p:spPr>
+        <p:style>
+          <a:lnRef idx="1">
+            <a:schemeClr val="accent1"/>
+          </a:lnRef>
+          <a:fillRef idx="3">
+            <a:schemeClr val="accent1"/>
+          </a:fillRef>
+          <a:effectRef idx="2">
+            <a:schemeClr val="accent1"/>
+          </a:effectRef>
+          <a:fontRef idx="minor">
+            <a:schemeClr val="lt1"/>
+          </a:fontRef>
+        </p:style>
+        <p:txBody>
+          <a:bodyPr rtlCol="0" anchor="ctr" lIns="279400" rIns="279400" tIns="228600" bIns="228600" wrap="square"/>
+          <a:lstStyle/>
+          <a:p>
+            <a:pPr algn="ctr" indent="-203200" marL="203200">
+              <a:spcAft>
+                <a:spcPts val="900"/>
+              </a:spcAft>
+              <a:buClr>
+                <a:srgbClr val="2B2A4A"/>
+              </a:buClr>
+              <a:buSzPct val="90000"/>
+              <a:buFont typeface="Arial"/>
+              <a:buChar char="●"/>
+            </a:pPr>
+            <a:r>
+              <a:rPr sz="1400" b="0" i="0">
+                <a:solidFill>
+                  <a:srgbClr val="201F33"/>
+                </a:solidFill>
+                <a:latin typeface="Calibri"/>
+              </a:rPr>
+              <a:t>Development is not just personal preference — it is an iterative process of testing ideas against the brief and gathering feedback.</a:t>
+            </a:r>
+          </a:p>
+          <a:p>
+            <a:pPr indent="-203200" marL="203200">
+              <a:spcAft>
+                <a:spcPts val="900"/>
+              </a:spcAft>
+              <a:buClr>
+                <a:srgbClr val="2B2A4A"/>
+              </a:buClr>
+              <a:buSzPct val="90000"/>
+              <a:buFont typeface="Arial"/>
+              <a:buChar char="–"/>
+            </a:pPr>
+            <a:r>
+              <a:rPr sz="1250" b="1" i="0">
+                <a:solidFill>
+                  <a:srgbClr val="24233E"/>
+                </a:solidFill>
+                <a:latin typeface="Calibri"/>
+              </a:rPr>
+              <a:t>Peer feedback</a:t>
+            </a:r>
+            <a:r>
+              <a:rPr sz="1250" b="0" i="0">
+                <a:solidFill>
+                  <a:srgbClr val="201F33"/>
+                </a:solidFill>
+                <a:latin typeface="Calibri"/>
+              </a:rPr>
+              <a:t> — classmates critique clarity and effectiveness</a:t>
+            </a:r>
+          </a:p>
+          <a:p>
+            <a:pPr indent="-203200" marL="203200">
+              <a:spcAft>
+                <a:spcPts val="900"/>
+              </a:spcAft>
+              <a:buClr>
+                <a:srgbClr val="2B2A4A"/>
+              </a:buClr>
+              <a:buSzPct val="90000"/>
+              <a:buFont typeface="Arial"/>
+              <a:buChar char="–"/>
+            </a:pPr>
+            <a:r>
+              <a:rPr sz="1250" b="1" i="0">
+                <a:solidFill>
+                  <a:srgbClr val="24233E"/>
+                </a:solidFill>
+                <a:latin typeface="Calibri"/>
+              </a:rPr>
+              <a:t>Teacher feedback</a:t>
+            </a:r>
+            <a:r>
+              <a:rPr sz="1250" b="0" i="0">
+                <a:solidFill>
+                  <a:srgbClr val="201F33"/>
+                </a:solidFill>
+                <a:latin typeface="Calibri"/>
+              </a:rPr>
+              <a:t> — checks against assessment criteria</a:t>
+            </a:r>
+          </a:p>
+          <a:p>
+            <a:pPr indent="-203200" marL="203200">
+              <a:spcAft>
+                <a:spcPts val="900"/>
+              </a:spcAft>
+              <a:buClr>
+                <a:srgbClr val="2B2A4A"/>
+              </a:buClr>
+              <a:buSzPct val="90000"/>
+              <a:buFont typeface="Arial"/>
+              <a:buChar char="–"/>
+            </a:pPr>
+            <a:r>
+              <a:rPr sz="1250" b="1" i="0">
+                <a:solidFill>
+                  <a:srgbClr val="24233E"/>
+                </a:solidFill>
+                <a:latin typeface="Calibri"/>
+              </a:rPr>
+              <a:t>Self-testing</a:t>
+            </a:r>
+            <a:r>
+              <a:rPr sz="1250" b="0" i="0">
+                <a:solidFill>
+                  <a:srgbClr val="201F33"/>
+                </a:solidFill>
+                <a:latin typeface="Calibri"/>
+              </a:rPr>
+              <a:t> — does it meet the audience, purpose and constraints?</a:t>
+            </a:r>
+          </a:p>
+        </p:txBody>
+      </p:sp>
+      <p:sp>
+        <p:nvSpPr>
+          <p:cNvPr id="5" name="Rounded Rectangle 4"/>
+          <p:cNvSpPr/>
+          <p:nvPr/>
+        </p:nvSpPr>
+        <p:spPr>
+          <a:xfrm>
+            <a:off x="6080760" y="1874519"/>
+            <a:ext cx="5166360" cy="4526280"/>
+          </a:xfrm>
+          <a:prstGeom prst="roundRect">
+            <a:avLst>
+              <a:gd name="adj" fmla="val 6000"/>
+            </a:avLst>
+          </a:prstGeom>
+          <a:solidFill>
+            <a:srgbClr val="EFDAE3"/>
+          </a:solidFill>
+          <a:ln>
+            <a:noFill/>
+          </a:ln>
+          <a:effectLst/>
+        </p:spPr>
+        <p:style>
+          <a:lnRef idx="1">
+            <a:schemeClr val="accent1"/>
+          </a:lnRef>
+          <a:fillRef idx="3">
+            <a:schemeClr val="accent1"/>
+          </a:fillRef>
+          <a:effectRef idx="2">
+            <a:schemeClr val="accent1"/>
+          </a:effectRef>
+          <a:fontRef idx="minor">
+            <a:schemeClr val="lt1"/>
+          </a:fontRef>
+        </p:style>
+        <p:txBody>
+          <a:bodyPr rtlCol="0" anchor="ctr" lIns="279400" rIns="279400" tIns="228600" bIns="228600" wrap="square"/>
+          <a:lstStyle/>
+          <a:p>
+            <a:pPr algn="ctr" indent="-203200" marL="203200">
+              <a:spcAft>
+                <a:spcPts val="900"/>
+              </a:spcAft>
+              <a:buClr>
+                <a:srgbClr val="C97B9E"/>
+              </a:buClr>
+              <a:buSzPct val="90000"/>
+              <a:buFont typeface="Arial"/>
+              <a:buChar char="●"/>
+            </a:pPr>
+            <a:r>
+              <a:rPr sz="1400" b="0" i="0">
+                <a:solidFill>
+                  <a:srgbClr val="201F33"/>
+                </a:solidFill>
+                <a:latin typeface="Calibri"/>
+              </a:rPr>
+              <a:t>Exam Tip</a:t>
+            </a:r>
+          </a:p>
+          <a:p>
+            <a:pPr indent="-203200" marL="203200">
+              <a:spcAft>
+                <a:spcPts val="900"/>
+              </a:spcAft>
+              <a:buClr>
+                <a:srgbClr val="C97B9E"/>
+              </a:buClr>
+              <a:buSzPct val="90000"/>
+              <a:buFont typeface="Arial"/>
+              <a:buChar char="●"/>
+            </a:pPr>
+            <a:r>
+              <a:rPr sz="1400" b="0" i="0">
+                <a:solidFill>
+                  <a:srgbClr val="201F33"/>
+                </a:solidFill>
+                <a:latin typeface="Calibri"/>
+              </a:rPr>
+              <a:t>When describing development, always show the </a:t>
+            </a:r>
+            <a:r>
+              <a:rPr sz="1400" b="1" i="0">
+                <a:solidFill>
+                  <a:srgbClr val="AA6886"/>
+                </a:solidFill>
+                <a:latin typeface="Calibri"/>
+              </a:rPr>
+              <a:t>before → feedback/testing → after</a:t>
+            </a:r>
+            <a:r>
+              <a:rPr sz="1400" b="0" i="0">
+                <a:solidFill>
+                  <a:srgbClr val="201F33"/>
+                </a:solidFill>
+                <a:latin typeface="Calibri"/>
+              </a:rPr>
+              <a:t> sequence, not just the final result.</a:t>
+            </a:r>
+          </a:p>
+        </p:txBody>
+      </p:sp>
+      <p:sp>
+        <p:nvSpPr>
+          <p:cNvPr id="6" name="Oval 5"/>
+          <p:cNvSpPr/>
+          <p:nvPr/>
+        </p:nvSpPr>
+        <p:spPr>
+          <a:xfrm>
+            <a:off x="5532120" y="3840480"/>
+            <a:ext cx="685800" cy="685800"/>
+          </a:xfrm>
+          <a:prstGeom prst="ellipse">
+            <a:avLst/>
+          </a:prstGeom>
+          <a:solidFill>
+            <a:srgbClr val="D9A441"/>
           </a:solidFill>
           <a:ln>
             <a:noFill/>
@@ -5656,6 +7819,14 @@
 <file path=ppt/slides/slide6.xml><?xml version="1.0" encoding="utf-8"?>
 <p:sld xmlns:a="http://schemas.openxmlformats.org/drawingml/2006/main" xmlns:p="http://schemas.openxmlformats.org/presentationml/2006/main" xmlns:r="http://schemas.openxmlformats.org/officeDocument/2006/relationships">
   <p:cSld>
+    <p:bg>
+      <p:bgPr>
+        <a:solidFill>
+          <a:srgbClr val="F8F6FB"/>
+        </a:solidFill>
+        <a:effectLst/>
+      </p:bgPr>
+    </p:bg>
     <p:spTree>
       <p:nvGrpSpPr>
         <p:cNvPr id="1" name=""/>
@@ -5665,231 +7836,378 @@
       <p:grpSpPr/>
       <p:sp>
         <p:nvSpPr>
-          <p:cNvPr id="2" name="Title 1"/>
-          <p:cNvSpPr>
-            <a:spLocks noGrp="1"/>
-          </p:cNvSpPr>
-          <p:nvPr>
-            <p:ph type="title"/>
-          </p:nvPr>
-        </p:nvSpPr>
-        <p:spPr/>
-        <p:txBody>
-          <a:bodyPr wrap="square"/>
-          <a:lstStyle/>
-          <a:p>
-            <a:r>
-              <a:rPr sz="3200" b="1">
-                <a:solidFill>
-                  <a:srgbClr val="3B2F4A"/>
-                </a:solidFill>
-                <a:latin typeface="Cambria"/>
-              </a:rPr>
-              <a:t>Selecting a Direction to Resolve</a:t>
-            </a:r>
-          </a:p>
-        </p:txBody>
-      </p:sp>
-      <p:sp>
-        <p:nvSpPr>
-          <p:cNvPr id="3" name="Content Placeholder 2"/>
-          <p:cNvSpPr>
-            <a:spLocks noGrp="1"/>
-          </p:cNvSpPr>
-          <p:nvPr>
-            <p:ph idx="1" sz="half"/>
-          </p:nvPr>
-        </p:nvSpPr>
-        <p:spPr/>
-        <p:txBody>
-          <a:bodyPr wrap="square"/>
-          <a:lstStyle/>
-          <a:p>
-            <a:pPr>
-              <a:spcAft>
-                <a:spcPts val="1000"/>
-              </a:spcAft>
-            </a:pPr>
-            <a:r>
-              <a:rPr sz="2000" b="0" i="0">
-                <a:solidFill>
-                  <a:srgbClr val="333333"/>
-                </a:solidFill>
-                <a:latin typeface="Calibri"/>
-              </a:rPr>
-              <a:t>After development, one concept is chosen to be resolved into the final design. This decision must be justified against the brief.</a:t>
-            </a:r>
-          </a:p>
-          <a:p>
-            <a:pPr lvl="1">
-              <a:spcAft>
-                <a:spcPts val="1000"/>
-              </a:spcAft>
-            </a:pPr>
-            <a:r>
-              <a:rPr sz="1800" b="0" i="0">
-                <a:solidFill>
-                  <a:srgbClr val="333333"/>
-                </a:solidFill>
-                <a:latin typeface="Calibri"/>
-              </a:rPr>
-              <a:t>Which concept best meets the </a:t>
-            </a:r>
-            <a:r>
-              <a:rPr sz="1800" b="1" i="0">
-                <a:solidFill>
-                  <a:srgbClr val="3B2F4A"/>
-                </a:solidFill>
-                <a:latin typeface="Calibri"/>
-              </a:rPr>
-              <a:t>audience &amp; purpose</a:t>
-            </a:r>
-            <a:r>
-              <a:rPr sz="1800" b="0" i="0">
-                <a:solidFill>
-                  <a:srgbClr val="333333"/>
-                </a:solidFill>
-                <a:latin typeface="Calibri"/>
-              </a:rPr>
-              <a:t>?</a:t>
-            </a:r>
-          </a:p>
-          <a:p>
-            <a:pPr lvl="1">
-              <a:spcAft>
-                <a:spcPts val="1000"/>
-              </a:spcAft>
-            </a:pPr>
-            <a:r>
-              <a:rPr sz="1800" b="0" i="0">
-                <a:solidFill>
-                  <a:srgbClr val="333333"/>
-                </a:solidFill>
-                <a:latin typeface="Calibri"/>
-              </a:rPr>
-              <a:t>Which received the strongest </a:t>
-            </a:r>
-            <a:r>
-              <a:rPr sz="1800" b="1" i="0">
-                <a:solidFill>
-                  <a:srgbClr val="3B2F4A"/>
-                </a:solidFill>
-                <a:latin typeface="Calibri"/>
-              </a:rPr>
-              <a:t>feedback</a:t>
-            </a:r>
-            <a:r>
-              <a:rPr sz="1800" b="0" i="0">
-                <a:solidFill>
-                  <a:srgbClr val="333333"/>
-                </a:solidFill>
-                <a:latin typeface="Calibri"/>
-              </a:rPr>
-              <a:t>?</a:t>
-            </a:r>
-          </a:p>
-          <a:p>
-            <a:pPr lvl="1">
-              <a:spcAft>
-                <a:spcPts val="1000"/>
-              </a:spcAft>
-            </a:pPr>
-            <a:r>
-              <a:rPr sz="1800" b="0" i="0">
-                <a:solidFill>
-                  <a:srgbClr val="333333"/>
-                </a:solidFill>
-                <a:latin typeface="Calibri"/>
-              </a:rPr>
-              <a:t>Which is most </a:t>
-            </a:r>
-            <a:r>
-              <a:rPr sz="1800" b="1" i="0">
-                <a:solidFill>
-                  <a:srgbClr val="3B2F4A"/>
-                </a:solidFill>
-                <a:latin typeface="Calibri"/>
-              </a:rPr>
-              <a:t>achievable</a:t>
-            </a:r>
-            <a:r>
-              <a:rPr sz="1800" b="0" i="0">
-                <a:solidFill>
-                  <a:srgbClr val="333333"/>
-                </a:solidFill>
-                <a:latin typeface="Calibri"/>
-              </a:rPr>
-              <a:t> within constraints (time, materials)?</a:t>
-            </a:r>
-          </a:p>
-        </p:txBody>
-      </p:sp>
-      <p:sp>
-        <p:nvSpPr>
-          <p:cNvPr id="4" name="Content Placeholder 3"/>
-          <p:cNvSpPr>
-            <a:spLocks noGrp="1"/>
-          </p:cNvSpPr>
-          <p:nvPr>
-            <p:ph idx="2" sz="half"/>
-          </p:nvPr>
-        </p:nvSpPr>
-        <p:spPr/>
-        <p:txBody>
-          <a:bodyPr wrap="square"/>
-          <a:lstStyle/>
-          <a:p>
-            <a:pPr>
-              <a:spcAft>
-                <a:spcPts val="1000"/>
-              </a:spcAft>
-            </a:pPr>
-            <a:r>
-              <a:rPr sz="2000" b="0" i="0">
-                <a:solidFill>
-                  <a:srgbClr val="333333"/>
-                </a:solidFill>
-                <a:latin typeface="Calibri"/>
-              </a:rPr>
-              <a:t>The rejected concept is not wasted — it still demonstrates </a:t>
-            </a:r>
-            <a:r>
-              <a:rPr sz="2000" b="1" i="0">
-                <a:solidFill>
-                  <a:srgbClr val="3B2F4A"/>
-                </a:solidFill>
-                <a:latin typeface="Calibri"/>
-              </a:rPr>
-              <a:t>breadth of development</a:t>
-            </a:r>
-            <a:r>
-              <a:rPr sz="2000" b="0" i="0">
-                <a:solidFill>
-                  <a:srgbClr val="333333"/>
-                </a:solidFill>
-                <a:latin typeface="Calibri"/>
-              </a:rPr>
-              <a:t> and is assessed as part of your folio.</a:t>
-            </a:r>
-          </a:p>
-        </p:txBody>
-      </p:sp>
-      <p:sp>
-        <p:nvSpPr>
-          <p:cNvPr id="5" name="Rectangle 4"/>
+          <p:cNvPr id="2" name="Rounded Rectangle 1"/>
           <p:cNvSpPr/>
           <p:nvPr/>
         </p:nvSpPr>
         <p:spPr>
           <a:xfrm>
-            <a:off x="548640" y="1234440"/>
-            <a:ext cx="1463040" cy="38100"/>
+            <a:off x="685800" y="502920"/>
+            <a:ext cx="3291840" cy="457200"/>
+          </a:xfrm>
+          <a:prstGeom prst="roundRect">
+            <a:avLst>
+              <a:gd name="adj" fmla="val 50000"/>
+            </a:avLst>
+          </a:prstGeom>
+          <a:solidFill>
+            <a:srgbClr val="2B2A4A"/>
+          </a:solidFill>
+          <a:ln>
+            <a:noFill/>
+          </a:ln>
+          <a:effectLst/>
+        </p:spPr>
+        <p:style>
+          <a:lnRef idx="1">
+            <a:schemeClr val="accent1"/>
+          </a:lnRef>
+          <a:fillRef idx="3">
+            <a:schemeClr val="accent1"/>
+          </a:fillRef>
+          <a:effectRef idx="2">
+            <a:schemeClr val="accent1"/>
+          </a:effectRef>
+          <a:fontRef idx="minor">
+            <a:schemeClr val="lt1"/>
+          </a:fontRef>
+        </p:style>
+        <p:txBody>
+          <a:bodyPr rtlCol="0" anchor="ctr" wrap="none" lIns="50800" rIns="50800"/>
+          <a:lstStyle/>
+          <a:p>
+            <a:pPr algn="ctr"/>
+            <a:r>
+              <a:rPr sz="1100" b="1">
+                <a:solidFill>
+                  <a:srgbClr val="FFFFFF"/>
+                </a:solidFill>
+                <a:latin typeface="Calibri"/>
+              </a:rPr>
+              <a:t>DEVELOPMENT &amp; RESOLUTION</a:t>
+            </a:r>
+          </a:p>
+        </p:txBody>
+      </p:sp>
+      <p:sp>
+        <p:nvSpPr>
+          <p:cNvPr id="3" name="TextBox 2"/>
+          <p:cNvSpPr txBox="1"/>
+          <p:nvPr/>
+        </p:nvSpPr>
+        <p:spPr>
+          <a:xfrm>
+            <a:off x="685800" y="1051560"/>
+            <a:ext cx="10607040" cy="822960"/>
           </a:xfrm>
           <a:prstGeom prst="rect">
             <a:avLst/>
           </a:prstGeom>
+          <a:noFill/>
+        </p:spPr>
+        <p:txBody>
+          <a:bodyPr wrap="square" anchor="t">
+            <a:spAutoFit/>
+          </a:bodyPr>
+          <a:lstStyle/>
+          <a:p>
+            <a:pPr algn="l"/>
+            <a:r>
+              <a:rPr sz="2700" b="1" i="0">
+                <a:solidFill>
+                  <a:srgbClr val="201F33"/>
+                </a:solidFill>
+                <a:latin typeface="Cambria"/>
+              </a:rPr>
+              <a:t>Selecting a Direction to Resolve</a:t>
+            </a:r>
+          </a:p>
+        </p:txBody>
+      </p:sp>
+      <p:sp>
+        <p:nvSpPr>
+          <p:cNvPr id="4" name="Rounded Rectangle 3"/>
+          <p:cNvSpPr/>
+          <p:nvPr/>
+        </p:nvSpPr>
+        <p:spPr>
+          <a:xfrm>
+            <a:off x="685800" y="1874519"/>
+            <a:ext cx="5166360" cy="4526280"/>
+          </a:xfrm>
+          <a:prstGeom prst="roundRect">
+            <a:avLst>
+              <a:gd name="adj" fmla="val 6000"/>
+            </a:avLst>
+          </a:prstGeom>
           <a:solidFill>
-            <a:srgbClr val="3B2F4A"/>
+            <a:srgbClr val="E5E5E9"/>
+          </a:solidFill>
+          <a:ln>
+            <a:noFill/>
+          </a:ln>
+          <a:effectLst/>
+        </p:spPr>
+        <p:style>
+          <a:lnRef idx="1">
+            <a:schemeClr val="accent1"/>
+          </a:lnRef>
+          <a:fillRef idx="3">
+            <a:schemeClr val="accent1"/>
+          </a:fillRef>
+          <a:effectRef idx="2">
+            <a:schemeClr val="accent1"/>
+          </a:effectRef>
+          <a:fontRef idx="minor">
+            <a:schemeClr val="lt1"/>
+          </a:fontRef>
+        </p:style>
+        <p:txBody>
+          <a:bodyPr rtlCol="0" anchor="ctr" lIns="279400" rIns="279400" tIns="228600" bIns="228600" wrap="square"/>
+          <a:lstStyle/>
+          <a:p>
+            <a:pPr algn="ctr" indent="-203200" marL="203200">
+              <a:spcAft>
+                <a:spcPts val="900"/>
+              </a:spcAft>
+              <a:buClr>
+                <a:srgbClr val="2B2A4A"/>
+              </a:buClr>
+              <a:buSzPct val="90000"/>
+              <a:buFont typeface="Arial"/>
+              <a:buChar char="●"/>
+            </a:pPr>
+            <a:r>
+              <a:rPr sz="1400" b="0" i="0">
+                <a:solidFill>
+                  <a:srgbClr val="201F33"/>
+                </a:solidFill>
+                <a:latin typeface="Calibri"/>
+              </a:rPr>
+              <a:t>After development, one concept is chosen to be resolved into the final design. This decision must be justified against the brief.</a:t>
+            </a:r>
+          </a:p>
+          <a:p>
+            <a:pPr indent="-203200" marL="203200">
+              <a:spcAft>
+                <a:spcPts val="900"/>
+              </a:spcAft>
+              <a:buClr>
+                <a:srgbClr val="2B2A4A"/>
+              </a:buClr>
+              <a:buSzPct val="90000"/>
+              <a:buFont typeface="Arial"/>
+              <a:buChar char="–"/>
+            </a:pPr>
+            <a:r>
+              <a:rPr sz="1250" b="0" i="0">
+                <a:solidFill>
+                  <a:srgbClr val="201F33"/>
+                </a:solidFill>
+                <a:latin typeface="Calibri"/>
+              </a:rPr>
+              <a:t>Which concept best meets the </a:t>
+            </a:r>
+            <a:r>
+              <a:rPr sz="1250" b="1" i="0">
+                <a:solidFill>
+                  <a:srgbClr val="24233E"/>
+                </a:solidFill>
+                <a:latin typeface="Calibri"/>
+              </a:rPr>
+              <a:t>audience &amp; purpose</a:t>
+            </a:r>
+            <a:r>
+              <a:rPr sz="1250" b="0" i="0">
+                <a:solidFill>
+                  <a:srgbClr val="201F33"/>
+                </a:solidFill>
+                <a:latin typeface="Calibri"/>
+              </a:rPr>
+              <a:t>?</a:t>
+            </a:r>
+          </a:p>
+          <a:p>
+            <a:pPr indent="-203200" marL="203200">
+              <a:spcAft>
+                <a:spcPts val="900"/>
+              </a:spcAft>
+              <a:buClr>
+                <a:srgbClr val="2B2A4A"/>
+              </a:buClr>
+              <a:buSzPct val="90000"/>
+              <a:buFont typeface="Arial"/>
+              <a:buChar char="–"/>
+            </a:pPr>
+            <a:r>
+              <a:rPr sz="1250" b="0" i="0">
+                <a:solidFill>
+                  <a:srgbClr val="201F33"/>
+                </a:solidFill>
+                <a:latin typeface="Calibri"/>
+              </a:rPr>
+              <a:t>Which received the strongest </a:t>
+            </a:r>
+            <a:r>
+              <a:rPr sz="1250" b="1" i="0">
+                <a:solidFill>
+                  <a:srgbClr val="24233E"/>
+                </a:solidFill>
+                <a:latin typeface="Calibri"/>
+              </a:rPr>
+              <a:t>feedback</a:t>
+            </a:r>
+            <a:r>
+              <a:rPr sz="1250" b="0" i="0">
+                <a:solidFill>
+                  <a:srgbClr val="201F33"/>
+                </a:solidFill>
+                <a:latin typeface="Calibri"/>
+              </a:rPr>
+              <a:t>?</a:t>
+            </a:r>
+          </a:p>
+          <a:p>
+            <a:pPr indent="-203200" marL="203200">
+              <a:spcAft>
+                <a:spcPts val="900"/>
+              </a:spcAft>
+              <a:buClr>
+                <a:srgbClr val="2B2A4A"/>
+              </a:buClr>
+              <a:buSzPct val="90000"/>
+              <a:buFont typeface="Arial"/>
+              <a:buChar char="–"/>
+            </a:pPr>
+            <a:r>
+              <a:rPr sz="1250" b="0" i="0">
+                <a:solidFill>
+                  <a:srgbClr val="201F33"/>
+                </a:solidFill>
+                <a:latin typeface="Calibri"/>
+              </a:rPr>
+              <a:t>Which is most </a:t>
+            </a:r>
+            <a:r>
+              <a:rPr sz="1250" b="1" i="0">
+                <a:solidFill>
+                  <a:srgbClr val="24233E"/>
+                </a:solidFill>
+                <a:latin typeface="Calibri"/>
+              </a:rPr>
+              <a:t>achievable</a:t>
+            </a:r>
+            <a:r>
+              <a:rPr sz="1250" b="0" i="0">
+                <a:solidFill>
+                  <a:srgbClr val="201F33"/>
+                </a:solidFill>
+                <a:latin typeface="Calibri"/>
+              </a:rPr>
+              <a:t> within constraints (time, materials)?</a:t>
+            </a:r>
+          </a:p>
+        </p:txBody>
+      </p:sp>
+      <p:sp>
+        <p:nvSpPr>
+          <p:cNvPr id="5" name="Rounded Rectangle 4"/>
+          <p:cNvSpPr/>
+          <p:nvPr/>
+        </p:nvSpPr>
+        <p:spPr>
+          <a:xfrm>
+            <a:off x="6080760" y="1874519"/>
+            <a:ext cx="5166360" cy="4526280"/>
+          </a:xfrm>
+          <a:prstGeom prst="roundRect">
+            <a:avLst>
+              <a:gd name="adj" fmla="val 6000"/>
+            </a:avLst>
+          </a:prstGeom>
+          <a:solidFill>
+            <a:srgbClr val="EFDAE3"/>
+          </a:solidFill>
+          <a:ln>
+            <a:noFill/>
+          </a:ln>
+          <a:effectLst/>
+        </p:spPr>
+        <p:style>
+          <a:lnRef idx="1">
+            <a:schemeClr val="accent1"/>
+          </a:lnRef>
+          <a:fillRef idx="3">
+            <a:schemeClr val="accent1"/>
+          </a:fillRef>
+          <a:effectRef idx="2">
+            <a:schemeClr val="accent1"/>
+          </a:effectRef>
+          <a:fontRef idx="minor">
+            <a:schemeClr val="lt1"/>
+          </a:fontRef>
+        </p:style>
+        <p:txBody>
+          <a:bodyPr rtlCol="0" anchor="ctr" lIns="279400" rIns="279400" tIns="228600" bIns="228600" wrap="square"/>
+          <a:lstStyle/>
+          <a:p>
+            <a:pPr algn="ctr" indent="-203200" marL="203200">
+              <a:spcAft>
+                <a:spcPts val="900"/>
+              </a:spcAft>
+              <a:buClr>
+                <a:srgbClr val="C97B9E"/>
+              </a:buClr>
+              <a:buSzPct val="90000"/>
+              <a:buFont typeface="Arial"/>
+              <a:buChar char="●"/>
+            </a:pPr>
+            <a:r>
+              <a:rPr sz="1400" b="0" i="0">
+                <a:solidFill>
+                  <a:srgbClr val="201F33"/>
+                </a:solidFill>
+                <a:latin typeface="Calibri"/>
+              </a:rPr>
+              <a:t>The rejected concept is not wasted — it still demonstrates </a:t>
+            </a:r>
+            <a:r>
+              <a:rPr sz="1400" b="1" i="0">
+                <a:solidFill>
+                  <a:srgbClr val="AA6886"/>
+                </a:solidFill>
+                <a:latin typeface="Calibri"/>
+              </a:rPr>
+              <a:t>breadth of development</a:t>
+            </a:r>
+            <a:r>
+              <a:rPr sz="1400" b="0" i="0">
+                <a:solidFill>
+                  <a:srgbClr val="201F33"/>
+                </a:solidFill>
+                <a:latin typeface="Calibri"/>
+              </a:rPr>
+              <a:t> and is assessed as part of your folio.</a:t>
+            </a:r>
+          </a:p>
+        </p:txBody>
+      </p:sp>
+      <p:sp>
+        <p:nvSpPr>
+          <p:cNvPr id="6" name="Oval 5"/>
+          <p:cNvSpPr/>
+          <p:nvPr/>
+        </p:nvSpPr>
+        <p:spPr>
+          <a:xfrm>
+            <a:off x="5532120" y="3840480"/>
+            <a:ext cx="685800" cy="685800"/>
+          </a:xfrm>
+          <a:prstGeom prst="ellipse">
+            <a:avLst/>
+          </a:prstGeom>
+          <a:solidFill>
+            <a:srgbClr val="D9A441"/>
           </a:solidFill>
           <a:ln>
             <a:noFill/>
@@ -5929,6 +8247,14 @@
 <file path=ppt/slides/slide7.xml><?xml version="1.0" encoding="utf-8"?>
 <p:sld xmlns:a="http://schemas.openxmlformats.org/drawingml/2006/main" xmlns:p="http://schemas.openxmlformats.org/presentationml/2006/main" xmlns:r="http://schemas.openxmlformats.org/officeDocument/2006/relationships">
   <p:cSld>
+    <p:bg>
+      <p:bgPr>
+        <a:solidFill>
+          <a:srgbClr val="F8F6FB"/>
+        </a:solidFill>
+        <a:effectLst/>
+      </p:bgPr>
+    </p:bg>
     <p:spTree>
       <p:nvGrpSpPr>
         <p:cNvPr id="1" name=""/>
@@ -5938,207 +8264,367 @@
       <p:grpSpPr/>
       <p:sp>
         <p:nvSpPr>
-          <p:cNvPr id="2" name="Title 1"/>
-          <p:cNvSpPr>
-            <a:spLocks noGrp="1"/>
-          </p:cNvSpPr>
-          <p:nvPr>
-            <p:ph type="title"/>
-          </p:nvPr>
-        </p:nvSpPr>
-        <p:spPr/>
-        <p:txBody>
-          <a:bodyPr wrap="square"/>
-          <a:lstStyle/>
-          <a:p>
-            <a:r>
-              <a:rPr sz="3200" b="1">
-                <a:solidFill>
-                  <a:srgbClr val="3B2F4A"/>
-                </a:solidFill>
-                <a:latin typeface="Cambria"/>
-              </a:rPr>
-              <a:t>Answering Development Questions</a:t>
-            </a:r>
-          </a:p>
-        </p:txBody>
-      </p:sp>
-      <p:sp>
-        <p:nvSpPr>
-          <p:cNvPr id="3" name="Content Placeholder 2"/>
-          <p:cNvSpPr>
-            <a:spLocks noGrp="1"/>
-          </p:cNvSpPr>
-          <p:nvPr>
-            <p:ph idx="1" sz="half"/>
-          </p:nvPr>
-        </p:nvSpPr>
-        <p:spPr/>
-        <p:txBody>
-          <a:bodyPr wrap="square"/>
-          <a:lstStyle/>
-          <a:p>
-            <a:pPr lvl="1">
-              <a:spcAft>
-                <a:spcPts val="1000"/>
-              </a:spcAft>
-            </a:pPr>
-            <a:r>
-              <a:rPr sz="1800" b="0" i="0">
-                <a:solidFill>
-                  <a:srgbClr val="333333"/>
-                </a:solidFill>
-                <a:latin typeface="Calibri"/>
-              </a:rPr>
-              <a:t>Method → Change → Justification</a:t>
-            </a:r>
-          </a:p>
-          <a:p>
-            <a:pPr lvl="1">
-              <a:spcAft>
-                <a:spcPts val="1000"/>
-              </a:spcAft>
-            </a:pPr>
-            <a:r>
-              <a:rPr sz="1800" b="0" i="0">
-                <a:solidFill>
-                  <a:srgbClr val="333333"/>
-                </a:solidFill>
-                <a:latin typeface="Calibri"/>
-              </a:rPr>
-              <a:t>1. Name the development method used</a:t>
-            </a:r>
-          </a:p>
-          <a:p>
-            <a:pPr lvl="1">
-              <a:spcAft>
-                <a:spcPts val="1000"/>
-              </a:spcAft>
-            </a:pPr>
-            <a:r>
-              <a:rPr sz="1800" b="0" i="0">
-                <a:solidFill>
-                  <a:srgbClr val="333333"/>
-                </a:solidFill>
-                <a:latin typeface="Calibri"/>
-              </a:rPr>
-              <a:t>2. Describe what changed between versions</a:t>
-            </a:r>
-          </a:p>
-          <a:p>
-            <a:pPr lvl="1">
-              <a:spcAft>
-                <a:spcPts val="1000"/>
-              </a:spcAft>
-            </a:pPr>
-            <a:r>
-              <a:rPr sz="1800" b="0" i="0">
-                <a:solidFill>
-                  <a:srgbClr val="333333"/>
-                </a:solidFill>
-                <a:latin typeface="Calibri"/>
-              </a:rPr>
-              <a:t>3. Justify the change against the brief</a:t>
-            </a:r>
-          </a:p>
-        </p:txBody>
-      </p:sp>
-      <p:sp>
-        <p:nvSpPr>
-          <p:cNvPr id="4" name="Content Placeholder 3"/>
-          <p:cNvSpPr>
-            <a:spLocks noGrp="1"/>
-          </p:cNvSpPr>
-          <p:nvPr>
-            <p:ph idx="2" sz="half"/>
-          </p:nvPr>
-        </p:nvSpPr>
-        <p:spPr/>
-        <p:txBody>
-          <a:bodyPr wrap="square"/>
-          <a:lstStyle/>
-          <a:p>
-            <a:pPr>
-              <a:spcAft>
-                <a:spcPts val="1000"/>
-              </a:spcAft>
-            </a:pPr>
-            <a:r>
-              <a:rPr sz="1800" b="0" i="1">
-                <a:solidFill>
-                  <a:srgbClr val="333333"/>
-                </a:solidFill>
-                <a:latin typeface="Calibri"/>
-              </a:rPr>
-              <a:t>Sentence Starters</a:t>
-            </a:r>
-          </a:p>
-          <a:p>
-            <a:pPr lvl="1">
-              <a:spcAft>
-                <a:spcPts val="1000"/>
-              </a:spcAft>
-            </a:pPr>
-            <a:r>
-              <a:rPr sz="1800" b="0" i="0">
-                <a:solidFill>
-                  <a:srgbClr val="333333"/>
-                </a:solidFill>
-                <a:latin typeface="Calibri"/>
-              </a:rPr>
-              <a:t>"A colour trial was conducted to test..."</a:t>
-            </a:r>
-          </a:p>
-          <a:p>
-            <a:pPr lvl="1">
-              <a:spcAft>
-                <a:spcPts val="1000"/>
-              </a:spcAft>
-            </a:pPr>
-            <a:r>
-              <a:rPr sz="1800" b="0" i="0">
-                <a:solidFill>
-                  <a:srgbClr val="333333"/>
-                </a:solidFill>
-                <a:latin typeface="Calibri"/>
-              </a:rPr>
-              <a:t>"Following feedback, the [feature] was changed to..."</a:t>
-            </a:r>
-          </a:p>
-          <a:p>
-            <a:pPr lvl="1">
-              <a:spcAft>
-                <a:spcPts val="1000"/>
-              </a:spcAft>
-            </a:pPr>
-            <a:r>
-              <a:rPr sz="1800" b="0" i="0">
-                <a:solidFill>
-                  <a:srgbClr val="333333"/>
-                </a:solidFill>
-                <a:latin typeface="Calibri"/>
-              </a:rPr>
-              <a:t>"This concept was selected for resolution because..."</a:t>
-            </a:r>
-          </a:p>
-        </p:txBody>
-      </p:sp>
-      <p:sp>
-        <p:nvSpPr>
-          <p:cNvPr id="5" name="Rectangle 4"/>
+          <p:cNvPr id="2" name="Rounded Rectangle 1"/>
           <p:cNvSpPr/>
           <p:nvPr/>
         </p:nvSpPr>
         <p:spPr>
           <a:xfrm>
-            <a:off x="548640" y="1234440"/>
-            <a:ext cx="1463040" cy="38100"/>
+            <a:off x="685800" y="502920"/>
+            <a:ext cx="3291840" cy="457200"/>
+          </a:xfrm>
+          <a:prstGeom prst="roundRect">
+            <a:avLst>
+              <a:gd name="adj" fmla="val 50000"/>
+            </a:avLst>
+          </a:prstGeom>
+          <a:solidFill>
+            <a:srgbClr val="2B2A4A"/>
+          </a:solidFill>
+          <a:ln>
+            <a:noFill/>
+          </a:ln>
+          <a:effectLst/>
+        </p:spPr>
+        <p:style>
+          <a:lnRef idx="1">
+            <a:schemeClr val="accent1"/>
+          </a:lnRef>
+          <a:fillRef idx="3">
+            <a:schemeClr val="accent1"/>
+          </a:fillRef>
+          <a:effectRef idx="2">
+            <a:schemeClr val="accent1"/>
+          </a:effectRef>
+          <a:fontRef idx="minor">
+            <a:schemeClr val="lt1"/>
+          </a:fontRef>
+        </p:style>
+        <p:txBody>
+          <a:bodyPr rtlCol="0" anchor="ctr" wrap="none" lIns="50800" rIns="50800"/>
+          <a:lstStyle/>
+          <a:p>
+            <a:pPr algn="ctr"/>
+            <a:r>
+              <a:rPr sz="1100" b="1">
+                <a:solidFill>
+                  <a:srgbClr val="FFFFFF"/>
+                </a:solidFill>
+                <a:latin typeface="Calibri"/>
+              </a:rPr>
+              <a:t>DEVELOPMENT &amp; RESOLUTION</a:t>
+            </a:r>
+          </a:p>
+        </p:txBody>
+      </p:sp>
+      <p:sp>
+        <p:nvSpPr>
+          <p:cNvPr id="3" name="TextBox 2"/>
+          <p:cNvSpPr txBox="1"/>
+          <p:nvPr/>
+        </p:nvSpPr>
+        <p:spPr>
+          <a:xfrm>
+            <a:off x="685800" y="1051560"/>
+            <a:ext cx="10607040" cy="822960"/>
           </a:xfrm>
           <a:prstGeom prst="rect">
             <a:avLst/>
           </a:prstGeom>
+          <a:noFill/>
+        </p:spPr>
+        <p:txBody>
+          <a:bodyPr wrap="square" anchor="t">
+            <a:spAutoFit/>
+          </a:bodyPr>
+          <a:lstStyle/>
+          <a:p>
+            <a:pPr algn="l"/>
+            <a:r>
+              <a:rPr sz="2700" b="1" i="0">
+                <a:solidFill>
+                  <a:srgbClr val="201F33"/>
+                </a:solidFill>
+                <a:latin typeface="Cambria"/>
+              </a:rPr>
+              <a:t>Answering Development Questions</a:t>
+            </a:r>
+          </a:p>
+        </p:txBody>
+      </p:sp>
+      <p:sp>
+        <p:nvSpPr>
+          <p:cNvPr id="4" name="Rounded Rectangle 3"/>
+          <p:cNvSpPr/>
+          <p:nvPr/>
+        </p:nvSpPr>
+        <p:spPr>
+          <a:xfrm>
+            <a:off x="685800" y="1874519"/>
+            <a:ext cx="5166360" cy="4526280"/>
+          </a:xfrm>
+          <a:prstGeom prst="roundRect">
+            <a:avLst>
+              <a:gd name="adj" fmla="val 6000"/>
+            </a:avLst>
+          </a:prstGeom>
           <a:solidFill>
-            <a:srgbClr val="3B2F4A"/>
+            <a:srgbClr val="E5E5E9"/>
+          </a:solidFill>
+          <a:ln>
+            <a:noFill/>
+          </a:ln>
+          <a:effectLst/>
+        </p:spPr>
+        <p:style>
+          <a:lnRef idx="1">
+            <a:schemeClr val="accent1"/>
+          </a:lnRef>
+          <a:fillRef idx="3">
+            <a:schemeClr val="accent1"/>
+          </a:fillRef>
+          <a:effectRef idx="2">
+            <a:schemeClr val="accent1"/>
+          </a:effectRef>
+          <a:fontRef idx="minor">
+            <a:schemeClr val="lt1"/>
+          </a:fontRef>
+        </p:style>
+        <p:txBody>
+          <a:bodyPr rtlCol="0" anchor="ctr" lIns="279400" rIns="279400" tIns="228600" bIns="228600" wrap="square"/>
+          <a:lstStyle/>
+          <a:p>
+            <a:pPr algn="ctr" indent="-203200" marL="203200">
+              <a:spcAft>
+                <a:spcPts val="900"/>
+              </a:spcAft>
+              <a:buClr>
+                <a:srgbClr val="2B2A4A"/>
+              </a:buClr>
+              <a:buSzPct val="90000"/>
+              <a:buFont typeface="Arial"/>
+              <a:buChar char="–"/>
+            </a:pPr>
+            <a:r>
+              <a:rPr sz="1250" b="0" i="0">
+                <a:solidFill>
+                  <a:srgbClr val="201F33"/>
+                </a:solidFill>
+                <a:latin typeface="Calibri"/>
+              </a:rPr>
+              <a:t>Method → Change → Justification</a:t>
+            </a:r>
+          </a:p>
+          <a:p>
+            <a:pPr indent="-203200" marL="203200">
+              <a:spcAft>
+                <a:spcPts val="900"/>
+              </a:spcAft>
+              <a:buClr>
+                <a:srgbClr val="2B2A4A"/>
+              </a:buClr>
+              <a:buSzPct val="90000"/>
+              <a:buFont typeface="Arial"/>
+              <a:buChar char="–"/>
+            </a:pPr>
+            <a:r>
+              <a:rPr sz="1250" b="0" i="0">
+                <a:solidFill>
+                  <a:srgbClr val="201F33"/>
+                </a:solidFill>
+                <a:latin typeface="Calibri"/>
+              </a:rPr>
+              <a:t>1. Name the development method used</a:t>
+            </a:r>
+          </a:p>
+          <a:p>
+            <a:pPr indent="-203200" marL="203200">
+              <a:spcAft>
+                <a:spcPts val="900"/>
+              </a:spcAft>
+              <a:buClr>
+                <a:srgbClr val="2B2A4A"/>
+              </a:buClr>
+              <a:buSzPct val="90000"/>
+              <a:buFont typeface="Arial"/>
+              <a:buChar char="–"/>
+            </a:pPr>
+            <a:r>
+              <a:rPr sz="1250" b="0" i="0">
+                <a:solidFill>
+                  <a:srgbClr val="201F33"/>
+                </a:solidFill>
+                <a:latin typeface="Calibri"/>
+              </a:rPr>
+              <a:t>2. Describe what changed between versions</a:t>
+            </a:r>
+          </a:p>
+          <a:p>
+            <a:pPr indent="-203200" marL="203200">
+              <a:spcAft>
+                <a:spcPts val="900"/>
+              </a:spcAft>
+              <a:buClr>
+                <a:srgbClr val="2B2A4A"/>
+              </a:buClr>
+              <a:buSzPct val="90000"/>
+              <a:buFont typeface="Arial"/>
+              <a:buChar char="–"/>
+            </a:pPr>
+            <a:r>
+              <a:rPr sz="1250" b="0" i="0">
+                <a:solidFill>
+                  <a:srgbClr val="201F33"/>
+                </a:solidFill>
+                <a:latin typeface="Calibri"/>
+              </a:rPr>
+              <a:t>3. Justify the change against the brief</a:t>
+            </a:r>
+          </a:p>
+        </p:txBody>
+      </p:sp>
+      <p:sp>
+        <p:nvSpPr>
+          <p:cNvPr id="5" name="Rounded Rectangle 4"/>
+          <p:cNvSpPr/>
+          <p:nvPr/>
+        </p:nvSpPr>
+        <p:spPr>
+          <a:xfrm>
+            <a:off x="6080760" y="1874519"/>
+            <a:ext cx="5166360" cy="4526280"/>
+          </a:xfrm>
+          <a:prstGeom prst="roundRect">
+            <a:avLst>
+              <a:gd name="adj" fmla="val 6000"/>
+            </a:avLst>
+          </a:prstGeom>
+          <a:solidFill>
+            <a:srgbClr val="EFDAE3"/>
+          </a:solidFill>
+          <a:ln>
+            <a:noFill/>
+          </a:ln>
+          <a:effectLst/>
+        </p:spPr>
+        <p:style>
+          <a:lnRef idx="1">
+            <a:schemeClr val="accent1"/>
+          </a:lnRef>
+          <a:fillRef idx="3">
+            <a:schemeClr val="accent1"/>
+          </a:fillRef>
+          <a:effectRef idx="2">
+            <a:schemeClr val="accent1"/>
+          </a:effectRef>
+          <a:fontRef idx="minor">
+            <a:schemeClr val="lt1"/>
+          </a:fontRef>
+        </p:style>
+        <p:txBody>
+          <a:bodyPr rtlCol="0" anchor="ctr" lIns="279400" rIns="279400" tIns="228600" bIns="228600" wrap="square"/>
+          <a:lstStyle/>
+          <a:p>
+            <a:pPr algn="ctr">
+              <a:spcAft>
+                <a:spcPts val="900"/>
+              </a:spcAft>
+              <a:buNone/>
+            </a:pPr>
+            <a:r>
+              <a:rPr sz="1250" b="0" i="1">
+                <a:solidFill>
+                  <a:srgbClr val="201F33"/>
+                </a:solidFill>
+                <a:latin typeface="Calibri"/>
+              </a:rPr>
+              <a:t>Sentence Starters</a:t>
+            </a:r>
+          </a:p>
+          <a:p>
+            <a:pPr indent="-203200" marL="203200">
+              <a:spcAft>
+                <a:spcPts val="900"/>
+              </a:spcAft>
+              <a:buClr>
+                <a:srgbClr val="C97B9E"/>
+              </a:buClr>
+              <a:buSzPct val="90000"/>
+              <a:buFont typeface="Arial"/>
+              <a:buChar char="–"/>
+            </a:pPr>
+            <a:r>
+              <a:rPr sz="1250" b="0" i="0">
+                <a:solidFill>
+                  <a:srgbClr val="201F33"/>
+                </a:solidFill>
+                <a:latin typeface="Calibri"/>
+              </a:rPr>
+              <a:t>"A colour trial was conducted to test..."</a:t>
+            </a:r>
+          </a:p>
+          <a:p>
+            <a:pPr indent="-203200" marL="203200">
+              <a:spcAft>
+                <a:spcPts val="900"/>
+              </a:spcAft>
+              <a:buClr>
+                <a:srgbClr val="C97B9E"/>
+              </a:buClr>
+              <a:buSzPct val="90000"/>
+              <a:buFont typeface="Arial"/>
+              <a:buChar char="–"/>
+            </a:pPr>
+            <a:r>
+              <a:rPr sz="1250" b="0" i="0">
+                <a:solidFill>
+                  <a:srgbClr val="201F33"/>
+                </a:solidFill>
+                <a:latin typeface="Calibri"/>
+              </a:rPr>
+              <a:t>"Following feedback, the [feature] was changed to..."</a:t>
+            </a:r>
+          </a:p>
+          <a:p>
+            <a:pPr indent="-203200" marL="203200">
+              <a:spcAft>
+                <a:spcPts val="900"/>
+              </a:spcAft>
+              <a:buClr>
+                <a:srgbClr val="C97B9E"/>
+              </a:buClr>
+              <a:buSzPct val="90000"/>
+              <a:buFont typeface="Arial"/>
+              <a:buChar char="–"/>
+            </a:pPr>
+            <a:r>
+              <a:rPr sz="1250" b="0" i="0">
+                <a:solidFill>
+                  <a:srgbClr val="201F33"/>
+                </a:solidFill>
+                <a:latin typeface="Calibri"/>
+              </a:rPr>
+              <a:t>"This concept was selected for resolution because..."</a:t>
+            </a:r>
+          </a:p>
+        </p:txBody>
+      </p:sp>
+      <p:sp>
+        <p:nvSpPr>
+          <p:cNvPr id="6" name="Oval 5"/>
+          <p:cNvSpPr/>
+          <p:nvPr/>
+        </p:nvSpPr>
+        <p:spPr>
+          <a:xfrm>
+            <a:off x="5532120" y="3840480"/>
+            <a:ext cx="685800" cy="685800"/>
+          </a:xfrm>
+          <a:prstGeom prst="ellipse">
+            <a:avLst/>
+          </a:prstGeom>
+          <a:solidFill>
+            <a:srgbClr val="D9A441"/>
           </a:solidFill>
           <a:ln>
             <a:noFill/>
@@ -6178,6 +8664,14 @@
 <file path=ppt/slides/slide8.xml><?xml version="1.0" encoding="utf-8"?>
 <p:sld xmlns:a="http://schemas.openxmlformats.org/drawingml/2006/main" xmlns:p="http://schemas.openxmlformats.org/presentationml/2006/main" xmlns:r="http://schemas.openxmlformats.org/officeDocument/2006/relationships">
   <p:cSld>
+    <p:bg>
+      <p:bgPr>
+        <a:solidFill>
+          <a:srgbClr val="F8F6FB"/>
+        </a:solidFill>
+        <a:effectLst/>
+      </p:bgPr>
+    </p:bg>
     <p:spTree>
       <p:nvGrpSpPr>
         <p:cNvPr id="1" name=""/>
@@ -6187,225 +8681,22 @@
       <p:grpSpPr/>
       <p:sp>
         <p:nvSpPr>
-          <p:cNvPr id="2" name="Title 1"/>
-          <p:cNvSpPr>
-            <a:spLocks noGrp="1"/>
-          </p:cNvSpPr>
-          <p:nvPr>
-            <p:ph type="title"/>
-          </p:nvPr>
-        </p:nvSpPr>
-        <p:spPr/>
-        <p:txBody>
-          <a:bodyPr wrap="square"/>
-          <a:lstStyle/>
-          <a:p>
-            <a:r>
-              <a:rPr sz="3200" b="1">
-                <a:solidFill>
-                  <a:srgbClr val="3B2F4A"/>
-                </a:solidFill>
-                <a:latin typeface="Cambria"/>
-              </a:rPr>
-              <a:t>Development &amp; Resolution — Quick Reference</a:t>
-            </a:r>
-          </a:p>
-        </p:txBody>
-      </p:sp>
-      <p:sp>
-        <p:nvSpPr>
-          <p:cNvPr id="3" name="Content Placeholder 2"/>
-          <p:cNvSpPr>
-            <a:spLocks noGrp="1"/>
-          </p:cNvSpPr>
-          <p:nvPr>
-            <p:ph idx="1"/>
-          </p:nvPr>
-        </p:nvSpPr>
-        <p:spPr/>
-        <p:txBody>
-          <a:bodyPr wrap="square"/>
-          <a:lstStyle/>
-          <a:p>
-            <a:pPr lvl="1">
-              <a:spcAft>
-                <a:spcPts val="1000"/>
-              </a:spcAft>
-            </a:pPr>
-            <a:r>
-              <a:rPr sz="1800" b="0" i="0">
-                <a:solidFill>
-                  <a:srgbClr val="333333"/>
-                </a:solidFill>
-                <a:latin typeface="Calibri"/>
-              </a:rPr>
-              <a:t>Type Trials</a:t>
-            </a:r>
-          </a:p>
-          <a:p>
-            <a:pPr lvl="1">
-              <a:spcAft>
-                <a:spcPts val="1000"/>
-              </a:spcAft>
-            </a:pPr>
-            <a:r>
-              <a:rPr sz="1800" b="0" i="0">
-                <a:solidFill>
-                  <a:srgbClr val="333333"/>
-                </a:solidFill>
-                <a:latin typeface="Calibri"/>
-              </a:rPr>
-              <a:t>Test typeface, weight, hierarchy.</a:t>
-            </a:r>
-          </a:p>
-          <a:p>
-            <a:pPr lvl="1">
-              <a:spcAft>
-                <a:spcPts val="1000"/>
-              </a:spcAft>
-            </a:pPr>
-            <a:r>
-              <a:rPr sz="1800" b="0" i="0">
-                <a:solidFill>
-                  <a:srgbClr val="333333"/>
-                </a:solidFill>
-                <a:latin typeface="Calibri"/>
-              </a:rPr>
-              <a:t>Colour Trials</a:t>
-            </a:r>
-          </a:p>
-          <a:p>
-            <a:pPr lvl="1">
-              <a:spcAft>
-                <a:spcPts val="1000"/>
-              </a:spcAft>
-            </a:pPr>
-            <a:r>
-              <a:rPr sz="1800" b="0" i="0">
-                <a:solidFill>
-                  <a:srgbClr val="333333"/>
-                </a:solidFill>
-                <a:latin typeface="Calibri"/>
-              </a:rPr>
-              <a:t>Test palette for mood &amp; audience.</a:t>
-            </a:r>
-          </a:p>
-          <a:p>
-            <a:pPr lvl="1">
-              <a:spcAft>
-                <a:spcPts val="1000"/>
-              </a:spcAft>
-            </a:pPr>
-            <a:r>
-              <a:rPr sz="1800" b="0" i="0">
-                <a:solidFill>
-                  <a:srgbClr val="333333"/>
-                </a:solidFill>
-                <a:latin typeface="Calibri"/>
-              </a:rPr>
-              <a:t>Feedback</a:t>
-            </a:r>
-          </a:p>
-          <a:p>
-            <a:pPr lvl="1">
-              <a:spcAft>
-                <a:spcPts val="1000"/>
-              </a:spcAft>
-            </a:pPr>
-            <a:r>
-              <a:rPr sz="1800" b="0" i="0">
-                <a:solidFill>
-                  <a:srgbClr val="333333"/>
-                </a:solidFill>
-                <a:latin typeface="Calibri"/>
-              </a:rPr>
-              <a:t>Peer, teacher, self-testing against brief.</a:t>
-            </a:r>
-          </a:p>
-          <a:p>
-            <a:pPr lvl="1">
-              <a:spcAft>
-                <a:spcPts val="1000"/>
-              </a:spcAft>
-            </a:pPr>
-            <a:r>
-              <a:rPr sz="1800" b="0" i="0">
-                <a:solidFill>
-                  <a:srgbClr val="333333"/>
-                </a:solidFill>
-                <a:latin typeface="Calibri"/>
-              </a:rPr>
-              <a:t>Selection</a:t>
-            </a:r>
-          </a:p>
-          <a:p>
-            <a:pPr lvl="1">
-              <a:spcAft>
-                <a:spcPts val="1000"/>
-              </a:spcAft>
-            </a:pPr>
-            <a:r>
-              <a:rPr sz="1800" b="0" i="0">
-                <a:solidFill>
-                  <a:srgbClr val="333333"/>
-                </a:solidFill>
-                <a:latin typeface="Calibri"/>
-              </a:rPr>
-              <a:t>Justify the chosen concept against the brief.</a:t>
-            </a:r>
-          </a:p>
-          <a:p>
-            <a:pPr>
-              <a:spcAft>
-                <a:spcPts val="1000"/>
-              </a:spcAft>
-            </a:pPr>
-            <a:r>
-              <a:rPr sz="2000" b="0" i="0">
-                <a:solidFill>
-                  <a:srgbClr val="333333"/>
-                </a:solidFill>
-                <a:latin typeface="Calibri"/>
-              </a:rPr>
-              <a:t> Reminder: the resolved concept moves into </a:t>
-            </a:r>
-            <a:r>
-              <a:rPr sz="2000" b="1" i="0">
-                <a:solidFill>
-                  <a:srgbClr val="3B2F4A"/>
-                </a:solidFill>
-                <a:latin typeface="Calibri"/>
-              </a:rPr>
-              <a:t>Unit 4 AOS 2</a:t>
-            </a:r>
-            <a:r>
-              <a:rPr sz="2000" b="0" i="0">
-                <a:solidFill>
-                  <a:srgbClr val="333333"/>
-                </a:solidFill>
-                <a:latin typeface="Calibri"/>
-              </a:rPr>
-              <a:t> for final presentation and evaluation. </a:t>
-            </a:r>
-          </a:p>
-        </p:txBody>
-      </p:sp>
-      <p:sp>
-        <p:nvSpPr>
-          <p:cNvPr id="4" name="Rectangle 3"/>
+          <p:cNvPr id="2" name="Rounded Rectangle 1"/>
           <p:cNvSpPr/>
           <p:nvPr/>
         </p:nvSpPr>
         <p:spPr>
           <a:xfrm>
-            <a:off x="548640" y="1234440"/>
-            <a:ext cx="1463040" cy="38100"/>
-          </a:xfrm>
-          <a:prstGeom prst="rect">
-            <a:avLst/>
+            <a:off x="685800" y="502920"/>
+            <a:ext cx="3291840" cy="457200"/>
+          </a:xfrm>
+          <a:prstGeom prst="roundRect">
+            <a:avLst>
+              <a:gd name="adj" fmla="val 50000"/>
+            </a:avLst>
           </a:prstGeom>
           <a:solidFill>
-            <a:srgbClr val="3B2F4A"/>
+            <a:srgbClr val="2B2A4A"/>
           </a:solidFill>
           <a:ln>
             <a:noFill/>
@@ -6427,10 +8718,401 @@
           </a:fontRef>
         </p:style>
         <p:txBody>
-          <a:bodyPr rtlCol="0" anchor="ctr"/>
+          <a:bodyPr rtlCol="0" anchor="ctr" wrap="none" lIns="50800" rIns="50800"/>
           <a:lstStyle/>
           <a:p>
             <a:pPr algn="ctr"/>
+            <a:r>
+              <a:rPr sz="1100" b="1">
+                <a:solidFill>
+                  <a:srgbClr val="FFFFFF"/>
+                </a:solidFill>
+                <a:latin typeface="Calibri"/>
+              </a:rPr>
+              <a:t>DEVELOPMENT &amp; RESOLUTION</a:t>
+            </a:r>
+          </a:p>
+        </p:txBody>
+      </p:sp>
+      <p:sp>
+        <p:nvSpPr>
+          <p:cNvPr id="3" name="TextBox 2"/>
+          <p:cNvSpPr txBox="1"/>
+          <p:nvPr/>
+        </p:nvSpPr>
+        <p:spPr>
+          <a:xfrm>
+            <a:off x="685800" y="1051560"/>
+            <a:ext cx="10607040" cy="822960"/>
+          </a:xfrm>
+          <a:prstGeom prst="rect">
+            <a:avLst/>
+          </a:prstGeom>
+          <a:noFill/>
+        </p:spPr>
+        <p:txBody>
+          <a:bodyPr wrap="square" anchor="t">
+            <a:spAutoFit/>
+          </a:bodyPr>
+          <a:lstStyle/>
+          <a:p>
+            <a:pPr algn="l"/>
+            <a:r>
+              <a:rPr sz="2700" b="1" i="0">
+                <a:solidFill>
+                  <a:srgbClr val="201F33"/>
+                </a:solidFill>
+                <a:latin typeface="Cambria"/>
+              </a:rPr>
+              <a:t>Development &amp; Resolution — Quick Reference</a:t>
+            </a:r>
+          </a:p>
+        </p:txBody>
+      </p:sp>
+      <p:sp>
+        <p:nvSpPr>
+          <p:cNvPr id="4" name="Rounded Rectangle 3"/>
+          <p:cNvSpPr/>
+          <p:nvPr/>
+        </p:nvSpPr>
+        <p:spPr>
+          <a:xfrm>
+            <a:off x="685800" y="1874519"/>
+            <a:ext cx="2500884" cy="1554480"/>
+          </a:xfrm>
+          <a:prstGeom prst="roundRect">
+            <a:avLst>
+              <a:gd name="adj" fmla="val 12000"/>
+            </a:avLst>
+          </a:prstGeom>
+          <a:solidFill>
+            <a:srgbClr val="DFDFE3"/>
+          </a:solidFill>
+          <a:ln>
+            <a:noFill/>
+          </a:ln>
+          <a:effectLst/>
+        </p:spPr>
+        <p:style>
+          <a:lnRef idx="1">
+            <a:schemeClr val="accent1"/>
+          </a:lnRef>
+          <a:fillRef idx="3">
+            <a:schemeClr val="accent1"/>
+          </a:fillRef>
+          <a:effectRef idx="2">
+            <a:schemeClr val="accent1"/>
+          </a:effectRef>
+          <a:fontRef idx="minor">
+            <a:schemeClr val="lt1"/>
+          </a:fontRef>
+        </p:style>
+        <p:txBody>
+          <a:bodyPr rtlCol="0" anchor="ctr" wrap="square" lIns="127000" rIns="127000" tIns="101600" bIns="101600"/>
+          <a:lstStyle/>
+          <a:p>
+            <a:pPr algn="ctr"/>
+            <a:r>
+              <a:rPr b="1" sz="1300">
+                <a:solidFill>
+                  <a:srgbClr val="22213B"/>
+                </a:solidFill>
+                <a:latin typeface="Calibri"/>
+              </a:rPr>
+              <a:t>Type Trials</a:t>
+            </a:r>
+          </a:p>
+          <a:p>
+            <a:r>
+              <a:rPr sz="1050">
+                <a:solidFill>
+                  <a:srgbClr val="201F33"/>
+                </a:solidFill>
+                <a:latin typeface="Calibri"/>
+              </a:rPr>
+              <a:t>Test typeface, weight, hierarchy.</a:t>
+            </a:r>
+          </a:p>
+        </p:txBody>
+      </p:sp>
+      <p:sp>
+        <p:nvSpPr>
+          <p:cNvPr id="5" name="Rounded Rectangle 4"/>
+          <p:cNvSpPr/>
+          <p:nvPr/>
+        </p:nvSpPr>
+        <p:spPr>
+          <a:xfrm>
+            <a:off x="3387852" y="1874519"/>
+            <a:ext cx="2500884" cy="1554480"/>
+          </a:xfrm>
+          <a:prstGeom prst="roundRect">
+            <a:avLst>
+              <a:gd name="adj" fmla="val 12000"/>
+            </a:avLst>
+          </a:prstGeom>
+          <a:solidFill>
+            <a:srgbClr val="F9F1E2"/>
+          </a:solidFill>
+          <a:ln>
+            <a:noFill/>
+          </a:ln>
+          <a:effectLst/>
+        </p:spPr>
+        <p:style>
+          <a:lnRef idx="1">
+            <a:schemeClr val="accent1"/>
+          </a:lnRef>
+          <a:fillRef idx="3">
+            <a:schemeClr val="accent1"/>
+          </a:fillRef>
+          <a:effectRef idx="2">
+            <a:schemeClr val="accent1"/>
+          </a:effectRef>
+          <a:fontRef idx="minor">
+            <a:schemeClr val="lt1"/>
+          </a:fontRef>
+        </p:style>
+        <p:txBody>
+          <a:bodyPr rtlCol="0" anchor="ctr" wrap="square" lIns="127000" rIns="127000" tIns="101600" bIns="101600"/>
+          <a:lstStyle/>
+          <a:p>
+            <a:pPr algn="ctr"/>
+            <a:r>
+              <a:rPr b="1" sz="1300">
+                <a:solidFill>
+                  <a:srgbClr val="AD8334"/>
+                </a:solidFill>
+                <a:latin typeface="Calibri"/>
+              </a:rPr>
+              <a:t>Colour Trials</a:t>
+            </a:r>
+          </a:p>
+          <a:p>
+            <a:r>
+              <a:rPr sz="1050">
+                <a:solidFill>
+                  <a:srgbClr val="201F33"/>
+                </a:solidFill>
+                <a:latin typeface="Calibri"/>
+              </a:rPr>
+              <a:t>Test palette for mood &amp; audience.</a:t>
+            </a:r>
+          </a:p>
+        </p:txBody>
+      </p:sp>
+      <p:sp>
+        <p:nvSpPr>
+          <p:cNvPr id="6" name="Rounded Rectangle 5"/>
+          <p:cNvSpPr/>
+          <p:nvPr/>
+        </p:nvSpPr>
+        <p:spPr>
+          <a:xfrm>
+            <a:off x="6089904" y="1874519"/>
+            <a:ext cx="2500884" cy="1554480"/>
+          </a:xfrm>
+          <a:prstGeom prst="roundRect">
+            <a:avLst>
+              <a:gd name="adj" fmla="val 12000"/>
+            </a:avLst>
+          </a:prstGeom>
+          <a:solidFill>
+            <a:srgbClr val="F6EBF0"/>
+          </a:solidFill>
+          <a:ln>
+            <a:noFill/>
+          </a:ln>
+          <a:effectLst/>
+        </p:spPr>
+        <p:style>
+          <a:lnRef idx="1">
+            <a:schemeClr val="accent1"/>
+          </a:lnRef>
+          <a:fillRef idx="3">
+            <a:schemeClr val="accent1"/>
+          </a:fillRef>
+          <a:effectRef idx="2">
+            <a:schemeClr val="accent1"/>
+          </a:effectRef>
+          <a:fontRef idx="minor">
+            <a:schemeClr val="lt1"/>
+          </a:fontRef>
+        </p:style>
+        <p:txBody>
+          <a:bodyPr rtlCol="0" anchor="ctr" wrap="square" lIns="127000" rIns="127000" tIns="101600" bIns="101600"/>
+          <a:lstStyle/>
+          <a:p>
+            <a:pPr algn="ctr"/>
+            <a:r>
+              <a:rPr b="1" sz="1300">
+                <a:solidFill>
+                  <a:srgbClr val="A0627E"/>
+                </a:solidFill>
+                <a:latin typeface="Calibri"/>
+              </a:rPr>
+              <a:t>Feedback</a:t>
+            </a:r>
+          </a:p>
+          <a:p>
+            <a:r>
+              <a:rPr sz="1050">
+                <a:solidFill>
+                  <a:srgbClr val="201F33"/>
+                </a:solidFill>
+                <a:latin typeface="Calibri"/>
+              </a:rPr>
+              <a:t>Peer, teacher, self-testing against brief.</a:t>
+            </a:r>
+          </a:p>
+        </p:txBody>
+      </p:sp>
+      <p:sp>
+        <p:nvSpPr>
+          <p:cNvPr id="7" name="Rounded Rectangle 6"/>
+          <p:cNvSpPr/>
+          <p:nvPr/>
+        </p:nvSpPr>
+        <p:spPr>
+          <a:xfrm>
+            <a:off x="8791956" y="1874519"/>
+            <a:ext cx="2500884" cy="1554480"/>
+          </a:xfrm>
+          <a:prstGeom prst="roundRect">
+            <a:avLst>
+              <a:gd name="adj" fmla="val 12000"/>
+            </a:avLst>
+          </a:prstGeom>
+          <a:solidFill>
+            <a:srgbClr val="DFDFE3"/>
+          </a:solidFill>
+          <a:ln>
+            <a:noFill/>
+          </a:ln>
+          <a:effectLst/>
+        </p:spPr>
+        <p:style>
+          <a:lnRef idx="1">
+            <a:schemeClr val="accent1"/>
+          </a:lnRef>
+          <a:fillRef idx="3">
+            <a:schemeClr val="accent1"/>
+          </a:fillRef>
+          <a:effectRef idx="2">
+            <a:schemeClr val="accent1"/>
+          </a:effectRef>
+          <a:fontRef idx="minor">
+            <a:schemeClr val="lt1"/>
+          </a:fontRef>
+        </p:style>
+        <p:txBody>
+          <a:bodyPr rtlCol="0" anchor="ctr" wrap="square" lIns="127000" rIns="127000" tIns="101600" bIns="101600"/>
+          <a:lstStyle/>
+          <a:p>
+            <a:pPr algn="ctr"/>
+            <a:r>
+              <a:rPr b="1" sz="1300">
+                <a:solidFill>
+                  <a:srgbClr val="22213B"/>
+                </a:solidFill>
+                <a:latin typeface="Calibri"/>
+              </a:rPr>
+              <a:t>Selection</a:t>
+            </a:r>
+          </a:p>
+          <a:p>
+            <a:r>
+              <a:rPr sz="1050">
+                <a:solidFill>
+                  <a:srgbClr val="201F33"/>
+                </a:solidFill>
+                <a:latin typeface="Calibri"/>
+              </a:rPr>
+              <a:t>Justify the chosen concept against the brief.</a:t>
+            </a:r>
+          </a:p>
+        </p:txBody>
+      </p:sp>
+      <p:sp>
+        <p:nvSpPr>
+          <p:cNvPr id="8" name="Rounded Rectangle 7"/>
+          <p:cNvSpPr/>
+          <p:nvPr/>
+        </p:nvSpPr>
+        <p:spPr>
+          <a:xfrm>
+            <a:off x="685800" y="3675887"/>
+            <a:ext cx="10607040" cy="2862073"/>
+          </a:xfrm>
+          <a:prstGeom prst="roundRect">
+            <a:avLst>
+              <a:gd name="adj" fmla="val 10000"/>
+            </a:avLst>
+          </a:prstGeom>
+          <a:solidFill>
+            <a:srgbClr val="F9F1E2"/>
+          </a:solidFill>
+          <a:ln>
+            <a:noFill/>
+          </a:ln>
+          <a:effectLst/>
+        </p:spPr>
+        <p:style>
+          <a:lnRef idx="1">
+            <a:schemeClr val="accent1"/>
+          </a:lnRef>
+          <a:fillRef idx="3">
+            <a:schemeClr val="accent1"/>
+          </a:fillRef>
+          <a:effectRef idx="2">
+            <a:schemeClr val="accent1"/>
+          </a:effectRef>
+          <a:fontRef idx="minor">
+            <a:schemeClr val="lt1"/>
+          </a:fontRef>
+        </p:style>
+        <p:txBody>
+          <a:bodyPr rtlCol="0" anchor="ctr" lIns="203200" rIns="203200" tIns="101600" bIns="101600" wrap="square"/>
+          <a:lstStyle/>
+          <a:p>
+            <a:pPr algn="ctr" indent="-203200" marL="203200">
+              <a:spcAft>
+                <a:spcPts val="900"/>
+              </a:spcAft>
+              <a:buClr>
+                <a:srgbClr val="D9A441"/>
+              </a:buClr>
+              <a:buSzPct val="90000"/>
+              <a:buFont typeface="Arial"/>
+              <a:buChar char="●"/>
+            </a:pPr>
+            <a:r>
+              <a:rPr sz="1200" b="0" i="0">
+                <a:solidFill>
+                  <a:srgbClr val="201F33"/>
+                </a:solidFill>
+                <a:latin typeface="Calibri"/>
+              </a:rPr>
+              <a:t> Reminder: the resolved concept moves into </a:t>
+            </a:r>
+            <a:r>
+              <a:rPr sz="1200" b="1" i="0">
+                <a:solidFill>
+                  <a:srgbClr val="B88B37"/>
+                </a:solidFill>
+                <a:latin typeface="Calibri"/>
+              </a:rPr>
+              <a:t>Unit 4 AOS 2</a:t>
+            </a:r>
+            <a:r>
+              <a:rPr sz="1200" b="0" i="0">
+                <a:solidFill>
+                  <a:srgbClr val="201F33"/>
+                </a:solidFill>
+                <a:latin typeface="Calibri"/>
+              </a:rPr>
+              <a:t> for final presentation and evaluation. </a:t>
+            </a:r>
           </a:p>
         </p:txBody>
       </p:sp>
@@ -6448,7 +9130,7 @@
     <p:bg>
       <p:bgPr>
         <a:solidFill>
-          <a:srgbClr val="3B2F4A"/>
+          <a:srgbClr val="2B2A4A"/>
         </a:solidFill>
         <a:effectLst/>
       </p:bgPr>
@@ -6462,23 +9144,220 @@
       <p:grpSpPr/>
       <p:sp>
         <p:nvSpPr>
-          <p:cNvPr id="2" name="Title 1"/>
-          <p:cNvSpPr>
-            <a:spLocks noGrp="1"/>
-          </p:cNvSpPr>
-          <p:nvPr>
-            <p:ph type="title"/>
-          </p:nvPr>
-        </p:nvSpPr>
-        <p:spPr/>
-        <p:txBody>
-          <a:bodyPr/>
-          <a:lstStyle/>
-          <a:p>
-            <a:r>
-              <a:rPr sz="4000" b="1">
-                <a:solidFill>
-                  <a:srgbClr val="FFFFFF"/>
+          <p:cNvPr id="2" name="Oval 1"/>
+          <p:cNvSpPr/>
+          <p:nvPr/>
+        </p:nvSpPr>
+        <p:spPr>
+          <a:xfrm>
+            <a:off x="9692640" y="-914400"/>
+            <a:ext cx="2926080" cy="2926080"/>
+          </a:xfrm>
+          <a:prstGeom prst="ellipse">
+            <a:avLst/>
+          </a:prstGeom>
+          <a:solidFill>
+            <a:srgbClr val="252441"/>
+          </a:solidFill>
+          <a:ln>
+            <a:noFill/>
+          </a:ln>
+          <a:effectLst/>
+        </p:spPr>
+        <p:style>
+          <a:lnRef idx="1">
+            <a:schemeClr val="accent1"/>
+          </a:lnRef>
+          <a:fillRef idx="3">
+            <a:schemeClr val="accent1"/>
+          </a:fillRef>
+          <a:effectRef idx="2">
+            <a:schemeClr val="accent1"/>
+          </a:effectRef>
+          <a:fontRef idx="minor">
+            <a:schemeClr val="lt1"/>
+          </a:fontRef>
+        </p:style>
+        <p:txBody>
+          <a:bodyPr rtlCol="0" anchor="ctr"/>
+          <a:lstStyle/>
+          <a:p>
+            <a:pPr algn="ctr"/>
+          </a:p>
+        </p:txBody>
+      </p:sp>
+      <p:sp>
+        <p:nvSpPr>
+          <p:cNvPr id="3" name="Oval 2"/>
+          <p:cNvSpPr/>
+          <p:nvPr/>
+        </p:nvSpPr>
+        <p:spPr>
+          <a:xfrm>
+            <a:off x="-914400" y="4937760"/>
+            <a:ext cx="2377440" cy="2377440"/>
+          </a:xfrm>
+          <a:prstGeom prst="ellipse">
+            <a:avLst/>
+          </a:prstGeom>
+          <a:solidFill>
+            <a:srgbClr val="252441"/>
+          </a:solidFill>
+          <a:ln>
+            <a:noFill/>
+          </a:ln>
+          <a:effectLst/>
+        </p:spPr>
+        <p:style>
+          <a:lnRef idx="1">
+            <a:schemeClr val="accent1"/>
+          </a:lnRef>
+          <a:fillRef idx="3">
+            <a:schemeClr val="accent1"/>
+          </a:fillRef>
+          <a:effectRef idx="2">
+            <a:schemeClr val="accent1"/>
+          </a:effectRef>
+          <a:fontRef idx="minor">
+            <a:schemeClr val="lt1"/>
+          </a:fontRef>
+        </p:style>
+        <p:txBody>
+          <a:bodyPr rtlCol="0" anchor="ctr"/>
+          <a:lstStyle/>
+          <a:p>
+            <a:pPr algn="ctr"/>
+          </a:p>
+        </p:txBody>
+      </p:sp>
+      <p:sp>
+        <p:nvSpPr>
+          <p:cNvPr id="4" name="Rounded Rectangle 3"/>
+          <p:cNvSpPr/>
+          <p:nvPr/>
+        </p:nvSpPr>
+        <p:spPr>
+          <a:xfrm>
+            <a:off x="822960" y="1051560"/>
+            <a:ext cx="1188720" cy="502920"/>
+          </a:xfrm>
+          <a:prstGeom prst="roundRect">
+            <a:avLst>
+              <a:gd name="adj" fmla="val 50000"/>
+            </a:avLst>
+          </a:prstGeom>
+          <a:solidFill>
+            <a:srgbClr val="FFFFFF"/>
+          </a:solidFill>
+          <a:ln>
+            <a:noFill/>
+          </a:ln>
+          <a:effectLst/>
+        </p:spPr>
+        <p:style>
+          <a:lnRef idx="1">
+            <a:schemeClr val="accent1"/>
+          </a:lnRef>
+          <a:fillRef idx="3">
+            <a:schemeClr val="accent1"/>
+          </a:fillRef>
+          <a:effectRef idx="2">
+            <a:schemeClr val="accent1"/>
+          </a:effectRef>
+          <a:fontRef idx="minor">
+            <a:schemeClr val="lt1"/>
+          </a:fontRef>
+        </p:style>
+        <p:txBody>
+          <a:bodyPr rtlCol="0" anchor="ctr" wrap="none" lIns="50800" rIns="50800"/>
+          <a:lstStyle/>
+          <a:p>
+            <a:pPr algn="ctr"/>
+            <a:r>
+              <a:rPr sz="1400" b="1">
+                <a:solidFill>
+                  <a:srgbClr val="22213B"/>
+                </a:solidFill>
+                <a:latin typeface="Calibri"/>
+              </a:rPr>
+              <a:t>02</a:t>
+            </a:r>
+          </a:p>
+        </p:txBody>
+      </p:sp>
+      <p:sp>
+        <p:nvSpPr>
+          <p:cNvPr id="5" name="Rounded Rectangle 4"/>
+          <p:cNvSpPr/>
+          <p:nvPr/>
+        </p:nvSpPr>
+        <p:spPr>
+          <a:xfrm>
+            <a:off x="822960" y="2011680"/>
+            <a:ext cx="10515600" cy="2834640"/>
+          </a:xfrm>
+          <a:prstGeom prst="roundRect">
+            <a:avLst>
+              <a:gd name="adj" fmla="val 18000"/>
+            </a:avLst>
+          </a:prstGeom>
+          <a:solidFill>
+            <a:srgbClr val="FFFFFF"/>
+          </a:solidFill>
+          <a:ln>
+            <a:noFill/>
+          </a:ln>
+          <a:effectLst/>
+        </p:spPr>
+        <p:style>
+          <a:lnRef idx="1">
+            <a:schemeClr val="accent1"/>
+          </a:lnRef>
+          <a:fillRef idx="3">
+            <a:schemeClr val="accent1"/>
+          </a:fillRef>
+          <a:effectRef idx="2">
+            <a:schemeClr val="accent1"/>
+          </a:effectRef>
+          <a:fontRef idx="minor">
+            <a:schemeClr val="lt1"/>
+          </a:fontRef>
+        </p:style>
+        <p:txBody>
+          <a:bodyPr rtlCol="0" anchor="ctr"/>
+          <a:lstStyle/>
+          <a:p>
+            <a:pPr algn="ctr"/>
+          </a:p>
+        </p:txBody>
+      </p:sp>
+      <p:sp>
+        <p:nvSpPr>
+          <p:cNvPr id="6" name="TextBox 5"/>
+          <p:cNvSpPr txBox="1"/>
+          <p:nvPr/>
+        </p:nvSpPr>
+        <p:spPr>
+          <a:xfrm>
+            <a:off x="1280160" y="2697480"/>
+            <a:ext cx="9601200" cy="1097280"/>
+          </a:xfrm>
+          <a:prstGeom prst="rect">
+            <a:avLst/>
+          </a:prstGeom>
+          <a:noFill/>
+        </p:spPr>
+        <p:txBody>
+          <a:bodyPr wrap="square" anchor="t">
+            <a:spAutoFit/>
+          </a:bodyPr>
+          <a:lstStyle/>
+          <a:p>
+            <a:pPr algn="l"/>
+            <a:r>
+              <a:rPr sz="3400" b="1" i="0">
+                <a:solidFill>
+                  <a:srgbClr val="24233E"/>
                 </a:solidFill>
                 <a:latin typeface="Cambria"/>
               </a:rPr>
@@ -6489,27 +9368,35 @@
       </p:sp>
       <p:sp>
         <p:nvSpPr>
-          <p:cNvPr id="3" name="Text Placeholder 2"/>
-          <p:cNvSpPr>
-            <a:spLocks noGrp="1"/>
-          </p:cNvSpPr>
-          <p:nvPr>
-            <p:ph type="body" idx="1"/>
-          </p:nvPr>
-        </p:nvSpPr>
-        <p:spPr/>
-        <p:txBody>
-          <a:bodyPr/>
-          <a:lstStyle/>
-          <a:p>
-            <a:r>
-              <a:rPr sz="1800">
-                <a:solidFill>
-                  <a:srgbClr val="E5E5E5"/>
-                </a:solidFill>
-                <a:latin typeface="Calibri"/>
-              </a:rPr>
-              <a:t>AOS 2 · Evaluation, Refinement and Presentation</a:t>
+          <p:cNvPr id="7" name="TextBox 6"/>
+          <p:cNvSpPr txBox="1"/>
+          <p:nvPr/>
+        </p:nvSpPr>
+        <p:spPr>
+          <a:xfrm>
+            <a:off x="1280160" y="3657600"/>
+            <a:ext cx="9601200" cy="548640"/>
+          </a:xfrm>
+          <a:prstGeom prst="rect">
+            <a:avLst/>
+          </a:prstGeom>
+          <a:noFill/>
+        </p:spPr>
+        <p:txBody>
+          <a:bodyPr wrap="square" anchor="t">
+            <a:spAutoFit/>
+          </a:bodyPr>
+          <a:lstStyle/>
+          <a:p>
+            <a:pPr algn="l"/>
+            <a:r>
+              <a:rPr sz="1500" b="0" i="0">
+                <a:solidFill>
+                  <a:srgbClr val="6B6B6B"/>
+                </a:solidFill>
+                <a:latin typeface="Calibri"/>
+              </a:rPr>
+              <a:t>AOS 2 - Evaluation, Refinement and Presentation</a:t>
             </a:r>
           </a:p>
         </p:txBody>

--- a/teaching-materials/vcd-vce/powerpoint/Unit4-Design-Development-and-Presentation.pptx
+++ b/teaching-materials/vcd-vce/powerpoint/Unit4-Design-Development-and-Presentation.pptx
@@ -21,6 +21,16 @@
     <p:sldId id="269" r:id="rId20"/>
     <p:sldId id="270" r:id="rId21"/>
     <p:sldId id="271" r:id="rId22"/>
+    <p:sldId id="272" r:id="rId23"/>
+    <p:sldId id="273" r:id="rId24"/>
+    <p:sldId id="274" r:id="rId25"/>
+    <p:sldId id="275" r:id="rId26"/>
+    <p:sldId id="276" r:id="rId27"/>
+    <p:sldId id="277" r:id="rId28"/>
+    <p:sldId id="278" r:id="rId29"/>
+    <p:sldId id="279" r:id="rId30"/>
+    <p:sldId id="280" r:id="rId31"/>
+    <p:sldId id="281" r:id="rId32"/>
   </p:sldIdLst>
   <p:sldSz cx="12191695" cy="6858000" type="screen4x3"/>
   <p:notesSz cx="6858000" cy="9144000"/>
@@ -6053,7 +6063,7 @@
     <p:bg>
       <p:bgPr>
         <a:solidFill>
-          <a:srgbClr val="2B2A4A"/>
+          <a:srgbClr val="D9A441"/>
         </a:solidFill>
         <a:effectLst/>
       </p:bgPr>
@@ -6073,14 +6083,14 @@
         </p:nvSpPr>
         <p:spPr>
           <a:xfrm>
-            <a:off x="-1097280" y="4114800"/>
-            <a:ext cx="3108960" cy="3108960"/>
+            <a:off x="9692640" y="-914400"/>
+            <a:ext cx="2926080" cy="2926080"/>
           </a:xfrm>
           <a:prstGeom prst="ellipse">
             <a:avLst/>
           </a:prstGeom>
           <a:solidFill>
-            <a:srgbClr val="252441"/>
+            <a:srgbClr val="BE9039"/>
           </a:solidFill>
           <a:ln>
             <a:noFill/>
@@ -6117,14 +6127,14 @@
         </p:nvSpPr>
         <p:spPr>
           <a:xfrm>
-            <a:off x="9875520" y="-1188720"/>
-            <a:ext cx="2743200" cy="2743200"/>
+            <a:off x="-914400" y="4937760"/>
+            <a:ext cx="2377440" cy="2377440"/>
           </a:xfrm>
           <a:prstGeom prst="ellipse">
             <a:avLst/>
           </a:prstGeom>
           <a:solidFill>
-            <a:srgbClr val="D9A441"/>
+            <a:srgbClr val="BE9039"/>
           </a:solidFill>
           <a:ln>
             <a:noFill/>
@@ -6161,12 +6171,12 @@
         </p:nvSpPr>
         <p:spPr>
           <a:xfrm>
-            <a:off x="1920240" y="2286000"/>
-            <a:ext cx="8321040" cy="2377440"/>
+            <a:off x="822960" y="1051560"/>
+            <a:ext cx="1188720" cy="502920"/>
           </a:xfrm>
           <a:prstGeom prst="roundRect">
             <a:avLst>
-              <a:gd name="adj" fmla="val 20000"/>
+              <a:gd name="adj" fmla="val 50000"/>
             </a:avLst>
           </a:prstGeom>
           <a:solidFill>
@@ -6192,30 +6202,1118 @@
           </a:fontRef>
         </p:style>
         <p:txBody>
+          <a:bodyPr rtlCol="0" anchor="ctr" wrap="none" lIns="50800" rIns="50800"/>
+          <a:lstStyle/>
+          <a:p>
+            <a:pPr algn="ctr"/>
+            <a:r>
+              <a:rPr sz="1400" b="1">
+                <a:solidFill>
+                  <a:srgbClr val="AD8334"/>
+                </a:solidFill>
+                <a:latin typeface="Calibri"/>
+              </a:rPr>
+              <a:t>03</a:t>
+            </a:r>
+          </a:p>
+        </p:txBody>
+      </p:sp>
+      <p:sp>
+        <p:nvSpPr>
+          <p:cNvPr id="5" name="Rounded Rectangle 4"/>
+          <p:cNvSpPr/>
+          <p:nvPr/>
+        </p:nvSpPr>
+        <p:spPr>
+          <a:xfrm>
+            <a:off x="822960" y="2011680"/>
+            <a:ext cx="10515600" cy="2834640"/>
+          </a:xfrm>
+          <a:prstGeom prst="roundRect">
+            <a:avLst>
+              <a:gd name="adj" fmla="val 18000"/>
+            </a:avLst>
+          </a:prstGeom>
+          <a:solidFill>
+            <a:srgbClr val="FFFFFF"/>
+          </a:solidFill>
+          <a:ln>
+            <a:noFill/>
+          </a:ln>
+          <a:effectLst/>
+        </p:spPr>
+        <p:style>
+          <a:lnRef idx="1">
+            <a:schemeClr val="accent1"/>
+          </a:lnRef>
+          <a:fillRef idx="3">
+            <a:schemeClr val="accent1"/>
+          </a:fillRef>
+          <a:effectRef idx="2">
+            <a:schemeClr val="accent1"/>
+          </a:effectRef>
+          <a:fontRef idx="minor">
+            <a:schemeClr val="lt1"/>
+          </a:fontRef>
+        </p:style>
+        <p:txBody>
           <a:bodyPr rtlCol="0" anchor="ctr"/>
           <a:lstStyle/>
           <a:p>
             <a:pPr algn="ctr"/>
-            <a:r>
-              <a:rPr b="1" sz="3000">
-                <a:solidFill>
-                  <a:srgbClr val="2B2A4A"/>
+          </a:p>
+        </p:txBody>
+      </p:sp>
+      <p:sp>
+        <p:nvSpPr>
+          <p:cNvPr id="6" name="TextBox 5"/>
+          <p:cNvSpPr txBox="1"/>
+          <p:nvPr/>
+        </p:nvSpPr>
+        <p:spPr>
+          <a:xfrm>
+            <a:off x="1280160" y="2697480"/>
+            <a:ext cx="9601200" cy="1097280"/>
+          </a:xfrm>
+          <a:prstGeom prst="rect">
+            <a:avLst/>
+          </a:prstGeom>
+          <a:noFill/>
+        </p:spPr>
+        <p:txBody>
+          <a:bodyPr wrap="square" anchor="t">
+            <a:spAutoFit/>
+          </a:bodyPr>
+          <a:lstStyle/>
+          <a:p>
+            <a:pPr algn="l"/>
+            <a:r>
+              <a:rPr sz="3400" b="1" i="0">
+                <a:solidFill>
+                  <a:srgbClr val="B88B37"/>
                 </a:solidFill>
                 <a:latin typeface="Cambria"/>
               </a:rPr>
-              <a:t>End of Unit 4</a:t>
-            </a:r>
-          </a:p>
+              <a:t>Extended Knowledge</a:t>
+            </a:r>
+          </a:p>
+        </p:txBody>
+      </p:sp>
+      <p:sp>
+        <p:nvSpPr>
+          <p:cNvPr id="7" name="TextBox 6"/>
+          <p:cNvSpPr txBox="1"/>
+          <p:nvPr/>
+        </p:nvSpPr>
+        <p:spPr>
+          <a:xfrm>
+            <a:off x="1280160" y="3657600"/>
+            <a:ext cx="9601200" cy="548640"/>
+          </a:xfrm>
+          <a:prstGeom prst="rect">
+            <a:avLst/>
+          </a:prstGeom>
+          <a:noFill/>
+        </p:spPr>
+        <p:txBody>
+          <a:bodyPr wrap="square" anchor="t">
+            <a:spAutoFit/>
+          </a:bodyPr>
+          <a:lstStyle/>
+          <a:p>
+            <a:pPr algn="l"/>
+            <a:r>
+              <a:rPr sz="1500" b="0" i="0">
+                <a:solidFill>
+                  <a:srgbClr val="6B6B6B"/>
+                </a:solidFill>
+                <a:latin typeface="Calibri"/>
+              </a:rPr>
+              <a:t>Beyond the study design</a:t>
+            </a:r>
+          </a:p>
+        </p:txBody>
+      </p:sp>
+    </p:spTree>
+  </p:cSld>
+  <p:clrMapOvr>
+    <a:masterClrMapping/>
+  </p:clrMapOvr>
+</p:sld>
+</file>
+
+<file path=ppt/slides/slide17.xml><?xml version="1.0" encoding="utf-8"?>
+<p:sld xmlns:a="http://schemas.openxmlformats.org/drawingml/2006/main" xmlns:p="http://schemas.openxmlformats.org/presentationml/2006/main" xmlns:r="http://schemas.openxmlformats.org/officeDocument/2006/relationships">
+  <p:cSld>
+    <p:bg>
+      <p:bgPr>
+        <a:solidFill>
+          <a:srgbClr val="F8F6FB"/>
+        </a:solidFill>
+        <a:effectLst/>
+      </p:bgPr>
+    </p:bg>
+    <p:spTree>
+      <p:nvGrpSpPr>
+        <p:cNvPr id="1" name=""/>
+        <p:cNvGrpSpPr/>
+        <p:nvPr/>
+      </p:nvGrpSpPr>
+      <p:grpSpPr/>
+      <p:sp>
+        <p:nvSpPr>
+          <p:cNvPr id="2" name="Rounded Rectangle 1"/>
+          <p:cNvSpPr/>
+          <p:nvPr/>
+        </p:nvSpPr>
+        <p:spPr>
+          <a:xfrm>
+            <a:off x="685800" y="502920"/>
+            <a:ext cx="3291840" cy="457200"/>
+          </a:xfrm>
+          <a:prstGeom prst="roundRect">
+            <a:avLst>
+              <a:gd name="adj" fmla="val 50000"/>
+            </a:avLst>
+          </a:prstGeom>
+          <a:solidFill>
+            <a:srgbClr val="2B2A4A"/>
+          </a:solidFill>
+          <a:ln>
+            <a:noFill/>
+          </a:ln>
+          <a:effectLst/>
+        </p:spPr>
+        <p:style>
+          <a:lnRef idx="1">
+            <a:schemeClr val="accent1"/>
+          </a:lnRef>
+          <a:fillRef idx="3">
+            <a:schemeClr val="accent1"/>
+          </a:fillRef>
+          <a:effectRef idx="2">
+            <a:schemeClr val="accent1"/>
+          </a:effectRef>
+          <a:fontRef idx="minor">
+            <a:schemeClr val="lt1"/>
+          </a:fontRef>
+        </p:style>
+        <p:txBody>
+          <a:bodyPr rtlCol="0" anchor="ctr" wrap="none" lIns="50800" rIns="50800"/>
+          <a:lstStyle/>
           <a:p>
             <a:pPr algn="ctr"/>
             <a:r>
-              <a:rPr sz="1400">
-                <a:solidFill>
-                  <a:srgbClr val="595959"/>
-                </a:solidFill>
-              </a:rPr>
-              <a:t>Review the matching workbook to consolidate what you have learnt.</a:t>
-            </a:r>
+              <a:rPr sz="1100" b="1">
+                <a:solidFill>
+                  <a:srgbClr val="FFFFFF"/>
+                </a:solidFill>
+                <a:latin typeface="Calibri"/>
+              </a:rPr>
+              <a:t>EXTENDED KNOWLEDGE</a:t>
+            </a:r>
+          </a:p>
+        </p:txBody>
+      </p:sp>
+      <p:sp>
+        <p:nvSpPr>
+          <p:cNvPr id="3" name="TextBox 2"/>
+          <p:cNvSpPr txBox="1"/>
+          <p:nvPr/>
+        </p:nvSpPr>
+        <p:spPr>
+          <a:xfrm>
+            <a:off x="685800" y="1051560"/>
+            <a:ext cx="10607040" cy="822960"/>
+          </a:xfrm>
+          <a:prstGeom prst="rect">
+            <a:avLst/>
+          </a:prstGeom>
+          <a:noFill/>
+        </p:spPr>
+        <p:txBody>
+          <a:bodyPr wrap="square" anchor="t">
+            <a:spAutoFit/>
+          </a:bodyPr>
+          <a:lstStyle/>
+          <a:p>
+            <a:pPr algn="l"/>
+            <a:r>
+              <a:rPr sz="2700" b="1" i="0">
+                <a:solidFill>
+                  <a:srgbClr val="201F33"/>
+                </a:solidFill>
+                <a:latin typeface="Cambria"/>
+              </a:rPr>
+              <a:t>Materials and Manufacturing Processes</a:t>
+            </a:r>
+          </a:p>
+        </p:txBody>
+      </p:sp>
+      <p:sp>
+        <p:nvSpPr>
+          <p:cNvPr id="4" name="Rounded Rectangle 3"/>
+          <p:cNvSpPr/>
+          <p:nvPr/>
+        </p:nvSpPr>
+        <p:spPr>
+          <a:xfrm>
+            <a:off x="685800" y="1874519"/>
+            <a:ext cx="10607040" cy="4526280"/>
+          </a:xfrm>
+          <a:prstGeom prst="roundRect">
+            <a:avLst>
+              <a:gd name="adj" fmla="val 6000"/>
+            </a:avLst>
+          </a:prstGeom>
+          <a:solidFill>
+            <a:srgbClr val="E9E9EC"/>
+          </a:solidFill>
+          <a:ln>
+            <a:noFill/>
+          </a:ln>
+          <a:effectLst/>
+        </p:spPr>
+        <p:style>
+          <a:lnRef idx="1">
+            <a:schemeClr val="accent1"/>
+          </a:lnRef>
+          <a:fillRef idx="3">
+            <a:schemeClr val="accent1"/>
+          </a:fillRef>
+          <a:effectRef idx="2">
+            <a:schemeClr val="accent1"/>
+          </a:effectRef>
+          <a:fontRef idx="minor">
+            <a:schemeClr val="lt1"/>
+          </a:fontRef>
+        </p:style>
+        <p:txBody>
+          <a:bodyPr rtlCol="0" anchor="ctr" lIns="330200" rIns="330200" tIns="254000" bIns="254000" wrap="square"/>
+          <a:lstStyle/>
+          <a:p>
+            <a:pPr algn="ctr" indent="-203200" marL="203200">
+              <a:spcAft>
+                <a:spcPts val="900"/>
+              </a:spcAft>
+              <a:buClr>
+                <a:srgbClr val="2B2A4A"/>
+              </a:buClr>
+              <a:buSzPct val="90000"/>
+              <a:buFont typeface="Arial"/>
+              <a:buChar char="●"/>
+            </a:pPr>
+            <a:r>
+              <a:rPr sz="1500" b="1" i="0">
+                <a:solidFill>
+                  <a:srgbClr val="24233E"/>
+                </a:solidFill>
+                <a:latin typeface="Calibri"/>
+              </a:rPr>
+              <a:t>Common processes worth knowing</a:t>
+            </a:r>
+          </a:p>
+          <a:p>
+            <a:pPr indent="-203200" marL="203200">
+              <a:spcAft>
+                <a:spcPts val="900"/>
+              </a:spcAft>
+              <a:buClr>
+                <a:srgbClr val="2B2A4A"/>
+              </a:buClr>
+              <a:buSzPct val="90000"/>
+              <a:buFont typeface="Arial"/>
+              <a:buChar char="–"/>
+            </a:pPr>
+            <a:r>
+              <a:rPr sz="1350" b="0" i="0">
+                <a:solidFill>
+                  <a:srgbClr val="201F33"/>
+                </a:solidFill>
+                <a:latin typeface="Calibri"/>
+              </a:rPr>
+              <a:t>Injection moulding — mass production of plastic products via molten plastic injected into a mould</a:t>
+            </a:r>
+          </a:p>
+          <a:p>
+            <a:pPr indent="-203200" marL="203200">
+              <a:spcAft>
+                <a:spcPts val="900"/>
+              </a:spcAft>
+              <a:buClr>
+                <a:srgbClr val="2B2A4A"/>
+              </a:buClr>
+              <a:buSzPct val="90000"/>
+              <a:buFont typeface="Arial"/>
+              <a:buChar char="–"/>
+            </a:pPr>
+            <a:r>
+              <a:rPr sz="1350" b="0" i="0">
+                <a:solidFill>
+                  <a:srgbClr val="201F33"/>
+                </a:solidFill>
+                <a:latin typeface="Calibri"/>
+              </a:rPr>
+              <a:t>Offset vs digital printing — offset suits large runs at low unit cost; digital suits short runs and personalisation</a:t>
+            </a:r>
+          </a:p>
+          <a:p>
+            <a:pPr indent="-203200" marL="203200">
+              <a:spcAft>
+                <a:spcPts val="900"/>
+              </a:spcAft>
+              <a:buClr>
+                <a:srgbClr val="2B2A4A"/>
+              </a:buClr>
+              <a:buSzPct val="90000"/>
+              <a:buFont typeface="Arial"/>
+              <a:buChar char="–"/>
+            </a:pPr>
+            <a:r>
+              <a:rPr sz="1350" b="0" i="0">
+                <a:solidFill>
+                  <a:srgbClr val="201F33"/>
+                </a:solidFill>
+                <a:latin typeface="Calibri"/>
+              </a:rPr>
+              <a:t>Laser cutting — precise cutting/engraving of sheet materials, common in packaging prototyping</a:t>
+            </a:r>
+          </a:p>
+          <a:p>
+            <a:pPr indent="-203200" marL="203200">
+              <a:spcAft>
+                <a:spcPts val="900"/>
+              </a:spcAft>
+              <a:buClr>
+                <a:srgbClr val="2B2A4A"/>
+              </a:buClr>
+              <a:buSzPct val="90000"/>
+              <a:buFont typeface="Arial"/>
+              <a:buChar char="–"/>
+            </a:pPr>
+            <a:r>
+              <a:rPr sz="1350" b="0" i="0">
+                <a:solidFill>
+                  <a:srgbClr val="201F33"/>
+                </a:solidFill>
+                <a:latin typeface="Calibri"/>
+              </a:rPr>
+              <a:t>3D printing / additive manufacturing — building objects layer by layer from a digital model</a:t>
+            </a:r>
+          </a:p>
+          <a:p>
+            <a:pPr indent="-203200" marL="203200">
+              <a:spcAft>
+                <a:spcPts val="900"/>
+              </a:spcAft>
+              <a:buClr>
+                <a:srgbClr val="2B2A4A"/>
+              </a:buClr>
+              <a:buSzPct val="90000"/>
+              <a:buFont typeface="Arial"/>
+              <a:buChar char="●"/>
+            </a:pPr>
+            <a:r>
+              <a:rPr sz="1500" b="1" i="0">
+                <a:solidFill>
+                  <a:srgbClr val="24233E"/>
+                </a:solidFill>
+                <a:latin typeface="Calibri"/>
+              </a:rPr>
+              <a:t>Sustainable material choices</a:t>
+            </a:r>
+          </a:p>
+          <a:p>
+            <a:pPr indent="-203200" marL="203200">
+              <a:spcAft>
+                <a:spcPts val="900"/>
+              </a:spcAft>
+              <a:buClr>
+                <a:srgbClr val="2B2A4A"/>
+              </a:buClr>
+              <a:buSzPct val="90000"/>
+              <a:buFont typeface="Arial"/>
+              <a:buChar char="–"/>
+            </a:pPr>
+            <a:r>
+              <a:rPr sz="1350" b="0" i="0">
+                <a:solidFill>
+                  <a:srgbClr val="201F33"/>
+                </a:solidFill>
+                <a:latin typeface="Calibri"/>
+              </a:rPr>
+              <a:t>Recycled and recyclable substrates, biodegradable plastics, FSC-certified paper stock, and designing for minimal material use are all increasingly expected in professional practice and make for strong evaluation discussion points.</a:t>
+            </a:r>
+          </a:p>
+        </p:txBody>
+      </p:sp>
+      <p:sp>
+        <p:nvSpPr>
+          <p:cNvPr id="5" name="Oval 4"/>
+          <p:cNvSpPr/>
+          <p:nvPr/>
+        </p:nvSpPr>
+        <p:spPr>
+          <a:xfrm>
+            <a:off x="10881360" y="5943600"/>
+            <a:ext cx="1005840" cy="1005840"/>
+          </a:xfrm>
+          <a:prstGeom prst="ellipse">
+            <a:avLst/>
+          </a:prstGeom>
+          <a:solidFill>
+            <a:srgbClr val="E6C3D3"/>
+          </a:solidFill>
+          <a:ln>
+            <a:noFill/>
+          </a:ln>
+          <a:effectLst/>
+        </p:spPr>
+        <p:style>
+          <a:lnRef idx="1">
+            <a:schemeClr val="accent1"/>
+          </a:lnRef>
+          <a:fillRef idx="3">
+            <a:schemeClr val="accent1"/>
+          </a:fillRef>
+          <a:effectRef idx="2">
+            <a:schemeClr val="accent1"/>
+          </a:effectRef>
+          <a:fontRef idx="minor">
+            <a:schemeClr val="lt1"/>
+          </a:fontRef>
+        </p:style>
+        <p:txBody>
+          <a:bodyPr rtlCol="0" anchor="ctr"/>
+          <a:lstStyle/>
+          <a:p>
+            <a:pPr algn="ctr"/>
+          </a:p>
+        </p:txBody>
+      </p:sp>
+    </p:spTree>
+  </p:cSld>
+  <p:clrMapOvr>
+    <a:masterClrMapping/>
+  </p:clrMapOvr>
+</p:sld>
+</file>
+
+<file path=ppt/slides/slide18.xml><?xml version="1.0" encoding="utf-8"?>
+<p:sld xmlns:a="http://schemas.openxmlformats.org/drawingml/2006/main" xmlns:p="http://schemas.openxmlformats.org/presentationml/2006/main" xmlns:r="http://schemas.openxmlformats.org/officeDocument/2006/relationships">
+  <p:cSld>
+    <p:bg>
+      <p:bgPr>
+        <a:solidFill>
+          <a:srgbClr val="F8F6FB"/>
+        </a:solidFill>
+        <a:effectLst/>
+      </p:bgPr>
+    </p:bg>
+    <p:spTree>
+      <p:nvGrpSpPr>
+        <p:cNvPr id="1" name=""/>
+        <p:cNvGrpSpPr/>
+        <p:nvPr/>
+      </p:nvGrpSpPr>
+      <p:grpSpPr/>
+      <p:sp>
+        <p:nvSpPr>
+          <p:cNvPr id="2" name="Rounded Rectangle 1"/>
+          <p:cNvSpPr/>
+          <p:nvPr/>
+        </p:nvSpPr>
+        <p:spPr>
+          <a:xfrm>
+            <a:off x="685800" y="502920"/>
+            <a:ext cx="3291840" cy="457200"/>
+          </a:xfrm>
+          <a:prstGeom prst="roundRect">
+            <a:avLst>
+              <a:gd name="adj" fmla="val 50000"/>
+            </a:avLst>
+          </a:prstGeom>
+          <a:solidFill>
+            <a:srgbClr val="2B2A4A"/>
+          </a:solidFill>
+          <a:ln>
+            <a:noFill/>
+          </a:ln>
+          <a:effectLst/>
+        </p:spPr>
+        <p:style>
+          <a:lnRef idx="1">
+            <a:schemeClr val="accent1"/>
+          </a:lnRef>
+          <a:fillRef idx="3">
+            <a:schemeClr val="accent1"/>
+          </a:fillRef>
+          <a:effectRef idx="2">
+            <a:schemeClr val="accent1"/>
+          </a:effectRef>
+          <a:fontRef idx="minor">
+            <a:schemeClr val="lt1"/>
+          </a:fontRef>
+        </p:style>
+        <p:txBody>
+          <a:bodyPr rtlCol="0" anchor="ctr" wrap="none" lIns="50800" rIns="50800"/>
+          <a:lstStyle/>
+          <a:p>
+            <a:pPr algn="ctr"/>
+            <a:r>
+              <a:rPr sz="1100" b="1">
+                <a:solidFill>
+                  <a:srgbClr val="FFFFFF"/>
+                </a:solidFill>
+                <a:latin typeface="Calibri"/>
+              </a:rPr>
+              <a:t>EXTENDED KNOWLEDGE</a:t>
+            </a:r>
+          </a:p>
+        </p:txBody>
+      </p:sp>
+      <p:sp>
+        <p:nvSpPr>
+          <p:cNvPr id="3" name="TextBox 2"/>
+          <p:cNvSpPr txBox="1"/>
+          <p:nvPr/>
+        </p:nvSpPr>
+        <p:spPr>
+          <a:xfrm>
+            <a:off x="685800" y="1051560"/>
+            <a:ext cx="10607040" cy="822960"/>
+          </a:xfrm>
+          <a:prstGeom prst="rect">
+            <a:avLst/>
+          </a:prstGeom>
+          <a:noFill/>
+        </p:spPr>
+        <p:txBody>
+          <a:bodyPr wrap="square" anchor="t">
+            <a:spAutoFit/>
+          </a:bodyPr>
+          <a:lstStyle/>
+          <a:p>
+            <a:pPr algn="l"/>
+            <a:r>
+              <a:rPr sz="2700" b="1" i="0">
+                <a:solidFill>
+                  <a:srgbClr val="201F33"/>
+                </a:solidFill>
+                <a:latin typeface="Cambria"/>
+              </a:rPr>
+              <a:t>Advanced Rendering and Presentation Techniques</a:t>
+            </a:r>
+          </a:p>
+        </p:txBody>
+      </p:sp>
+      <p:sp>
+        <p:nvSpPr>
+          <p:cNvPr id="4" name="Rounded Rectangle 3"/>
+          <p:cNvSpPr/>
+          <p:nvPr/>
+        </p:nvSpPr>
+        <p:spPr>
+          <a:xfrm>
+            <a:off x="685800" y="1874519"/>
+            <a:ext cx="10607040" cy="4526280"/>
+          </a:xfrm>
+          <a:prstGeom prst="roundRect">
+            <a:avLst>
+              <a:gd name="adj" fmla="val 6000"/>
+            </a:avLst>
+          </a:prstGeom>
+          <a:solidFill>
+            <a:srgbClr val="E9E9EC"/>
+          </a:solidFill>
+          <a:ln>
+            <a:noFill/>
+          </a:ln>
+          <a:effectLst/>
+        </p:spPr>
+        <p:style>
+          <a:lnRef idx="1">
+            <a:schemeClr val="accent1"/>
+          </a:lnRef>
+          <a:fillRef idx="3">
+            <a:schemeClr val="accent1"/>
+          </a:fillRef>
+          <a:effectRef idx="2">
+            <a:schemeClr val="accent1"/>
+          </a:effectRef>
+          <a:fontRef idx="minor">
+            <a:schemeClr val="lt1"/>
+          </a:fontRef>
+        </p:style>
+        <p:txBody>
+          <a:bodyPr rtlCol="0" anchor="ctr" lIns="330200" rIns="330200" tIns="254000" bIns="254000" wrap="square"/>
+          <a:lstStyle/>
+          <a:p>
+            <a:pPr algn="ctr" indent="-203200" marL="203200">
+              <a:spcAft>
+                <a:spcPts val="900"/>
+              </a:spcAft>
+              <a:buClr>
+                <a:srgbClr val="2B2A4A"/>
+              </a:buClr>
+              <a:buSzPct val="90000"/>
+              <a:buFont typeface="Arial"/>
+              <a:buChar char="●"/>
+            </a:pPr>
+            <a:r>
+              <a:rPr sz="1500" b="1" i="0">
+                <a:solidFill>
+                  <a:srgbClr val="24233E"/>
+                </a:solidFill>
+                <a:latin typeface="Calibri"/>
+              </a:rPr>
+              <a:t>Manual rendering</a:t>
+            </a:r>
+          </a:p>
+          <a:p>
+            <a:pPr indent="-203200" marL="203200">
+              <a:spcAft>
+                <a:spcPts val="900"/>
+              </a:spcAft>
+              <a:buClr>
+                <a:srgbClr val="2B2A4A"/>
+              </a:buClr>
+              <a:buSzPct val="90000"/>
+              <a:buFont typeface="Arial"/>
+              <a:buChar char="–"/>
+            </a:pPr>
+            <a:r>
+              <a:rPr sz="1350" b="0" i="0">
+                <a:solidFill>
+                  <a:srgbClr val="201F33"/>
+                </a:solidFill>
+                <a:latin typeface="Calibri"/>
+              </a:rPr>
+              <a:t>Layering marker strokes from light to dark builds convincing tone and form</a:t>
+            </a:r>
+          </a:p>
+          <a:p>
+            <a:pPr indent="-203200" marL="203200">
+              <a:spcAft>
+                <a:spcPts val="900"/>
+              </a:spcAft>
+              <a:buClr>
+                <a:srgbClr val="2B2A4A"/>
+              </a:buClr>
+              <a:buSzPct val="90000"/>
+              <a:buFont typeface="Arial"/>
+              <a:buChar char="–"/>
+            </a:pPr>
+            <a:r>
+              <a:rPr sz="1350" b="0" i="0">
+                <a:solidFill>
+                  <a:srgbClr val="201F33"/>
+                </a:solidFill>
+                <a:latin typeface="Calibri"/>
+              </a:rPr>
+              <a:t>A consistent light source direction across a rendering keeps shading believable</a:t>
+            </a:r>
+          </a:p>
+          <a:p>
+            <a:pPr indent="-203200" marL="203200">
+              <a:spcAft>
+                <a:spcPts val="900"/>
+              </a:spcAft>
+              <a:buClr>
+                <a:srgbClr val="2B2A4A"/>
+              </a:buClr>
+              <a:buSzPct val="90000"/>
+              <a:buFont typeface="Arial"/>
+              <a:buChar char="–"/>
+            </a:pPr>
+            <a:r>
+              <a:rPr sz="1350" b="0" i="0">
+                <a:solidFill>
+                  <a:srgbClr val="201F33"/>
+                </a:solidFill>
+                <a:latin typeface="Calibri"/>
+              </a:rPr>
+              <a:t>Photorealistic vs stylised rendering — choose the approach that best suits the brief and audience</a:t>
+            </a:r>
+          </a:p>
+          <a:p>
+            <a:pPr indent="-203200" marL="203200">
+              <a:spcAft>
+                <a:spcPts val="900"/>
+              </a:spcAft>
+              <a:buClr>
+                <a:srgbClr val="2B2A4A"/>
+              </a:buClr>
+              <a:buSzPct val="90000"/>
+              <a:buFont typeface="Arial"/>
+              <a:buChar char="●"/>
+            </a:pPr>
+            <a:r>
+              <a:rPr sz="1500" b="1" i="0">
+                <a:solidFill>
+                  <a:srgbClr val="24233E"/>
+                </a:solidFill>
+                <a:latin typeface="Calibri"/>
+              </a:rPr>
+              <a:t>Digital rendering</a:t>
+            </a:r>
+          </a:p>
+          <a:p>
+            <a:pPr indent="-203200" marL="203200">
+              <a:spcAft>
+                <a:spcPts val="900"/>
+              </a:spcAft>
+              <a:buClr>
+                <a:srgbClr val="2B2A4A"/>
+              </a:buClr>
+              <a:buSzPct val="90000"/>
+              <a:buFont typeface="Arial"/>
+              <a:buChar char="–"/>
+            </a:pPr>
+            <a:r>
+              <a:rPr sz="1350" b="0" i="0">
+                <a:solidFill>
+                  <a:srgbClr val="201F33"/>
+                </a:solidFill>
+                <a:latin typeface="Calibri"/>
+              </a:rPr>
+              <a:t>Basic familiarity with digital mockup techniques (placing a design onto a photographed product/environment) can significantly lift the perceived professionalism of a final presentation.</a:t>
+            </a:r>
+          </a:p>
+        </p:txBody>
+      </p:sp>
+      <p:sp>
+        <p:nvSpPr>
+          <p:cNvPr id="5" name="Oval 4"/>
+          <p:cNvSpPr/>
+          <p:nvPr/>
+        </p:nvSpPr>
+        <p:spPr>
+          <a:xfrm>
+            <a:off x="10881360" y="5943600"/>
+            <a:ext cx="1005840" cy="1005840"/>
+          </a:xfrm>
+          <a:prstGeom prst="ellipse">
+            <a:avLst/>
+          </a:prstGeom>
+          <a:solidFill>
+            <a:srgbClr val="E6C3D3"/>
+          </a:solidFill>
+          <a:ln>
+            <a:noFill/>
+          </a:ln>
+          <a:effectLst/>
+        </p:spPr>
+        <p:style>
+          <a:lnRef idx="1">
+            <a:schemeClr val="accent1"/>
+          </a:lnRef>
+          <a:fillRef idx="3">
+            <a:schemeClr val="accent1"/>
+          </a:fillRef>
+          <a:effectRef idx="2">
+            <a:schemeClr val="accent1"/>
+          </a:effectRef>
+          <a:fontRef idx="minor">
+            <a:schemeClr val="lt1"/>
+          </a:fontRef>
+        </p:style>
+        <p:txBody>
+          <a:bodyPr rtlCol="0" anchor="ctr"/>
+          <a:lstStyle/>
+          <a:p>
+            <a:pPr algn="ctr"/>
+          </a:p>
+        </p:txBody>
+      </p:sp>
+    </p:spTree>
+  </p:cSld>
+  <p:clrMapOvr>
+    <a:masterClrMapping/>
+  </p:clrMapOvr>
+</p:sld>
+</file>
+
+<file path=ppt/slides/slide19.xml><?xml version="1.0" encoding="utf-8"?>
+<p:sld xmlns:a="http://schemas.openxmlformats.org/drawingml/2006/main" xmlns:p="http://schemas.openxmlformats.org/presentationml/2006/main" xmlns:r="http://schemas.openxmlformats.org/officeDocument/2006/relationships">
+  <p:cSld>
+    <p:bg>
+      <p:bgPr>
+        <a:solidFill>
+          <a:srgbClr val="F8F6FB"/>
+        </a:solidFill>
+        <a:effectLst/>
+      </p:bgPr>
+    </p:bg>
+    <p:spTree>
+      <p:nvGrpSpPr>
+        <p:cNvPr id="1" name=""/>
+        <p:cNvGrpSpPr/>
+        <p:nvPr/>
+      </p:nvGrpSpPr>
+      <p:grpSpPr/>
+      <p:sp>
+        <p:nvSpPr>
+          <p:cNvPr id="2" name="Rounded Rectangle 1"/>
+          <p:cNvSpPr/>
+          <p:nvPr/>
+        </p:nvSpPr>
+        <p:spPr>
+          <a:xfrm>
+            <a:off x="685800" y="502920"/>
+            <a:ext cx="3291840" cy="457200"/>
+          </a:xfrm>
+          <a:prstGeom prst="roundRect">
+            <a:avLst>
+              <a:gd name="adj" fmla="val 50000"/>
+            </a:avLst>
+          </a:prstGeom>
+          <a:solidFill>
+            <a:srgbClr val="2B2A4A"/>
+          </a:solidFill>
+          <a:ln>
+            <a:noFill/>
+          </a:ln>
+          <a:effectLst/>
+        </p:spPr>
+        <p:style>
+          <a:lnRef idx="1">
+            <a:schemeClr val="accent1"/>
+          </a:lnRef>
+          <a:fillRef idx="3">
+            <a:schemeClr val="accent1"/>
+          </a:fillRef>
+          <a:effectRef idx="2">
+            <a:schemeClr val="accent1"/>
+          </a:effectRef>
+          <a:fontRef idx="minor">
+            <a:schemeClr val="lt1"/>
+          </a:fontRef>
+        </p:style>
+        <p:txBody>
+          <a:bodyPr rtlCol="0" anchor="ctr" wrap="none" lIns="50800" rIns="50800"/>
+          <a:lstStyle/>
+          <a:p>
+            <a:pPr algn="ctr"/>
+            <a:r>
+              <a:rPr sz="1100" b="1">
+                <a:solidFill>
+                  <a:srgbClr val="FFFFFF"/>
+                </a:solidFill>
+                <a:latin typeface="Calibri"/>
+              </a:rPr>
+              <a:t>EXTENDED KNOWLEDGE</a:t>
+            </a:r>
+          </a:p>
+        </p:txBody>
+      </p:sp>
+      <p:sp>
+        <p:nvSpPr>
+          <p:cNvPr id="3" name="TextBox 2"/>
+          <p:cNvSpPr txBox="1"/>
+          <p:nvPr/>
+        </p:nvSpPr>
+        <p:spPr>
+          <a:xfrm>
+            <a:off x="685800" y="1051560"/>
+            <a:ext cx="10607040" cy="822960"/>
+          </a:xfrm>
+          <a:prstGeom prst="rect">
+            <a:avLst/>
+          </a:prstGeom>
+          <a:noFill/>
+        </p:spPr>
+        <p:txBody>
+          <a:bodyPr wrap="square" anchor="t">
+            <a:spAutoFit/>
+          </a:bodyPr>
+          <a:lstStyle/>
+          <a:p>
+            <a:pPr algn="l"/>
+            <a:r>
+              <a:rPr sz="2700" b="1" i="0">
+                <a:solidFill>
+                  <a:srgbClr val="201F33"/>
+                </a:solidFill>
+                <a:latin typeface="Cambria"/>
+              </a:rPr>
+              <a:t>Folio and Portfolio Presentation</a:t>
+            </a:r>
+          </a:p>
+        </p:txBody>
+      </p:sp>
+      <p:sp>
+        <p:nvSpPr>
+          <p:cNvPr id="4" name="Rounded Rectangle 3"/>
+          <p:cNvSpPr/>
+          <p:nvPr/>
+        </p:nvSpPr>
+        <p:spPr>
+          <a:xfrm>
+            <a:off x="685800" y="1874519"/>
+            <a:ext cx="10607040" cy="4526280"/>
+          </a:xfrm>
+          <a:prstGeom prst="roundRect">
+            <a:avLst>
+              <a:gd name="adj" fmla="val 6000"/>
+            </a:avLst>
+          </a:prstGeom>
+          <a:solidFill>
+            <a:srgbClr val="E9E9EC"/>
+          </a:solidFill>
+          <a:ln>
+            <a:noFill/>
+          </a:ln>
+          <a:effectLst/>
+        </p:spPr>
+        <p:style>
+          <a:lnRef idx="1">
+            <a:schemeClr val="accent1"/>
+          </a:lnRef>
+          <a:fillRef idx="3">
+            <a:schemeClr val="accent1"/>
+          </a:fillRef>
+          <a:effectRef idx="2">
+            <a:schemeClr val="accent1"/>
+          </a:effectRef>
+          <a:fontRef idx="minor">
+            <a:schemeClr val="lt1"/>
+          </a:fontRef>
+        </p:style>
+        <p:txBody>
+          <a:bodyPr rtlCol="0" anchor="ctr" lIns="330200" rIns="330200" tIns="254000" bIns="254000" wrap="square"/>
+          <a:lstStyle/>
+          <a:p>
+            <a:pPr algn="ctr" indent="-203200" marL="203200">
+              <a:spcAft>
+                <a:spcPts val="900"/>
+              </a:spcAft>
+              <a:buClr>
+                <a:srgbClr val="2B2A4A"/>
+              </a:buClr>
+              <a:buSzPct val="90000"/>
+              <a:buFont typeface="Arial"/>
+              <a:buChar char="●"/>
+            </a:pPr>
+            <a:r>
+              <a:rPr sz="1500" b="1" i="0">
+                <a:solidFill>
+                  <a:srgbClr val="24233E"/>
+                </a:solidFill>
+                <a:latin typeface="Calibri"/>
+              </a:rPr>
+              <a:t>Beyond the VCE folio</a:t>
+            </a:r>
+          </a:p>
+          <a:p>
+            <a:pPr indent="-203200" marL="203200">
+              <a:spcAft>
+                <a:spcPts val="900"/>
+              </a:spcAft>
+              <a:buClr>
+                <a:srgbClr val="2B2A4A"/>
+              </a:buClr>
+              <a:buSzPct val="90000"/>
+              <a:buFont typeface="Arial"/>
+              <a:buChar char="–"/>
+            </a:pPr>
+            <a:r>
+              <a:rPr sz="1350" b="0" i="0">
+                <a:solidFill>
+                  <a:srgbClr val="201F33"/>
+                </a:solidFill>
+                <a:latin typeface="Calibri"/>
+              </a:rPr>
+              <a:t>Presentation boards — large-format physical boards used for exhibitions and client pitches</a:t>
+            </a:r>
+          </a:p>
+          <a:p>
+            <a:pPr indent="-203200" marL="203200">
+              <a:spcAft>
+                <a:spcPts val="900"/>
+              </a:spcAft>
+              <a:buClr>
+                <a:srgbClr val="2B2A4A"/>
+              </a:buClr>
+              <a:buSzPct val="90000"/>
+              <a:buFont typeface="Arial"/>
+              <a:buChar char="–"/>
+            </a:pPr>
+            <a:r>
+              <a:rPr sz="1350" b="0" i="0">
+                <a:solidFill>
+                  <a:srgbClr val="201F33"/>
+                </a:solidFill>
+                <a:latin typeface="Calibri"/>
+              </a:rPr>
+              <a:t>Digital portfolios — platforms such as Behance or a personal website for showcasing work beyond school</a:t>
+            </a:r>
+          </a:p>
+          <a:p>
+            <a:pPr indent="-203200" marL="203200">
+              <a:spcAft>
+                <a:spcPts val="900"/>
+              </a:spcAft>
+              <a:buClr>
+                <a:srgbClr val="2B2A4A"/>
+              </a:buClr>
+              <a:buSzPct val="90000"/>
+              <a:buFont typeface="Arial"/>
+              <a:buChar char="–"/>
+            </a:pPr>
+            <a:r>
+              <a:rPr sz="1350" b="0" i="0">
+                <a:solidFill>
+                  <a:srgbClr val="201F33"/>
+                </a:solidFill>
+                <a:latin typeface="Calibri"/>
+              </a:rPr>
+              <a:t>Consistent visual presentation (typography, layout, colour) across folio pages signals professionalism</a:t>
+            </a:r>
+          </a:p>
+        </p:txBody>
+      </p:sp>
+      <p:sp>
+        <p:nvSpPr>
+          <p:cNvPr id="5" name="Oval 4"/>
+          <p:cNvSpPr/>
+          <p:nvPr/>
+        </p:nvSpPr>
+        <p:spPr>
+          <a:xfrm>
+            <a:off x="10881360" y="5943600"/>
+            <a:ext cx="1005840" cy="1005840"/>
+          </a:xfrm>
+          <a:prstGeom prst="ellipse">
+            <a:avLst/>
+          </a:prstGeom>
+          <a:solidFill>
+            <a:srgbClr val="E6C3D3"/>
+          </a:solidFill>
+          <a:ln>
+            <a:noFill/>
+          </a:ln>
+          <a:effectLst/>
+        </p:spPr>
+        <p:style>
+          <a:lnRef idx="1">
+            <a:schemeClr val="accent1"/>
+          </a:lnRef>
+          <a:fillRef idx="3">
+            <a:schemeClr val="accent1"/>
+          </a:fillRef>
+          <a:effectRef idx="2">
+            <a:schemeClr val="accent1"/>
+          </a:effectRef>
+          <a:fontRef idx="minor">
+            <a:schemeClr val="lt1"/>
+          </a:fontRef>
+        </p:style>
+        <p:txBody>
+          <a:bodyPr rtlCol="0" anchor="ctr"/>
+          <a:lstStyle/>
+          <a:p>
+            <a:pPr algn="ctr"/>
           </a:p>
         </p:txBody>
       </p:sp>
@@ -6500,6 +7598,2300 @@
                 <a:latin typeface="Calibri"/>
               </a:rPr>
               <a:t>AOS 1 - Development and Resolution of Designs</a:t>
+            </a:r>
+          </a:p>
+        </p:txBody>
+      </p:sp>
+    </p:spTree>
+  </p:cSld>
+  <p:clrMapOvr>
+    <a:masterClrMapping/>
+  </p:clrMapOvr>
+</p:sld>
+</file>
+
+<file path=ppt/slides/slide20.xml><?xml version="1.0" encoding="utf-8"?>
+<p:sld xmlns:a="http://schemas.openxmlformats.org/drawingml/2006/main" xmlns:p="http://schemas.openxmlformats.org/presentationml/2006/main" xmlns:r="http://schemas.openxmlformats.org/officeDocument/2006/relationships">
+  <p:cSld>
+    <p:bg>
+      <p:bgPr>
+        <a:solidFill>
+          <a:srgbClr val="F8F6FB"/>
+        </a:solidFill>
+        <a:effectLst/>
+      </p:bgPr>
+    </p:bg>
+    <p:spTree>
+      <p:nvGrpSpPr>
+        <p:cNvPr id="1" name=""/>
+        <p:cNvGrpSpPr/>
+        <p:nvPr/>
+      </p:nvGrpSpPr>
+      <p:grpSpPr/>
+      <p:sp>
+        <p:nvSpPr>
+          <p:cNvPr id="2" name="Rounded Rectangle 1"/>
+          <p:cNvSpPr/>
+          <p:nvPr/>
+        </p:nvSpPr>
+        <p:spPr>
+          <a:xfrm>
+            <a:off x="685800" y="502920"/>
+            <a:ext cx="3291840" cy="457200"/>
+          </a:xfrm>
+          <a:prstGeom prst="roundRect">
+            <a:avLst>
+              <a:gd name="adj" fmla="val 50000"/>
+            </a:avLst>
+          </a:prstGeom>
+          <a:solidFill>
+            <a:srgbClr val="2B2A4A"/>
+          </a:solidFill>
+          <a:ln>
+            <a:noFill/>
+          </a:ln>
+          <a:effectLst/>
+        </p:spPr>
+        <p:style>
+          <a:lnRef idx="1">
+            <a:schemeClr val="accent1"/>
+          </a:lnRef>
+          <a:fillRef idx="3">
+            <a:schemeClr val="accent1"/>
+          </a:fillRef>
+          <a:effectRef idx="2">
+            <a:schemeClr val="accent1"/>
+          </a:effectRef>
+          <a:fontRef idx="minor">
+            <a:schemeClr val="lt1"/>
+          </a:fontRef>
+        </p:style>
+        <p:txBody>
+          <a:bodyPr rtlCol="0" anchor="ctr" wrap="none" lIns="50800" rIns="50800"/>
+          <a:lstStyle/>
+          <a:p>
+            <a:pPr algn="ctr"/>
+            <a:r>
+              <a:rPr sz="1100" b="1">
+                <a:solidFill>
+                  <a:srgbClr val="FFFFFF"/>
+                </a:solidFill>
+                <a:latin typeface="Calibri"/>
+              </a:rPr>
+              <a:t>EXTENDED KNOWLEDGE</a:t>
+            </a:r>
+          </a:p>
+        </p:txBody>
+      </p:sp>
+      <p:sp>
+        <p:nvSpPr>
+          <p:cNvPr id="3" name="TextBox 2"/>
+          <p:cNvSpPr txBox="1"/>
+          <p:nvPr/>
+        </p:nvSpPr>
+        <p:spPr>
+          <a:xfrm>
+            <a:off x="685800" y="1051560"/>
+            <a:ext cx="10607040" cy="822960"/>
+          </a:xfrm>
+          <a:prstGeom prst="rect">
+            <a:avLst/>
+          </a:prstGeom>
+          <a:noFill/>
+        </p:spPr>
+        <p:txBody>
+          <a:bodyPr wrap="square" anchor="t">
+            <a:spAutoFit/>
+          </a:bodyPr>
+          <a:lstStyle/>
+          <a:p>
+            <a:pPr algn="l"/>
+            <a:r>
+              <a:rPr sz="2700" b="1" i="0">
+                <a:solidFill>
+                  <a:srgbClr val="201F33"/>
+                </a:solidFill>
+                <a:latin typeface="Cambria"/>
+              </a:rPr>
+              <a:t>Evaluation Frameworks Beyond VCAA</a:t>
+            </a:r>
+          </a:p>
+        </p:txBody>
+      </p:sp>
+      <p:sp>
+        <p:nvSpPr>
+          <p:cNvPr id="4" name="Rounded Rectangle 3"/>
+          <p:cNvSpPr/>
+          <p:nvPr/>
+        </p:nvSpPr>
+        <p:spPr>
+          <a:xfrm>
+            <a:off x="685800" y="1874519"/>
+            <a:ext cx="10607040" cy="4526280"/>
+          </a:xfrm>
+          <a:prstGeom prst="roundRect">
+            <a:avLst>
+              <a:gd name="adj" fmla="val 6000"/>
+            </a:avLst>
+          </a:prstGeom>
+          <a:solidFill>
+            <a:srgbClr val="E9E9EC"/>
+          </a:solidFill>
+          <a:ln>
+            <a:noFill/>
+          </a:ln>
+          <a:effectLst/>
+        </p:spPr>
+        <p:style>
+          <a:lnRef idx="1">
+            <a:schemeClr val="accent1"/>
+          </a:lnRef>
+          <a:fillRef idx="3">
+            <a:schemeClr val="accent1"/>
+          </a:fillRef>
+          <a:effectRef idx="2">
+            <a:schemeClr val="accent1"/>
+          </a:effectRef>
+          <a:fontRef idx="minor">
+            <a:schemeClr val="lt1"/>
+          </a:fontRef>
+        </p:style>
+        <p:txBody>
+          <a:bodyPr rtlCol="0" anchor="ctr" lIns="330200" rIns="330200" tIns="254000" bIns="254000" wrap="square"/>
+          <a:lstStyle/>
+          <a:p>
+            <a:pPr algn="ctr" indent="-203200" marL="203200">
+              <a:spcAft>
+                <a:spcPts val="900"/>
+              </a:spcAft>
+              <a:buClr>
+                <a:srgbClr val="2B2A4A"/>
+              </a:buClr>
+              <a:buSzPct val="90000"/>
+              <a:buFont typeface="Arial"/>
+              <a:buChar char="●"/>
+            </a:pPr>
+            <a:r>
+              <a:rPr sz="1500" b="1" i="0">
+                <a:solidFill>
+                  <a:srgbClr val="24233E"/>
+                </a:solidFill>
+                <a:latin typeface="Calibri"/>
+              </a:rPr>
+              <a:t>Methods used in industry</a:t>
+            </a:r>
+          </a:p>
+          <a:p>
+            <a:pPr indent="-203200" marL="203200">
+              <a:spcAft>
+                <a:spcPts val="900"/>
+              </a:spcAft>
+              <a:buClr>
+                <a:srgbClr val="2B2A4A"/>
+              </a:buClr>
+              <a:buSzPct val="90000"/>
+              <a:buFont typeface="Arial"/>
+              <a:buChar char="–"/>
+            </a:pPr>
+            <a:r>
+              <a:rPr sz="1350" b="0" i="0">
+                <a:solidFill>
+                  <a:srgbClr val="201F33"/>
+                </a:solidFill>
+                <a:latin typeface="Calibri"/>
+              </a:rPr>
+              <a:t>Heuristic evaluation — assessing a design against established usability principles</a:t>
+            </a:r>
+          </a:p>
+          <a:p>
+            <a:pPr indent="-203200" marL="203200">
+              <a:spcAft>
+                <a:spcPts val="900"/>
+              </a:spcAft>
+              <a:buClr>
+                <a:srgbClr val="2B2A4A"/>
+              </a:buClr>
+              <a:buSzPct val="90000"/>
+              <a:buFont typeface="Arial"/>
+              <a:buChar char="–"/>
+            </a:pPr>
+            <a:r>
+              <a:rPr sz="1350" b="0" i="0">
+                <a:solidFill>
+                  <a:srgbClr val="201F33"/>
+                </a:solidFill>
+                <a:latin typeface="Calibri"/>
+              </a:rPr>
+              <a:t>A/B testing — comparing two versions of a design with real users to see which performs better</a:t>
+            </a:r>
+          </a:p>
+          <a:p>
+            <a:pPr indent="-203200" marL="203200">
+              <a:spcAft>
+                <a:spcPts val="900"/>
+              </a:spcAft>
+              <a:buClr>
+                <a:srgbClr val="2B2A4A"/>
+              </a:buClr>
+              <a:buSzPct val="90000"/>
+              <a:buFont typeface="Arial"/>
+              <a:buChar char="–"/>
+            </a:pPr>
+            <a:r>
+              <a:rPr sz="1350" b="0" i="0">
+                <a:solidFill>
+                  <a:srgbClr val="201F33"/>
+                </a:solidFill>
+                <a:latin typeface="Calibri"/>
+              </a:rPr>
+              <a:t>'I like / I wish / What if' — a simple, structured feedback framework for peer critique</a:t>
+            </a:r>
+          </a:p>
+        </p:txBody>
+      </p:sp>
+      <p:sp>
+        <p:nvSpPr>
+          <p:cNvPr id="5" name="Oval 4"/>
+          <p:cNvSpPr/>
+          <p:nvPr/>
+        </p:nvSpPr>
+        <p:spPr>
+          <a:xfrm>
+            <a:off x="10881360" y="5943600"/>
+            <a:ext cx="1005840" cy="1005840"/>
+          </a:xfrm>
+          <a:prstGeom prst="ellipse">
+            <a:avLst/>
+          </a:prstGeom>
+          <a:solidFill>
+            <a:srgbClr val="E6C3D3"/>
+          </a:solidFill>
+          <a:ln>
+            <a:noFill/>
+          </a:ln>
+          <a:effectLst/>
+        </p:spPr>
+        <p:style>
+          <a:lnRef idx="1">
+            <a:schemeClr val="accent1"/>
+          </a:lnRef>
+          <a:fillRef idx="3">
+            <a:schemeClr val="accent1"/>
+          </a:fillRef>
+          <a:effectRef idx="2">
+            <a:schemeClr val="accent1"/>
+          </a:effectRef>
+          <a:fontRef idx="minor">
+            <a:schemeClr val="lt1"/>
+          </a:fontRef>
+        </p:style>
+        <p:txBody>
+          <a:bodyPr rtlCol="0" anchor="ctr"/>
+          <a:lstStyle/>
+          <a:p>
+            <a:pPr algn="ctr"/>
+          </a:p>
+        </p:txBody>
+      </p:sp>
+    </p:spTree>
+  </p:cSld>
+  <p:clrMapOvr>
+    <a:masterClrMapping/>
+  </p:clrMapOvr>
+</p:sld>
+</file>
+
+<file path=ppt/slides/slide21.xml><?xml version="1.0" encoding="utf-8"?>
+<p:sld xmlns:a="http://schemas.openxmlformats.org/drawingml/2006/main" xmlns:p="http://schemas.openxmlformats.org/presentationml/2006/main" xmlns:r="http://schemas.openxmlformats.org/officeDocument/2006/relationships">
+  <p:cSld>
+    <p:bg>
+      <p:bgPr>
+        <a:solidFill>
+          <a:srgbClr val="F8F6FB"/>
+        </a:solidFill>
+        <a:effectLst/>
+      </p:bgPr>
+    </p:bg>
+    <p:spTree>
+      <p:nvGrpSpPr>
+        <p:cNvPr id="1" name=""/>
+        <p:cNvGrpSpPr/>
+        <p:nvPr/>
+      </p:nvGrpSpPr>
+      <p:grpSpPr/>
+      <p:sp>
+        <p:nvSpPr>
+          <p:cNvPr id="2" name="Rounded Rectangle 1"/>
+          <p:cNvSpPr/>
+          <p:nvPr/>
+        </p:nvSpPr>
+        <p:spPr>
+          <a:xfrm>
+            <a:off x="685800" y="502920"/>
+            <a:ext cx="3291840" cy="457200"/>
+          </a:xfrm>
+          <a:prstGeom prst="roundRect">
+            <a:avLst>
+              <a:gd name="adj" fmla="val 50000"/>
+            </a:avLst>
+          </a:prstGeom>
+          <a:solidFill>
+            <a:srgbClr val="2B2A4A"/>
+          </a:solidFill>
+          <a:ln>
+            <a:noFill/>
+          </a:ln>
+          <a:effectLst/>
+        </p:spPr>
+        <p:style>
+          <a:lnRef idx="1">
+            <a:schemeClr val="accent1"/>
+          </a:lnRef>
+          <a:fillRef idx="3">
+            <a:schemeClr val="accent1"/>
+          </a:fillRef>
+          <a:effectRef idx="2">
+            <a:schemeClr val="accent1"/>
+          </a:effectRef>
+          <a:fontRef idx="minor">
+            <a:schemeClr val="lt1"/>
+          </a:fontRef>
+        </p:style>
+        <p:txBody>
+          <a:bodyPr rtlCol="0" anchor="ctr" wrap="none" lIns="50800" rIns="50800"/>
+          <a:lstStyle/>
+          <a:p>
+            <a:pPr algn="ctr"/>
+            <a:r>
+              <a:rPr sz="1100" b="1">
+                <a:solidFill>
+                  <a:srgbClr val="FFFFFF"/>
+                </a:solidFill>
+                <a:latin typeface="Calibri"/>
+              </a:rPr>
+              <a:t>EXTENDED KNOWLEDGE</a:t>
+            </a:r>
+          </a:p>
+        </p:txBody>
+      </p:sp>
+      <p:sp>
+        <p:nvSpPr>
+          <p:cNvPr id="3" name="TextBox 2"/>
+          <p:cNvSpPr txBox="1"/>
+          <p:nvPr/>
+        </p:nvSpPr>
+        <p:spPr>
+          <a:xfrm>
+            <a:off x="685800" y="1051560"/>
+            <a:ext cx="10607040" cy="822960"/>
+          </a:xfrm>
+          <a:prstGeom prst="rect">
+            <a:avLst/>
+          </a:prstGeom>
+          <a:noFill/>
+        </p:spPr>
+        <p:txBody>
+          <a:bodyPr wrap="square" anchor="t">
+            <a:spAutoFit/>
+          </a:bodyPr>
+          <a:lstStyle/>
+          <a:p>
+            <a:pPr algn="l"/>
+            <a:r>
+              <a:rPr sz="2700" b="1" i="0">
+                <a:solidFill>
+                  <a:srgbClr val="201F33"/>
+                </a:solidFill>
+                <a:latin typeface="Cambria"/>
+              </a:rPr>
+              <a:t>Career Pathways in Design</a:t>
+            </a:r>
+          </a:p>
+        </p:txBody>
+      </p:sp>
+      <p:sp>
+        <p:nvSpPr>
+          <p:cNvPr id="4" name="Rounded Rectangle 3"/>
+          <p:cNvSpPr/>
+          <p:nvPr/>
+        </p:nvSpPr>
+        <p:spPr>
+          <a:xfrm>
+            <a:off x="685800" y="1874519"/>
+            <a:ext cx="10607040" cy="4526280"/>
+          </a:xfrm>
+          <a:prstGeom prst="roundRect">
+            <a:avLst>
+              <a:gd name="adj" fmla="val 6000"/>
+            </a:avLst>
+          </a:prstGeom>
+          <a:solidFill>
+            <a:srgbClr val="E9E9EC"/>
+          </a:solidFill>
+          <a:ln>
+            <a:noFill/>
+          </a:ln>
+          <a:effectLst/>
+        </p:spPr>
+        <p:style>
+          <a:lnRef idx="1">
+            <a:schemeClr val="accent1"/>
+          </a:lnRef>
+          <a:fillRef idx="3">
+            <a:schemeClr val="accent1"/>
+          </a:fillRef>
+          <a:effectRef idx="2">
+            <a:schemeClr val="accent1"/>
+          </a:effectRef>
+          <a:fontRef idx="minor">
+            <a:schemeClr val="lt1"/>
+          </a:fontRef>
+        </p:style>
+        <p:txBody>
+          <a:bodyPr rtlCol="0" anchor="ctr" lIns="330200" rIns="330200" tIns="254000" bIns="254000" wrap="square"/>
+          <a:lstStyle/>
+          <a:p>
+            <a:pPr algn="ctr" indent="-203200" marL="203200">
+              <a:spcAft>
+                <a:spcPts val="900"/>
+              </a:spcAft>
+              <a:buClr>
+                <a:srgbClr val="2B2A4A"/>
+              </a:buClr>
+              <a:buSzPct val="90000"/>
+              <a:buFont typeface="Arial"/>
+              <a:buChar char="●"/>
+            </a:pPr>
+            <a:r>
+              <a:rPr sz="1500" b="1" i="0">
+                <a:solidFill>
+                  <a:srgbClr val="24233E"/>
+                </a:solidFill>
+                <a:latin typeface="Calibri"/>
+              </a:rPr>
+              <a:t>Where VCD can lead</a:t>
+            </a:r>
+          </a:p>
+          <a:p>
+            <a:pPr indent="-203200" marL="203200">
+              <a:spcAft>
+                <a:spcPts val="900"/>
+              </a:spcAft>
+              <a:buClr>
+                <a:srgbClr val="2B2A4A"/>
+              </a:buClr>
+              <a:buSzPct val="90000"/>
+              <a:buFont typeface="Arial"/>
+              <a:buChar char="–"/>
+            </a:pPr>
+            <a:r>
+              <a:rPr sz="1350" b="0" i="0">
+                <a:solidFill>
+                  <a:srgbClr val="201F33"/>
+                </a:solidFill>
+                <a:latin typeface="Calibri"/>
+              </a:rPr>
+              <a:t>University pathways — Bachelor of Design/Communication Design/Industrial Design programs</a:t>
+            </a:r>
+          </a:p>
+          <a:p>
+            <a:pPr indent="-203200" marL="203200">
+              <a:spcAft>
+                <a:spcPts val="900"/>
+              </a:spcAft>
+              <a:buClr>
+                <a:srgbClr val="2B2A4A"/>
+              </a:buClr>
+              <a:buSzPct val="90000"/>
+              <a:buFont typeface="Arial"/>
+              <a:buChar char="–"/>
+            </a:pPr>
+            <a:r>
+              <a:rPr sz="1350" b="0" i="0">
+                <a:solidFill>
+                  <a:srgbClr val="201F33"/>
+                </a:solidFill>
+                <a:latin typeface="Calibri"/>
+              </a:rPr>
+              <a:t>TAFE and apprenticeship pathways into trades connected to design (signage, cabinetmaking, print)</a:t>
+            </a:r>
+          </a:p>
+          <a:p>
+            <a:pPr indent="-203200" marL="203200">
+              <a:spcAft>
+                <a:spcPts val="900"/>
+              </a:spcAft>
+              <a:buClr>
+                <a:srgbClr val="2B2A4A"/>
+              </a:buClr>
+              <a:buSzPct val="90000"/>
+              <a:buFont typeface="Arial"/>
+              <a:buChar char="–"/>
+            </a:pPr>
+            <a:r>
+              <a:rPr sz="1350" b="0" i="0">
+                <a:solidFill>
+                  <a:srgbClr val="201F33"/>
+                </a:solidFill>
+                <a:latin typeface="Calibri"/>
+              </a:rPr>
+              <a:t>Industry roles — graphic designer, UX/UI designer, industrial designer, exhibition designer, art director</a:t>
+            </a:r>
+          </a:p>
+          <a:p>
+            <a:pPr indent="-203200" marL="203200">
+              <a:spcAft>
+                <a:spcPts val="900"/>
+              </a:spcAft>
+              <a:buClr>
+                <a:srgbClr val="2B2A4A"/>
+              </a:buClr>
+              <a:buSzPct val="90000"/>
+              <a:buFont typeface="Arial"/>
+              <a:buChar char="●"/>
+            </a:pPr>
+            <a:r>
+              <a:rPr sz="1500" b="1" i="0">
+                <a:solidFill>
+                  <a:srgbClr val="24233E"/>
+                </a:solidFill>
+                <a:latin typeface="Calibri"/>
+              </a:rPr>
+              <a:t>Tertiary folio requirements</a:t>
+            </a:r>
+          </a:p>
+          <a:p>
+            <a:pPr indent="-203200" marL="203200">
+              <a:spcAft>
+                <a:spcPts val="900"/>
+              </a:spcAft>
+              <a:buClr>
+                <a:srgbClr val="2B2A4A"/>
+              </a:buClr>
+              <a:buSzPct val="90000"/>
+              <a:buFont typeface="Arial"/>
+              <a:buChar char="–"/>
+            </a:pPr>
+            <a:r>
+              <a:rPr sz="1350" b="0" i="0">
+                <a:solidFill>
+                  <a:srgbClr val="201F33"/>
+                </a:solidFill>
+                <a:latin typeface="Calibri"/>
+              </a:rPr>
+              <a:t>Many design degrees require a submitted folio as part of entry — the analytical and process-documentation habits built in VCE VCD directly prepare students for this.</a:t>
+            </a:r>
+          </a:p>
+        </p:txBody>
+      </p:sp>
+      <p:sp>
+        <p:nvSpPr>
+          <p:cNvPr id="5" name="Oval 4"/>
+          <p:cNvSpPr/>
+          <p:nvPr/>
+        </p:nvSpPr>
+        <p:spPr>
+          <a:xfrm>
+            <a:off x="10881360" y="5943600"/>
+            <a:ext cx="1005840" cy="1005840"/>
+          </a:xfrm>
+          <a:prstGeom prst="ellipse">
+            <a:avLst/>
+          </a:prstGeom>
+          <a:solidFill>
+            <a:srgbClr val="E6C3D3"/>
+          </a:solidFill>
+          <a:ln>
+            <a:noFill/>
+          </a:ln>
+          <a:effectLst/>
+        </p:spPr>
+        <p:style>
+          <a:lnRef idx="1">
+            <a:schemeClr val="accent1"/>
+          </a:lnRef>
+          <a:fillRef idx="3">
+            <a:schemeClr val="accent1"/>
+          </a:fillRef>
+          <a:effectRef idx="2">
+            <a:schemeClr val="accent1"/>
+          </a:effectRef>
+          <a:fontRef idx="minor">
+            <a:schemeClr val="lt1"/>
+          </a:fontRef>
+        </p:style>
+        <p:txBody>
+          <a:bodyPr rtlCol="0" anchor="ctr"/>
+          <a:lstStyle/>
+          <a:p>
+            <a:pPr algn="ctr"/>
+          </a:p>
+        </p:txBody>
+      </p:sp>
+    </p:spTree>
+  </p:cSld>
+  <p:clrMapOvr>
+    <a:masterClrMapping/>
+  </p:clrMapOvr>
+</p:sld>
+</file>
+
+<file path=ppt/slides/slide22.xml><?xml version="1.0" encoding="utf-8"?>
+<p:sld xmlns:a="http://schemas.openxmlformats.org/drawingml/2006/main" xmlns:p="http://schemas.openxmlformats.org/presentationml/2006/main" xmlns:r="http://schemas.openxmlformats.org/officeDocument/2006/relationships">
+  <p:cSld>
+    <p:bg>
+      <p:bgPr>
+        <a:solidFill>
+          <a:srgbClr val="F8F6FB"/>
+        </a:solidFill>
+        <a:effectLst/>
+      </p:bgPr>
+    </p:bg>
+    <p:spTree>
+      <p:nvGrpSpPr>
+        <p:cNvPr id="1" name=""/>
+        <p:cNvGrpSpPr/>
+        <p:nvPr/>
+      </p:nvGrpSpPr>
+      <p:grpSpPr/>
+      <p:sp>
+        <p:nvSpPr>
+          <p:cNvPr id="2" name="Rounded Rectangle 1"/>
+          <p:cNvSpPr/>
+          <p:nvPr/>
+        </p:nvSpPr>
+        <p:spPr>
+          <a:xfrm>
+            <a:off x="685800" y="502920"/>
+            <a:ext cx="3291840" cy="457200"/>
+          </a:xfrm>
+          <a:prstGeom prst="roundRect">
+            <a:avLst>
+              <a:gd name="adj" fmla="val 50000"/>
+            </a:avLst>
+          </a:prstGeom>
+          <a:solidFill>
+            <a:srgbClr val="2B2A4A"/>
+          </a:solidFill>
+          <a:ln>
+            <a:noFill/>
+          </a:ln>
+          <a:effectLst/>
+        </p:spPr>
+        <p:style>
+          <a:lnRef idx="1">
+            <a:schemeClr val="accent1"/>
+          </a:lnRef>
+          <a:fillRef idx="3">
+            <a:schemeClr val="accent1"/>
+          </a:fillRef>
+          <a:effectRef idx="2">
+            <a:schemeClr val="accent1"/>
+          </a:effectRef>
+          <a:fontRef idx="minor">
+            <a:schemeClr val="lt1"/>
+          </a:fontRef>
+        </p:style>
+        <p:txBody>
+          <a:bodyPr rtlCol="0" anchor="ctr" wrap="none" lIns="50800" rIns="50800"/>
+          <a:lstStyle/>
+          <a:p>
+            <a:pPr algn="ctr"/>
+            <a:r>
+              <a:rPr sz="1100" b="1">
+                <a:solidFill>
+                  <a:srgbClr val="FFFFFF"/>
+                </a:solidFill>
+                <a:latin typeface="Calibri"/>
+              </a:rPr>
+              <a:t>EXTENDED KNOWLEDGE</a:t>
+            </a:r>
+          </a:p>
+        </p:txBody>
+      </p:sp>
+      <p:sp>
+        <p:nvSpPr>
+          <p:cNvPr id="3" name="TextBox 2"/>
+          <p:cNvSpPr txBox="1"/>
+          <p:nvPr/>
+        </p:nvSpPr>
+        <p:spPr>
+          <a:xfrm>
+            <a:off x="685800" y="1051560"/>
+            <a:ext cx="10607040" cy="822960"/>
+          </a:xfrm>
+          <a:prstGeom prst="rect">
+            <a:avLst/>
+          </a:prstGeom>
+          <a:noFill/>
+        </p:spPr>
+        <p:txBody>
+          <a:bodyPr wrap="square" anchor="t">
+            <a:spAutoFit/>
+          </a:bodyPr>
+          <a:lstStyle/>
+          <a:p>
+            <a:pPr algn="l"/>
+            <a:r>
+              <a:rPr sz="2700" b="1" i="0">
+                <a:solidFill>
+                  <a:srgbClr val="201F33"/>
+                </a:solidFill>
+                <a:latin typeface="Cambria"/>
+              </a:rPr>
+              <a:t>Exam Preparation Strategies</a:t>
+            </a:r>
+          </a:p>
+        </p:txBody>
+      </p:sp>
+      <p:sp>
+        <p:nvSpPr>
+          <p:cNvPr id="4" name="Rounded Rectangle 3"/>
+          <p:cNvSpPr/>
+          <p:nvPr/>
+        </p:nvSpPr>
+        <p:spPr>
+          <a:xfrm>
+            <a:off x="685800" y="1874519"/>
+            <a:ext cx="10607040" cy="4526280"/>
+          </a:xfrm>
+          <a:prstGeom prst="roundRect">
+            <a:avLst>
+              <a:gd name="adj" fmla="val 6000"/>
+            </a:avLst>
+          </a:prstGeom>
+          <a:solidFill>
+            <a:srgbClr val="E9E9EC"/>
+          </a:solidFill>
+          <a:ln>
+            <a:noFill/>
+          </a:ln>
+          <a:effectLst/>
+        </p:spPr>
+        <p:style>
+          <a:lnRef idx="1">
+            <a:schemeClr val="accent1"/>
+          </a:lnRef>
+          <a:fillRef idx="3">
+            <a:schemeClr val="accent1"/>
+          </a:fillRef>
+          <a:effectRef idx="2">
+            <a:schemeClr val="accent1"/>
+          </a:effectRef>
+          <a:fontRef idx="minor">
+            <a:schemeClr val="lt1"/>
+          </a:fontRef>
+        </p:style>
+        <p:txBody>
+          <a:bodyPr rtlCol="0" anchor="ctr" lIns="330200" rIns="330200" tIns="254000" bIns="254000" wrap="square"/>
+          <a:lstStyle/>
+          <a:p>
+            <a:pPr algn="ctr" indent="-203200" marL="203200">
+              <a:spcAft>
+                <a:spcPts val="900"/>
+              </a:spcAft>
+              <a:buClr>
+                <a:srgbClr val="2B2A4A"/>
+              </a:buClr>
+              <a:buSzPct val="90000"/>
+              <a:buFont typeface="Arial"/>
+              <a:buChar char="●"/>
+            </a:pPr>
+            <a:r>
+              <a:rPr sz="1500" b="1" i="0">
+                <a:solidFill>
+                  <a:srgbClr val="24233E"/>
+                </a:solidFill>
+                <a:latin typeface="Calibri"/>
+              </a:rPr>
+              <a:t>Revising effectively</a:t>
+            </a:r>
+          </a:p>
+          <a:p>
+            <a:pPr indent="-203200" marL="203200">
+              <a:spcAft>
+                <a:spcPts val="900"/>
+              </a:spcAft>
+              <a:buClr>
+                <a:srgbClr val="2B2A4A"/>
+              </a:buClr>
+              <a:buSzPct val="90000"/>
+              <a:buFont typeface="Arial"/>
+              <a:buChar char="–"/>
+            </a:pPr>
+            <a:r>
+              <a:rPr sz="1350" b="0" i="0">
+                <a:solidFill>
+                  <a:srgbClr val="201F33"/>
+                </a:solidFill>
+                <a:latin typeface="Calibri"/>
+              </a:rPr>
+              <a:t>Revisit the command word glossary (identify, describe, explain, analyse, discuss, evaluate)</a:t>
+            </a:r>
+          </a:p>
+          <a:p>
+            <a:pPr indent="-203200" marL="203200">
+              <a:spcAft>
+                <a:spcPts val="900"/>
+              </a:spcAft>
+              <a:buClr>
+                <a:srgbClr val="2B2A4A"/>
+              </a:buClr>
+              <a:buSzPct val="90000"/>
+              <a:buFont typeface="Arial"/>
+              <a:buChar char="–"/>
+            </a:pPr>
+            <a:r>
+              <a:rPr sz="1350" b="0" i="0">
+                <a:solidFill>
+                  <a:srgbClr val="201F33"/>
+                </a:solidFill>
+                <a:latin typeface="Calibri"/>
+              </a:rPr>
+              <a:t>Practise full past exam papers under timed conditions, not just isolated questions</a:t>
+            </a:r>
+          </a:p>
+          <a:p>
+            <a:pPr indent="-203200" marL="203200">
+              <a:spcAft>
+                <a:spcPts val="900"/>
+              </a:spcAft>
+              <a:buClr>
+                <a:srgbClr val="2B2A4A"/>
+              </a:buClr>
+              <a:buSzPct val="90000"/>
+              <a:buFont typeface="Arial"/>
+              <a:buChar char="–"/>
+            </a:pPr>
+            <a:r>
+              <a:rPr sz="1350" b="0" i="0">
+                <a:solidFill>
+                  <a:srgbClr val="201F33"/>
+                </a:solidFill>
+                <a:latin typeface="Calibri"/>
+              </a:rPr>
+              <a:t>Review Unit 3 &amp; 4 key knowledge systematically rather than only re-reading notes passively</a:t>
+            </a:r>
+          </a:p>
+          <a:p>
+            <a:pPr indent="-203200" marL="203200">
+              <a:spcAft>
+                <a:spcPts val="900"/>
+              </a:spcAft>
+              <a:buClr>
+                <a:srgbClr val="2B2A4A"/>
+              </a:buClr>
+              <a:buSzPct val="90000"/>
+              <a:buFont typeface="Arial"/>
+              <a:buChar char="–"/>
+            </a:pPr>
+            <a:r>
+              <a:rPr sz="1350" b="0" i="0">
+                <a:solidFill>
+                  <a:srgbClr val="201F33"/>
+                </a:solidFill>
+                <a:latin typeface="Calibri"/>
+              </a:rPr>
+              <a:t>Time-box each exam question during practice so pacing becomes automatic</a:t>
+            </a:r>
+          </a:p>
+        </p:txBody>
+      </p:sp>
+      <p:sp>
+        <p:nvSpPr>
+          <p:cNvPr id="5" name="Oval 4"/>
+          <p:cNvSpPr/>
+          <p:nvPr/>
+        </p:nvSpPr>
+        <p:spPr>
+          <a:xfrm>
+            <a:off x="10881360" y="5943600"/>
+            <a:ext cx="1005840" cy="1005840"/>
+          </a:xfrm>
+          <a:prstGeom prst="ellipse">
+            <a:avLst/>
+          </a:prstGeom>
+          <a:solidFill>
+            <a:srgbClr val="E6C3D3"/>
+          </a:solidFill>
+          <a:ln>
+            <a:noFill/>
+          </a:ln>
+          <a:effectLst/>
+        </p:spPr>
+        <p:style>
+          <a:lnRef idx="1">
+            <a:schemeClr val="accent1"/>
+          </a:lnRef>
+          <a:fillRef idx="3">
+            <a:schemeClr val="accent1"/>
+          </a:fillRef>
+          <a:effectRef idx="2">
+            <a:schemeClr val="accent1"/>
+          </a:effectRef>
+          <a:fontRef idx="minor">
+            <a:schemeClr val="lt1"/>
+          </a:fontRef>
+        </p:style>
+        <p:txBody>
+          <a:bodyPr rtlCol="0" anchor="ctr"/>
+          <a:lstStyle/>
+          <a:p>
+            <a:pPr algn="ctr"/>
+          </a:p>
+        </p:txBody>
+      </p:sp>
+    </p:spTree>
+  </p:cSld>
+  <p:clrMapOvr>
+    <a:masterClrMapping/>
+  </p:clrMapOvr>
+</p:sld>
+</file>
+
+<file path=ppt/slides/slide23.xml><?xml version="1.0" encoding="utf-8"?>
+<p:sld xmlns:a="http://schemas.openxmlformats.org/drawingml/2006/main" xmlns:p="http://schemas.openxmlformats.org/presentationml/2006/main" xmlns:r="http://schemas.openxmlformats.org/officeDocument/2006/relationships">
+  <p:cSld>
+    <p:bg>
+      <p:bgPr>
+        <a:solidFill>
+          <a:srgbClr val="2B2A4A"/>
+        </a:solidFill>
+        <a:effectLst/>
+      </p:bgPr>
+    </p:bg>
+    <p:spTree>
+      <p:nvGrpSpPr>
+        <p:cNvPr id="1" name=""/>
+        <p:cNvGrpSpPr/>
+        <p:nvPr/>
+      </p:nvGrpSpPr>
+      <p:grpSpPr/>
+      <p:sp>
+        <p:nvSpPr>
+          <p:cNvPr id="2" name="Oval 1"/>
+          <p:cNvSpPr/>
+          <p:nvPr/>
+        </p:nvSpPr>
+        <p:spPr>
+          <a:xfrm>
+            <a:off x="9692640" y="-914400"/>
+            <a:ext cx="2926080" cy="2926080"/>
+          </a:xfrm>
+          <a:prstGeom prst="ellipse">
+            <a:avLst/>
+          </a:prstGeom>
+          <a:solidFill>
+            <a:srgbClr val="252441"/>
+          </a:solidFill>
+          <a:ln>
+            <a:noFill/>
+          </a:ln>
+          <a:effectLst/>
+        </p:spPr>
+        <p:style>
+          <a:lnRef idx="1">
+            <a:schemeClr val="accent1"/>
+          </a:lnRef>
+          <a:fillRef idx="3">
+            <a:schemeClr val="accent1"/>
+          </a:fillRef>
+          <a:effectRef idx="2">
+            <a:schemeClr val="accent1"/>
+          </a:effectRef>
+          <a:fontRef idx="minor">
+            <a:schemeClr val="lt1"/>
+          </a:fontRef>
+        </p:style>
+        <p:txBody>
+          <a:bodyPr rtlCol="0" anchor="ctr"/>
+          <a:lstStyle/>
+          <a:p>
+            <a:pPr algn="ctr"/>
+          </a:p>
+        </p:txBody>
+      </p:sp>
+      <p:sp>
+        <p:nvSpPr>
+          <p:cNvPr id="3" name="Oval 2"/>
+          <p:cNvSpPr/>
+          <p:nvPr/>
+        </p:nvSpPr>
+        <p:spPr>
+          <a:xfrm>
+            <a:off x="-914400" y="4937760"/>
+            <a:ext cx="2377440" cy="2377440"/>
+          </a:xfrm>
+          <a:prstGeom prst="ellipse">
+            <a:avLst/>
+          </a:prstGeom>
+          <a:solidFill>
+            <a:srgbClr val="252441"/>
+          </a:solidFill>
+          <a:ln>
+            <a:noFill/>
+          </a:ln>
+          <a:effectLst/>
+        </p:spPr>
+        <p:style>
+          <a:lnRef idx="1">
+            <a:schemeClr val="accent1"/>
+          </a:lnRef>
+          <a:fillRef idx="3">
+            <a:schemeClr val="accent1"/>
+          </a:fillRef>
+          <a:effectRef idx="2">
+            <a:schemeClr val="accent1"/>
+          </a:effectRef>
+          <a:fontRef idx="minor">
+            <a:schemeClr val="lt1"/>
+          </a:fontRef>
+        </p:style>
+        <p:txBody>
+          <a:bodyPr rtlCol="0" anchor="ctr"/>
+          <a:lstStyle/>
+          <a:p>
+            <a:pPr algn="ctr"/>
+          </a:p>
+        </p:txBody>
+      </p:sp>
+      <p:sp>
+        <p:nvSpPr>
+          <p:cNvPr id="4" name="Rounded Rectangle 3"/>
+          <p:cNvSpPr/>
+          <p:nvPr/>
+        </p:nvSpPr>
+        <p:spPr>
+          <a:xfrm>
+            <a:off x="822960" y="1051560"/>
+            <a:ext cx="1188720" cy="502920"/>
+          </a:xfrm>
+          <a:prstGeom prst="roundRect">
+            <a:avLst>
+              <a:gd name="adj" fmla="val 50000"/>
+            </a:avLst>
+          </a:prstGeom>
+          <a:solidFill>
+            <a:srgbClr val="FFFFFF"/>
+          </a:solidFill>
+          <a:ln>
+            <a:noFill/>
+          </a:ln>
+          <a:effectLst/>
+        </p:spPr>
+        <p:style>
+          <a:lnRef idx="1">
+            <a:schemeClr val="accent1"/>
+          </a:lnRef>
+          <a:fillRef idx="3">
+            <a:schemeClr val="accent1"/>
+          </a:fillRef>
+          <a:effectRef idx="2">
+            <a:schemeClr val="accent1"/>
+          </a:effectRef>
+          <a:fontRef idx="minor">
+            <a:schemeClr val="lt1"/>
+          </a:fontRef>
+        </p:style>
+        <p:txBody>
+          <a:bodyPr rtlCol="0" anchor="ctr" wrap="none" lIns="50800" rIns="50800"/>
+          <a:lstStyle/>
+          <a:p>
+            <a:pPr algn="ctr"/>
+            <a:r>
+              <a:rPr sz="1400" b="1">
+                <a:solidFill>
+                  <a:srgbClr val="22213B"/>
+                </a:solidFill>
+                <a:latin typeface="Calibri"/>
+              </a:rPr>
+              <a:t>04</a:t>
+            </a:r>
+          </a:p>
+        </p:txBody>
+      </p:sp>
+      <p:sp>
+        <p:nvSpPr>
+          <p:cNvPr id="5" name="Rounded Rectangle 4"/>
+          <p:cNvSpPr/>
+          <p:nvPr/>
+        </p:nvSpPr>
+        <p:spPr>
+          <a:xfrm>
+            <a:off x="822960" y="2011680"/>
+            <a:ext cx="10515600" cy="2834640"/>
+          </a:xfrm>
+          <a:prstGeom prst="roundRect">
+            <a:avLst>
+              <a:gd name="adj" fmla="val 18000"/>
+            </a:avLst>
+          </a:prstGeom>
+          <a:solidFill>
+            <a:srgbClr val="FFFFFF"/>
+          </a:solidFill>
+          <a:ln>
+            <a:noFill/>
+          </a:ln>
+          <a:effectLst/>
+        </p:spPr>
+        <p:style>
+          <a:lnRef idx="1">
+            <a:schemeClr val="accent1"/>
+          </a:lnRef>
+          <a:fillRef idx="3">
+            <a:schemeClr val="accent1"/>
+          </a:fillRef>
+          <a:effectRef idx="2">
+            <a:schemeClr val="accent1"/>
+          </a:effectRef>
+          <a:fontRef idx="minor">
+            <a:schemeClr val="lt1"/>
+          </a:fontRef>
+        </p:style>
+        <p:txBody>
+          <a:bodyPr rtlCol="0" anchor="ctr"/>
+          <a:lstStyle/>
+          <a:p>
+            <a:pPr algn="ctr"/>
+          </a:p>
+        </p:txBody>
+      </p:sp>
+      <p:sp>
+        <p:nvSpPr>
+          <p:cNvPr id="6" name="TextBox 5"/>
+          <p:cNvSpPr txBox="1"/>
+          <p:nvPr/>
+        </p:nvSpPr>
+        <p:spPr>
+          <a:xfrm>
+            <a:off x="1280160" y="2697480"/>
+            <a:ext cx="9601200" cy="1097280"/>
+          </a:xfrm>
+          <a:prstGeom prst="rect">
+            <a:avLst/>
+          </a:prstGeom>
+          <a:noFill/>
+        </p:spPr>
+        <p:txBody>
+          <a:bodyPr wrap="square" anchor="t">
+            <a:spAutoFit/>
+          </a:bodyPr>
+          <a:lstStyle/>
+          <a:p>
+            <a:pPr algn="l"/>
+            <a:r>
+              <a:rPr sz="3400" b="1" i="0">
+                <a:solidFill>
+                  <a:srgbClr val="24233E"/>
+                </a:solidFill>
+                <a:latin typeface="Cambria"/>
+              </a:rPr>
+              <a:t>SAC Briefing</a:t>
+            </a:r>
+          </a:p>
+        </p:txBody>
+      </p:sp>
+      <p:sp>
+        <p:nvSpPr>
+          <p:cNvPr id="7" name="TextBox 6"/>
+          <p:cNvSpPr txBox="1"/>
+          <p:nvPr/>
+        </p:nvSpPr>
+        <p:spPr>
+          <a:xfrm>
+            <a:off x="1280160" y="3657600"/>
+            <a:ext cx="9601200" cy="548640"/>
+          </a:xfrm>
+          <a:prstGeom prst="rect">
+            <a:avLst/>
+          </a:prstGeom>
+          <a:noFill/>
+        </p:spPr>
+        <p:txBody>
+          <a:bodyPr wrap="square" anchor="t">
+            <a:spAutoFit/>
+          </a:bodyPr>
+          <a:lstStyle/>
+          <a:p>
+            <a:pPr algn="l"/>
+            <a:r>
+              <a:rPr sz="1500" b="0" i="0">
+                <a:solidFill>
+                  <a:srgbClr val="6B6B6B"/>
+                </a:solidFill>
+                <a:latin typeface="Calibri"/>
+              </a:rPr>
+              <a:t>Draft — confirm against your school’s SAC schedule</a:t>
+            </a:r>
+          </a:p>
+        </p:txBody>
+      </p:sp>
+    </p:spTree>
+  </p:cSld>
+  <p:clrMapOvr>
+    <a:masterClrMapping/>
+  </p:clrMapOvr>
+</p:sld>
+</file>
+
+<file path=ppt/slides/slide24.xml><?xml version="1.0" encoding="utf-8"?>
+<p:sld xmlns:a="http://schemas.openxmlformats.org/drawingml/2006/main" xmlns:p="http://schemas.openxmlformats.org/presentationml/2006/main" xmlns:r="http://schemas.openxmlformats.org/officeDocument/2006/relationships">
+  <p:cSld>
+    <p:bg>
+      <p:bgPr>
+        <a:solidFill>
+          <a:srgbClr val="F8F6FB"/>
+        </a:solidFill>
+        <a:effectLst/>
+      </p:bgPr>
+    </p:bg>
+    <p:spTree>
+      <p:nvGrpSpPr>
+        <p:cNvPr id="1" name=""/>
+        <p:cNvGrpSpPr/>
+        <p:nvPr/>
+      </p:nvGrpSpPr>
+      <p:grpSpPr/>
+      <p:sp>
+        <p:nvSpPr>
+          <p:cNvPr id="2" name="Rounded Rectangle 1"/>
+          <p:cNvSpPr/>
+          <p:nvPr/>
+        </p:nvSpPr>
+        <p:spPr>
+          <a:xfrm>
+            <a:off x="685800" y="502920"/>
+            <a:ext cx="3291840" cy="457200"/>
+          </a:xfrm>
+          <a:prstGeom prst="roundRect">
+            <a:avLst>
+              <a:gd name="adj" fmla="val 50000"/>
+            </a:avLst>
+          </a:prstGeom>
+          <a:solidFill>
+            <a:srgbClr val="2B2A4A"/>
+          </a:solidFill>
+          <a:ln>
+            <a:noFill/>
+          </a:ln>
+          <a:effectLst/>
+        </p:spPr>
+        <p:style>
+          <a:lnRef idx="1">
+            <a:schemeClr val="accent1"/>
+          </a:lnRef>
+          <a:fillRef idx="3">
+            <a:schemeClr val="accent1"/>
+          </a:fillRef>
+          <a:effectRef idx="2">
+            <a:schemeClr val="accent1"/>
+          </a:effectRef>
+          <a:fontRef idx="minor">
+            <a:schemeClr val="lt1"/>
+          </a:fontRef>
+        </p:style>
+        <p:txBody>
+          <a:bodyPr rtlCol="0" anchor="ctr" wrap="none" lIns="50800" rIns="50800"/>
+          <a:lstStyle/>
+          <a:p>
+            <a:pPr algn="ctr"/>
+            <a:r>
+              <a:rPr sz="1100" b="1">
+                <a:solidFill>
+                  <a:srgbClr val="FFFFFF"/>
+                </a:solidFill>
+                <a:latin typeface="Calibri"/>
+              </a:rPr>
+              <a:t>SAC BRIEFING</a:t>
+            </a:r>
+          </a:p>
+        </p:txBody>
+      </p:sp>
+      <p:sp>
+        <p:nvSpPr>
+          <p:cNvPr id="3" name="TextBox 2"/>
+          <p:cNvSpPr txBox="1"/>
+          <p:nvPr/>
+        </p:nvSpPr>
+        <p:spPr>
+          <a:xfrm>
+            <a:off x="685800" y="1051560"/>
+            <a:ext cx="10607040" cy="822960"/>
+          </a:xfrm>
+          <a:prstGeom prst="rect">
+            <a:avLst/>
+          </a:prstGeom>
+          <a:noFill/>
+        </p:spPr>
+        <p:txBody>
+          <a:bodyPr wrap="square" anchor="t">
+            <a:spAutoFit/>
+          </a:bodyPr>
+          <a:lstStyle/>
+          <a:p>
+            <a:pPr algn="l"/>
+            <a:r>
+              <a:rPr sz="2700" b="1" i="0">
+                <a:solidFill>
+                  <a:srgbClr val="201F33"/>
+                </a:solidFill>
+                <a:latin typeface="Cambria"/>
+              </a:rPr>
+              <a:t>Outcome 1 (AOS 1) — Development and Resolution of Designs</a:t>
+            </a:r>
+          </a:p>
+        </p:txBody>
+      </p:sp>
+      <p:sp>
+        <p:nvSpPr>
+          <p:cNvPr id="4" name="Rounded Rectangle 3"/>
+          <p:cNvSpPr/>
+          <p:nvPr/>
+        </p:nvSpPr>
+        <p:spPr>
+          <a:xfrm>
+            <a:off x="685800" y="1874519"/>
+            <a:ext cx="10607040" cy="4526280"/>
+          </a:xfrm>
+          <a:prstGeom prst="roundRect">
+            <a:avLst>
+              <a:gd name="adj" fmla="val 6000"/>
+            </a:avLst>
+          </a:prstGeom>
+          <a:solidFill>
+            <a:srgbClr val="E9E9EC"/>
+          </a:solidFill>
+          <a:ln>
+            <a:noFill/>
+          </a:ln>
+          <a:effectLst/>
+        </p:spPr>
+        <p:style>
+          <a:lnRef idx="1">
+            <a:schemeClr val="accent1"/>
+          </a:lnRef>
+          <a:fillRef idx="3">
+            <a:schemeClr val="accent1"/>
+          </a:fillRef>
+          <a:effectRef idx="2">
+            <a:schemeClr val="accent1"/>
+          </a:effectRef>
+          <a:fontRef idx="minor">
+            <a:schemeClr val="lt1"/>
+          </a:fontRef>
+        </p:style>
+        <p:txBody>
+          <a:bodyPr rtlCol="0" anchor="ctr" lIns="330200" rIns="330200" tIns="254000" bIns="254000" wrap="square"/>
+          <a:lstStyle/>
+          <a:p>
+            <a:pPr algn="ctr" indent="-203200" marL="203200">
+              <a:spcAft>
+                <a:spcPts val="900"/>
+              </a:spcAft>
+              <a:buClr>
+                <a:srgbClr val="2B2A4A"/>
+              </a:buClr>
+              <a:buSzPct val="90000"/>
+              <a:buFont typeface="Arial"/>
+              <a:buChar char="●"/>
+            </a:pPr>
+            <a:r>
+              <a:rPr sz="1500" b="1" i="0">
+                <a:solidFill>
+                  <a:srgbClr val="24233E"/>
+                </a:solidFill>
+                <a:latin typeface="Calibri"/>
+              </a:rPr>
+              <a:t>Task</a:t>
+            </a:r>
+          </a:p>
+          <a:p>
+            <a:pPr indent="-203200" marL="203200">
+              <a:spcAft>
+                <a:spcPts val="900"/>
+              </a:spcAft>
+              <a:buClr>
+                <a:srgbClr val="2B2A4A"/>
+              </a:buClr>
+              <a:buSzPct val="90000"/>
+              <a:buFont typeface="Arial"/>
+              <a:buChar char="–"/>
+            </a:pPr>
+            <a:r>
+              <a:rPr sz="1350" b="0" i="0">
+                <a:solidFill>
+                  <a:srgbClr val="201F33"/>
+                </a:solidFill>
+                <a:latin typeface="Calibri"/>
+              </a:rPr>
+              <a:t>Using the two concepts generated in Unit 3, further develop each through relevant trials (type, colour, material, layout) and feedback, then select and justify ONE concept to resolve into a presentation-ready final design.</a:t>
+            </a:r>
+          </a:p>
+          <a:p>
+            <a:pPr indent="-203200" marL="203200">
+              <a:spcAft>
+                <a:spcPts val="900"/>
+              </a:spcAft>
+              <a:buClr>
+                <a:srgbClr val="2B2A4A"/>
+              </a:buClr>
+              <a:buSzPct val="90000"/>
+              <a:buFont typeface="Arial"/>
+              <a:buChar char="●"/>
+            </a:pPr>
+            <a:r>
+              <a:rPr sz="1500" b="1" i="0">
+                <a:solidFill>
+                  <a:srgbClr val="24233E"/>
+                </a:solidFill>
+                <a:latin typeface="Calibri"/>
+              </a:rPr>
+              <a:t>Conditions</a:t>
+            </a:r>
+          </a:p>
+          <a:p>
+            <a:pPr indent="-203200" marL="203200">
+              <a:spcAft>
+                <a:spcPts val="900"/>
+              </a:spcAft>
+              <a:buClr>
+                <a:srgbClr val="2B2A4A"/>
+              </a:buClr>
+              <a:buSzPct val="90000"/>
+              <a:buFont typeface="Arial"/>
+              <a:buChar char="–"/>
+            </a:pPr>
+            <a:r>
+              <a:rPr sz="1350" b="0" i="0">
+                <a:solidFill>
+                  <a:srgbClr val="201F33"/>
+                </a:solidFill>
+                <a:latin typeface="Calibri"/>
+              </a:rPr>
+              <a:t>Completed over approximately 5-6 weeks</a:t>
+            </a:r>
+          </a:p>
+          <a:p>
+            <a:pPr indent="-203200" marL="203200">
+              <a:spcAft>
+                <a:spcPts val="900"/>
+              </a:spcAft>
+              <a:buClr>
+                <a:srgbClr val="2B2A4A"/>
+              </a:buClr>
+              <a:buSzPct val="90000"/>
+              <a:buFont typeface="Arial"/>
+              <a:buChar char="–"/>
+            </a:pPr>
+            <a:r>
+              <a:rPr sz="1350" b="0" i="0">
+                <a:solidFill>
+                  <a:srgbClr val="201F33"/>
+                </a:solidFill>
+                <a:latin typeface="Calibri"/>
+              </a:rPr>
+              <a:t>Folio submission (development pages and the resolved design)</a:t>
+            </a:r>
+          </a:p>
+          <a:p>
+            <a:pPr indent="-203200" marL="203200">
+              <a:spcAft>
+                <a:spcPts val="900"/>
+              </a:spcAft>
+              <a:buClr>
+                <a:srgbClr val="2B2A4A"/>
+              </a:buClr>
+              <a:buSzPct val="90000"/>
+              <a:buFont typeface="Arial"/>
+              <a:buChar char="–"/>
+            </a:pPr>
+            <a:r>
+              <a:rPr sz="1350" b="0" i="0">
+                <a:solidFill>
+                  <a:srgbClr val="201F33"/>
+                </a:solidFill>
+                <a:latin typeface="Calibri"/>
+              </a:rPr>
+              <a:t>Individual work</a:t>
+            </a:r>
+          </a:p>
+          <a:p>
+            <a:pPr indent="-203200" marL="203200">
+              <a:spcAft>
+                <a:spcPts val="900"/>
+              </a:spcAft>
+              <a:buClr>
+                <a:srgbClr val="2B2A4A"/>
+              </a:buClr>
+              <a:buSzPct val="90000"/>
+              <a:buFont typeface="Arial"/>
+              <a:buChar char="●"/>
+            </a:pPr>
+            <a:r>
+              <a:rPr sz="1500" b="1" i="0">
+                <a:solidFill>
+                  <a:srgbClr val="24233E"/>
+                </a:solidFill>
+                <a:latin typeface="Calibri"/>
+              </a:rPr>
+              <a:t>Assessment Criteria (/70)</a:t>
+            </a:r>
+          </a:p>
+          <a:p>
+            <a:pPr indent="-203200" marL="203200">
+              <a:spcAft>
+                <a:spcPts val="900"/>
+              </a:spcAft>
+              <a:buClr>
+                <a:srgbClr val="2B2A4A"/>
+              </a:buClr>
+              <a:buSzPct val="90000"/>
+              <a:buFont typeface="Arial"/>
+              <a:buChar char="–"/>
+            </a:pPr>
+            <a:r>
+              <a:rPr sz="1350" b="0" i="0">
+                <a:solidFill>
+                  <a:srgbClr val="201F33"/>
+                </a:solidFill>
+                <a:latin typeface="Calibri"/>
+              </a:rPr>
+              <a:t>Breadth and quality of development across both concepts — 25 marks</a:t>
+            </a:r>
+          </a:p>
+          <a:p>
+            <a:pPr indent="-203200" marL="203200">
+              <a:spcAft>
+                <a:spcPts val="900"/>
+              </a:spcAft>
+              <a:buClr>
+                <a:srgbClr val="2B2A4A"/>
+              </a:buClr>
+              <a:buSzPct val="90000"/>
+              <a:buFont typeface="Arial"/>
+              <a:buChar char="–"/>
+            </a:pPr>
+            <a:r>
+              <a:rPr sz="1350" b="0" i="0">
+                <a:solidFill>
+                  <a:srgbClr val="201F33"/>
+                </a:solidFill>
+                <a:latin typeface="Calibri"/>
+              </a:rPr>
+              <a:t>Use of feedback to refine ideas — 10 marks</a:t>
+            </a:r>
+          </a:p>
+          <a:p>
+            <a:pPr indent="-203200" marL="203200">
+              <a:spcAft>
+                <a:spcPts val="900"/>
+              </a:spcAft>
+              <a:buClr>
+                <a:srgbClr val="2B2A4A"/>
+              </a:buClr>
+              <a:buSzPct val="90000"/>
+              <a:buFont typeface="Arial"/>
+              <a:buChar char="–"/>
+            </a:pPr>
+            <a:r>
+              <a:rPr sz="1350" b="0" i="0">
+                <a:solidFill>
+                  <a:srgbClr val="201F33"/>
+                </a:solidFill>
+                <a:latin typeface="Calibri"/>
+              </a:rPr>
+              <a:t>Justification of the selected direction — 10 marks</a:t>
+            </a:r>
+          </a:p>
+          <a:p>
+            <a:pPr indent="-203200" marL="203200">
+              <a:spcAft>
+                <a:spcPts val="900"/>
+              </a:spcAft>
+              <a:buClr>
+                <a:srgbClr val="2B2A4A"/>
+              </a:buClr>
+              <a:buSzPct val="90000"/>
+              <a:buFont typeface="Arial"/>
+              <a:buChar char="–"/>
+            </a:pPr>
+            <a:r>
+              <a:rPr sz="1350" b="0" i="0">
+                <a:solidFill>
+                  <a:srgbClr val="201F33"/>
+                </a:solidFill>
+                <a:latin typeface="Calibri"/>
+              </a:rPr>
+              <a:t>Quality and accuracy of the resolved design — 20 marks</a:t>
+            </a:r>
+          </a:p>
+          <a:p>
+            <a:pPr indent="-203200" marL="203200">
+              <a:spcAft>
+                <a:spcPts val="900"/>
+              </a:spcAft>
+              <a:buClr>
+                <a:srgbClr val="2B2A4A"/>
+              </a:buClr>
+              <a:buSzPct val="90000"/>
+              <a:buFont typeface="Arial"/>
+              <a:buChar char="–"/>
+            </a:pPr>
+            <a:r>
+              <a:rPr sz="1350" b="0" i="0">
+                <a:solidFill>
+                  <a:srgbClr val="201F33"/>
+                </a:solidFill>
+                <a:latin typeface="Calibri"/>
+              </a:rPr>
+              <a:t>Folio documentation — 5 marks</a:t>
+            </a:r>
+          </a:p>
+        </p:txBody>
+      </p:sp>
+      <p:sp>
+        <p:nvSpPr>
+          <p:cNvPr id="5" name="Oval 4"/>
+          <p:cNvSpPr/>
+          <p:nvPr/>
+        </p:nvSpPr>
+        <p:spPr>
+          <a:xfrm>
+            <a:off x="10881360" y="5943600"/>
+            <a:ext cx="1005840" cy="1005840"/>
+          </a:xfrm>
+          <a:prstGeom prst="ellipse">
+            <a:avLst/>
+          </a:prstGeom>
+          <a:solidFill>
+            <a:srgbClr val="E6C3D3"/>
+          </a:solidFill>
+          <a:ln>
+            <a:noFill/>
+          </a:ln>
+          <a:effectLst/>
+        </p:spPr>
+        <p:style>
+          <a:lnRef idx="1">
+            <a:schemeClr val="accent1"/>
+          </a:lnRef>
+          <a:fillRef idx="3">
+            <a:schemeClr val="accent1"/>
+          </a:fillRef>
+          <a:effectRef idx="2">
+            <a:schemeClr val="accent1"/>
+          </a:effectRef>
+          <a:fontRef idx="minor">
+            <a:schemeClr val="lt1"/>
+          </a:fontRef>
+        </p:style>
+        <p:txBody>
+          <a:bodyPr rtlCol="0" anchor="ctr"/>
+          <a:lstStyle/>
+          <a:p>
+            <a:pPr algn="ctr"/>
+          </a:p>
+        </p:txBody>
+      </p:sp>
+    </p:spTree>
+  </p:cSld>
+  <p:clrMapOvr>
+    <a:masterClrMapping/>
+  </p:clrMapOvr>
+</p:sld>
+</file>
+
+<file path=ppt/slides/slide25.xml><?xml version="1.0" encoding="utf-8"?>
+<p:sld xmlns:a="http://schemas.openxmlformats.org/drawingml/2006/main" xmlns:p="http://schemas.openxmlformats.org/presentationml/2006/main" xmlns:r="http://schemas.openxmlformats.org/officeDocument/2006/relationships">
+  <p:cSld>
+    <p:bg>
+      <p:bgPr>
+        <a:solidFill>
+          <a:srgbClr val="F8F6FB"/>
+        </a:solidFill>
+        <a:effectLst/>
+      </p:bgPr>
+    </p:bg>
+    <p:spTree>
+      <p:nvGrpSpPr>
+        <p:cNvPr id="1" name=""/>
+        <p:cNvGrpSpPr/>
+        <p:nvPr/>
+      </p:nvGrpSpPr>
+      <p:grpSpPr/>
+      <p:sp>
+        <p:nvSpPr>
+          <p:cNvPr id="2" name="Rounded Rectangle 1"/>
+          <p:cNvSpPr/>
+          <p:nvPr/>
+        </p:nvSpPr>
+        <p:spPr>
+          <a:xfrm>
+            <a:off x="685800" y="502920"/>
+            <a:ext cx="3291840" cy="457200"/>
+          </a:xfrm>
+          <a:prstGeom prst="roundRect">
+            <a:avLst>
+              <a:gd name="adj" fmla="val 50000"/>
+            </a:avLst>
+          </a:prstGeom>
+          <a:solidFill>
+            <a:srgbClr val="2B2A4A"/>
+          </a:solidFill>
+          <a:ln>
+            <a:noFill/>
+          </a:ln>
+          <a:effectLst/>
+        </p:spPr>
+        <p:style>
+          <a:lnRef idx="1">
+            <a:schemeClr val="accent1"/>
+          </a:lnRef>
+          <a:fillRef idx="3">
+            <a:schemeClr val="accent1"/>
+          </a:fillRef>
+          <a:effectRef idx="2">
+            <a:schemeClr val="accent1"/>
+          </a:effectRef>
+          <a:fontRef idx="minor">
+            <a:schemeClr val="lt1"/>
+          </a:fontRef>
+        </p:style>
+        <p:txBody>
+          <a:bodyPr rtlCol="0" anchor="ctr" wrap="none" lIns="50800" rIns="50800"/>
+          <a:lstStyle/>
+          <a:p>
+            <a:pPr algn="ctr"/>
+            <a:r>
+              <a:rPr sz="1100" b="1">
+                <a:solidFill>
+                  <a:srgbClr val="FFFFFF"/>
+                </a:solidFill>
+                <a:latin typeface="Calibri"/>
+              </a:rPr>
+              <a:t>SAC BRIEFING</a:t>
+            </a:r>
+          </a:p>
+        </p:txBody>
+      </p:sp>
+      <p:sp>
+        <p:nvSpPr>
+          <p:cNvPr id="3" name="TextBox 2"/>
+          <p:cNvSpPr txBox="1"/>
+          <p:nvPr/>
+        </p:nvSpPr>
+        <p:spPr>
+          <a:xfrm>
+            <a:off x="685800" y="1051560"/>
+            <a:ext cx="10607040" cy="822960"/>
+          </a:xfrm>
+          <a:prstGeom prst="rect">
+            <a:avLst/>
+          </a:prstGeom>
+          <a:noFill/>
+        </p:spPr>
+        <p:txBody>
+          <a:bodyPr wrap="square" anchor="t">
+            <a:spAutoFit/>
+          </a:bodyPr>
+          <a:lstStyle/>
+          <a:p>
+            <a:pPr algn="l"/>
+            <a:r>
+              <a:rPr sz="2700" b="1" i="0">
+                <a:solidFill>
+                  <a:srgbClr val="201F33"/>
+                </a:solidFill>
+                <a:latin typeface="Cambria"/>
+              </a:rPr>
+              <a:t>Outcome 2 (AOS 2) — Evaluation, Refinement and Presentation</a:t>
+            </a:r>
+          </a:p>
+        </p:txBody>
+      </p:sp>
+      <p:sp>
+        <p:nvSpPr>
+          <p:cNvPr id="4" name="Rounded Rectangle 3"/>
+          <p:cNvSpPr/>
+          <p:nvPr/>
+        </p:nvSpPr>
+        <p:spPr>
+          <a:xfrm>
+            <a:off x="685800" y="1874519"/>
+            <a:ext cx="10607040" cy="4526280"/>
+          </a:xfrm>
+          <a:prstGeom prst="roundRect">
+            <a:avLst>
+              <a:gd name="adj" fmla="val 6000"/>
+            </a:avLst>
+          </a:prstGeom>
+          <a:solidFill>
+            <a:srgbClr val="E9E9EC"/>
+          </a:solidFill>
+          <a:ln>
+            <a:noFill/>
+          </a:ln>
+          <a:effectLst/>
+        </p:spPr>
+        <p:style>
+          <a:lnRef idx="1">
+            <a:schemeClr val="accent1"/>
+          </a:lnRef>
+          <a:fillRef idx="3">
+            <a:schemeClr val="accent1"/>
+          </a:fillRef>
+          <a:effectRef idx="2">
+            <a:schemeClr val="accent1"/>
+          </a:effectRef>
+          <a:fontRef idx="minor">
+            <a:schemeClr val="lt1"/>
+          </a:fontRef>
+        </p:style>
+        <p:txBody>
+          <a:bodyPr rtlCol="0" anchor="ctr" lIns="330200" rIns="330200" tIns="254000" bIns="254000" wrap="square"/>
+          <a:lstStyle/>
+          <a:p>
+            <a:pPr algn="ctr" indent="-203200" marL="203200">
+              <a:spcAft>
+                <a:spcPts val="900"/>
+              </a:spcAft>
+              <a:buClr>
+                <a:srgbClr val="2B2A4A"/>
+              </a:buClr>
+              <a:buSzPct val="90000"/>
+              <a:buFont typeface="Arial"/>
+              <a:buChar char="●"/>
+            </a:pPr>
+            <a:r>
+              <a:rPr sz="1500" b="1" i="0">
+                <a:solidFill>
+                  <a:srgbClr val="24233E"/>
+                </a:solidFill>
+                <a:latin typeface="Calibri"/>
+              </a:rPr>
+              <a:t>Task</a:t>
+            </a:r>
+          </a:p>
+          <a:p>
+            <a:pPr indent="-203200" marL="203200">
+              <a:spcAft>
+                <a:spcPts val="900"/>
+              </a:spcAft>
+              <a:buClr>
+                <a:srgbClr val="2B2A4A"/>
+              </a:buClr>
+              <a:buSzPct val="90000"/>
+              <a:buFont typeface="Arial"/>
+              <a:buChar char="–"/>
+            </a:pPr>
+            <a:r>
+              <a:rPr sz="1350" b="0" i="0">
+                <a:solidFill>
+                  <a:srgbClr val="201F33"/>
+                </a:solidFill>
+                <a:latin typeface="Calibri"/>
+              </a:rPr>
+              <a:t>Refine your resolved design to a professional presentation standard using appropriate methods. Write an evaluation of approximately 600-800 words assessing the final design against your original brief (purpose, audience, constraints, obligatory fields).</a:t>
+            </a:r>
+          </a:p>
+          <a:p>
+            <a:pPr indent="-203200" marL="203200">
+              <a:spcAft>
+                <a:spcPts val="900"/>
+              </a:spcAft>
+              <a:buClr>
+                <a:srgbClr val="2B2A4A"/>
+              </a:buClr>
+              <a:buSzPct val="90000"/>
+              <a:buFont typeface="Arial"/>
+              <a:buChar char="●"/>
+            </a:pPr>
+            <a:r>
+              <a:rPr sz="1500" b="1" i="0">
+                <a:solidFill>
+                  <a:srgbClr val="24233E"/>
+                </a:solidFill>
+                <a:latin typeface="Calibri"/>
+              </a:rPr>
+              <a:t>Conditions</a:t>
+            </a:r>
+          </a:p>
+          <a:p>
+            <a:pPr indent="-203200" marL="203200">
+              <a:spcAft>
+                <a:spcPts val="900"/>
+              </a:spcAft>
+              <a:buClr>
+                <a:srgbClr val="2B2A4A"/>
+              </a:buClr>
+              <a:buSzPct val="90000"/>
+              <a:buFont typeface="Arial"/>
+              <a:buChar char="–"/>
+            </a:pPr>
+            <a:r>
+              <a:rPr sz="1350" b="0" i="0">
+                <a:solidFill>
+                  <a:srgbClr val="201F33"/>
+                </a:solidFill>
+                <a:latin typeface="Calibri"/>
+              </a:rPr>
+              <a:t>Completed over approximately 3-4 weeks</a:t>
+            </a:r>
+          </a:p>
+          <a:p>
+            <a:pPr indent="-203200" marL="203200">
+              <a:spcAft>
+                <a:spcPts val="900"/>
+              </a:spcAft>
+              <a:buClr>
+                <a:srgbClr val="2B2A4A"/>
+              </a:buClr>
+              <a:buSzPct val="90000"/>
+              <a:buFont typeface="Arial"/>
+              <a:buChar char="–"/>
+            </a:pPr>
+            <a:r>
+              <a:rPr sz="1350" b="0" i="0">
+                <a:solidFill>
+                  <a:srgbClr val="201F33"/>
+                </a:solidFill>
+                <a:latin typeface="Calibri"/>
+              </a:rPr>
+              <a:t>Folio and written evaluation submission</a:t>
+            </a:r>
+          </a:p>
+          <a:p>
+            <a:pPr indent="-203200" marL="203200">
+              <a:spcAft>
+                <a:spcPts val="900"/>
+              </a:spcAft>
+              <a:buClr>
+                <a:srgbClr val="2B2A4A"/>
+              </a:buClr>
+              <a:buSzPct val="90000"/>
+              <a:buFont typeface="Arial"/>
+              <a:buChar char="–"/>
+            </a:pPr>
+            <a:r>
+              <a:rPr sz="1350" b="0" i="0">
+                <a:solidFill>
+                  <a:srgbClr val="201F33"/>
+                </a:solidFill>
+                <a:latin typeface="Calibri"/>
+              </a:rPr>
+              <a:t>Individual work</a:t>
+            </a:r>
+          </a:p>
+          <a:p>
+            <a:pPr indent="-203200" marL="203200">
+              <a:spcAft>
+                <a:spcPts val="900"/>
+              </a:spcAft>
+              <a:buClr>
+                <a:srgbClr val="2B2A4A"/>
+              </a:buClr>
+              <a:buSzPct val="90000"/>
+              <a:buFont typeface="Arial"/>
+              <a:buChar char="●"/>
+            </a:pPr>
+            <a:r>
+              <a:rPr sz="1500" b="1" i="0">
+                <a:solidFill>
+                  <a:srgbClr val="24233E"/>
+                </a:solidFill>
+                <a:latin typeface="Calibri"/>
+              </a:rPr>
+              <a:t>Assessment Criteria (/50)</a:t>
+            </a:r>
+          </a:p>
+          <a:p>
+            <a:pPr indent="-203200" marL="203200">
+              <a:spcAft>
+                <a:spcPts val="900"/>
+              </a:spcAft>
+              <a:buClr>
+                <a:srgbClr val="2B2A4A"/>
+              </a:buClr>
+              <a:buSzPct val="90000"/>
+              <a:buFont typeface="Arial"/>
+              <a:buChar char="–"/>
+            </a:pPr>
+            <a:r>
+              <a:rPr sz="1350" b="0" i="0">
+                <a:solidFill>
+                  <a:srgbClr val="201F33"/>
+                </a:solidFill>
+                <a:latin typeface="Calibri"/>
+              </a:rPr>
+              <a:t>Presentation standard: accuracy, rendering, craftsmanship — 20 marks</a:t>
+            </a:r>
+          </a:p>
+          <a:p>
+            <a:pPr indent="-203200" marL="203200">
+              <a:spcAft>
+                <a:spcPts val="900"/>
+              </a:spcAft>
+              <a:buClr>
+                <a:srgbClr val="2B2A4A"/>
+              </a:buClr>
+              <a:buSzPct val="90000"/>
+              <a:buFont typeface="Arial"/>
+              <a:buChar char="–"/>
+            </a:pPr>
+            <a:r>
+              <a:rPr sz="1350" b="0" i="0">
+                <a:solidFill>
+                  <a:srgbClr val="201F33"/>
+                </a:solidFill>
+                <a:latin typeface="Calibri"/>
+              </a:rPr>
+              <a:t>Quality and balance of the written evaluation — 20 marks</a:t>
+            </a:r>
+          </a:p>
+          <a:p>
+            <a:pPr indent="-203200" marL="203200">
+              <a:spcAft>
+                <a:spcPts val="900"/>
+              </a:spcAft>
+              <a:buClr>
+                <a:srgbClr val="2B2A4A"/>
+              </a:buClr>
+              <a:buSzPct val="90000"/>
+              <a:buFont typeface="Arial"/>
+              <a:buChar char="–"/>
+            </a:pPr>
+            <a:r>
+              <a:rPr sz="1350" b="0" i="0">
+                <a:solidFill>
+                  <a:srgbClr val="201F33"/>
+                </a:solidFill>
+                <a:latin typeface="Calibri"/>
+              </a:rPr>
+              <a:t>Specific reference to brief criteria — 10 marks</a:t>
+            </a:r>
+          </a:p>
+        </p:txBody>
+      </p:sp>
+      <p:sp>
+        <p:nvSpPr>
+          <p:cNvPr id="5" name="Oval 4"/>
+          <p:cNvSpPr/>
+          <p:nvPr/>
+        </p:nvSpPr>
+        <p:spPr>
+          <a:xfrm>
+            <a:off x="10881360" y="5943600"/>
+            <a:ext cx="1005840" cy="1005840"/>
+          </a:xfrm>
+          <a:prstGeom prst="ellipse">
+            <a:avLst/>
+          </a:prstGeom>
+          <a:solidFill>
+            <a:srgbClr val="E6C3D3"/>
+          </a:solidFill>
+          <a:ln>
+            <a:noFill/>
+          </a:ln>
+          <a:effectLst/>
+        </p:spPr>
+        <p:style>
+          <a:lnRef idx="1">
+            <a:schemeClr val="accent1"/>
+          </a:lnRef>
+          <a:fillRef idx="3">
+            <a:schemeClr val="accent1"/>
+          </a:fillRef>
+          <a:effectRef idx="2">
+            <a:schemeClr val="accent1"/>
+          </a:effectRef>
+          <a:fontRef idx="minor">
+            <a:schemeClr val="lt1"/>
+          </a:fontRef>
+        </p:style>
+        <p:txBody>
+          <a:bodyPr rtlCol="0" anchor="ctr"/>
+          <a:lstStyle/>
+          <a:p>
+            <a:pPr algn="ctr"/>
+          </a:p>
+        </p:txBody>
+      </p:sp>
+    </p:spTree>
+  </p:cSld>
+  <p:clrMapOvr>
+    <a:masterClrMapping/>
+  </p:clrMapOvr>
+</p:sld>
+</file>
+
+<file path=ppt/slides/slide26.xml><?xml version="1.0" encoding="utf-8"?>
+<p:sld xmlns:a="http://schemas.openxmlformats.org/drawingml/2006/main" xmlns:p="http://schemas.openxmlformats.org/presentationml/2006/main" xmlns:r="http://schemas.openxmlformats.org/officeDocument/2006/relationships">
+  <p:cSld>
+    <p:bg>
+      <p:bgPr>
+        <a:solidFill>
+          <a:srgbClr val="2B2A4A"/>
+        </a:solidFill>
+        <a:effectLst/>
+      </p:bgPr>
+    </p:bg>
+    <p:spTree>
+      <p:nvGrpSpPr>
+        <p:cNvPr id="1" name=""/>
+        <p:cNvGrpSpPr/>
+        <p:nvPr/>
+      </p:nvGrpSpPr>
+      <p:grpSpPr/>
+      <p:sp>
+        <p:nvSpPr>
+          <p:cNvPr id="2" name="Oval 1"/>
+          <p:cNvSpPr/>
+          <p:nvPr/>
+        </p:nvSpPr>
+        <p:spPr>
+          <a:xfrm>
+            <a:off x="-1097280" y="4114800"/>
+            <a:ext cx="3108960" cy="3108960"/>
+          </a:xfrm>
+          <a:prstGeom prst="ellipse">
+            <a:avLst/>
+          </a:prstGeom>
+          <a:solidFill>
+            <a:srgbClr val="252441"/>
+          </a:solidFill>
+          <a:ln>
+            <a:noFill/>
+          </a:ln>
+          <a:effectLst/>
+        </p:spPr>
+        <p:style>
+          <a:lnRef idx="1">
+            <a:schemeClr val="accent1"/>
+          </a:lnRef>
+          <a:fillRef idx="3">
+            <a:schemeClr val="accent1"/>
+          </a:fillRef>
+          <a:effectRef idx="2">
+            <a:schemeClr val="accent1"/>
+          </a:effectRef>
+          <a:fontRef idx="minor">
+            <a:schemeClr val="lt1"/>
+          </a:fontRef>
+        </p:style>
+        <p:txBody>
+          <a:bodyPr rtlCol="0" anchor="ctr"/>
+          <a:lstStyle/>
+          <a:p>
+            <a:pPr algn="ctr"/>
+          </a:p>
+        </p:txBody>
+      </p:sp>
+      <p:sp>
+        <p:nvSpPr>
+          <p:cNvPr id="3" name="Oval 2"/>
+          <p:cNvSpPr/>
+          <p:nvPr/>
+        </p:nvSpPr>
+        <p:spPr>
+          <a:xfrm>
+            <a:off x="9875520" y="-1188720"/>
+            <a:ext cx="2743200" cy="2743200"/>
+          </a:xfrm>
+          <a:prstGeom prst="ellipse">
+            <a:avLst/>
+          </a:prstGeom>
+          <a:solidFill>
+            <a:srgbClr val="D9A441"/>
+          </a:solidFill>
+          <a:ln>
+            <a:noFill/>
+          </a:ln>
+          <a:effectLst/>
+        </p:spPr>
+        <p:style>
+          <a:lnRef idx="1">
+            <a:schemeClr val="accent1"/>
+          </a:lnRef>
+          <a:fillRef idx="3">
+            <a:schemeClr val="accent1"/>
+          </a:fillRef>
+          <a:effectRef idx="2">
+            <a:schemeClr val="accent1"/>
+          </a:effectRef>
+          <a:fontRef idx="minor">
+            <a:schemeClr val="lt1"/>
+          </a:fontRef>
+        </p:style>
+        <p:txBody>
+          <a:bodyPr rtlCol="0" anchor="ctr"/>
+          <a:lstStyle/>
+          <a:p>
+            <a:pPr algn="ctr"/>
+          </a:p>
+        </p:txBody>
+      </p:sp>
+      <p:sp>
+        <p:nvSpPr>
+          <p:cNvPr id="4" name="Rounded Rectangle 3"/>
+          <p:cNvSpPr/>
+          <p:nvPr/>
+        </p:nvSpPr>
+        <p:spPr>
+          <a:xfrm>
+            <a:off x="1920240" y="2286000"/>
+            <a:ext cx="8321040" cy="2377440"/>
+          </a:xfrm>
+          <a:prstGeom prst="roundRect">
+            <a:avLst>
+              <a:gd name="adj" fmla="val 20000"/>
+            </a:avLst>
+          </a:prstGeom>
+          <a:solidFill>
+            <a:srgbClr val="FFFFFF"/>
+          </a:solidFill>
+          <a:ln>
+            <a:noFill/>
+          </a:ln>
+          <a:effectLst/>
+        </p:spPr>
+        <p:style>
+          <a:lnRef idx="1">
+            <a:schemeClr val="accent1"/>
+          </a:lnRef>
+          <a:fillRef idx="3">
+            <a:schemeClr val="accent1"/>
+          </a:fillRef>
+          <a:effectRef idx="2">
+            <a:schemeClr val="accent1"/>
+          </a:effectRef>
+          <a:fontRef idx="minor">
+            <a:schemeClr val="lt1"/>
+          </a:fontRef>
+        </p:style>
+        <p:txBody>
+          <a:bodyPr rtlCol="0" anchor="ctr"/>
+          <a:lstStyle/>
+          <a:p>
+            <a:pPr algn="ctr"/>
+            <a:r>
+              <a:rPr b="1" sz="3000">
+                <a:solidFill>
+                  <a:srgbClr val="2B2A4A"/>
+                </a:solidFill>
+                <a:latin typeface="Cambria"/>
+              </a:rPr>
+              <a:t>End of Unit 4</a:t>
+            </a:r>
+          </a:p>
+          <a:p>
+            <a:pPr algn="ctr"/>
+            <a:r>
+              <a:rPr sz="1400">
+                <a:solidFill>
+                  <a:srgbClr val="595959"/>
+                </a:solidFill>
+              </a:rPr>
+              <a:t>Review the matching workbook to consolidate what you have learnt.</a:t>
             </a:r>
           </a:p>
         </p:txBody>

--- a/teaching-materials/vcd-vce/powerpoint/Unit4-Design-Development-and-Presentation.pptx
+++ b/teaching-materials/vcd-vce/powerpoint/Unit4-Design-Development-and-Presentation.pptx
@@ -31,6 +31,12 @@
     <p:sldId id="279" r:id="rId30"/>
     <p:sldId id="280" r:id="rId31"/>
     <p:sldId id="281" r:id="rId32"/>
+    <p:sldId id="282" r:id="rId33"/>
+    <p:sldId id="283" r:id="rId34"/>
+    <p:sldId id="284" r:id="rId35"/>
+    <p:sldId id="285" r:id="rId36"/>
+    <p:sldId id="286" r:id="rId37"/>
+    <p:sldId id="287" r:id="rId38"/>
   </p:sldIdLst>
   <p:sldSz cx="12191695" cy="6858000" type="screen4x3"/>
   <p:notesSz cx="6858000" cy="9144000"/>
@@ -3429,7 +3435,7 @@
     <p:bg>
       <p:bgPr>
         <a:solidFill>
-          <a:srgbClr val="F8F6FB"/>
+          <a:srgbClr val="C97B9E"/>
         </a:solidFill>
         <a:effectLst/>
       </p:bgPr>
@@ -3443,22 +3449,20 @@
       <p:grpSpPr/>
       <p:sp>
         <p:nvSpPr>
-          <p:cNvPr id="2" name="Rounded Rectangle 1"/>
+          <p:cNvPr id="2" name="Oval 1"/>
           <p:cNvSpPr/>
           <p:nvPr/>
         </p:nvSpPr>
         <p:spPr>
           <a:xfrm>
-            <a:off x="685800" y="502920"/>
-            <a:ext cx="3291840" cy="457200"/>
-          </a:xfrm>
-          <a:prstGeom prst="roundRect">
-            <a:avLst>
-              <a:gd name="adj" fmla="val 50000"/>
-            </a:avLst>
-          </a:prstGeom>
-          <a:solidFill>
-            <a:srgbClr val="2B2A4A"/>
+            <a:off x="-914400" y="-914400"/>
+            <a:ext cx="2103120" cy="2103120"/>
+          </a:xfrm>
+          <a:prstGeom prst="ellipse">
+            <a:avLst/>
+          </a:prstGeom>
+          <a:solidFill>
+            <a:srgbClr val="B06C8B"/>
           </a:solidFill>
           <a:ln>
             <a:noFill/>
@@ -3480,75 +3484,29 @@
           </a:fontRef>
         </p:style>
         <p:txBody>
-          <a:bodyPr rtlCol="0" anchor="ctr" wrap="none" lIns="50800" rIns="50800"/>
+          <a:bodyPr rtlCol="0" anchor="ctr"/>
           <a:lstStyle/>
           <a:p>
             <a:pPr algn="ctr"/>
-            <a:r>
-              <a:rPr sz="1100" b="1">
-                <a:solidFill>
-                  <a:srgbClr val="FFFFFF"/>
-                </a:solidFill>
-                <a:latin typeface="Calibri"/>
-              </a:rPr>
-              <a:t>EVALUATION &amp; PRESENTATION</a:t>
-            </a:r>
-          </a:p>
-        </p:txBody>
-      </p:sp>
-      <p:sp>
-        <p:nvSpPr>
-          <p:cNvPr id="3" name="TextBox 2"/>
-          <p:cNvSpPr txBox="1"/>
-          <p:nvPr/>
-        </p:nvSpPr>
-        <p:spPr>
-          <a:xfrm>
-            <a:off x="685800" y="1051560"/>
-            <a:ext cx="10607040" cy="822960"/>
-          </a:xfrm>
-          <a:prstGeom prst="rect">
+          </a:p>
+        </p:txBody>
+      </p:sp>
+      <p:sp>
+        <p:nvSpPr>
+          <p:cNvPr id="3" name="Oval 2"/>
+          <p:cNvSpPr/>
+          <p:nvPr/>
+        </p:nvSpPr>
+        <p:spPr>
+          <a:xfrm>
+            <a:off x="11064240" y="5852160"/>
+            <a:ext cx="1737360" cy="1737360"/>
+          </a:xfrm>
+          <a:prstGeom prst="ellipse">
             <a:avLst/>
           </a:prstGeom>
-          <a:noFill/>
-        </p:spPr>
-        <p:txBody>
-          <a:bodyPr wrap="square" anchor="t">
-            <a:spAutoFit/>
-          </a:bodyPr>
-          <a:lstStyle/>
-          <a:p>
-            <a:pPr algn="l"/>
-            <a:r>
-              <a:rPr sz="2700" b="1" i="0">
-                <a:solidFill>
-                  <a:srgbClr val="201F33"/>
-                </a:solidFill>
-                <a:latin typeface="Cambria"/>
-              </a:rPr>
-              <a:t>From Resolution to Final Presentation</a:t>
-            </a:r>
-          </a:p>
-        </p:txBody>
-      </p:sp>
-      <p:sp>
-        <p:nvSpPr>
-          <p:cNvPr id="4" name="Rounded Rectangle 3"/>
-          <p:cNvSpPr/>
-          <p:nvPr/>
-        </p:nvSpPr>
-        <p:spPr>
-          <a:xfrm>
-            <a:off x="685800" y="1874519"/>
-            <a:ext cx="5166360" cy="4526280"/>
-          </a:xfrm>
-          <a:prstGeom prst="roundRect">
-            <a:avLst>
-              <a:gd name="adj" fmla="val 6000"/>
-            </a:avLst>
-          </a:prstGeom>
-          <a:solidFill>
-            <a:srgbClr val="E5E5E9"/>
+          <a:solidFill>
+            <a:srgbClr val="B06C8B"/>
           </a:solidFill>
           <a:ln>
             <a:noFill/>
@@ -3570,108 +3528,31 @@
           </a:fontRef>
         </p:style>
         <p:txBody>
-          <a:bodyPr rtlCol="0" anchor="ctr" lIns="279400" rIns="279400" tIns="228600" bIns="228600" wrap="square"/>
-          <a:lstStyle/>
-          <a:p>
-            <a:pPr algn="ctr" indent="-203200" marL="203200">
-              <a:spcAft>
-                <a:spcPts val="900"/>
-              </a:spcAft>
-              <a:buClr>
-                <a:srgbClr val="2B2A4A"/>
-              </a:buClr>
-              <a:buSzPct val="90000"/>
-              <a:buFont typeface="Arial"/>
-              <a:buChar char="●"/>
-            </a:pPr>
-            <a:r>
-              <a:rPr sz="1400" b="0" i="0">
-                <a:solidFill>
-                  <a:srgbClr val="201F33"/>
-                </a:solidFill>
-                <a:latin typeface="Calibri"/>
-              </a:rPr>
-              <a:t>Once a concept is resolved, it undergoes </a:t>
-            </a:r>
-            <a:r>
-              <a:rPr sz="1400" b="1" i="0">
-                <a:solidFill>
-                  <a:srgbClr val="24233E"/>
-                </a:solidFill>
-                <a:latin typeface="Calibri"/>
-              </a:rPr>
-              <a:t>final refinement</a:t>
-            </a:r>
-            <a:r>
-              <a:rPr sz="1400" b="0" i="0">
-                <a:solidFill>
-                  <a:srgbClr val="201F33"/>
-                </a:solidFill>
-                <a:latin typeface="Calibri"/>
-              </a:rPr>
-              <a:t> — small, precise adjustments — before being presented to a professional standard.</a:t>
-            </a:r>
-          </a:p>
-          <a:p>
-            <a:pPr indent="-203200" marL="203200">
-              <a:spcAft>
-                <a:spcPts val="900"/>
-              </a:spcAft>
-              <a:buClr>
-                <a:srgbClr val="2B2A4A"/>
-              </a:buClr>
-              <a:buSzPct val="90000"/>
-              <a:buFont typeface="Arial"/>
-              <a:buChar char="●"/>
-            </a:pPr>
-            <a:r>
-              <a:rPr sz="1400" b="0" i="0">
-                <a:solidFill>
-                  <a:srgbClr val="201F33"/>
-                </a:solidFill>
-                <a:latin typeface="Calibri"/>
-              </a:rPr>
-              <a:t>The finished design is then </a:t>
-            </a:r>
-            <a:r>
-              <a:rPr sz="1400" b="1" i="0">
-                <a:solidFill>
-                  <a:srgbClr val="24233E"/>
-                </a:solidFill>
-                <a:latin typeface="Calibri"/>
-              </a:rPr>
-              <a:t>evaluated</a:t>
-            </a:r>
-            <a:r>
-              <a:rPr sz="1400" b="0" i="0">
-                <a:solidFill>
-                  <a:srgbClr val="201F33"/>
-                </a:solidFill>
-                <a:latin typeface="Calibri"/>
-              </a:rPr>
-              <a:t> against the original brief to determine its success.</a:t>
-            </a:r>
-          </a:p>
-        </p:txBody>
-      </p:sp>
-      <p:sp>
-        <p:nvSpPr>
-          <p:cNvPr id="5" name="Rounded Rectangle 4"/>
+          <a:bodyPr rtlCol="0" anchor="ctr"/>
+          <a:lstStyle/>
+          <a:p>
+            <a:pPr algn="ctr"/>
+          </a:p>
+        </p:txBody>
+      </p:sp>
+      <p:sp>
+        <p:nvSpPr>
+          <p:cNvPr id="4" name="Rounded Rectangle 3"/>
           <p:cNvSpPr/>
           <p:nvPr/>
         </p:nvSpPr>
         <p:spPr>
           <a:xfrm>
-            <a:off x="6080760" y="1874519"/>
-            <a:ext cx="5166360" cy="4526280"/>
+            <a:off x="685800" y="457200"/>
+            <a:ext cx="1033271" cy="502920"/>
           </a:xfrm>
           <a:prstGeom prst="roundRect">
             <a:avLst>
-              <a:gd name="adj" fmla="val 6000"/>
+              <a:gd name="adj" fmla="val 50000"/>
             </a:avLst>
           </a:prstGeom>
           <a:solidFill>
-            <a:srgbClr val="EFDAE3"/>
+            <a:srgbClr val="FFFFFF"/>
           </a:solidFill>
           <a:ln>
             <a:noFill/>
@@ -3693,7 +3574,207 @@
           </a:fontRef>
         </p:style>
         <p:txBody>
-          <a:bodyPr rtlCol="0" anchor="ctr" lIns="279400" rIns="279400" tIns="228600" bIns="228600" wrap="square"/>
+          <a:bodyPr rtlCol="0" anchor="ctr"/>
+          <a:lstStyle/>
+          <a:p>
+            <a:pPr algn="ctr"/>
+            <a:r>
+              <a:rPr b="1" sz="1400">
+                <a:solidFill>
+                  <a:srgbClr val="824F66"/>
+                </a:solidFill>
+                <a:latin typeface="Calibri"/>
+              </a:rPr>
+              <a:t>GAME</a:t>
+            </a:r>
+          </a:p>
+        </p:txBody>
+      </p:sp>
+      <p:sp>
+        <p:nvSpPr>
+          <p:cNvPr id="5" name="TextBox 4"/>
+          <p:cNvSpPr txBox="1"/>
+          <p:nvPr/>
+        </p:nvSpPr>
+        <p:spPr>
+          <a:xfrm>
+            <a:off x="685800" y="1143000"/>
+            <a:ext cx="10607040" cy="914400"/>
+          </a:xfrm>
+          <a:prstGeom prst="rect">
+            <a:avLst/>
+          </a:prstGeom>
+          <a:noFill/>
+        </p:spPr>
+        <p:txBody>
+          <a:bodyPr wrap="square" anchor="t">
+            <a:spAutoFit/>
+          </a:bodyPr>
+          <a:lstStyle/>
+          <a:p>
+            <a:pPr algn="l"/>
+            <a:r>
+              <a:rPr sz="3000" b="1" i="0">
+                <a:solidFill>
+                  <a:srgbClr val="FFFFFF"/>
+                </a:solidFill>
+                <a:latin typeface="Cambria"/>
+              </a:rPr>
+              <a:t>Feedback Frenzy</a:t>
+            </a:r>
+          </a:p>
+        </p:txBody>
+      </p:sp>
+      <p:sp>
+        <p:nvSpPr>
+          <p:cNvPr id="6" name="Rounded Rectangle 5"/>
+          <p:cNvSpPr/>
+          <p:nvPr/>
+        </p:nvSpPr>
+        <p:spPr>
+          <a:xfrm>
+            <a:off x="685800" y="2148840"/>
+            <a:ext cx="960120" cy="411480"/>
+          </a:xfrm>
+          <a:prstGeom prst="roundRect">
+            <a:avLst>
+              <a:gd name="adj" fmla="val 50000"/>
+            </a:avLst>
+          </a:prstGeom>
+          <a:solidFill>
+            <a:srgbClr val="965C76"/>
+          </a:solidFill>
+          <a:ln>
+            <a:noFill/>
+          </a:ln>
+          <a:effectLst/>
+        </p:spPr>
+        <p:style>
+          <a:lnRef idx="1">
+            <a:schemeClr val="accent1"/>
+          </a:lnRef>
+          <a:fillRef idx="3">
+            <a:schemeClr val="accent1"/>
+          </a:fillRef>
+          <a:effectRef idx="2">
+            <a:schemeClr val="accent1"/>
+          </a:effectRef>
+          <a:fontRef idx="minor">
+            <a:schemeClr val="lt1"/>
+          </a:fontRef>
+        </p:style>
+        <p:txBody>
+          <a:bodyPr rtlCol="0" anchor="ctr" wrap="none" lIns="50800" rIns="50800"/>
+          <a:lstStyle/>
+          <a:p>
+            <a:pPr algn="ctr"/>
+            <a:r>
+              <a:rPr sz="1050" b="1">
+                <a:solidFill>
+                  <a:srgbClr val="FFFFFF"/>
+                </a:solidFill>
+                <a:latin typeface="Calibri"/>
+              </a:rPr>
+              <a:t>8 MIN</a:t>
+            </a:r>
+          </a:p>
+        </p:txBody>
+      </p:sp>
+      <p:sp>
+        <p:nvSpPr>
+          <p:cNvPr id="7" name="Rounded Rectangle 6"/>
+          <p:cNvSpPr/>
+          <p:nvPr/>
+        </p:nvSpPr>
+        <p:spPr>
+          <a:xfrm>
+            <a:off x="1783080" y="2148840"/>
+            <a:ext cx="960120" cy="411480"/>
+          </a:xfrm>
+          <a:prstGeom prst="roundRect">
+            <a:avLst>
+              <a:gd name="adj" fmla="val 50000"/>
+            </a:avLst>
+          </a:prstGeom>
+          <a:solidFill>
+            <a:srgbClr val="965C76"/>
+          </a:solidFill>
+          <a:ln>
+            <a:noFill/>
+          </a:ln>
+          <a:effectLst/>
+        </p:spPr>
+        <p:style>
+          <a:lnRef idx="1">
+            <a:schemeClr val="accent1"/>
+          </a:lnRef>
+          <a:fillRef idx="3">
+            <a:schemeClr val="accent1"/>
+          </a:fillRef>
+          <a:effectRef idx="2">
+            <a:schemeClr val="accent1"/>
+          </a:effectRef>
+          <a:fontRef idx="minor">
+            <a:schemeClr val="lt1"/>
+          </a:fontRef>
+        </p:style>
+        <p:txBody>
+          <a:bodyPr rtlCol="0" anchor="ctr" wrap="none" lIns="50800" rIns="50800"/>
+          <a:lstStyle/>
+          <a:p>
+            <a:pPr algn="ctr"/>
+            <a:r>
+              <a:rPr sz="1050" b="1">
+                <a:solidFill>
+                  <a:srgbClr val="FFFFFF"/>
+                </a:solidFill>
+                <a:latin typeface="Calibri"/>
+              </a:rPr>
+              <a:t>PAIRS</a:t>
+            </a:r>
+          </a:p>
+        </p:txBody>
+      </p:sp>
+      <p:sp>
+        <p:nvSpPr>
+          <p:cNvPr id="8" name="Rounded Rectangle 7"/>
+          <p:cNvSpPr/>
+          <p:nvPr/>
+        </p:nvSpPr>
+        <p:spPr>
+          <a:xfrm>
+            <a:off x="685800" y="2788920"/>
+            <a:ext cx="10607040" cy="3246120"/>
+          </a:xfrm>
+          <a:prstGeom prst="roundRect">
+            <a:avLst>
+              <a:gd name="adj" fmla="val 8000"/>
+            </a:avLst>
+          </a:prstGeom>
+          <a:solidFill>
+            <a:srgbClr val="FFFFFF"/>
+          </a:solidFill>
+          <a:ln>
+            <a:noFill/>
+          </a:ln>
+          <a:effectLst/>
+        </p:spPr>
+        <p:style>
+          <a:lnRef idx="1">
+            <a:schemeClr val="accent1"/>
+          </a:lnRef>
+          <a:fillRef idx="3">
+            <a:schemeClr val="accent1"/>
+          </a:fillRef>
+          <a:effectRef idx="2">
+            <a:schemeClr val="accent1"/>
+          </a:effectRef>
+          <a:fontRef idx="minor">
+            <a:schemeClr val="lt1"/>
+          </a:fontRef>
+        </p:style>
+        <p:txBody>
+          <a:bodyPr rtlCol="0" anchor="ctr" lIns="304800" rIns="304800" tIns="203200" bIns="203200" wrap="square"/>
           <a:lstStyle/>
           <a:p>
             <a:pPr algn="ctr" indent="-203200" marL="203200">
@@ -3708,13 +3789,13 @@
               <a:buChar char="●"/>
             </a:pPr>
             <a:r>
-              <a:rPr sz="1400" b="0" i="0">
-                <a:solidFill>
-                  <a:srgbClr val="201F33"/>
-                </a:solidFill>
-                <a:latin typeface="Calibri"/>
-              </a:rPr>
-              <a:t>This AOS Covers</a:t>
+              <a:rPr sz="1450" b="0" i="0">
+                <a:solidFill>
+                  <a:srgbClr val="201F33"/>
+                </a:solidFill>
+                <a:latin typeface="Calibri"/>
+              </a:rPr>
+              <a:t>Swap current folio work with a partner.</a:t>
             </a:r>
           </a:p>
           <a:p>
@@ -3727,16 +3808,16 @@
               </a:buClr>
               <a:buSzPct val="90000"/>
               <a:buFont typeface="Arial"/>
-              <a:buChar char="–"/>
+              <a:buChar char="●"/>
             </a:pPr>
             <a:r>
-              <a:rPr sz="1250" b="0" i="0">
-                <a:solidFill>
-                  <a:srgbClr val="201F33"/>
-                </a:solidFill>
-                <a:latin typeface="Calibri"/>
-              </a:rPr>
-              <a:t>Final refinement techniques</a:t>
+              <a:rPr sz="1450" b="0" i="0">
+                <a:solidFill>
+                  <a:srgbClr val="201F33"/>
+                </a:solidFill>
+                <a:latin typeface="Calibri"/>
+              </a:rPr>
+              <a:t>Give feedback using the format: "I like...", "I wish...", "What if...".</a:t>
             </a:r>
           </a:p>
           <a:p>
@@ -3749,105 +3830,52 @@
               </a:buClr>
               <a:buSzPct val="90000"/>
               <a:buFont typeface="Arial"/>
-              <a:buChar char="–"/>
+              <a:buChar char="●"/>
             </a:pPr>
             <a:r>
-              <a:rPr sz="1250" b="0" i="0">
-                <a:solidFill>
-                  <a:srgbClr val="201F33"/>
-                </a:solidFill>
-                <a:latin typeface="Calibri"/>
-              </a:rPr>
-              <a:t>Presentation drawing standards</a:t>
-            </a:r>
-          </a:p>
-          <a:p>
-            <a:pPr indent="-203200" marL="203200">
-              <a:spcAft>
-                <a:spcPts val="900"/>
-              </a:spcAft>
-              <a:buClr>
-                <a:srgbClr val="C97B9E"/>
-              </a:buClr>
-              <a:buSzPct val="90000"/>
-              <a:buFont typeface="Arial"/>
-              <a:buChar char="–"/>
-            </a:pPr>
-            <a:r>
-              <a:rPr sz="1250" b="0" i="0">
-                <a:solidFill>
-                  <a:srgbClr val="201F33"/>
-                </a:solidFill>
-                <a:latin typeface="Calibri"/>
-              </a:rPr>
-              <a:t>Folio layout and clarity</a:t>
-            </a:r>
-          </a:p>
-          <a:p>
-            <a:pPr indent="-203200" marL="203200">
-              <a:spcAft>
-                <a:spcPts val="900"/>
-              </a:spcAft>
-              <a:buClr>
-                <a:srgbClr val="C97B9E"/>
-              </a:buClr>
-              <a:buSzPct val="90000"/>
-              <a:buFont typeface="Arial"/>
-              <a:buChar char="–"/>
-            </a:pPr>
-            <a:r>
-              <a:rPr sz="1250" b="0" i="0">
-                <a:solidFill>
-                  <a:srgbClr val="201F33"/>
-                </a:solidFill>
-                <a:latin typeface="Calibri"/>
-              </a:rPr>
-              <a:t>Evaluating against the brief</a:t>
-            </a:r>
-          </a:p>
-        </p:txBody>
-      </p:sp>
-      <p:sp>
-        <p:nvSpPr>
-          <p:cNvPr id="6" name="Oval 5"/>
-          <p:cNvSpPr/>
-          <p:nvPr/>
-        </p:nvSpPr>
-        <p:spPr>
-          <a:xfrm>
-            <a:off x="5532120" y="3840480"/>
-            <a:ext cx="685800" cy="685800"/>
-          </a:xfrm>
-          <a:prstGeom prst="ellipse">
+              <a:rPr sz="1450" b="0" i="0">
+                <a:solidFill>
+                  <a:srgbClr val="201F33"/>
+                </a:solidFill>
+                <a:latin typeface="Calibri"/>
+              </a:rPr>
+              <a:t>Swap back and note one piece of feedback you'll act on.</a:t>
+            </a:r>
+          </a:p>
+        </p:txBody>
+      </p:sp>
+      <p:sp>
+        <p:nvSpPr>
+          <p:cNvPr id="9" name="TextBox 8"/>
+          <p:cNvSpPr txBox="1"/>
+          <p:nvPr/>
+        </p:nvSpPr>
+        <p:spPr>
+          <a:xfrm>
+            <a:off x="685800" y="6217920"/>
+            <a:ext cx="10607040" cy="502920"/>
+          </a:xfrm>
+          <a:prstGeom prst="rect">
             <a:avLst/>
           </a:prstGeom>
-          <a:solidFill>
-            <a:srgbClr val="D9A441"/>
-          </a:solidFill>
-          <a:ln>
-            <a:noFill/>
-          </a:ln>
-          <a:effectLst/>
-        </p:spPr>
-        <p:style>
-          <a:lnRef idx="1">
-            <a:schemeClr val="accent1"/>
-          </a:lnRef>
-          <a:fillRef idx="3">
-            <a:schemeClr val="accent1"/>
-          </a:fillRef>
-          <a:effectRef idx="2">
-            <a:schemeClr val="accent1"/>
-          </a:effectRef>
-          <a:fontRef idx="minor">
-            <a:schemeClr val="lt1"/>
-          </a:fontRef>
-        </p:style>
-        <p:txBody>
-          <a:bodyPr rtlCol="0" anchor="ctr"/>
-          <a:lstStyle/>
-          <a:p>
-            <a:pPr algn="ctr"/>
+          <a:noFill/>
+        </p:spPr>
+        <p:txBody>
+          <a:bodyPr wrap="square" anchor="t">
+            <a:spAutoFit/>
+          </a:bodyPr>
+          <a:lstStyle/>
+          <a:p>
+            <a:pPr algn="l"/>
+            <a:r>
+              <a:rPr sz="1250" b="0" i="1">
+                <a:solidFill>
+                  <a:srgbClr val="FFFFFF"/>
+                </a:solidFill>
+                <a:latin typeface="Calibri"/>
+              </a:rPr>
+              <a:t>Debrief: What's one piece of feedback you disagreed with, and why?</a:t>
+            </a:r>
           </a:p>
         </p:txBody>
       </p:sp>
@@ -3865,7 +3893,7 @@
     <p:bg>
       <p:bgPr>
         <a:solidFill>
-          <a:srgbClr val="F8F6FB"/>
+          <a:srgbClr val="2B2A4A"/>
         </a:solidFill>
         <a:effectLst/>
       </p:bgPr>
@@ -3879,22 +3907,20 @@
       <p:grpSpPr/>
       <p:sp>
         <p:nvSpPr>
-          <p:cNvPr id="2" name="Rounded Rectangle 1"/>
+          <p:cNvPr id="2" name="Oval 1"/>
           <p:cNvSpPr/>
           <p:nvPr/>
         </p:nvSpPr>
         <p:spPr>
           <a:xfrm>
-            <a:off x="685800" y="502920"/>
-            <a:ext cx="3291840" cy="457200"/>
-          </a:xfrm>
-          <a:prstGeom prst="roundRect">
-            <a:avLst>
-              <a:gd name="adj" fmla="val 50000"/>
-            </a:avLst>
-          </a:prstGeom>
-          <a:solidFill>
-            <a:srgbClr val="2B2A4A"/>
+            <a:off x="9692640" y="-914400"/>
+            <a:ext cx="2926080" cy="2926080"/>
+          </a:xfrm>
+          <a:prstGeom prst="ellipse">
+            <a:avLst/>
+          </a:prstGeom>
+          <a:solidFill>
+            <a:srgbClr val="252441"/>
           </a:solidFill>
           <a:ln>
             <a:noFill/>
@@ -3916,75 +3942,29 @@
           </a:fontRef>
         </p:style>
         <p:txBody>
-          <a:bodyPr rtlCol="0" anchor="ctr" wrap="none" lIns="50800" rIns="50800"/>
+          <a:bodyPr rtlCol="0" anchor="ctr"/>
           <a:lstStyle/>
           <a:p>
             <a:pPr algn="ctr"/>
-            <a:r>
-              <a:rPr sz="1100" b="1">
-                <a:solidFill>
-                  <a:srgbClr val="FFFFFF"/>
-                </a:solidFill>
-                <a:latin typeface="Calibri"/>
-              </a:rPr>
-              <a:t>EVALUATION &amp; PRESENTATION</a:t>
-            </a:r>
-          </a:p>
-        </p:txBody>
-      </p:sp>
-      <p:sp>
-        <p:nvSpPr>
-          <p:cNvPr id="3" name="TextBox 2"/>
-          <p:cNvSpPr txBox="1"/>
-          <p:nvPr/>
-        </p:nvSpPr>
-        <p:spPr>
-          <a:xfrm>
-            <a:off x="685800" y="1051560"/>
-            <a:ext cx="10607040" cy="822960"/>
-          </a:xfrm>
-          <a:prstGeom prst="rect">
+          </a:p>
+        </p:txBody>
+      </p:sp>
+      <p:sp>
+        <p:nvSpPr>
+          <p:cNvPr id="3" name="Oval 2"/>
+          <p:cNvSpPr/>
+          <p:nvPr/>
+        </p:nvSpPr>
+        <p:spPr>
+          <a:xfrm>
+            <a:off x="-914400" y="4937760"/>
+            <a:ext cx="2377440" cy="2377440"/>
+          </a:xfrm>
+          <a:prstGeom prst="ellipse">
             <a:avLst/>
           </a:prstGeom>
-          <a:noFill/>
-        </p:spPr>
-        <p:txBody>
-          <a:bodyPr wrap="square" anchor="t">
-            <a:spAutoFit/>
-          </a:bodyPr>
-          <a:lstStyle/>
-          <a:p>
-            <a:pPr algn="l"/>
-            <a:r>
-              <a:rPr sz="2700" b="1" i="0">
-                <a:solidFill>
-                  <a:srgbClr val="201F33"/>
-                </a:solidFill>
-                <a:latin typeface="Cambria"/>
-              </a:rPr>
-              <a:t>Presentation Standards</a:t>
-            </a:r>
-          </a:p>
-        </p:txBody>
-      </p:sp>
-      <p:sp>
-        <p:nvSpPr>
-          <p:cNvPr id="4" name="Rounded Rectangle 3"/>
-          <p:cNvSpPr/>
-          <p:nvPr/>
-        </p:nvSpPr>
-        <p:spPr>
-          <a:xfrm>
-            <a:off x="685800" y="1874519"/>
-            <a:ext cx="5166360" cy="4526280"/>
-          </a:xfrm>
-          <a:prstGeom prst="roundRect">
-            <a:avLst>
-              <a:gd name="adj" fmla="val 6000"/>
-            </a:avLst>
-          </a:prstGeom>
-          <a:solidFill>
-            <a:srgbClr val="E5E5E9"/>
+          <a:solidFill>
+            <a:srgbClr val="252441"/>
           </a:solidFill>
           <a:ln>
             <a:noFill/>
@@ -4006,174 +3986,31 @@
           </a:fontRef>
         </p:style>
         <p:txBody>
-          <a:bodyPr rtlCol="0" anchor="ctr" lIns="279400" rIns="279400" tIns="228600" bIns="228600" wrap="square"/>
-          <a:lstStyle/>
-          <a:p>
-            <a:pPr algn="ctr" indent="-203200" marL="203200">
-              <a:spcAft>
-                <a:spcPts val="900"/>
-              </a:spcAft>
-              <a:buClr>
-                <a:srgbClr val="2B2A4A"/>
-              </a:buClr>
-              <a:buSzPct val="90000"/>
-              <a:buFont typeface="Arial"/>
-              <a:buChar char="●"/>
-            </a:pPr>
-            <a:r>
-              <a:rPr sz="1400" b="0" i="0">
-                <a:solidFill>
-                  <a:srgbClr val="201F33"/>
-                </a:solidFill>
-                <a:latin typeface="Calibri"/>
-              </a:rPr>
-              <a:t>The final design must be presented using an appropriate method to a professional standard, clearly communicating the resolved concept.</a:t>
-            </a:r>
-          </a:p>
-          <a:p>
-            <a:pPr indent="-203200" marL="203200">
-              <a:spcAft>
-                <a:spcPts val="900"/>
-              </a:spcAft>
-              <a:buClr>
-                <a:srgbClr val="2B2A4A"/>
-              </a:buClr>
-              <a:buSzPct val="90000"/>
-              <a:buFont typeface="Arial"/>
-              <a:buChar char="–"/>
-            </a:pPr>
-            <a:r>
-              <a:rPr sz="1250" b="1" i="0">
-                <a:solidFill>
-                  <a:srgbClr val="24233E"/>
-                </a:solidFill>
-                <a:latin typeface="Calibri"/>
-              </a:rPr>
-              <a:t>Accuracy</a:t>
-            </a:r>
-            <a:r>
-              <a:rPr sz="1250" b="0" i="0">
-                <a:solidFill>
-                  <a:srgbClr val="201F33"/>
-                </a:solidFill>
-                <a:latin typeface="Calibri"/>
-              </a:rPr>
-              <a:t> — correct use of orthogonal, isometric or perspective methods</a:t>
-            </a:r>
-          </a:p>
-          <a:p>
-            <a:pPr indent="-203200" marL="203200">
-              <a:spcAft>
-                <a:spcPts val="900"/>
-              </a:spcAft>
-              <a:buClr>
-                <a:srgbClr val="2B2A4A"/>
-              </a:buClr>
-              <a:buSzPct val="90000"/>
-              <a:buFont typeface="Arial"/>
-              <a:buChar char="–"/>
-            </a:pPr>
-            <a:r>
-              <a:rPr sz="1250" b="1" i="0">
-                <a:solidFill>
-                  <a:srgbClr val="24233E"/>
-                </a:solidFill>
-                <a:latin typeface="Calibri"/>
-              </a:rPr>
-              <a:t>Rendering</a:t>
-            </a:r>
-            <a:r>
-              <a:rPr sz="1250" b="0" i="0">
-                <a:solidFill>
-                  <a:srgbClr val="201F33"/>
-                </a:solidFill>
-                <a:latin typeface="Calibri"/>
-              </a:rPr>
-              <a:t> — colour, tone and material communicated clearly</a:t>
-            </a:r>
-          </a:p>
-          <a:p>
-            <a:pPr indent="-203200" marL="203200">
-              <a:spcAft>
-                <a:spcPts val="900"/>
-              </a:spcAft>
-              <a:buClr>
-                <a:srgbClr val="2B2A4A"/>
-              </a:buClr>
-              <a:buSzPct val="90000"/>
-              <a:buFont typeface="Arial"/>
-              <a:buChar char="–"/>
-            </a:pPr>
-            <a:r>
-              <a:rPr sz="1250" b="1" i="0">
-                <a:solidFill>
-                  <a:srgbClr val="24233E"/>
-                </a:solidFill>
-                <a:latin typeface="Calibri"/>
-              </a:rPr>
-              <a:t>Context</a:t>
-            </a:r>
-            <a:r>
-              <a:rPr sz="1250" b="0" i="0">
-                <a:solidFill>
-                  <a:srgbClr val="201F33"/>
-                </a:solidFill>
-                <a:latin typeface="Calibri"/>
-              </a:rPr>
-              <a:t> — mockups or environment shown where relevant</a:t>
-            </a:r>
-          </a:p>
-          <a:p>
-            <a:pPr indent="-203200" marL="203200">
-              <a:spcAft>
-                <a:spcPts val="900"/>
-              </a:spcAft>
-              <a:buClr>
-                <a:srgbClr val="2B2A4A"/>
-              </a:buClr>
-              <a:buSzPct val="90000"/>
-              <a:buFont typeface="Arial"/>
-              <a:buChar char="–"/>
-            </a:pPr>
-            <a:r>
-              <a:rPr sz="1250" b="1" i="0">
-                <a:solidFill>
-                  <a:srgbClr val="24233E"/>
-                </a:solidFill>
-                <a:latin typeface="Calibri"/>
-              </a:rPr>
-              <a:t>Craftsmanship</a:t>
-            </a:r>
-            <a:r>
-              <a:rPr sz="1250" b="0" i="0">
-                <a:solidFill>
-                  <a:srgbClr val="201F33"/>
-                </a:solidFill>
-                <a:latin typeface="Calibri"/>
-              </a:rPr>
-              <a:t> — clean linework, consistent scale, legible annotation</a:t>
-            </a:r>
-          </a:p>
-        </p:txBody>
-      </p:sp>
-      <p:sp>
-        <p:nvSpPr>
-          <p:cNvPr id="5" name="Rounded Rectangle 4"/>
+          <a:bodyPr rtlCol="0" anchor="ctr"/>
+          <a:lstStyle/>
+          <a:p>
+            <a:pPr algn="ctr"/>
+          </a:p>
+        </p:txBody>
+      </p:sp>
+      <p:sp>
+        <p:nvSpPr>
+          <p:cNvPr id="4" name="Rounded Rectangle 3"/>
           <p:cNvSpPr/>
           <p:nvPr/>
         </p:nvSpPr>
         <p:spPr>
           <a:xfrm>
-            <a:off x="6080760" y="1874519"/>
-            <a:ext cx="5166360" cy="4526280"/>
+            <a:off x="822960" y="1051560"/>
+            <a:ext cx="1188720" cy="502920"/>
           </a:xfrm>
           <a:prstGeom prst="roundRect">
             <a:avLst>
-              <a:gd name="adj" fmla="val 6000"/>
+              <a:gd name="adj" fmla="val 50000"/>
             </a:avLst>
           </a:prstGeom>
           <a:solidFill>
-            <a:srgbClr val="EFDAE3"/>
+            <a:srgbClr val="FFFFFF"/>
           </a:solidFill>
           <a:ln>
             <a:noFill/>
@@ -4195,84 +4032,40 @@
           </a:fontRef>
         </p:style>
         <p:txBody>
-          <a:bodyPr rtlCol="0" anchor="ctr" lIns="279400" rIns="279400" tIns="228600" bIns="228600" wrap="square"/>
-          <a:lstStyle/>
-          <a:p>
-            <a:pPr algn="ctr" indent="-203200" marL="203200">
-              <a:spcAft>
-                <a:spcPts val="900"/>
-              </a:spcAft>
-              <a:buClr>
-                <a:srgbClr val="C97B9E"/>
-              </a:buClr>
-              <a:buSzPct val="90000"/>
-              <a:buFont typeface="Arial"/>
-              <a:buChar char="●"/>
-            </a:pPr>
-            <a:r>
-              <a:rPr sz="1400" b="0" i="0">
-                <a:solidFill>
-                  <a:srgbClr val="201F33"/>
-                </a:solidFill>
-                <a:latin typeface="Calibri"/>
-              </a:rPr>
-              <a:t>See the </a:t>
-            </a:r>
-            <a:r>
-              <a:rPr sz="1400" b="1" i="0">
-                <a:solidFill>
-                  <a:srgbClr val="AA6886"/>
-                </a:solidFill>
-                <a:latin typeface="Calibri"/>
-              </a:rPr>
-              <a:t>Technical Drawing</a:t>
-            </a:r>
-            <a:r>
-              <a:rPr sz="1400" b="0" i="0">
-                <a:solidFill>
-                  <a:srgbClr val="201F33"/>
-                </a:solidFill>
-                <a:latin typeface="Calibri"/>
-              </a:rPr>
-              <a:t> and </a:t>
-            </a:r>
-            <a:r>
-              <a:rPr sz="1400" b="1" i="0">
-                <a:solidFill>
-                  <a:srgbClr val="AA6886"/>
-                </a:solidFill>
-                <a:latin typeface="Calibri"/>
-              </a:rPr>
-              <a:t>Visualisation Drawing</a:t>
-            </a:r>
-            <a:r>
-              <a:rPr sz="1400" b="0" i="0">
-                <a:solidFill>
-                  <a:srgbClr val="201F33"/>
-                </a:solidFill>
-                <a:latin typeface="Calibri"/>
-              </a:rPr>
-              <a:t> handouts (Unit 1 AOS 2) for a full recap of drawing methods.</a:t>
-            </a:r>
-          </a:p>
-        </p:txBody>
-      </p:sp>
-      <p:sp>
-        <p:nvSpPr>
-          <p:cNvPr id="6" name="Oval 5"/>
+          <a:bodyPr rtlCol="0" anchor="ctr" wrap="none" lIns="50800" rIns="50800"/>
+          <a:lstStyle/>
+          <a:p>
+            <a:pPr algn="ctr"/>
+            <a:r>
+              <a:rPr sz="1400" b="1">
+                <a:solidFill>
+                  <a:srgbClr val="22213B"/>
+                </a:solidFill>
+                <a:latin typeface="Calibri"/>
+              </a:rPr>
+              <a:t>02</a:t>
+            </a:r>
+          </a:p>
+        </p:txBody>
+      </p:sp>
+      <p:sp>
+        <p:nvSpPr>
+          <p:cNvPr id="5" name="Rounded Rectangle 4"/>
           <p:cNvSpPr/>
           <p:nvPr/>
         </p:nvSpPr>
         <p:spPr>
           <a:xfrm>
-            <a:off x="5532120" y="3840480"/>
-            <a:ext cx="685800" cy="685800"/>
-          </a:xfrm>
-          <a:prstGeom prst="ellipse">
-            <a:avLst/>
-          </a:prstGeom>
-          <a:solidFill>
-            <a:srgbClr val="D9A441"/>
+            <a:off x="822960" y="2011680"/>
+            <a:ext cx="10515600" cy="2834640"/>
+          </a:xfrm>
+          <a:prstGeom prst="roundRect">
+            <a:avLst>
+              <a:gd name="adj" fmla="val 18000"/>
+            </a:avLst>
+          </a:prstGeom>
+          <a:solidFill>
+            <a:srgbClr val="FFFFFF"/>
           </a:solidFill>
           <a:ln>
             <a:noFill/>
@@ -4298,6 +4091,76 @@
           <a:lstStyle/>
           <a:p>
             <a:pPr algn="ctr"/>
+          </a:p>
+        </p:txBody>
+      </p:sp>
+      <p:sp>
+        <p:nvSpPr>
+          <p:cNvPr id="6" name="TextBox 5"/>
+          <p:cNvSpPr txBox="1"/>
+          <p:nvPr/>
+        </p:nvSpPr>
+        <p:spPr>
+          <a:xfrm>
+            <a:off x="1280160" y="2697480"/>
+            <a:ext cx="9601200" cy="1097280"/>
+          </a:xfrm>
+          <a:prstGeom prst="rect">
+            <a:avLst/>
+          </a:prstGeom>
+          <a:noFill/>
+        </p:spPr>
+        <p:txBody>
+          <a:bodyPr wrap="square" anchor="t">
+            <a:spAutoFit/>
+          </a:bodyPr>
+          <a:lstStyle/>
+          <a:p>
+            <a:pPr algn="l"/>
+            <a:r>
+              <a:rPr sz="3400" b="1" i="0">
+                <a:solidFill>
+                  <a:srgbClr val="24233E"/>
+                </a:solidFill>
+                <a:latin typeface="Cambria"/>
+              </a:rPr>
+              <a:t>Evaluation &amp; Presentation</a:t>
+            </a:r>
+          </a:p>
+        </p:txBody>
+      </p:sp>
+      <p:sp>
+        <p:nvSpPr>
+          <p:cNvPr id="7" name="TextBox 6"/>
+          <p:cNvSpPr txBox="1"/>
+          <p:nvPr/>
+        </p:nvSpPr>
+        <p:spPr>
+          <a:xfrm>
+            <a:off x="1280160" y="3657600"/>
+            <a:ext cx="9601200" cy="548640"/>
+          </a:xfrm>
+          <a:prstGeom prst="rect">
+            <a:avLst/>
+          </a:prstGeom>
+          <a:noFill/>
+        </p:spPr>
+        <p:txBody>
+          <a:bodyPr wrap="square" anchor="t">
+            <a:spAutoFit/>
+          </a:bodyPr>
+          <a:lstStyle/>
+          <a:p>
+            <a:pPr algn="l"/>
+            <a:r>
+              <a:rPr sz="1500" b="0" i="0">
+                <a:solidFill>
+                  <a:srgbClr val="6B6B6B"/>
+                </a:solidFill>
+                <a:latin typeface="Calibri"/>
+              </a:rPr>
+              <a:t>AOS 2 - Evaluation, Refinement and Presentation</a:t>
+            </a:r>
           </a:p>
         </p:txBody>
       </p:sp>
@@ -4412,7 +4275,7 @@
                 </a:solidFill>
                 <a:latin typeface="Cambria"/>
               </a:rPr>
-              <a:t>Evaluating Against the Brief</a:t>
+              <a:t>From Resolution to Final Presentation</a:t>
             </a:r>
           </a:p>
         </p:txBody>
@@ -4426,15 +4289,15 @@
         <p:spPr>
           <a:xfrm>
             <a:off x="685800" y="1874519"/>
-            <a:ext cx="2500884" cy="1554480"/>
+            <a:ext cx="5166360" cy="4526280"/>
           </a:xfrm>
           <a:prstGeom prst="roundRect">
             <a:avLst>
-              <a:gd name="adj" fmla="val 12000"/>
+              <a:gd name="adj" fmla="val 6000"/>
             </a:avLst>
           </a:prstGeom>
           <a:solidFill>
-            <a:srgbClr val="DFDFE3"/>
+            <a:srgbClr val="E5E5E9"/>
           </a:solidFill>
           <a:ln>
             <a:noFill/>
@@ -4456,29 +4319,86 @@
           </a:fontRef>
         </p:style>
         <p:txBody>
-          <a:bodyPr rtlCol="0" anchor="ctr" wrap="square" lIns="127000" rIns="127000" tIns="101600" bIns="101600"/>
-          <a:lstStyle/>
-          <a:p>
-            <a:pPr algn="ctr"/>
-            <a:r>
-              <a:rPr b="1" sz="1300">
-                <a:solidFill>
-                  <a:srgbClr val="22213B"/>
-                </a:solidFill>
-                <a:latin typeface="Calibri"/>
-              </a:rPr>
-              <a:t>Purpose</a:t>
-            </a:r>
-          </a:p>
-          <a:p>
-            <a:r>
-              <a:rPr sz="1050">
-                <a:solidFill>
-                  <a:srgbClr val="201F33"/>
-                </a:solidFill>
-                <a:latin typeface="Calibri"/>
-              </a:rPr>
-              <a:t>Does the design achieve its communication objective?</a:t>
+          <a:bodyPr rtlCol="0" anchor="ctr" lIns="279400" rIns="279400" tIns="228600" bIns="228600" wrap="square"/>
+          <a:lstStyle/>
+          <a:p>
+            <a:pPr algn="ctr" indent="-203200" marL="203200">
+              <a:spcAft>
+                <a:spcPts val="900"/>
+              </a:spcAft>
+              <a:buClr>
+                <a:srgbClr val="2B2A4A"/>
+              </a:buClr>
+              <a:buSzPct val="90000"/>
+              <a:buFont typeface="Arial"/>
+              <a:buChar char="●"/>
+            </a:pPr>
+            <a:r>
+              <a:rPr sz="1400" b="0" i="0">
+                <a:solidFill>
+                  <a:srgbClr val="201F33"/>
+                </a:solidFill>
+                <a:latin typeface="Calibri"/>
+              </a:rPr>
+              <a:t>Once a concept is resolved, it undergoes </a:t>
+            </a:r>
+            <a:r>
+              <a:rPr sz="1400" b="1" i="0">
+                <a:solidFill>
+                  <a:srgbClr val="24233E"/>
+                </a:solidFill>
+                <a:latin typeface="Calibri"/>
+              </a:rPr>
+              <a:t>final refinement</a:t>
+            </a:r>
+            <a:r>
+              <a:rPr sz="1400" b="0" i="0">
+                <a:solidFill>
+                  <a:srgbClr val="201F33"/>
+                </a:solidFill>
+                <a:latin typeface="Calibri"/>
+              </a:rPr>
+              <a:t> — small, precise adjustments — before being presented to a professional standard.</a:t>
+            </a:r>
+          </a:p>
+          <a:p>
+            <a:pPr indent="-203200" marL="203200">
+              <a:spcAft>
+                <a:spcPts val="900"/>
+              </a:spcAft>
+              <a:buClr>
+                <a:srgbClr val="2B2A4A"/>
+              </a:buClr>
+              <a:buSzPct val="90000"/>
+              <a:buFont typeface="Arial"/>
+              <a:buChar char="●"/>
+            </a:pPr>
+            <a:r>
+              <a:rPr sz="1400" b="0" i="0">
+                <a:solidFill>
+                  <a:srgbClr val="201F33"/>
+                </a:solidFill>
+                <a:latin typeface="Calibri"/>
+              </a:rPr>
+              <a:t>The finished design is then </a:t>
+            </a:r>
+            <a:r>
+              <a:rPr sz="1400" b="1" i="0">
+                <a:solidFill>
+                  <a:srgbClr val="24233E"/>
+                </a:solidFill>
+                <a:latin typeface="Calibri"/>
+              </a:rPr>
+              <a:t>evaluated</a:t>
+            </a:r>
+            <a:r>
+              <a:rPr sz="1400" b="0" i="0">
+                <a:solidFill>
+                  <a:srgbClr val="201F33"/>
+                </a:solidFill>
+                <a:latin typeface="Calibri"/>
+              </a:rPr>
+              <a:t> against the original brief to determine its success.</a:t>
             </a:r>
           </a:p>
         </p:txBody>
@@ -4491,16 +4411,16 @@
         </p:nvSpPr>
         <p:spPr>
           <a:xfrm>
-            <a:off x="3387852" y="1874519"/>
-            <a:ext cx="2500884" cy="1554480"/>
+            <a:off x="6080760" y="1874519"/>
+            <a:ext cx="5166360" cy="4526280"/>
           </a:xfrm>
           <a:prstGeom prst="roundRect">
             <a:avLst>
-              <a:gd name="adj" fmla="val 12000"/>
+              <a:gd name="adj" fmla="val 6000"/>
             </a:avLst>
           </a:prstGeom>
           <a:solidFill>
-            <a:srgbClr val="F9F1E2"/>
+            <a:srgbClr val="EFDAE3"/>
           </a:solidFill>
           <a:ln>
             <a:noFill/>
@@ -4522,51 +4442,136 @@
           </a:fontRef>
         </p:style>
         <p:txBody>
-          <a:bodyPr rtlCol="0" anchor="ctr" wrap="square" lIns="127000" rIns="127000" tIns="101600" bIns="101600"/>
-          <a:lstStyle/>
-          <a:p>
-            <a:pPr algn="ctr"/>
-            <a:r>
-              <a:rPr b="1" sz="1300">
-                <a:solidFill>
-                  <a:srgbClr val="AD8334"/>
-                </a:solidFill>
-                <a:latin typeface="Calibri"/>
-              </a:rPr>
-              <a:t>Audience</a:t>
-            </a:r>
-          </a:p>
-          <a:p>
-            <a:r>
-              <a:rPr sz="1050">
-                <a:solidFill>
-                  <a:srgbClr val="201F33"/>
-                </a:solidFill>
-                <a:latin typeface="Calibri"/>
-              </a:rPr>
-              <a:t>Is it appropriate and effective for the target audience?</a:t>
-            </a:r>
-          </a:p>
-        </p:txBody>
-      </p:sp>
-      <p:sp>
-        <p:nvSpPr>
-          <p:cNvPr id="6" name="Rounded Rectangle 5"/>
+          <a:bodyPr rtlCol="0" anchor="ctr" lIns="279400" rIns="279400" tIns="228600" bIns="228600" wrap="square"/>
+          <a:lstStyle/>
+          <a:p>
+            <a:pPr algn="ctr" indent="-203200" marL="203200">
+              <a:spcAft>
+                <a:spcPts val="900"/>
+              </a:spcAft>
+              <a:buClr>
+                <a:srgbClr val="C97B9E"/>
+              </a:buClr>
+              <a:buSzPct val="90000"/>
+              <a:buFont typeface="Arial"/>
+              <a:buChar char="●"/>
+            </a:pPr>
+            <a:r>
+              <a:rPr sz="1400" b="0" i="0">
+                <a:solidFill>
+                  <a:srgbClr val="201F33"/>
+                </a:solidFill>
+                <a:latin typeface="Calibri"/>
+              </a:rPr>
+              <a:t>This AOS Covers</a:t>
+            </a:r>
+          </a:p>
+          <a:p>
+            <a:pPr indent="-203200" marL="203200">
+              <a:spcAft>
+                <a:spcPts val="900"/>
+              </a:spcAft>
+              <a:buClr>
+                <a:srgbClr val="C97B9E"/>
+              </a:buClr>
+              <a:buSzPct val="90000"/>
+              <a:buFont typeface="Arial"/>
+              <a:buChar char="–"/>
+            </a:pPr>
+            <a:r>
+              <a:rPr sz="1250" b="0" i="0">
+                <a:solidFill>
+                  <a:srgbClr val="201F33"/>
+                </a:solidFill>
+                <a:latin typeface="Calibri"/>
+              </a:rPr>
+              <a:t>Final refinement techniques</a:t>
+            </a:r>
+          </a:p>
+          <a:p>
+            <a:pPr indent="-203200" marL="203200">
+              <a:spcAft>
+                <a:spcPts val="900"/>
+              </a:spcAft>
+              <a:buClr>
+                <a:srgbClr val="C97B9E"/>
+              </a:buClr>
+              <a:buSzPct val="90000"/>
+              <a:buFont typeface="Arial"/>
+              <a:buChar char="–"/>
+            </a:pPr>
+            <a:r>
+              <a:rPr sz="1250" b="0" i="0">
+                <a:solidFill>
+                  <a:srgbClr val="201F33"/>
+                </a:solidFill>
+                <a:latin typeface="Calibri"/>
+              </a:rPr>
+              <a:t>Presentation drawing standards</a:t>
+            </a:r>
+          </a:p>
+          <a:p>
+            <a:pPr indent="-203200" marL="203200">
+              <a:spcAft>
+                <a:spcPts val="900"/>
+              </a:spcAft>
+              <a:buClr>
+                <a:srgbClr val="C97B9E"/>
+              </a:buClr>
+              <a:buSzPct val="90000"/>
+              <a:buFont typeface="Arial"/>
+              <a:buChar char="–"/>
+            </a:pPr>
+            <a:r>
+              <a:rPr sz="1250" b="0" i="0">
+                <a:solidFill>
+                  <a:srgbClr val="201F33"/>
+                </a:solidFill>
+                <a:latin typeface="Calibri"/>
+              </a:rPr>
+              <a:t>Folio layout and clarity</a:t>
+            </a:r>
+          </a:p>
+          <a:p>
+            <a:pPr indent="-203200" marL="203200">
+              <a:spcAft>
+                <a:spcPts val="900"/>
+              </a:spcAft>
+              <a:buClr>
+                <a:srgbClr val="C97B9E"/>
+              </a:buClr>
+              <a:buSzPct val="90000"/>
+              <a:buFont typeface="Arial"/>
+              <a:buChar char="–"/>
+            </a:pPr>
+            <a:r>
+              <a:rPr sz="1250" b="0" i="0">
+                <a:solidFill>
+                  <a:srgbClr val="201F33"/>
+                </a:solidFill>
+                <a:latin typeface="Calibri"/>
+              </a:rPr>
+              <a:t>Evaluating against the brief</a:t>
+            </a:r>
+          </a:p>
+        </p:txBody>
+      </p:sp>
+      <p:sp>
+        <p:nvSpPr>
+          <p:cNvPr id="6" name="Oval 5"/>
           <p:cNvSpPr/>
           <p:nvPr/>
         </p:nvSpPr>
         <p:spPr>
           <a:xfrm>
-            <a:off x="6089904" y="1874519"/>
-            <a:ext cx="2500884" cy="1554480"/>
-          </a:xfrm>
-          <a:prstGeom prst="roundRect">
-            <a:avLst>
-              <a:gd name="adj" fmla="val 12000"/>
-            </a:avLst>
-          </a:prstGeom>
-          <a:solidFill>
-            <a:srgbClr val="F6EBF0"/>
+            <a:off x="5532120" y="3840480"/>
+            <a:ext cx="685800" cy="685800"/>
+          </a:xfrm>
+          <a:prstGeom prst="ellipse">
+            <a:avLst/>
+          </a:prstGeom>
+          <a:solidFill>
+            <a:srgbClr val="D9A441"/>
           </a:solidFill>
           <a:ln>
             <a:noFill/>
@@ -4588,179 +4593,10 @@
           </a:fontRef>
         </p:style>
         <p:txBody>
-          <a:bodyPr rtlCol="0" anchor="ctr" wrap="square" lIns="127000" rIns="127000" tIns="101600" bIns="101600"/>
+          <a:bodyPr rtlCol="0" anchor="ctr"/>
           <a:lstStyle/>
           <a:p>
             <a:pPr algn="ctr"/>
-            <a:r>
-              <a:rPr b="1" sz="1300">
-                <a:solidFill>
-                  <a:srgbClr val="A0627E"/>
-                </a:solidFill>
-                <a:latin typeface="Calibri"/>
-              </a:rPr>
-              <a:t>Constraints</a:t>
-            </a:r>
-          </a:p>
-          <a:p>
-            <a:r>
-              <a:rPr sz="1050">
-                <a:solidFill>
-                  <a:srgbClr val="201F33"/>
-                </a:solidFill>
-                <a:latin typeface="Calibri"/>
-              </a:rPr>
-              <a:t>Were the stated constraints respected (materials, time, format)?</a:t>
-            </a:r>
-          </a:p>
-        </p:txBody>
-      </p:sp>
-      <p:sp>
-        <p:nvSpPr>
-          <p:cNvPr id="7" name="Rounded Rectangle 6"/>
-          <p:cNvSpPr/>
-          <p:nvPr/>
-        </p:nvSpPr>
-        <p:spPr>
-          <a:xfrm>
-            <a:off x="8791956" y="1874519"/>
-            <a:ext cx="2500884" cy="1554480"/>
-          </a:xfrm>
-          <a:prstGeom prst="roundRect">
-            <a:avLst>
-              <a:gd name="adj" fmla="val 12000"/>
-            </a:avLst>
-          </a:prstGeom>
-          <a:solidFill>
-            <a:srgbClr val="DFDFE3"/>
-          </a:solidFill>
-          <a:ln>
-            <a:noFill/>
-          </a:ln>
-          <a:effectLst/>
-        </p:spPr>
-        <p:style>
-          <a:lnRef idx="1">
-            <a:schemeClr val="accent1"/>
-          </a:lnRef>
-          <a:fillRef idx="3">
-            <a:schemeClr val="accent1"/>
-          </a:fillRef>
-          <a:effectRef idx="2">
-            <a:schemeClr val="accent1"/>
-          </a:effectRef>
-          <a:fontRef idx="minor">
-            <a:schemeClr val="lt1"/>
-          </a:fontRef>
-        </p:style>
-        <p:txBody>
-          <a:bodyPr rtlCol="0" anchor="ctr" wrap="square" lIns="127000" rIns="127000" tIns="101600" bIns="101600"/>
-          <a:lstStyle/>
-          <a:p>
-            <a:pPr algn="ctr"/>
-            <a:r>
-              <a:rPr b="1" sz="1300">
-                <a:solidFill>
-                  <a:srgbClr val="22213B"/>
-                </a:solidFill>
-                <a:latin typeface="Calibri"/>
-              </a:rPr>
-              <a:t>Obligatory Fields</a:t>
-            </a:r>
-          </a:p>
-          <a:p>
-            <a:r>
-              <a:rPr sz="1050">
-                <a:solidFill>
-                  <a:srgbClr val="201F33"/>
-                </a:solidFill>
-                <a:latin typeface="Calibri"/>
-              </a:rPr>
-              <a:t>Were all required design outcomes delivered?</a:t>
-            </a:r>
-          </a:p>
-        </p:txBody>
-      </p:sp>
-      <p:sp>
-        <p:nvSpPr>
-          <p:cNvPr id="8" name="Rounded Rectangle 7"/>
-          <p:cNvSpPr/>
-          <p:nvPr/>
-        </p:nvSpPr>
-        <p:spPr>
-          <a:xfrm>
-            <a:off x="685800" y="3675887"/>
-            <a:ext cx="10607040" cy="2862073"/>
-          </a:xfrm>
-          <a:prstGeom prst="roundRect">
-            <a:avLst>
-              <a:gd name="adj" fmla="val 10000"/>
-            </a:avLst>
-          </a:prstGeom>
-          <a:solidFill>
-            <a:srgbClr val="F9F1E2"/>
-          </a:solidFill>
-          <a:ln>
-            <a:noFill/>
-          </a:ln>
-          <a:effectLst/>
-        </p:spPr>
-        <p:style>
-          <a:lnRef idx="1">
-            <a:schemeClr val="accent1"/>
-          </a:lnRef>
-          <a:fillRef idx="3">
-            <a:schemeClr val="accent1"/>
-          </a:fillRef>
-          <a:effectRef idx="2">
-            <a:schemeClr val="accent1"/>
-          </a:effectRef>
-          <a:fontRef idx="minor">
-            <a:schemeClr val="lt1"/>
-          </a:fontRef>
-        </p:style>
-        <p:txBody>
-          <a:bodyPr rtlCol="0" anchor="ctr" lIns="203200" rIns="203200" tIns="101600" bIns="101600" wrap="square"/>
-          <a:lstStyle/>
-          <a:p>
-            <a:pPr algn="ctr" indent="-203200" marL="203200">
-              <a:spcAft>
-                <a:spcPts val="900"/>
-              </a:spcAft>
-              <a:buClr>
-                <a:srgbClr val="D9A441"/>
-              </a:buClr>
-              <a:buSzPct val="90000"/>
-              <a:buFont typeface="Arial"/>
-              <a:buChar char="●"/>
-            </a:pPr>
-            <a:r>
-              <a:rPr sz="1200" b="0" i="0">
-                <a:solidFill>
-                  <a:srgbClr val="201F33"/>
-                </a:solidFill>
-                <a:latin typeface="Calibri"/>
-              </a:rPr>
-              <a:t> A strong evaluation is </a:t>
-            </a:r>
-            <a:r>
-              <a:rPr sz="1200" b="1" i="0">
-                <a:solidFill>
-                  <a:srgbClr val="B88B37"/>
-                </a:solidFill>
-                <a:latin typeface="Calibri"/>
-              </a:rPr>
-              <a:t>specific and balanced</a:t>
-            </a:r>
-            <a:r>
-              <a:rPr sz="1200" b="0" i="0">
-                <a:solidFill>
-                  <a:srgbClr val="201F33"/>
-                </a:solidFill>
-                <a:latin typeface="Calibri"/>
-              </a:rPr>
-              <a:t> — identify genuine strengths and any limitations, not just praise. </a:t>
-            </a:r>
           </a:p>
         </p:txBody>
       </p:sp>
@@ -4875,7 +4711,7 @@
                 </a:solidFill>
                 <a:latin typeface="Cambria"/>
               </a:rPr>
-              <a:t>Folio Layout &amp; Clarity</a:t>
+              <a:t>Presentation Standards</a:t>
             </a:r>
           </a:p>
         </p:txBody>
@@ -4940,7 +4776,7 @@
                 </a:solidFill>
                 <a:latin typeface="Calibri"/>
               </a:rPr>
-              <a:t>How your folio is organised affects how clearly your design thinking can be assessed.</a:t>
+              <a:t>The final design must be presented using an appropriate method to a professional standard, clearly communicating the resolved concept.</a:t>
             </a:r>
           </a:p>
           <a:p>
@@ -4962,7 +4798,7 @@
                 </a:solidFill>
                 <a:latin typeface="Calibri"/>
               </a:rPr>
-              <a:t>Sequence</a:t>
+              <a:t>Accuracy</a:t>
             </a:r>
             <a:r>
               <a:rPr sz="1250" b="0" i="0">
@@ -4971,7 +4807,7 @@
                 </a:solidFill>
                 <a:latin typeface="Calibri"/>
               </a:rPr>
-              <a:t> — brief → research → generation → development → resolution → evaluation</a:t>
+              <a:t> — correct use of orthogonal, isometric or perspective methods</a:t>
             </a:r>
           </a:p>
           <a:p>
@@ -4993,7 +4829,7 @@
                 </a:solidFill>
                 <a:latin typeface="Calibri"/>
               </a:rPr>
-              <a:t>Labelling</a:t>
+              <a:t>Rendering</a:t>
             </a:r>
             <a:r>
               <a:rPr sz="1250" b="0" i="0">
@@ -5002,7 +4838,7 @@
                 </a:solidFill>
                 <a:latin typeface="Calibri"/>
               </a:rPr>
-              <a:t> — clearly label the brief, each concept, and final design</a:t>
+              <a:t> — colour, tone and material communicated clearly</a:t>
             </a:r>
           </a:p>
           <a:p>
@@ -5024,7 +4860,7 @@
                 </a:solidFill>
                 <a:latin typeface="Calibri"/>
               </a:rPr>
-              <a:t>Consistency</a:t>
+              <a:t>Context</a:t>
             </a:r>
             <a:r>
               <a:rPr sz="1250" b="0" i="0">
@@ -5033,7 +4869,38 @@
                 </a:solidFill>
                 <a:latin typeface="Calibri"/>
               </a:rPr>
-              <a:t> — consistent visual presentation across pages</a:t>
+              <a:t> — mockups or environment shown where relevant</a:t>
+            </a:r>
+          </a:p>
+          <a:p>
+            <a:pPr indent="-203200" marL="203200">
+              <a:spcAft>
+                <a:spcPts val="900"/>
+              </a:spcAft>
+              <a:buClr>
+                <a:srgbClr val="2B2A4A"/>
+              </a:buClr>
+              <a:buSzPct val="90000"/>
+              <a:buFont typeface="Arial"/>
+              <a:buChar char="–"/>
+            </a:pPr>
+            <a:r>
+              <a:rPr sz="1250" b="1" i="0">
+                <a:solidFill>
+                  <a:srgbClr val="24233E"/>
+                </a:solidFill>
+                <a:latin typeface="Calibri"/>
+              </a:rPr>
+              <a:t>Craftsmanship</a:t>
+            </a:r>
+            <a:r>
+              <a:rPr sz="1250" b="0" i="0">
+                <a:solidFill>
+                  <a:srgbClr val="201F33"/>
+                </a:solidFill>
+                <a:latin typeface="Calibri"/>
+              </a:rPr>
+              <a:t> — clean linework, consistent scale, legible annotation</a:t>
             </a:r>
           </a:p>
         </p:txBody>
@@ -5098,21 +4965,17 @@
                 </a:solidFill>
                 <a:latin typeface="Calibri"/>
               </a:rPr>
-              <a:t>Exam Tip</a:t>
-            </a:r>
-          </a:p>
-          <a:p>
-            <a:pPr indent="-203200" marL="203200">
-              <a:spcAft>
-                <a:spcPts val="900"/>
-              </a:spcAft>
-              <a:buClr>
-                <a:srgbClr val="C97B9E"/>
-              </a:buClr>
-              <a:buSzPct val="90000"/>
-              <a:buFont typeface="Arial"/>
-              <a:buChar char="●"/>
-            </a:pPr>
+              <a:t>See the </a:t>
+            </a:r>
+            <a:r>
+              <a:rPr sz="1400" b="1" i="0">
+                <a:solidFill>
+                  <a:srgbClr val="AA6886"/>
+                </a:solidFill>
+                <a:latin typeface="Calibri"/>
+              </a:rPr>
+              <a:t>Technical Drawing</a:t>
+            </a:r>
             <a:r>
               <a:rPr sz="1400" b="0" i="0">
                 <a:solidFill>
@@ -5120,7 +4983,25 @@
                 </a:solidFill>
                 <a:latin typeface="Calibri"/>
               </a:rPr>
-              <a:t>Exam questions may show a folio excerpt and ask you to identify which stage of the process it represents — know the full sequence well.</a:t>
+              <a:t> and </a:t>
+            </a:r>
+            <a:r>
+              <a:rPr sz="1400" b="1" i="0">
+                <a:solidFill>
+                  <a:srgbClr val="AA6886"/>
+                </a:solidFill>
+                <a:latin typeface="Calibri"/>
+              </a:rPr>
+              <a:t>Visualisation Drawing</a:t>
+            </a:r>
+            <a:r>
+              <a:rPr sz="1400" b="0" i="0">
+                <a:solidFill>
+                  <a:srgbClr val="201F33"/>
+                </a:solidFill>
+                <a:latin typeface="Calibri"/>
+              </a:rPr>
+              <a:t> handouts (Unit 1 AOS 2) for a full recap of drawing methods.</a:t>
             </a:r>
           </a:p>
         </p:txBody>
@@ -5280,7 +5161,7 @@
                 </a:solidFill>
                 <a:latin typeface="Cambria"/>
               </a:rPr>
-              <a:t>Writing an Evaluation</a:t>
+              <a:t>Evaluating Against the Brief</a:t>
             </a:r>
           </a:p>
         </p:txBody>
@@ -5294,15 +5175,15 @@
         <p:spPr>
           <a:xfrm>
             <a:off x="685800" y="1874519"/>
-            <a:ext cx="5166360" cy="4526280"/>
+            <a:ext cx="2500884" cy="1554480"/>
           </a:xfrm>
           <a:prstGeom prst="roundRect">
             <a:avLst>
-              <a:gd name="adj" fmla="val 6000"/>
+              <a:gd name="adj" fmla="val 12000"/>
             </a:avLst>
           </a:prstGeom>
           <a:solidFill>
-            <a:srgbClr val="E5E5E9"/>
+            <a:srgbClr val="DFDFE3"/>
           </a:solidFill>
           <a:ln>
             <a:noFill/>
@@ -5324,7 +5205,271 @@
           </a:fontRef>
         </p:style>
         <p:txBody>
-          <a:bodyPr rtlCol="0" anchor="ctr" lIns="279400" rIns="279400" tIns="228600" bIns="228600" wrap="square"/>
+          <a:bodyPr rtlCol="0" anchor="ctr" wrap="square" lIns="127000" rIns="127000" tIns="101600" bIns="101600"/>
+          <a:lstStyle/>
+          <a:p>
+            <a:pPr algn="ctr"/>
+            <a:r>
+              <a:rPr b="1" sz="1300">
+                <a:solidFill>
+                  <a:srgbClr val="22213B"/>
+                </a:solidFill>
+                <a:latin typeface="Calibri"/>
+              </a:rPr>
+              <a:t>Purpose</a:t>
+            </a:r>
+          </a:p>
+          <a:p>
+            <a:r>
+              <a:rPr sz="1050">
+                <a:solidFill>
+                  <a:srgbClr val="201F33"/>
+                </a:solidFill>
+                <a:latin typeface="Calibri"/>
+              </a:rPr>
+              <a:t>Does the design achieve its communication objective?</a:t>
+            </a:r>
+          </a:p>
+        </p:txBody>
+      </p:sp>
+      <p:sp>
+        <p:nvSpPr>
+          <p:cNvPr id="5" name="Rounded Rectangle 4"/>
+          <p:cNvSpPr/>
+          <p:nvPr/>
+        </p:nvSpPr>
+        <p:spPr>
+          <a:xfrm>
+            <a:off x="3387852" y="1874519"/>
+            <a:ext cx="2500884" cy="1554480"/>
+          </a:xfrm>
+          <a:prstGeom prst="roundRect">
+            <a:avLst>
+              <a:gd name="adj" fmla="val 12000"/>
+            </a:avLst>
+          </a:prstGeom>
+          <a:solidFill>
+            <a:srgbClr val="F9F1E2"/>
+          </a:solidFill>
+          <a:ln>
+            <a:noFill/>
+          </a:ln>
+          <a:effectLst/>
+        </p:spPr>
+        <p:style>
+          <a:lnRef idx="1">
+            <a:schemeClr val="accent1"/>
+          </a:lnRef>
+          <a:fillRef idx="3">
+            <a:schemeClr val="accent1"/>
+          </a:fillRef>
+          <a:effectRef idx="2">
+            <a:schemeClr val="accent1"/>
+          </a:effectRef>
+          <a:fontRef idx="minor">
+            <a:schemeClr val="lt1"/>
+          </a:fontRef>
+        </p:style>
+        <p:txBody>
+          <a:bodyPr rtlCol="0" anchor="ctr" wrap="square" lIns="127000" rIns="127000" tIns="101600" bIns="101600"/>
+          <a:lstStyle/>
+          <a:p>
+            <a:pPr algn="ctr"/>
+            <a:r>
+              <a:rPr b="1" sz="1300">
+                <a:solidFill>
+                  <a:srgbClr val="AD8334"/>
+                </a:solidFill>
+                <a:latin typeface="Calibri"/>
+              </a:rPr>
+              <a:t>Audience</a:t>
+            </a:r>
+          </a:p>
+          <a:p>
+            <a:r>
+              <a:rPr sz="1050">
+                <a:solidFill>
+                  <a:srgbClr val="201F33"/>
+                </a:solidFill>
+                <a:latin typeface="Calibri"/>
+              </a:rPr>
+              <a:t>Is it appropriate and effective for the target audience?</a:t>
+            </a:r>
+          </a:p>
+        </p:txBody>
+      </p:sp>
+      <p:sp>
+        <p:nvSpPr>
+          <p:cNvPr id="6" name="Rounded Rectangle 5"/>
+          <p:cNvSpPr/>
+          <p:nvPr/>
+        </p:nvSpPr>
+        <p:spPr>
+          <a:xfrm>
+            <a:off x="6089904" y="1874519"/>
+            <a:ext cx="2500884" cy="1554480"/>
+          </a:xfrm>
+          <a:prstGeom prst="roundRect">
+            <a:avLst>
+              <a:gd name="adj" fmla="val 12000"/>
+            </a:avLst>
+          </a:prstGeom>
+          <a:solidFill>
+            <a:srgbClr val="F6EBF0"/>
+          </a:solidFill>
+          <a:ln>
+            <a:noFill/>
+          </a:ln>
+          <a:effectLst/>
+        </p:spPr>
+        <p:style>
+          <a:lnRef idx="1">
+            <a:schemeClr val="accent1"/>
+          </a:lnRef>
+          <a:fillRef idx="3">
+            <a:schemeClr val="accent1"/>
+          </a:fillRef>
+          <a:effectRef idx="2">
+            <a:schemeClr val="accent1"/>
+          </a:effectRef>
+          <a:fontRef idx="minor">
+            <a:schemeClr val="lt1"/>
+          </a:fontRef>
+        </p:style>
+        <p:txBody>
+          <a:bodyPr rtlCol="0" anchor="ctr" wrap="square" lIns="127000" rIns="127000" tIns="101600" bIns="101600"/>
+          <a:lstStyle/>
+          <a:p>
+            <a:pPr algn="ctr"/>
+            <a:r>
+              <a:rPr b="1" sz="1300">
+                <a:solidFill>
+                  <a:srgbClr val="A0627E"/>
+                </a:solidFill>
+                <a:latin typeface="Calibri"/>
+              </a:rPr>
+              <a:t>Constraints</a:t>
+            </a:r>
+          </a:p>
+          <a:p>
+            <a:r>
+              <a:rPr sz="1050">
+                <a:solidFill>
+                  <a:srgbClr val="201F33"/>
+                </a:solidFill>
+                <a:latin typeface="Calibri"/>
+              </a:rPr>
+              <a:t>Were the stated constraints respected (materials, time, format)?</a:t>
+            </a:r>
+          </a:p>
+        </p:txBody>
+      </p:sp>
+      <p:sp>
+        <p:nvSpPr>
+          <p:cNvPr id="7" name="Rounded Rectangle 6"/>
+          <p:cNvSpPr/>
+          <p:nvPr/>
+        </p:nvSpPr>
+        <p:spPr>
+          <a:xfrm>
+            <a:off x="8791956" y="1874519"/>
+            <a:ext cx="2500884" cy="1554480"/>
+          </a:xfrm>
+          <a:prstGeom prst="roundRect">
+            <a:avLst>
+              <a:gd name="adj" fmla="val 12000"/>
+            </a:avLst>
+          </a:prstGeom>
+          <a:solidFill>
+            <a:srgbClr val="DFDFE3"/>
+          </a:solidFill>
+          <a:ln>
+            <a:noFill/>
+          </a:ln>
+          <a:effectLst/>
+        </p:spPr>
+        <p:style>
+          <a:lnRef idx="1">
+            <a:schemeClr val="accent1"/>
+          </a:lnRef>
+          <a:fillRef idx="3">
+            <a:schemeClr val="accent1"/>
+          </a:fillRef>
+          <a:effectRef idx="2">
+            <a:schemeClr val="accent1"/>
+          </a:effectRef>
+          <a:fontRef idx="minor">
+            <a:schemeClr val="lt1"/>
+          </a:fontRef>
+        </p:style>
+        <p:txBody>
+          <a:bodyPr rtlCol="0" anchor="ctr" wrap="square" lIns="127000" rIns="127000" tIns="101600" bIns="101600"/>
+          <a:lstStyle/>
+          <a:p>
+            <a:pPr algn="ctr"/>
+            <a:r>
+              <a:rPr b="1" sz="1300">
+                <a:solidFill>
+                  <a:srgbClr val="22213B"/>
+                </a:solidFill>
+                <a:latin typeface="Calibri"/>
+              </a:rPr>
+              <a:t>Obligatory Fields</a:t>
+            </a:r>
+          </a:p>
+          <a:p>
+            <a:r>
+              <a:rPr sz="1050">
+                <a:solidFill>
+                  <a:srgbClr val="201F33"/>
+                </a:solidFill>
+                <a:latin typeface="Calibri"/>
+              </a:rPr>
+              <a:t>Were all required design outcomes delivered?</a:t>
+            </a:r>
+          </a:p>
+        </p:txBody>
+      </p:sp>
+      <p:sp>
+        <p:nvSpPr>
+          <p:cNvPr id="8" name="Rounded Rectangle 7"/>
+          <p:cNvSpPr/>
+          <p:nvPr/>
+        </p:nvSpPr>
+        <p:spPr>
+          <a:xfrm>
+            <a:off x="685800" y="3675887"/>
+            <a:ext cx="10607040" cy="2862073"/>
+          </a:xfrm>
+          <a:prstGeom prst="roundRect">
+            <a:avLst>
+              <a:gd name="adj" fmla="val 10000"/>
+            </a:avLst>
+          </a:prstGeom>
+          <a:solidFill>
+            <a:srgbClr val="F9F1E2"/>
+          </a:solidFill>
+          <a:ln>
+            <a:noFill/>
+          </a:ln>
+          <a:effectLst/>
+        </p:spPr>
+        <p:style>
+          <a:lnRef idx="1">
+            <a:schemeClr val="accent1"/>
+          </a:lnRef>
+          <a:fillRef idx="3">
+            <a:schemeClr val="accent1"/>
+          </a:fillRef>
+          <a:effectRef idx="2">
+            <a:schemeClr val="accent1"/>
+          </a:effectRef>
+          <a:fontRef idx="minor">
+            <a:schemeClr val="lt1"/>
+          </a:fontRef>
+        </p:style>
+        <p:txBody>
+          <a:bodyPr rtlCol="0" anchor="ctr" lIns="203200" rIns="203200" tIns="101600" bIns="101600" wrap="square"/>
           <a:lstStyle/>
           <a:p>
             <a:pPr algn="ctr" indent="-203200" marL="203200">
@@ -5332,257 +5477,39 @@
                 <a:spcPts val="900"/>
               </a:spcAft>
               <a:buClr>
-                <a:srgbClr val="2B2A4A"/>
+                <a:srgbClr val="D9A441"/>
               </a:buClr>
               <a:buSzPct val="90000"/>
               <a:buFont typeface="Arial"/>
-              <a:buChar char="–"/>
+              <a:buChar char="●"/>
             </a:pPr>
             <a:r>
-              <a:rPr sz="1250" b="0" i="0">
-                <a:solidFill>
-                  <a:srgbClr val="201F33"/>
-                </a:solidFill>
-                <a:latin typeface="Calibri"/>
-              </a:rPr>
-              <a:t>Criterion → Evidence → Judgement</a:t>
-            </a:r>
-          </a:p>
-          <a:p>
-            <a:pPr indent="-203200" marL="203200">
-              <a:spcAft>
-                <a:spcPts val="900"/>
-              </a:spcAft>
-              <a:buClr>
-                <a:srgbClr val="2B2A4A"/>
-              </a:buClr>
-              <a:buSzPct val="90000"/>
-              <a:buFont typeface="Arial"/>
-              <a:buChar char="–"/>
-            </a:pPr>
-            <a:r>
-              <a:rPr sz="1250" b="0" i="0">
-                <a:solidFill>
-                  <a:srgbClr val="201F33"/>
-                </a:solidFill>
-                <a:latin typeface="Calibri"/>
-              </a:rPr>
-              <a:t>1. State the brief criterion being evaluated</a:t>
-            </a:r>
-          </a:p>
-          <a:p>
-            <a:pPr indent="-203200" marL="203200">
-              <a:spcAft>
-                <a:spcPts val="900"/>
-              </a:spcAft>
-              <a:buClr>
-                <a:srgbClr val="2B2A4A"/>
-              </a:buClr>
-              <a:buSzPct val="90000"/>
-              <a:buFont typeface="Arial"/>
-              <a:buChar char="–"/>
-            </a:pPr>
-            <a:r>
-              <a:rPr sz="1250" b="0" i="0">
-                <a:solidFill>
-                  <a:srgbClr val="201F33"/>
-                </a:solidFill>
-                <a:latin typeface="Calibri"/>
-              </a:rPr>
-              <a:t>2. Give evidence from the final design</a:t>
-            </a:r>
-          </a:p>
-          <a:p>
-            <a:pPr indent="-203200" marL="203200">
-              <a:spcAft>
-                <a:spcPts val="900"/>
-              </a:spcAft>
-              <a:buClr>
-                <a:srgbClr val="2B2A4A"/>
-              </a:buClr>
-              <a:buSzPct val="90000"/>
-              <a:buFont typeface="Arial"/>
-              <a:buChar char="–"/>
-            </a:pPr>
-            <a:r>
-              <a:rPr sz="1250" b="0" i="0">
-                <a:solidFill>
-                  <a:srgbClr val="201F33"/>
-                </a:solidFill>
-                <a:latin typeface="Calibri"/>
-              </a:rPr>
-              <a:t>3. Judge whether it succeeds, with reasoning</a:t>
-            </a:r>
-          </a:p>
-        </p:txBody>
-      </p:sp>
-      <p:sp>
-        <p:nvSpPr>
-          <p:cNvPr id="5" name="Rounded Rectangle 4"/>
-          <p:cNvSpPr/>
-          <p:nvPr/>
-        </p:nvSpPr>
-        <p:spPr>
-          <a:xfrm>
-            <a:off x="6080760" y="1874519"/>
-            <a:ext cx="5166360" cy="4526280"/>
-          </a:xfrm>
-          <a:prstGeom prst="roundRect">
-            <a:avLst>
-              <a:gd name="adj" fmla="val 6000"/>
-            </a:avLst>
-          </a:prstGeom>
-          <a:solidFill>
-            <a:srgbClr val="EFDAE3"/>
-          </a:solidFill>
-          <a:ln>
-            <a:noFill/>
-          </a:ln>
-          <a:effectLst/>
-        </p:spPr>
-        <p:style>
-          <a:lnRef idx="1">
-            <a:schemeClr val="accent1"/>
-          </a:lnRef>
-          <a:fillRef idx="3">
-            <a:schemeClr val="accent1"/>
-          </a:fillRef>
-          <a:effectRef idx="2">
-            <a:schemeClr val="accent1"/>
-          </a:effectRef>
-          <a:fontRef idx="minor">
-            <a:schemeClr val="lt1"/>
-          </a:fontRef>
-        </p:style>
-        <p:txBody>
-          <a:bodyPr rtlCol="0" anchor="ctr" lIns="279400" rIns="279400" tIns="228600" bIns="228600" wrap="square"/>
-          <a:lstStyle/>
-          <a:p>
-            <a:pPr algn="ctr">
-              <a:spcAft>
-                <a:spcPts val="900"/>
-              </a:spcAft>
-              <a:buNone/>
-            </a:pPr>
-            <a:r>
-              <a:rPr sz="1250" b="0" i="1">
-                <a:solidFill>
-                  <a:srgbClr val="201F33"/>
-                </a:solidFill>
-                <a:latin typeface="Calibri"/>
-              </a:rPr>
-              <a:t>Sentence Starters</a:t>
-            </a:r>
-          </a:p>
-          <a:p>
-            <a:pPr indent="-203200" marL="203200">
-              <a:spcAft>
-                <a:spcPts val="900"/>
-              </a:spcAft>
-              <a:buClr>
-                <a:srgbClr val="C97B9E"/>
-              </a:buClr>
-              <a:buSzPct val="90000"/>
-              <a:buFont typeface="Arial"/>
-              <a:buChar char="–"/>
-            </a:pPr>
-            <a:r>
-              <a:rPr sz="1250" b="0" i="0">
-                <a:solidFill>
-                  <a:srgbClr val="201F33"/>
-                </a:solidFill>
-                <a:latin typeface="Calibri"/>
-              </a:rPr>
-              <a:t>"The brief required [X]; the final design achieves this by..."</a:t>
-            </a:r>
-          </a:p>
-          <a:p>
-            <a:pPr indent="-203200" marL="203200">
-              <a:spcAft>
-                <a:spcPts val="900"/>
-              </a:spcAft>
-              <a:buClr>
-                <a:srgbClr val="C97B9E"/>
-              </a:buClr>
-              <a:buSzPct val="90000"/>
-              <a:buFont typeface="Arial"/>
-              <a:buChar char="–"/>
-            </a:pPr>
-            <a:r>
-              <a:rPr sz="1250" b="0" i="0">
-                <a:solidFill>
-                  <a:srgbClr val="201F33"/>
-                </a:solidFill>
-                <a:latin typeface="Calibri"/>
-              </a:rPr>
-              <a:t>"This effectively meets the needs of [audience] because..."</a:t>
-            </a:r>
-          </a:p>
-          <a:p>
-            <a:pPr indent="-203200" marL="203200">
-              <a:spcAft>
-                <a:spcPts val="900"/>
-              </a:spcAft>
-              <a:buClr>
-                <a:srgbClr val="C97B9E"/>
-              </a:buClr>
-              <a:buSzPct val="90000"/>
-              <a:buFont typeface="Arial"/>
-              <a:buChar char="–"/>
-            </a:pPr>
-            <a:r>
-              <a:rPr sz="1250" b="0" i="0">
-                <a:solidFill>
-                  <a:srgbClr val="201F33"/>
-                </a:solidFill>
-                <a:latin typeface="Calibri"/>
-              </a:rPr>
-              <a:t>"One limitation of the final design is..."</a:t>
-            </a:r>
-          </a:p>
-        </p:txBody>
-      </p:sp>
-      <p:sp>
-        <p:nvSpPr>
-          <p:cNvPr id="6" name="Oval 5"/>
-          <p:cNvSpPr/>
-          <p:nvPr/>
-        </p:nvSpPr>
-        <p:spPr>
-          <a:xfrm>
-            <a:off x="5532120" y="3840480"/>
-            <a:ext cx="685800" cy="685800"/>
-          </a:xfrm>
-          <a:prstGeom prst="ellipse">
-            <a:avLst/>
-          </a:prstGeom>
-          <a:solidFill>
-            <a:srgbClr val="D9A441"/>
-          </a:solidFill>
-          <a:ln>
-            <a:noFill/>
-          </a:ln>
-          <a:effectLst/>
-        </p:spPr>
-        <p:style>
-          <a:lnRef idx="1">
-            <a:schemeClr val="accent1"/>
-          </a:lnRef>
-          <a:fillRef idx="3">
-            <a:schemeClr val="accent1"/>
-          </a:fillRef>
-          <a:effectRef idx="2">
-            <a:schemeClr val="accent1"/>
-          </a:effectRef>
-          <a:fontRef idx="minor">
-            <a:schemeClr val="lt1"/>
-          </a:fontRef>
-        </p:style>
-        <p:txBody>
-          <a:bodyPr rtlCol="0" anchor="ctr"/>
-          <a:lstStyle/>
-          <a:p>
-            <a:pPr algn="ctr"/>
+              <a:rPr sz="1200" b="0" i="0">
+                <a:solidFill>
+                  <a:srgbClr val="201F33"/>
+                </a:solidFill>
+                <a:latin typeface="Calibri"/>
+              </a:rPr>
+              <a:t> A strong evaluation is </a:t>
+            </a:r>
+            <a:r>
+              <a:rPr sz="1200" b="1" i="0">
+                <a:solidFill>
+                  <a:srgbClr val="B88B37"/>
+                </a:solidFill>
+                <a:latin typeface="Calibri"/>
+              </a:rPr>
+              <a:t>specific and balanced</a:t>
+            </a:r>
+            <a:r>
+              <a:rPr sz="1200" b="0" i="0">
+                <a:solidFill>
+                  <a:srgbClr val="201F33"/>
+                </a:solidFill>
+                <a:latin typeface="Calibri"/>
+              </a:rPr>
+              <a:t> — identify genuine strengths and any limitations, not just praise. </a:t>
+            </a:r>
           </a:p>
         </p:txBody>
       </p:sp>
@@ -5697,7 +5624,7 @@
                 </a:solidFill>
                 <a:latin typeface="Cambria"/>
               </a:rPr>
-              <a:t>Evaluation &amp; Presentation — Quick Reference</a:t>
+              <a:t>Folio Layout &amp; Clarity</a:t>
             </a:r>
           </a:p>
         </p:txBody>
@@ -5711,15 +5638,15 @@
         <p:spPr>
           <a:xfrm>
             <a:off x="685800" y="1874519"/>
-            <a:ext cx="2500884" cy="1554480"/>
+            <a:ext cx="5166360" cy="4526280"/>
           </a:xfrm>
           <a:prstGeom prst="roundRect">
             <a:avLst>
-              <a:gd name="adj" fmla="val 12000"/>
+              <a:gd name="adj" fmla="val 6000"/>
             </a:avLst>
           </a:prstGeom>
           <a:solidFill>
-            <a:srgbClr val="DFDFE3"/>
+            <a:srgbClr val="E5E5E9"/>
           </a:solidFill>
           <a:ln>
             <a:noFill/>
@@ -5741,29 +5668,121 @@
           </a:fontRef>
         </p:style>
         <p:txBody>
-          <a:bodyPr rtlCol="0" anchor="ctr" wrap="square" lIns="127000" rIns="127000" tIns="101600" bIns="101600"/>
-          <a:lstStyle/>
-          <a:p>
-            <a:pPr algn="ctr"/>
-            <a:r>
-              <a:rPr b="1" sz="1300">
-                <a:solidFill>
-                  <a:srgbClr val="22213B"/>
-                </a:solidFill>
-                <a:latin typeface="Calibri"/>
-              </a:rPr>
-              <a:t>Refinement</a:t>
-            </a:r>
-          </a:p>
-          <a:p>
-            <a:r>
-              <a:rPr sz="1050">
-                <a:solidFill>
-                  <a:srgbClr val="201F33"/>
-                </a:solidFill>
-                <a:latin typeface="Calibri"/>
-              </a:rPr>
-              <a:t>Small, precise final adjustments.</a:t>
+          <a:bodyPr rtlCol="0" anchor="ctr" lIns="279400" rIns="279400" tIns="228600" bIns="228600" wrap="square"/>
+          <a:lstStyle/>
+          <a:p>
+            <a:pPr algn="ctr" indent="-203200" marL="203200">
+              <a:spcAft>
+                <a:spcPts val="900"/>
+              </a:spcAft>
+              <a:buClr>
+                <a:srgbClr val="2B2A4A"/>
+              </a:buClr>
+              <a:buSzPct val="90000"/>
+              <a:buFont typeface="Arial"/>
+              <a:buChar char="●"/>
+            </a:pPr>
+            <a:r>
+              <a:rPr sz="1400" b="0" i="0">
+                <a:solidFill>
+                  <a:srgbClr val="201F33"/>
+                </a:solidFill>
+                <a:latin typeface="Calibri"/>
+              </a:rPr>
+              <a:t>How your folio is organised affects how clearly your design thinking can be assessed.</a:t>
+            </a:r>
+          </a:p>
+          <a:p>
+            <a:pPr indent="-203200" marL="203200">
+              <a:spcAft>
+                <a:spcPts val="900"/>
+              </a:spcAft>
+              <a:buClr>
+                <a:srgbClr val="2B2A4A"/>
+              </a:buClr>
+              <a:buSzPct val="90000"/>
+              <a:buFont typeface="Arial"/>
+              <a:buChar char="–"/>
+            </a:pPr>
+            <a:r>
+              <a:rPr sz="1250" b="1" i="0">
+                <a:solidFill>
+                  <a:srgbClr val="24233E"/>
+                </a:solidFill>
+                <a:latin typeface="Calibri"/>
+              </a:rPr>
+              <a:t>Sequence</a:t>
+            </a:r>
+            <a:r>
+              <a:rPr sz="1250" b="0" i="0">
+                <a:solidFill>
+                  <a:srgbClr val="201F33"/>
+                </a:solidFill>
+                <a:latin typeface="Calibri"/>
+              </a:rPr>
+              <a:t> — brief → research → generation → development → resolution → evaluation</a:t>
+            </a:r>
+          </a:p>
+          <a:p>
+            <a:pPr indent="-203200" marL="203200">
+              <a:spcAft>
+                <a:spcPts val="900"/>
+              </a:spcAft>
+              <a:buClr>
+                <a:srgbClr val="2B2A4A"/>
+              </a:buClr>
+              <a:buSzPct val="90000"/>
+              <a:buFont typeface="Arial"/>
+              <a:buChar char="–"/>
+            </a:pPr>
+            <a:r>
+              <a:rPr sz="1250" b="1" i="0">
+                <a:solidFill>
+                  <a:srgbClr val="24233E"/>
+                </a:solidFill>
+                <a:latin typeface="Calibri"/>
+              </a:rPr>
+              <a:t>Labelling</a:t>
+            </a:r>
+            <a:r>
+              <a:rPr sz="1250" b="0" i="0">
+                <a:solidFill>
+                  <a:srgbClr val="201F33"/>
+                </a:solidFill>
+                <a:latin typeface="Calibri"/>
+              </a:rPr>
+              <a:t> — clearly label the brief, each concept, and final design</a:t>
+            </a:r>
+          </a:p>
+          <a:p>
+            <a:pPr indent="-203200" marL="203200">
+              <a:spcAft>
+                <a:spcPts val="900"/>
+              </a:spcAft>
+              <a:buClr>
+                <a:srgbClr val="2B2A4A"/>
+              </a:buClr>
+              <a:buSzPct val="90000"/>
+              <a:buFont typeface="Arial"/>
+              <a:buChar char="–"/>
+            </a:pPr>
+            <a:r>
+              <a:rPr sz="1250" b="1" i="0">
+                <a:solidFill>
+                  <a:srgbClr val="24233E"/>
+                </a:solidFill>
+                <a:latin typeface="Calibri"/>
+              </a:rPr>
+              <a:t>Consistency</a:t>
+            </a:r>
+            <a:r>
+              <a:rPr sz="1250" b="0" i="0">
+                <a:solidFill>
+                  <a:srgbClr val="201F33"/>
+                </a:solidFill>
+                <a:latin typeface="Calibri"/>
+              </a:rPr>
+              <a:t> — consistent visual presentation across pages</a:t>
             </a:r>
           </a:p>
         </p:txBody>
@@ -5776,16 +5795,16 @@
         </p:nvSpPr>
         <p:spPr>
           <a:xfrm>
-            <a:off x="3387852" y="1874519"/>
-            <a:ext cx="2500884" cy="1554480"/>
+            <a:off x="6080760" y="1874519"/>
+            <a:ext cx="5166360" cy="4526280"/>
           </a:xfrm>
           <a:prstGeom prst="roundRect">
             <a:avLst>
-              <a:gd name="adj" fmla="val 12000"/>
+              <a:gd name="adj" fmla="val 6000"/>
             </a:avLst>
           </a:prstGeom>
           <a:solidFill>
-            <a:srgbClr val="F9F1E2"/>
+            <a:srgbClr val="EFDAE3"/>
           </a:solidFill>
           <a:ln>
             <a:noFill/>
@@ -5807,51 +5826,70 @@
           </a:fontRef>
         </p:style>
         <p:txBody>
-          <a:bodyPr rtlCol="0" anchor="ctr" wrap="square" lIns="127000" rIns="127000" tIns="101600" bIns="101600"/>
-          <a:lstStyle/>
-          <a:p>
-            <a:pPr algn="ctr"/>
-            <a:r>
-              <a:rPr b="1" sz="1300">
-                <a:solidFill>
-                  <a:srgbClr val="AD8334"/>
-                </a:solidFill>
-                <a:latin typeface="Calibri"/>
-              </a:rPr>
-              <a:t>Presentation</a:t>
-            </a:r>
-          </a:p>
-          <a:p>
-            <a:r>
-              <a:rPr sz="1050">
-                <a:solidFill>
-                  <a:srgbClr val="201F33"/>
-                </a:solidFill>
-                <a:latin typeface="Calibri"/>
-              </a:rPr>
-              <a:t>Accurate, rendered, professional standard.</a:t>
-            </a:r>
-          </a:p>
-        </p:txBody>
-      </p:sp>
-      <p:sp>
-        <p:nvSpPr>
-          <p:cNvPr id="6" name="Rounded Rectangle 5"/>
+          <a:bodyPr rtlCol="0" anchor="ctr" lIns="279400" rIns="279400" tIns="228600" bIns="228600" wrap="square"/>
+          <a:lstStyle/>
+          <a:p>
+            <a:pPr algn="ctr" indent="-203200" marL="203200">
+              <a:spcAft>
+                <a:spcPts val="900"/>
+              </a:spcAft>
+              <a:buClr>
+                <a:srgbClr val="C97B9E"/>
+              </a:buClr>
+              <a:buSzPct val="90000"/>
+              <a:buFont typeface="Arial"/>
+              <a:buChar char="●"/>
+            </a:pPr>
+            <a:r>
+              <a:rPr sz="1400" b="0" i="0">
+                <a:solidFill>
+                  <a:srgbClr val="201F33"/>
+                </a:solidFill>
+                <a:latin typeface="Calibri"/>
+              </a:rPr>
+              <a:t>Exam Tip</a:t>
+            </a:r>
+          </a:p>
+          <a:p>
+            <a:pPr indent="-203200" marL="203200">
+              <a:spcAft>
+                <a:spcPts val="900"/>
+              </a:spcAft>
+              <a:buClr>
+                <a:srgbClr val="C97B9E"/>
+              </a:buClr>
+              <a:buSzPct val="90000"/>
+              <a:buFont typeface="Arial"/>
+              <a:buChar char="●"/>
+            </a:pPr>
+            <a:r>
+              <a:rPr sz="1400" b="0" i="0">
+                <a:solidFill>
+                  <a:srgbClr val="201F33"/>
+                </a:solidFill>
+                <a:latin typeface="Calibri"/>
+              </a:rPr>
+              <a:t>Exam questions may show a folio excerpt and ask you to identify which stage of the process it represents — know the full sequence well.</a:t>
+            </a:r>
+          </a:p>
+        </p:txBody>
+      </p:sp>
+      <p:sp>
+        <p:nvSpPr>
+          <p:cNvPr id="6" name="Oval 5"/>
           <p:cNvSpPr/>
           <p:nvPr/>
         </p:nvSpPr>
         <p:spPr>
           <a:xfrm>
-            <a:off x="6089904" y="1874519"/>
-            <a:ext cx="2500884" cy="1554480"/>
-          </a:xfrm>
-          <a:prstGeom prst="roundRect">
-            <a:avLst>
-              <a:gd name="adj" fmla="val 12000"/>
-            </a:avLst>
-          </a:prstGeom>
-          <a:solidFill>
-            <a:srgbClr val="F6EBF0"/>
+            <a:off x="5532120" y="3840480"/>
+            <a:ext cx="685800" cy="685800"/>
+          </a:xfrm>
+          <a:prstGeom prst="ellipse">
+            <a:avLst/>
+          </a:prstGeom>
+          <a:solidFill>
+            <a:srgbClr val="D9A441"/>
           </a:solidFill>
           <a:ln>
             <a:noFill/>
@@ -5873,179 +5911,10 @@
           </a:fontRef>
         </p:style>
         <p:txBody>
-          <a:bodyPr rtlCol="0" anchor="ctr" wrap="square" lIns="127000" rIns="127000" tIns="101600" bIns="101600"/>
+          <a:bodyPr rtlCol="0" anchor="ctr"/>
           <a:lstStyle/>
           <a:p>
             <a:pPr algn="ctr"/>
-            <a:r>
-              <a:rPr b="1" sz="1300">
-                <a:solidFill>
-                  <a:srgbClr val="A0627E"/>
-                </a:solidFill>
-                <a:latin typeface="Calibri"/>
-              </a:rPr>
-              <a:t>Evaluation</a:t>
-            </a:r>
-          </a:p>
-          <a:p>
-            <a:r>
-              <a:rPr sz="1050">
-                <a:solidFill>
-                  <a:srgbClr val="201F33"/>
-                </a:solidFill>
-                <a:latin typeface="Calibri"/>
-              </a:rPr>
-              <a:t>Purpose, audience, constraints, obligatory fields.</a:t>
-            </a:r>
-          </a:p>
-        </p:txBody>
-      </p:sp>
-      <p:sp>
-        <p:nvSpPr>
-          <p:cNvPr id="7" name="Rounded Rectangle 6"/>
-          <p:cNvSpPr/>
-          <p:nvPr/>
-        </p:nvSpPr>
-        <p:spPr>
-          <a:xfrm>
-            <a:off x="8791956" y="1874519"/>
-            <a:ext cx="2500884" cy="1554480"/>
-          </a:xfrm>
-          <a:prstGeom prst="roundRect">
-            <a:avLst>
-              <a:gd name="adj" fmla="val 12000"/>
-            </a:avLst>
-          </a:prstGeom>
-          <a:solidFill>
-            <a:srgbClr val="DFDFE3"/>
-          </a:solidFill>
-          <a:ln>
-            <a:noFill/>
-          </a:ln>
-          <a:effectLst/>
-        </p:spPr>
-        <p:style>
-          <a:lnRef idx="1">
-            <a:schemeClr val="accent1"/>
-          </a:lnRef>
-          <a:fillRef idx="3">
-            <a:schemeClr val="accent1"/>
-          </a:fillRef>
-          <a:effectRef idx="2">
-            <a:schemeClr val="accent1"/>
-          </a:effectRef>
-          <a:fontRef idx="minor">
-            <a:schemeClr val="lt1"/>
-          </a:fontRef>
-        </p:style>
-        <p:txBody>
-          <a:bodyPr rtlCol="0" anchor="ctr" wrap="square" lIns="127000" rIns="127000" tIns="101600" bIns="101600"/>
-          <a:lstStyle/>
-          <a:p>
-            <a:pPr algn="ctr"/>
-            <a:r>
-              <a:rPr b="1" sz="1300">
-                <a:solidFill>
-                  <a:srgbClr val="22213B"/>
-                </a:solidFill>
-                <a:latin typeface="Calibri"/>
-              </a:rPr>
-              <a:t>Folio Layout</a:t>
-            </a:r>
-          </a:p>
-          <a:p>
-            <a:r>
-              <a:rPr sz="1050">
-                <a:solidFill>
-                  <a:srgbClr val="201F33"/>
-                </a:solidFill>
-                <a:latin typeface="Calibri"/>
-              </a:rPr>
-              <a:t>Clear sequence and consistent presentation.</a:t>
-            </a:r>
-          </a:p>
-        </p:txBody>
-      </p:sp>
-      <p:sp>
-        <p:nvSpPr>
-          <p:cNvPr id="8" name="Rounded Rectangle 7"/>
-          <p:cNvSpPr/>
-          <p:nvPr/>
-        </p:nvSpPr>
-        <p:spPr>
-          <a:xfrm>
-            <a:off x="685800" y="3675887"/>
-            <a:ext cx="10607040" cy="2862073"/>
-          </a:xfrm>
-          <a:prstGeom prst="roundRect">
-            <a:avLst>
-              <a:gd name="adj" fmla="val 10000"/>
-            </a:avLst>
-          </a:prstGeom>
-          <a:solidFill>
-            <a:srgbClr val="F9F1E2"/>
-          </a:solidFill>
-          <a:ln>
-            <a:noFill/>
-          </a:ln>
-          <a:effectLst/>
-        </p:spPr>
-        <p:style>
-          <a:lnRef idx="1">
-            <a:schemeClr val="accent1"/>
-          </a:lnRef>
-          <a:fillRef idx="3">
-            <a:schemeClr val="accent1"/>
-          </a:fillRef>
-          <a:effectRef idx="2">
-            <a:schemeClr val="accent1"/>
-          </a:effectRef>
-          <a:fontRef idx="minor">
-            <a:schemeClr val="lt1"/>
-          </a:fontRef>
-        </p:style>
-        <p:txBody>
-          <a:bodyPr rtlCol="0" anchor="ctr" lIns="203200" rIns="203200" tIns="101600" bIns="101600" wrap="square"/>
-          <a:lstStyle/>
-          <a:p>
-            <a:pPr algn="ctr" indent="-203200" marL="203200">
-              <a:spcAft>
-                <a:spcPts val="900"/>
-              </a:spcAft>
-              <a:buClr>
-                <a:srgbClr val="D9A441"/>
-              </a:buClr>
-              <a:buSzPct val="90000"/>
-              <a:buFont typeface="Arial"/>
-              <a:buChar char="●"/>
-            </a:pPr>
-            <a:r>
-              <a:rPr sz="1200" b="0" i="0">
-                <a:solidFill>
-                  <a:srgbClr val="201F33"/>
-                </a:solidFill>
-                <a:latin typeface="Calibri"/>
-              </a:rPr>
-              <a:t> Reminder: a strong evaluation is </a:t>
-            </a:r>
-            <a:r>
-              <a:rPr sz="1200" b="1" i="0">
-                <a:solidFill>
-                  <a:srgbClr val="B88B37"/>
-                </a:solidFill>
-                <a:latin typeface="Calibri"/>
-              </a:rPr>
-              <a:t>specific and balanced</a:t>
-            </a:r>
-            <a:r>
-              <a:rPr sz="1200" b="0" i="0">
-                <a:solidFill>
-                  <a:srgbClr val="201F33"/>
-                </a:solidFill>
-                <a:latin typeface="Calibri"/>
-              </a:rPr>
-              <a:t> — not just "the design looks good." </a:t>
-            </a:r>
           </a:p>
         </p:txBody>
       </p:sp>
@@ -6063,7 +5932,7 @@
     <p:bg>
       <p:bgPr>
         <a:solidFill>
-          <a:srgbClr val="D9A441"/>
+          <a:srgbClr val="F8F6FB"/>
         </a:solidFill>
         <a:effectLst/>
       </p:bgPr>
@@ -6077,20 +5946,22 @@
       <p:grpSpPr/>
       <p:sp>
         <p:nvSpPr>
-          <p:cNvPr id="2" name="Oval 1"/>
+          <p:cNvPr id="2" name="Rounded Rectangle 1"/>
           <p:cNvSpPr/>
           <p:nvPr/>
         </p:nvSpPr>
         <p:spPr>
           <a:xfrm>
-            <a:off x="9692640" y="-914400"/>
-            <a:ext cx="2926080" cy="2926080"/>
-          </a:xfrm>
-          <a:prstGeom prst="ellipse">
-            <a:avLst/>
-          </a:prstGeom>
-          <a:solidFill>
-            <a:srgbClr val="BE9039"/>
+            <a:off x="685800" y="502920"/>
+            <a:ext cx="3291840" cy="457200"/>
+          </a:xfrm>
+          <a:prstGeom prst="roundRect">
+            <a:avLst>
+              <a:gd name="adj" fmla="val 50000"/>
+            </a:avLst>
+          </a:prstGeom>
+          <a:solidFill>
+            <a:srgbClr val="2B2A4A"/>
           </a:solidFill>
           <a:ln>
             <a:noFill/>
@@ -6112,29 +5983,75 @@
           </a:fontRef>
         </p:style>
         <p:txBody>
-          <a:bodyPr rtlCol="0" anchor="ctr"/>
+          <a:bodyPr rtlCol="0" anchor="ctr" wrap="none" lIns="50800" rIns="50800"/>
           <a:lstStyle/>
           <a:p>
             <a:pPr algn="ctr"/>
-          </a:p>
-        </p:txBody>
-      </p:sp>
-      <p:sp>
-        <p:nvSpPr>
-          <p:cNvPr id="3" name="Oval 2"/>
+            <a:r>
+              <a:rPr sz="1100" b="1">
+                <a:solidFill>
+                  <a:srgbClr val="FFFFFF"/>
+                </a:solidFill>
+                <a:latin typeface="Calibri"/>
+              </a:rPr>
+              <a:t>EVALUATION &amp; PRESENTATION</a:t>
+            </a:r>
+          </a:p>
+        </p:txBody>
+      </p:sp>
+      <p:sp>
+        <p:nvSpPr>
+          <p:cNvPr id="3" name="TextBox 2"/>
+          <p:cNvSpPr txBox="1"/>
+          <p:nvPr/>
+        </p:nvSpPr>
+        <p:spPr>
+          <a:xfrm>
+            <a:off x="685800" y="1051560"/>
+            <a:ext cx="10607040" cy="822960"/>
+          </a:xfrm>
+          <a:prstGeom prst="rect">
+            <a:avLst/>
+          </a:prstGeom>
+          <a:noFill/>
+        </p:spPr>
+        <p:txBody>
+          <a:bodyPr wrap="square" anchor="t">
+            <a:spAutoFit/>
+          </a:bodyPr>
+          <a:lstStyle/>
+          <a:p>
+            <a:pPr algn="l"/>
+            <a:r>
+              <a:rPr sz="2700" b="1" i="0">
+                <a:solidFill>
+                  <a:srgbClr val="201F33"/>
+                </a:solidFill>
+                <a:latin typeface="Cambria"/>
+              </a:rPr>
+              <a:t>Writing an Evaluation</a:t>
+            </a:r>
+          </a:p>
+        </p:txBody>
+      </p:sp>
+      <p:sp>
+        <p:nvSpPr>
+          <p:cNvPr id="4" name="Rounded Rectangle 3"/>
           <p:cNvSpPr/>
           <p:nvPr/>
         </p:nvSpPr>
         <p:spPr>
           <a:xfrm>
-            <a:off x="-914400" y="4937760"/>
-            <a:ext cx="2377440" cy="2377440"/>
-          </a:xfrm>
-          <a:prstGeom prst="ellipse">
-            <a:avLst/>
-          </a:prstGeom>
-          <a:solidFill>
-            <a:srgbClr val="BE9039"/>
+            <a:off x="685800" y="1874519"/>
+            <a:ext cx="5166360" cy="4526280"/>
+          </a:xfrm>
+          <a:prstGeom prst="roundRect">
+            <a:avLst>
+              <a:gd name="adj" fmla="val 6000"/>
+            </a:avLst>
+          </a:prstGeom>
+          <a:solidFill>
+            <a:srgbClr val="E5E5E9"/>
           </a:solidFill>
           <a:ln>
             <a:noFill/>
@@ -6156,31 +6073,116 @@
           </a:fontRef>
         </p:style>
         <p:txBody>
-          <a:bodyPr rtlCol="0" anchor="ctr"/>
-          <a:lstStyle/>
-          <a:p>
-            <a:pPr algn="ctr"/>
-          </a:p>
-        </p:txBody>
-      </p:sp>
-      <p:sp>
-        <p:nvSpPr>
-          <p:cNvPr id="4" name="Rounded Rectangle 3"/>
+          <a:bodyPr rtlCol="0" anchor="ctr" lIns="279400" rIns="279400" tIns="228600" bIns="228600" wrap="square"/>
+          <a:lstStyle/>
+          <a:p>
+            <a:pPr algn="ctr" indent="-203200" marL="203200">
+              <a:spcAft>
+                <a:spcPts val="900"/>
+              </a:spcAft>
+              <a:buClr>
+                <a:srgbClr val="2B2A4A"/>
+              </a:buClr>
+              <a:buSzPct val="90000"/>
+              <a:buFont typeface="Arial"/>
+              <a:buChar char="–"/>
+            </a:pPr>
+            <a:r>
+              <a:rPr sz="1250" b="0" i="0">
+                <a:solidFill>
+                  <a:srgbClr val="201F33"/>
+                </a:solidFill>
+                <a:latin typeface="Calibri"/>
+              </a:rPr>
+              <a:t>Criterion → Evidence → Judgement</a:t>
+            </a:r>
+          </a:p>
+          <a:p>
+            <a:pPr indent="-203200" marL="203200">
+              <a:spcAft>
+                <a:spcPts val="900"/>
+              </a:spcAft>
+              <a:buClr>
+                <a:srgbClr val="2B2A4A"/>
+              </a:buClr>
+              <a:buSzPct val="90000"/>
+              <a:buFont typeface="Arial"/>
+              <a:buChar char="–"/>
+            </a:pPr>
+            <a:r>
+              <a:rPr sz="1250" b="0" i="0">
+                <a:solidFill>
+                  <a:srgbClr val="201F33"/>
+                </a:solidFill>
+                <a:latin typeface="Calibri"/>
+              </a:rPr>
+              <a:t>1. State the brief criterion being evaluated</a:t>
+            </a:r>
+          </a:p>
+          <a:p>
+            <a:pPr indent="-203200" marL="203200">
+              <a:spcAft>
+                <a:spcPts val="900"/>
+              </a:spcAft>
+              <a:buClr>
+                <a:srgbClr val="2B2A4A"/>
+              </a:buClr>
+              <a:buSzPct val="90000"/>
+              <a:buFont typeface="Arial"/>
+              <a:buChar char="–"/>
+            </a:pPr>
+            <a:r>
+              <a:rPr sz="1250" b="0" i="0">
+                <a:solidFill>
+                  <a:srgbClr val="201F33"/>
+                </a:solidFill>
+                <a:latin typeface="Calibri"/>
+              </a:rPr>
+              <a:t>2. Give evidence from the final design</a:t>
+            </a:r>
+          </a:p>
+          <a:p>
+            <a:pPr indent="-203200" marL="203200">
+              <a:spcAft>
+                <a:spcPts val="900"/>
+              </a:spcAft>
+              <a:buClr>
+                <a:srgbClr val="2B2A4A"/>
+              </a:buClr>
+              <a:buSzPct val="90000"/>
+              <a:buFont typeface="Arial"/>
+              <a:buChar char="–"/>
+            </a:pPr>
+            <a:r>
+              <a:rPr sz="1250" b="0" i="0">
+                <a:solidFill>
+                  <a:srgbClr val="201F33"/>
+                </a:solidFill>
+                <a:latin typeface="Calibri"/>
+              </a:rPr>
+              <a:t>3. Judge whether it succeeds, with reasoning</a:t>
+            </a:r>
+          </a:p>
+        </p:txBody>
+      </p:sp>
+      <p:sp>
+        <p:nvSpPr>
+          <p:cNvPr id="5" name="Rounded Rectangle 4"/>
           <p:cNvSpPr/>
           <p:nvPr/>
         </p:nvSpPr>
         <p:spPr>
           <a:xfrm>
-            <a:off x="822960" y="1051560"/>
-            <a:ext cx="1188720" cy="502920"/>
+            <a:off x="6080760" y="1874519"/>
+            <a:ext cx="5166360" cy="4526280"/>
           </a:xfrm>
           <a:prstGeom prst="roundRect">
             <a:avLst>
-              <a:gd name="adj" fmla="val 50000"/>
+              <a:gd name="adj" fmla="val 6000"/>
             </a:avLst>
           </a:prstGeom>
           <a:solidFill>
-            <a:srgbClr val="FFFFFF"/>
+            <a:srgbClr val="EFDAE3"/>
           </a:solidFill>
           <a:ln>
             <a:noFill/>
@@ -6202,40 +6204,109 @@
           </a:fontRef>
         </p:style>
         <p:txBody>
-          <a:bodyPr rtlCol="0" anchor="ctr" wrap="none" lIns="50800" rIns="50800"/>
-          <a:lstStyle/>
-          <a:p>
-            <a:pPr algn="ctr"/>
-            <a:r>
-              <a:rPr sz="1400" b="1">
-                <a:solidFill>
-                  <a:srgbClr val="AD8334"/>
-                </a:solidFill>
-                <a:latin typeface="Calibri"/>
-              </a:rPr>
-              <a:t>03</a:t>
-            </a:r>
-          </a:p>
-        </p:txBody>
-      </p:sp>
-      <p:sp>
-        <p:nvSpPr>
-          <p:cNvPr id="5" name="Rounded Rectangle 4"/>
+          <a:bodyPr rtlCol="0" anchor="ctr" lIns="279400" rIns="279400" tIns="228600" bIns="228600" wrap="square"/>
+          <a:lstStyle/>
+          <a:p>
+            <a:pPr algn="ctr">
+              <a:spcAft>
+                <a:spcPts val="900"/>
+              </a:spcAft>
+              <a:buNone/>
+            </a:pPr>
+            <a:r>
+              <a:rPr sz="1250" b="0" i="1">
+                <a:solidFill>
+                  <a:srgbClr val="201F33"/>
+                </a:solidFill>
+                <a:latin typeface="Calibri"/>
+              </a:rPr>
+              <a:t>Sentence Starters</a:t>
+            </a:r>
+          </a:p>
+          <a:p>
+            <a:pPr indent="-203200" marL="203200">
+              <a:spcAft>
+                <a:spcPts val="900"/>
+              </a:spcAft>
+              <a:buClr>
+                <a:srgbClr val="C97B9E"/>
+              </a:buClr>
+              <a:buSzPct val="90000"/>
+              <a:buFont typeface="Arial"/>
+              <a:buChar char="–"/>
+            </a:pPr>
+            <a:r>
+              <a:rPr sz="1250" b="0" i="0">
+                <a:solidFill>
+                  <a:srgbClr val="201F33"/>
+                </a:solidFill>
+                <a:latin typeface="Calibri"/>
+              </a:rPr>
+              <a:t>"The brief required [X]; the final design achieves this by..."</a:t>
+            </a:r>
+          </a:p>
+          <a:p>
+            <a:pPr indent="-203200" marL="203200">
+              <a:spcAft>
+                <a:spcPts val="900"/>
+              </a:spcAft>
+              <a:buClr>
+                <a:srgbClr val="C97B9E"/>
+              </a:buClr>
+              <a:buSzPct val="90000"/>
+              <a:buFont typeface="Arial"/>
+              <a:buChar char="–"/>
+            </a:pPr>
+            <a:r>
+              <a:rPr sz="1250" b="0" i="0">
+                <a:solidFill>
+                  <a:srgbClr val="201F33"/>
+                </a:solidFill>
+                <a:latin typeface="Calibri"/>
+              </a:rPr>
+              <a:t>"This effectively meets the needs of [audience] because..."</a:t>
+            </a:r>
+          </a:p>
+          <a:p>
+            <a:pPr indent="-203200" marL="203200">
+              <a:spcAft>
+                <a:spcPts val="900"/>
+              </a:spcAft>
+              <a:buClr>
+                <a:srgbClr val="C97B9E"/>
+              </a:buClr>
+              <a:buSzPct val="90000"/>
+              <a:buFont typeface="Arial"/>
+              <a:buChar char="–"/>
+            </a:pPr>
+            <a:r>
+              <a:rPr sz="1250" b="0" i="0">
+                <a:solidFill>
+                  <a:srgbClr val="201F33"/>
+                </a:solidFill>
+                <a:latin typeface="Calibri"/>
+              </a:rPr>
+              <a:t>"One limitation of the final design is..."</a:t>
+            </a:r>
+          </a:p>
+        </p:txBody>
+      </p:sp>
+      <p:sp>
+        <p:nvSpPr>
+          <p:cNvPr id="6" name="Oval 5"/>
           <p:cNvSpPr/>
           <p:nvPr/>
         </p:nvSpPr>
         <p:spPr>
           <a:xfrm>
-            <a:off x="822960" y="2011680"/>
-            <a:ext cx="10515600" cy="2834640"/>
-          </a:xfrm>
-          <a:prstGeom prst="roundRect">
-            <a:avLst>
-              <a:gd name="adj" fmla="val 18000"/>
-            </a:avLst>
-          </a:prstGeom>
-          <a:solidFill>
-            <a:srgbClr val="FFFFFF"/>
+            <a:off x="5532120" y="3840480"/>
+            <a:ext cx="685800" cy="685800"/>
+          </a:xfrm>
+          <a:prstGeom prst="ellipse">
+            <a:avLst/>
+          </a:prstGeom>
+          <a:solidFill>
+            <a:srgbClr val="D9A441"/>
           </a:solidFill>
           <a:ln>
             <a:noFill/>
@@ -6261,76 +6332,6 @@
           <a:lstStyle/>
           <a:p>
             <a:pPr algn="ctr"/>
-          </a:p>
-        </p:txBody>
-      </p:sp>
-      <p:sp>
-        <p:nvSpPr>
-          <p:cNvPr id="6" name="TextBox 5"/>
-          <p:cNvSpPr txBox="1"/>
-          <p:nvPr/>
-        </p:nvSpPr>
-        <p:spPr>
-          <a:xfrm>
-            <a:off x="1280160" y="2697480"/>
-            <a:ext cx="9601200" cy="1097280"/>
-          </a:xfrm>
-          <a:prstGeom prst="rect">
-            <a:avLst/>
-          </a:prstGeom>
-          <a:noFill/>
-        </p:spPr>
-        <p:txBody>
-          <a:bodyPr wrap="square" anchor="t">
-            <a:spAutoFit/>
-          </a:bodyPr>
-          <a:lstStyle/>
-          <a:p>
-            <a:pPr algn="l"/>
-            <a:r>
-              <a:rPr sz="3400" b="1" i="0">
-                <a:solidFill>
-                  <a:srgbClr val="B88B37"/>
-                </a:solidFill>
-                <a:latin typeface="Cambria"/>
-              </a:rPr>
-              <a:t>Extended Knowledge</a:t>
-            </a:r>
-          </a:p>
-        </p:txBody>
-      </p:sp>
-      <p:sp>
-        <p:nvSpPr>
-          <p:cNvPr id="7" name="TextBox 6"/>
-          <p:cNvSpPr txBox="1"/>
-          <p:nvPr/>
-        </p:nvSpPr>
-        <p:spPr>
-          <a:xfrm>
-            <a:off x="1280160" y="3657600"/>
-            <a:ext cx="9601200" cy="548640"/>
-          </a:xfrm>
-          <a:prstGeom prst="rect">
-            <a:avLst/>
-          </a:prstGeom>
-          <a:noFill/>
-        </p:spPr>
-        <p:txBody>
-          <a:bodyPr wrap="square" anchor="t">
-            <a:spAutoFit/>
-          </a:bodyPr>
-          <a:lstStyle/>
-          <a:p>
-            <a:pPr algn="l"/>
-            <a:r>
-              <a:rPr sz="1500" b="0" i="0">
-                <a:solidFill>
-                  <a:srgbClr val="6B6B6B"/>
-                </a:solidFill>
-                <a:latin typeface="Calibri"/>
-              </a:rPr>
-              <a:t>Beyond the study design</a:t>
-            </a:r>
           </a:p>
         </p:txBody>
       </p:sp>
@@ -6410,7 +6411,7 @@
                 </a:solidFill>
                 <a:latin typeface="Calibri"/>
               </a:rPr>
-              <a:t>EXTENDED KNOWLEDGE</a:t>
+              <a:t>EVALUATION &amp; PRESENTATION</a:t>
             </a:r>
           </a:p>
         </p:txBody>
@@ -6445,7 +6446,7 @@
                 </a:solidFill>
                 <a:latin typeface="Cambria"/>
               </a:rPr>
-              <a:t>Materials and Manufacturing Processes</a:t>
+              <a:t>Evaluation &amp; Presentation — Quick Reference</a:t>
             </a:r>
           </a:p>
         </p:txBody>
@@ -6459,15 +6460,15 @@
         <p:spPr>
           <a:xfrm>
             <a:off x="685800" y="1874519"/>
-            <a:ext cx="10607040" cy="4526280"/>
+            <a:ext cx="2500884" cy="1554480"/>
           </a:xfrm>
           <a:prstGeom prst="roundRect">
             <a:avLst>
-              <a:gd name="adj" fmla="val 6000"/>
+              <a:gd name="adj" fmla="val 12000"/>
             </a:avLst>
           </a:prstGeom>
           <a:solidFill>
-            <a:srgbClr val="E9E9EC"/>
+            <a:srgbClr val="DFDFE3"/>
           </a:solidFill>
           <a:ln>
             <a:noFill/>
@@ -6489,7 +6490,271 @@
           </a:fontRef>
         </p:style>
         <p:txBody>
-          <a:bodyPr rtlCol="0" anchor="ctr" lIns="330200" rIns="330200" tIns="254000" bIns="254000" wrap="square"/>
+          <a:bodyPr rtlCol="0" anchor="ctr" wrap="square" lIns="127000" rIns="127000" tIns="101600" bIns="101600"/>
+          <a:lstStyle/>
+          <a:p>
+            <a:pPr algn="ctr"/>
+            <a:r>
+              <a:rPr b="1" sz="1300">
+                <a:solidFill>
+                  <a:srgbClr val="22213B"/>
+                </a:solidFill>
+                <a:latin typeface="Calibri"/>
+              </a:rPr>
+              <a:t>Refinement</a:t>
+            </a:r>
+          </a:p>
+          <a:p>
+            <a:r>
+              <a:rPr sz="1050">
+                <a:solidFill>
+                  <a:srgbClr val="201F33"/>
+                </a:solidFill>
+                <a:latin typeface="Calibri"/>
+              </a:rPr>
+              <a:t>Small, precise final adjustments.</a:t>
+            </a:r>
+          </a:p>
+        </p:txBody>
+      </p:sp>
+      <p:sp>
+        <p:nvSpPr>
+          <p:cNvPr id="5" name="Rounded Rectangle 4"/>
+          <p:cNvSpPr/>
+          <p:nvPr/>
+        </p:nvSpPr>
+        <p:spPr>
+          <a:xfrm>
+            <a:off x="3387852" y="1874519"/>
+            <a:ext cx="2500884" cy="1554480"/>
+          </a:xfrm>
+          <a:prstGeom prst="roundRect">
+            <a:avLst>
+              <a:gd name="adj" fmla="val 12000"/>
+            </a:avLst>
+          </a:prstGeom>
+          <a:solidFill>
+            <a:srgbClr val="F9F1E2"/>
+          </a:solidFill>
+          <a:ln>
+            <a:noFill/>
+          </a:ln>
+          <a:effectLst/>
+        </p:spPr>
+        <p:style>
+          <a:lnRef idx="1">
+            <a:schemeClr val="accent1"/>
+          </a:lnRef>
+          <a:fillRef idx="3">
+            <a:schemeClr val="accent1"/>
+          </a:fillRef>
+          <a:effectRef idx="2">
+            <a:schemeClr val="accent1"/>
+          </a:effectRef>
+          <a:fontRef idx="minor">
+            <a:schemeClr val="lt1"/>
+          </a:fontRef>
+        </p:style>
+        <p:txBody>
+          <a:bodyPr rtlCol="0" anchor="ctr" wrap="square" lIns="127000" rIns="127000" tIns="101600" bIns="101600"/>
+          <a:lstStyle/>
+          <a:p>
+            <a:pPr algn="ctr"/>
+            <a:r>
+              <a:rPr b="1" sz="1300">
+                <a:solidFill>
+                  <a:srgbClr val="AD8334"/>
+                </a:solidFill>
+                <a:latin typeface="Calibri"/>
+              </a:rPr>
+              <a:t>Presentation</a:t>
+            </a:r>
+          </a:p>
+          <a:p>
+            <a:r>
+              <a:rPr sz="1050">
+                <a:solidFill>
+                  <a:srgbClr val="201F33"/>
+                </a:solidFill>
+                <a:latin typeface="Calibri"/>
+              </a:rPr>
+              <a:t>Accurate, rendered, professional standard.</a:t>
+            </a:r>
+          </a:p>
+        </p:txBody>
+      </p:sp>
+      <p:sp>
+        <p:nvSpPr>
+          <p:cNvPr id="6" name="Rounded Rectangle 5"/>
+          <p:cNvSpPr/>
+          <p:nvPr/>
+        </p:nvSpPr>
+        <p:spPr>
+          <a:xfrm>
+            <a:off x="6089904" y="1874519"/>
+            <a:ext cx="2500884" cy="1554480"/>
+          </a:xfrm>
+          <a:prstGeom prst="roundRect">
+            <a:avLst>
+              <a:gd name="adj" fmla="val 12000"/>
+            </a:avLst>
+          </a:prstGeom>
+          <a:solidFill>
+            <a:srgbClr val="F6EBF0"/>
+          </a:solidFill>
+          <a:ln>
+            <a:noFill/>
+          </a:ln>
+          <a:effectLst/>
+        </p:spPr>
+        <p:style>
+          <a:lnRef idx="1">
+            <a:schemeClr val="accent1"/>
+          </a:lnRef>
+          <a:fillRef idx="3">
+            <a:schemeClr val="accent1"/>
+          </a:fillRef>
+          <a:effectRef idx="2">
+            <a:schemeClr val="accent1"/>
+          </a:effectRef>
+          <a:fontRef idx="minor">
+            <a:schemeClr val="lt1"/>
+          </a:fontRef>
+        </p:style>
+        <p:txBody>
+          <a:bodyPr rtlCol="0" anchor="ctr" wrap="square" lIns="127000" rIns="127000" tIns="101600" bIns="101600"/>
+          <a:lstStyle/>
+          <a:p>
+            <a:pPr algn="ctr"/>
+            <a:r>
+              <a:rPr b="1" sz="1300">
+                <a:solidFill>
+                  <a:srgbClr val="A0627E"/>
+                </a:solidFill>
+                <a:latin typeface="Calibri"/>
+              </a:rPr>
+              <a:t>Evaluation</a:t>
+            </a:r>
+          </a:p>
+          <a:p>
+            <a:r>
+              <a:rPr sz="1050">
+                <a:solidFill>
+                  <a:srgbClr val="201F33"/>
+                </a:solidFill>
+                <a:latin typeface="Calibri"/>
+              </a:rPr>
+              <a:t>Purpose, audience, constraints, obligatory fields.</a:t>
+            </a:r>
+          </a:p>
+        </p:txBody>
+      </p:sp>
+      <p:sp>
+        <p:nvSpPr>
+          <p:cNvPr id="7" name="Rounded Rectangle 6"/>
+          <p:cNvSpPr/>
+          <p:nvPr/>
+        </p:nvSpPr>
+        <p:spPr>
+          <a:xfrm>
+            <a:off x="8791956" y="1874519"/>
+            <a:ext cx="2500884" cy="1554480"/>
+          </a:xfrm>
+          <a:prstGeom prst="roundRect">
+            <a:avLst>
+              <a:gd name="adj" fmla="val 12000"/>
+            </a:avLst>
+          </a:prstGeom>
+          <a:solidFill>
+            <a:srgbClr val="DFDFE3"/>
+          </a:solidFill>
+          <a:ln>
+            <a:noFill/>
+          </a:ln>
+          <a:effectLst/>
+        </p:spPr>
+        <p:style>
+          <a:lnRef idx="1">
+            <a:schemeClr val="accent1"/>
+          </a:lnRef>
+          <a:fillRef idx="3">
+            <a:schemeClr val="accent1"/>
+          </a:fillRef>
+          <a:effectRef idx="2">
+            <a:schemeClr val="accent1"/>
+          </a:effectRef>
+          <a:fontRef idx="minor">
+            <a:schemeClr val="lt1"/>
+          </a:fontRef>
+        </p:style>
+        <p:txBody>
+          <a:bodyPr rtlCol="0" anchor="ctr" wrap="square" lIns="127000" rIns="127000" tIns="101600" bIns="101600"/>
+          <a:lstStyle/>
+          <a:p>
+            <a:pPr algn="ctr"/>
+            <a:r>
+              <a:rPr b="1" sz="1300">
+                <a:solidFill>
+                  <a:srgbClr val="22213B"/>
+                </a:solidFill>
+                <a:latin typeface="Calibri"/>
+              </a:rPr>
+              <a:t>Folio Layout</a:t>
+            </a:r>
+          </a:p>
+          <a:p>
+            <a:r>
+              <a:rPr sz="1050">
+                <a:solidFill>
+                  <a:srgbClr val="201F33"/>
+                </a:solidFill>
+                <a:latin typeface="Calibri"/>
+              </a:rPr>
+              <a:t>Clear sequence and consistent presentation.</a:t>
+            </a:r>
+          </a:p>
+        </p:txBody>
+      </p:sp>
+      <p:sp>
+        <p:nvSpPr>
+          <p:cNvPr id="8" name="Rounded Rectangle 7"/>
+          <p:cNvSpPr/>
+          <p:nvPr/>
+        </p:nvSpPr>
+        <p:spPr>
+          <a:xfrm>
+            <a:off x="685800" y="3675887"/>
+            <a:ext cx="10607040" cy="2862073"/>
+          </a:xfrm>
+          <a:prstGeom prst="roundRect">
+            <a:avLst>
+              <a:gd name="adj" fmla="val 10000"/>
+            </a:avLst>
+          </a:prstGeom>
+          <a:solidFill>
+            <a:srgbClr val="F9F1E2"/>
+          </a:solidFill>
+          <a:ln>
+            <a:noFill/>
+          </a:ln>
+          <a:effectLst/>
+        </p:spPr>
+        <p:style>
+          <a:lnRef idx="1">
+            <a:schemeClr val="accent1"/>
+          </a:lnRef>
+          <a:fillRef idx="3">
+            <a:schemeClr val="accent1"/>
+          </a:fillRef>
+          <a:effectRef idx="2">
+            <a:schemeClr val="accent1"/>
+          </a:effectRef>
+          <a:fontRef idx="minor">
+            <a:schemeClr val="lt1"/>
+          </a:fontRef>
+        </p:style>
+        <p:txBody>
+          <a:bodyPr rtlCol="0" anchor="ctr" lIns="203200" rIns="203200" tIns="101600" bIns="101600" wrap="square"/>
           <a:lstStyle/>
           <a:p>
             <a:pPr algn="ctr" indent="-203200" marL="203200">
@@ -6497,197 +6762,39 @@
                 <a:spcPts val="900"/>
               </a:spcAft>
               <a:buClr>
-                <a:srgbClr val="2B2A4A"/>
+                <a:srgbClr val="D9A441"/>
               </a:buClr>
               <a:buSzPct val="90000"/>
               <a:buFont typeface="Arial"/>
               <a:buChar char="●"/>
             </a:pPr>
             <a:r>
-              <a:rPr sz="1500" b="1" i="0">
-                <a:solidFill>
-                  <a:srgbClr val="24233E"/>
-                </a:solidFill>
-                <a:latin typeface="Calibri"/>
-              </a:rPr>
-              <a:t>Common processes worth knowing</a:t>
-            </a:r>
-          </a:p>
-          <a:p>
-            <a:pPr indent="-203200" marL="203200">
-              <a:spcAft>
-                <a:spcPts val="900"/>
-              </a:spcAft>
-              <a:buClr>
-                <a:srgbClr val="2B2A4A"/>
-              </a:buClr>
-              <a:buSzPct val="90000"/>
-              <a:buFont typeface="Arial"/>
-              <a:buChar char="–"/>
-            </a:pPr>
-            <a:r>
-              <a:rPr sz="1350" b="0" i="0">
-                <a:solidFill>
-                  <a:srgbClr val="201F33"/>
-                </a:solidFill>
-                <a:latin typeface="Calibri"/>
-              </a:rPr>
-              <a:t>Injection moulding — mass production of plastic products via molten plastic injected into a mould</a:t>
-            </a:r>
-          </a:p>
-          <a:p>
-            <a:pPr indent="-203200" marL="203200">
-              <a:spcAft>
-                <a:spcPts val="900"/>
-              </a:spcAft>
-              <a:buClr>
-                <a:srgbClr val="2B2A4A"/>
-              </a:buClr>
-              <a:buSzPct val="90000"/>
-              <a:buFont typeface="Arial"/>
-              <a:buChar char="–"/>
-            </a:pPr>
-            <a:r>
-              <a:rPr sz="1350" b="0" i="0">
-                <a:solidFill>
-                  <a:srgbClr val="201F33"/>
-                </a:solidFill>
-                <a:latin typeface="Calibri"/>
-              </a:rPr>
-              <a:t>Offset vs digital printing — offset suits large runs at low unit cost; digital suits short runs and personalisation</a:t>
-            </a:r>
-          </a:p>
-          <a:p>
-            <a:pPr indent="-203200" marL="203200">
-              <a:spcAft>
-                <a:spcPts val="900"/>
-              </a:spcAft>
-              <a:buClr>
-                <a:srgbClr val="2B2A4A"/>
-              </a:buClr>
-              <a:buSzPct val="90000"/>
-              <a:buFont typeface="Arial"/>
-              <a:buChar char="–"/>
-            </a:pPr>
-            <a:r>
-              <a:rPr sz="1350" b="0" i="0">
-                <a:solidFill>
-                  <a:srgbClr val="201F33"/>
-                </a:solidFill>
-                <a:latin typeface="Calibri"/>
-              </a:rPr>
-              <a:t>Laser cutting — precise cutting/engraving of sheet materials, common in packaging prototyping</a:t>
-            </a:r>
-          </a:p>
-          <a:p>
-            <a:pPr indent="-203200" marL="203200">
-              <a:spcAft>
-                <a:spcPts val="900"/>
-              </a:spcAft>
-              <a:buClr>
-                <a:srgbClr val="2B2A4A"/>
-              </a:buClr>
-              <a:buSzPct val="90000"/>
-              <a:buFont typeface="Arial"/>
-              <a:buChar char="–"/>
-            </a:pPr>
-            <a:r>
-              <a:rPr sz="1350" b="0" i="0">
-                <a:solidFill>
-                  <a:srgbClr val="201F33"/>
-                </a:solidFill>
-                <a:latin typeface="Calibri"/>
-              </a:rPr>
-              <a:t>3D printing / additive manufacturing — building objects layer by layer from a digital model</a:t>
-            </a:r>
-          </a:p>
-          <a:p>
-            <a:pPr indent="-203200" marL="203200">
-              <a:spcAft>
-                <a:spcPts val="900"/>
-              </a:spcAft>
-              <a:buClr>
-                <a:srgbClr val="2B2A4A"/>
-              </a:buClr>
-              <a:buSzPct val="90000"/>
-              <a:buFont typeface="Arial"/>
-              <a:buChar char="●"/>
-            </a:pPr>
-            <a:r>
-              <a:rPr sz="1500" b="1" i="0">
-                <a:solidFill>
-                  <a:srgbClr val="24233E"/>
-                </a:solidFill>
-                <a:latin typeface="Calibri"/>
-              </a:rPr>
-              <a:t>Sustainable material choices</a:t>
-            </a:r>
-          </a:p>
-          <a:p>
-            <a:pPr indent="-203200" marL="203200">
-              <a:spcAft>
-                <a:spcPts val="900"/>
-              </a:spcAft>
-              <a:buClr>
-                <a:srgbClr val="2B2A4A"/>
-              </a:buClr>
-              <a:buSzPct val="90000"/>
-              <a:buFont typeface="Arial"/>
-              <a:buChar char="–"/>
-            </a:pPr>
-            <a:r>
-              <a:rPr sz="1350" b="0" i="0">
-                <a:solidFill>
-                  <a:srgbClr val="201F33"/>
-                </a:solidFill>
-                <a:latin typeface="Calibri"/>
-              </a:rPr>
-              <a:t>Recycled and recyclable substrates, biodegradable plastics, FSC-certified paper stock, and designing for minimal material use are all increasingly expected in professional practice and make for strong evaluation discussion points.</a:t>
-            </a:r>
-          </a:p>
-        </p:txBody>
-      </p:sp>
-      <p:sp>
-        <p:nvSpPr>
-          <p:cNvPr id="5" name="Oval 4"/>
-          <p:cNvSpPr/>
-          <p:nvPr/>
-        </p:nvSpPr>
-        <p:spPr>
-          <a:xfrm>
-            <a:off x="10881360" y="5943600"/>
-            <a:ext cx="1005840" cy="1005840"/>
-          </a:xfrm>
-          <a:prstGeom prst="ellipse">
-            <a:avLst/>
-          </a:prstGeom>
-          <a:solidFill>
-            <a:srgbClr val="E6C3D3"/>
-          </a:solidFill>
-          <a:ln>
-            <a:noFill/>
-          </a:ln>
-          <a:effectLst/>
-        </p:spPr>
-        <p:style>
-          <a:lnRef idx="1">
-            <a:schemeClr val="accent1"/>
-          </a:lnRef>
-          <a:fillRef idx="3">
-            <a:schemeClr val="accent1"/>
-          </a:fillRef>
-          <a:effectRef idx="2">
-            <a:schemeClr val="accent1"/>
-          </a:effectRef>
-          <a:fontRef idx="minor">
-            <a:schemeClr val="lt1"/>
-          </a:fontRef>
-        </p:style>
-        <p:txBody>
-          <a:bodyPr rtlCol="0" anchor="ctr"/>
-          <a:lstStyle/>
-          <a:p>
-            <a:pPr algn="ctr"/>
+              <a:rPr sz="1200" b="0" i="0">
+                <a:solidFill>
+                  <a:srgbClr val="201F33"/>
+                </a:solidFill>
+                <a:latin typeface="Calibri"/>
+              </a:rPr>
+              <a:t> Reminder: a strong evaluation is </a:t>
+            </a:r>
+            <a:r>
+              <a:rPr sz="1200" b="1" i="0">
+                <a:solidFill>
+                  <a:srgbClr val="B88B37"/>
+                </a:solidFill>
+                <a:latin typeface="Calibri"/>
+              </a:rPr>
+              <a:t>specific and balanced</a:t>
+            </a:r>
+            <a:r>
+              <a:rPr sz="1200" b="0" i="0">
+                <a:solidFill>
+                  <a:srgbClr val="201F33"/>
+                </a:solidFill>
+                <a:latin typeface="Calibri"/>
+              </a:rPr>
+              <a:t> — not just "the design looks good." </a:t>
+            </a:r>
           </a:p>
         </p:txBody>
       </p:sp>
@@ -6705,7 +6812,7 @@
     <p:bg>
       <p:bgPr>
         <a:solidFill>
-          <a:srgbClr val="F8F6FB"/>
+          <a:srgbClr val="C97B9E"/>
         </a:solidFill>
         <a:effectLst/>
       </p:bgPr>
@@ -6719,22 +6826,20 @@
       <p:grpSpPr/>
       <p:sp>
         <p:nvSpPr>
-          <p:cNvPr id="2" name="Rounded Rectangle 1"/>
+          <p:cNvPr id="2" name="Oval 1"/>
           <p:cNvSpPr/>
           <p:nvPr/>
         </p:nvSpPr>
         <p:spPr>
           <a:xfrm>
-            <a:off x="685800" y="502920"/>
-            <a:ext cx="3291840" cy="457200"/>
-          </a:xfrm>
-          <a:prstGeom prst="roundRect">
-            <a:avLst>
-              <a:gd name="adj" fmla="val 50000"/>
-            </a:avLst>
-          </a:prstGeom>
-          <a:solidFill>
-            <a:srgbClr val="2B2A4A"/>
+            <a:off x="-914400" y="-914400"/>
+            <a:ext cx="2103120" cy="2103120"/>
+          </a:xfrm>
+          <a:prstGeom prst="ellipse">
+            <a:avLst/>
+          </a:prstGeom>
+          <a:solidFill>
+            <a:srgbClr val="B06C8B"/>
           </a:solidFill>
           <a:ln>
             <a:noFill/>
@@ -6756,75 +6861,29 @@
           </a:fontRef>
         </p:style>
         <p:txBody>
-          <a:bodyPr rtlCol="0" anchor="ctr" wrap="none" lIns="50800" rIns="50800"/>
+          <a:bodyPr rtlCol="0" anchor="ctr"/>
           <a:lstStyle/>
           <a:p>
             <a:pPr algn="ctr"/>
-            <a:r>
-              <a:rPr sz="1100" b="1">
-                <a:solidFill>
-                  <a:srgbClr val="FFFFFF"/>
-                </a:solidFill>
-                <a:latin typeface="Calibri"/>
-              </a:rPr>
-              <a:t>EXTENDED KNOWLEDGE</a:t>
-            </a:r>
-          </a:p>
-        </p:txBody>
-      </p:sp>
-      <p:sp>
-        <p:nvSpPr>
-          <p:cNvPr id="3" name="TextBox 2"/>
-          <p:cNvSpPr txBox="1"/>
-          <p:nvPr/>
-        </p:nvSpPr>
-        <p:spPr>
-          <a:xfrm>
-            <a:off x="685800" y="1051560"/>
-            <a:ext cx="10607040" cy="822960"/>
-          </a:xfrm>
-          <a:prstGeom prst="rect">
+          </a:p>
+        </p:txBody>
+      </p:sp>
+      <p:sp>
+        <p:nvSpPr>
+          <p:cNvPr id="3" name="Oval 2"/>
+          <p:cNvSpPr/>
+          <p:nvPr/>
+        </p:nvSpPr>
+        <p:spPr>
+          <a:xfrm>
+            <a:off x="11064240" y="5852160"/>
+            <a:ext cx="1737360" cy="1737360"/>
+          </a:xfrm>
+          <a:prstGeom prst="ellipse">
             <a:avLst/>
           </a:prstGeom>
-          <a:noFill/>
-        </p:spPr>
-        <p:txBody>
-          <a:bodyPr wrap="square" anchor="t">
-            <a:spAutoFit/>
-          </a:bodyPr>
-          <a:lstStyle/>
-          <a:p>
-            <a:pPr algn="l"/>
-            <a:r>
-              <a:rPr sz="2700" b="1" i="0">
-                <a:solidFill>
-                  <a:srgbClr val="201F33"/>
-                </a:solidFill>
-                <a:latin typeface="Cambria"/>
-              </a:rPr>
-              <a:t>Advanced Rendering and Presentation Techniques</a:t>
-            </a:r>
-          </a:p>
-        </p:txBody>
-      </p:sp>
-      <p:sp>
-        <p:nvSpPr>
-          <p:cNvPr id="4" name="Rounded Rectangle 3"/>
-          <p:cNvSpPr/>
-          <p:nvPr/>
-        </p:nvSpPr>
-        <p:spPr>
-          <a:xfrm>
-            <a:off x="685800" y="1874519"/>
-            <a:ext cx="10607040" cy="4526280"/>
-          </a:xfrm>
-          <a:prstGeom prst="roundRect">
-            <a:avLst>
-              <a:gd name="adj" fmla="val 6000"/>
-            </a:avLst>
-          </a:prstGeom>
-          <a:solidFill>
-            <a:srgbClr val="E9E9EC"/>
+          <a:solidFill>
+            <a:srgbClr val="B06C8B"/>
           </a:solidFill>
           <a:ln>
             <a:noFill/>
@@ -6846,7 +6905,253 @@
           </a:fontRef>
         </p:style>
         <p:txBody>
-          <a:bodyPr rtlCol="0" anchor="ctr" lIns="330200" rIns="330200" tIns="254000" bIns="254000" wrap="square"/>
+          <a:bodyPr rtlCol="0" anchor="ctr"/>
+          <a:lstStyle/>
+          <a:p>
+            <a:pPr algn="ctr"/>
+          </a:p>
+        </p:txBody>
+      </p:sp>
+      <p:sp>
+        <p:nvSpPr>
+          <p:cNvPr id="4" name="Rounded Rectangle 3"/>
+          <p:cNvSpPr/>
+          <p:nvPr/>
+        </p:nvSpPr>
+        <p:spPr>
+          <a:xfrm>
+            <a:off x="685800" y="457200"/>
+            <a:ext cx="1696212" cy="502920"/>
+          </a:xfrm>
+          <a:prstGeom prst="roundRect">
+            <a:avLst>
+              <a:gd name="adj" fmla="val 50000"/>
+            </a:avLst>
+          </a:prstGeom>
+          <a:solidFill>
+            <a:srgbClr val="FFFFFF"/>
+          </a:solidFill>
+          <a:ln>
+            <a:noFill/>
+          </a:ln>
+          <a:effectLst/>
+        </p:spPr>
+        <p:style>
+          <a:lnRef idx="1">
+            <a:schemeClr val="accent1"/>
+          </a:lnRef>
+          <a:fillRef idx="3">
+            <a:schemeClr val="accent1"/>
+          </a:fillRef>
+          <a:effectRef idx="2">
+            <a:schemeClr val="accent1"/>
+          </a:effectRef>
+          <a:fontRef idx="minor">
+            <a:schemeClr val="lt1"/>
+          </a:fontRef>
+        </p:style>
+        <p:txBody>
+          <a:bodyPr rtlCol="0" anchor="ctr"/>
+          <a:lstStyle/>
+          <a:p>
+            <a:pPr algn="ctr"/>
+            <a:r>
+              <a:rPr b="1" sz="1400">
+                <a:solidFill>
+                  <a:srgbClr val="824F66"/>
+                </a:solidFill>
+                <a:latin typeface="Calibri"/>
+              </a:rPr>
+              <a:t>CHALLENGE</a:t>
+            </a:r>
+          </a:p>
+        </p:txBody>
+      </p:sp>
+      <p:sp>
+        <p:nvSpPr>
+          <p:cNvPr id="5" name="TextBox 4"/>
+          <p:cNvSpPr txBox="1"/>
+          <p:nvPr/>
+        </p:nvSpPr>
+        <p:spPr>
+          <a:xfrm>
+            <a:off x="685800" y="1143000"/>
+            <a:ext cx="10607040" cy="914400"/>
+          </a:xfrm>
+          <a:prstGeom prst="rect">
+            <a:avLst/>
+          </a:prstGeom>
+          <a:noFill/>
+        </p:spPr>
+        <p:txBody>
+          <a:bodyPr wrap="square" anchor="t">
+            <a:spAutoFit/>
+          </a:bodyPr>
+          <a:lstStyle/>
+          <a:p>
+            <a:pPr algn="l"/>
+            <a:r>
+              <a:rPr sz="3000" b="1" i="0">
+                <a:solidFill>
+                  <a:srgbClr val="FFFFFF"/>
+                </a:solidFill>
+                <a:latin typeface="Cambria"/>
+              </a:rPr>
+              <a:t>Evaluate This!</a:t>
+            </a:r>
+          </a:p>
+        </p:txBody>
+      </p:sp>
+      <p:sp>
+        <p:nvSpPr>
+          <p:cNvPr id="6" name="Rounded Rectangle 5"/>
+          <p:cNvSpPr/>
+          <p:nvPr/>
+        </p:nvSpPr>
+        <p:spPr>
+          <a:xfrm>
+            <a:off x="685800" y="2148840"/>
+            <a:ext cx="960120" cy="411480"/>
+          </a:xfrm>
+          <a:prstGeom prst="roundRect">
+            <a:avLst>
+              <a:gd name="adj" fmla="val 50000"/>
+            </a:avLst>
+          </a:prstGeom>
+          <a:solidFill>
+            <a:srgbClr val="965C76"/>
+          </a:solidFill>
+          <a:ln>
+            <a:noFill/>
+          </a:ln>
+          <a:effectLst/>
+        </p:spPr>
+        <p:style>
+          <a:lnRef idx="1">
+            <a:schemeClr val="accent1"/>
+          </a:lnRef>
+          <a:fillRef idx="3">
+            <a:schemeClr val="accent1"/>
+          </a:fillRef>
+          <a:effectRef idx="2">
+            <a:schemeClr val="accent1"/>
+          </a:effectRef>
+          <a:fontRef idx="minor">
+            <a:schemeClr val="lt1"/>
+          </a:fontRef>
+        </p:style>
+        <p:txBody>
+          <a:bodyPr rtlCol="0" anchor="ctr" wrap="none" lIns="50800" rIns="50800"/>
+          <a:lstStyle/>
+          <a:p>
+            <a:pPr algn="ctr"/>
+            <a:r>
+              <a:rPr sz="1050" b="1">
+                <a:solidFill>
+                  <a:srgbClr val="FFFFFF"/>
+                </a:solidFill>
+                <a:latin typeface="Calibri"/>
+              </a:rPr>
+              <a:t>5 MIN</a:t>
+            </a:r>
+          </a:p>
+        </p:txBody>
+      </p:sp>
+      <p:sp>
+        <p:nvSpPr>
+          <p:cNvPr id="7" name="Rounded Rectangle 6"/>
+          <p:cNvSpPr/>
+          <p:nvPr/>
+        </p:nvSpPr>
+        <p:spPr>
+          <a:xfrm>
+            <a:off x="1783080" y="2148840"/>
+            <a:ext cx="1463040" cy="411480"/>
+          </a:xfrm>
+          <a:prstGeom prst="roundRect">
+            <a:avLst>
+              <a:gd name="adj" fmla="val 50000"/>
+            </a:avLst>
+          </a:prstGeom>
+          <a:solidFill>
+            <a:srgbClr val="965C76"/>
+          </a:solidFill>
+          <a:ln>
+            <a:noFill/>
+          </a:ln>
+          <a:effectLst/>
+        </p:spPr>
+        <p:style>
+          <a:lnRef idx="1">
+            <a:schemeClr val="accent1"/>
+          </a:lnRef>
+          <a:fillRef idx="3">
+            <a:schemeClr val="accent1"/>
+          </a:fillRef>
+          <a:effectRef idx="2">
+            <a:schemeClr val="accent1"/>
+          </a:effectRef>
+          <a:fontRef idx="minor">
+            <a:schemeClr val="lt1"/>
+          </a:fontRef>
+        </p:style>
+        <p:txBody>
+          <a:bodyPr rtlCol="0" anchor="ctr" wrap="none" lIns="50800" rIns="50800"/>
+          <a:lstStyle/>
+          <a:p>
+            <a:pPr algn="ctr"/>
+            <a:r>
+              <a:rPr sz="1050" b="1">
+                <a:solidFill>
+                  <a:srgbClr val="FFFFFF"/>
+                </a:solidFill>
+                <a:latin typeface="Calibri"/>
+              </a:rPr>
+              <a:t>INDIVIDUAL</a:t>
+            </a:r>
+          </a:p>
+        </p:txBody>
+      </p:sp>
+      <p:sp>
+        <p:nvSpPr>
+          <p:cNvPr id="8" name="Rounded Rectangle 7"/>
+          <p:cNvSpPr/>
+          <p:nvPr/>
+        </p:nvSpPr>
+        <p:spPr>
+          <a:xfrm>
+            <a:off x="685800" y="2788920"/>
+            <a:ext cx="10607040" cy="3246120"/>
+          </a:xfrm>
+          <a:prstGeom prst="roundRect">
+            <a:avLst>
+              <a:gd name="adj" fmla="val 8000"/>
+            </a:avLst>
+          </a:prstGeom>
+          <a:solidFill>
+            <a:srgbClr val="FFFFFF"/>
+          </a:solidFill>
+          <a:ln>
+            <a:noFill/>
+          </a:ln>
+          <a:effectLst/>
+        </p:spPr>
+        <p:style>
+          <a:lnRef idx="1">
+            <a:schemeClr val="accent1"/>
+          </a:lnRef>
+          <a:fillRef idx="3">
+            <a:schemeClr val="accent1"/>
+          </a:fillRef>
+          <a:effectRef idx="2">
+            <a:schemeClr val="accent1"/>
+          </a:effectRef>
+          <a:fontRef idx="minor">
+            <a:schemeClr val="lt1"/>
+          </a:fontRef>
+        </p:style>
+        <p:txBody>
+          <a:bodyPr rtlCol="0" anchor="ctr" lIns="304800" rIns="304800" tIns="203200" bIns="203200" wrap="square"/>
           <a:lstStyle/>
           <a:p>
             <a:pPr algn="ctr" indent="-203200" marL="203200">
@@ -6854,20 +7159,20 @@
                 <a:spcPts val="900"/>
               </a:spcAft>
               <a:buClr>
-                <a:srgbClr val="2B2A4A"/>
+                <a:srgbClr val="C97B9E"/>
               </a:buClr>
               <a:buSzPct val="90000"/>
               <a:buFont typeface="Arial"/>
               <a:buChar char="●"/>
             </a:pPr>
             <a:r>
-              <a:rPr sz="1500" b="1" i="0">
-                <a:solidFill>
-                  <a:srgbClr val="24233E"/>
-                </a:solidFill>
-                <a:latin typeface="Calibri"/>
-              </a:rPr>
-              <a:t>Manual rendering</a:t>
+              <a:rPr sz="1450" b="0" i="0">
+                <a:solidFill>
+                  <a:srgbClr val="201F33"/>
+                </a:solidFill>
+                <a:latin typeface="Calibri"/>
+              </a:rPr>
+              <a:t>You are given a mock final design and a short brief.</a:t>
             </a:r>
           </a:p>
           <a:p>
@@ -6876,153 +7181,56 @@
                 <a:spcPts val="900"/>
               </a:spcAft>
               <a:buClr>
-                <a:srgbClr val="2B2A4A"/>
-              </a:buClr>
-              <a:buSzPct val="90000"/>
-              <a:buFont typeface="Arial"/>
-              <a:buChar char="–"/>
-            </a:pPr>
-            <a:r>
-              <a:rPr sz="1350" b="0" i="0">
-                <a:solidFill>
-                  <a:srgbClr val="201F33"/>
-                </a:solidFill>
-                <a:latin typeface="Calibri"/>
-              </a:rPr>
-              <a:t>Layering marker strokes from light to dark builds convincing tone and form</a:t>
-            </a:r>
-          </a:p>
-          <a:p>
-            <a:pPr indent="-203200" marL="203200">
-              <a:spcAft>
-                <a:spcPts val="900"/>
-              </a:spcAft>
-              <a:buClr>
-                <a:srgbClr val="2B2A4A"/>
-              </a:buClr>
-              <a:buSzPct val="90000"/>
-              <a:buFont typeface="Arial"/>
-              <a:buChar char="–"/>
-            </a:pPr>
-            <a:r>
-              <a:rPr sz="1350" b="0" i="0">
-                <a:solidFill>
-                  <a:srgbClr val="201F33"/>
-                </a:solidFill>
-                <a:latin typeface="Calibri"/>
-              </a:rPr>
-              <a:t>A consistent light source direction across a rendering keeps shading believable</a:t>
-            </a:r>
-          </a:p>
-          <a:p>
-            <a:pPr indent="-203200" marL="203200">
-              <a:spcAft>
-                <a:spcPts val="900"/>
-              </a:spcAft>
-              <a:buClr>
-                <a:srgbClr val="2B2A4A"/>
-              </a:buClr>
-              <a:buSzPct val="90000"/>
-              <a:buFont typeface="Arial"/>
-              <a:buChar char="–"/>
-            </a:pPr>
-            <a:r>
-              <a:rPr sz="1350" b="0" i="0">
-                <a:solidFill>
-                  <a:srgbClr val="201F33"/>
-                </a:solidFill>
-                <a:latin typeface="Calibri"/>
-              </a:rPr>
-              <a:t>Photorealistic vs stylised rendering — choose the approach that best suits the brief and audience</a:t>
-            </a:r>
-          </a:p>
-          <a:p>
-            <a:pPr indent="-203200" marL="203200">
-              <a:spcAft>
-                <a:spcPts val="900"/>
-              </a:spcAft>
-              <a:buClr>
-                <a:srgbClr val="2B2A4A"/>
+                <a:srgbClr val="C97B9E"/>
               </a:buClr>
               <a:buSzPct val="90000"/>
               <a:buFont typeface="Arial"/>
               <a:buChar char="●"/>
             </a:pPr>
             <a:r>
-              <a:rPr sz="1500" b="1" i="0">
-                <a:solidFill>
-                  <a:srgbClr val="24233E"/>
-                </a:solidFill>
-                <a:latin typeface="Calibri"/>
-              </a:rPr>
-              <a:t>Digital rendering</a:t>
-            </a:r>
-          </a:p>
-          <a:p>
-            <a:pPr indent="-203200" marL="203200">
-              <a:spcAft>
-                <a:spcPts val="900"/>
-              </a:spcAft>
-              <a:buClr>
-                <a:srgbClr val="2B2A4A"/>
-              </a:buClr>
-              <a:buSzPct val="90000"/>
-              <a:buFont typeface="Arial"/>
-              <a:buChar char="–"/>
-            </a:pPr>
-            <a:r>
-              <a:rPr sz="1350" b="0" i="0">
-                <a:solidFill>
-                  <a:srgbClr val="201F33"/>
-                </a:solidFill>
-                <a:latin typeface="Calibri"/>
-              </a:rPr>
-              <a:t>Basic familiarity with digital mockup techniques (placing a design onto a photographed product/environment) can significantly lift the perceived professionalism of a final presentation.</a:t>
-            </a:r>
-          </a:p>
-        </p:txBody>
-      </p:sp>
-      <p:sp>
-        <p:nvSpPr>
-          <p:cNvPr id="5" name="Oval 4"/>
-          <p:cNvSpPr/>
-          <p:nvPr/>
-        </p:nvSpPr>
-        <p:spPr>
-          <a:xfrm>
-            <a:off x="10881360" y="5943600"/>
-            <a:ext cx="1005840" cy="1005840"/>
-          </a:xfrm>
-          <a:prstGeom prst="ellipse">
+              <a:rPr sz="1450" b="0" i="0">
+                <a:solidFill>
+                  <a:srgbClr val="201F33"/>
+                </a:solidFill>
+                <a:latin typeface="Calibri"/>
+              </a:rPr>
+              <a:t>In 5 minutes, write one evaluation sentence covering purpose, audience or constraints.</a:t>
+            </a:r>
+          </a:p>
+        </p:txBody>
+      </p:sp>
+      <p:sp>
+        <p:nvSpPr>
+          <p:cNvPr id="9" name="TextBox 8"/>
+          <p:cNvSpPr txBox="1"/>
+          <p:nvPr/>
+        </p:nvSpPr>
+        <p:spPr>
+          <a:xfrm>
+            <a:off x="685800" y="6217920"/>
+            <a:ext cx="10607040" cy="502920"/>
+          </a:xfrm>
+          <a:prstGeom prst="rect">
             <a:avLst/>
           </a:prstGeom>
-          <a:solidFill>
-            <a:srgbClr val="E6C3D3"/>
-          </a:solidFill>
-          <a:ln>
-            <a:noFill/>
-          </a:ln>
-          <a:effectLst/>
-        </p:spPr>
-        <p:style>
-          <a:lnRef idx="1">
-            <a:schemeClr val="accent1"/>
-          </a:lnRef>
-          <a:fillRef idx="3">
-            <a:schemeClr val="accent1"/>
-          </a:fillRef>
-          <a:effectRef idx="2">
-            <a:schemeClr val="accent1"/>
-          </a:effectRef>
-          <a:fontRef idx="minor">
-            <a:schemeClr val="lt1"/>
-          </a:fontRef>
-        </p:style>
-        <p:txBody>
-          <a:bodyPr rtlCol="0" anchor="ctr"/>
-          <a:lstStyle/>
-          <a:p>
-            <a:pPr algn="ctr"/>
+          <a:noFill/>
+        </p:spPr>
+        <p:txBody>
+          <a:bodyPr wrap="square" anchor="t">
+            <a:spAutoFit/>
+          </a:bodyPr>
+          <a:lstStyle/>
+          <a:p>
+            <a:pPr algn="l"/>
+            <a:r>
+              <a:rPr sz="1250" b="0" i="1">
+                <a:solidFill>
+                  <a:srgbClr val="FFFFFF"/>
+                </a:solidFill>
+                <a:latin typeface="Calibri"/>
+              </a:rPr>
+              <a:t>Debrief: Share your sentence — is it specific and balanced, or just praise?</a:t>
+            </a:r>
           </a:p>
         </p:txBody>
       </p:sp>
@@ -7040,7 +7248,7 @@
     <p:bg>
       <p:bgPr>
         <a:solidFill>
-          <a:srgbClr val="F8F6FB"/>
+          <a:srgbClr val="C97B9E"/>
         </a:solidFill>
         <a:effectLst/>
       </p:bgPr>
@@ -7054,22 +7262,20 @@
       <p:grpSpPr/>
       <p:sp>
         <p:nvSpPr>
-          <p:cNvPr id="2" name="Rounded Rectangle 1"/>
+          <p:cNvPr id="2" name="Oval 1"/>
           <p:cNvSpPr/>
           <p:nvPr/>
         </p:nvSpPr>
         <p:spPr>
           <a:xfrm>
-            <a:off x="685800" y="502920"/>
-            <a:ext cx="3291840" cy="457200"/>
-          </a:xfrm>
-          <a:prstGeom prst="roundRect">
-            <a:avLst>
-              <a:gd name="adj" fmla="val 50000"/>
-            </a:avLst>
-          </a:prstGeom>
-          <a:solidFill>
-            <a:srgbClr val="2B2A4A"/>
+            <a:off x="-914400" y="-914400"/>
+            <a:ext cx="2103120" cy="2103120"/>
+          </a:xfrm>
+          <a:prstGeom prst="ellipse">
+            <a:avLst/>
+          </a:prstGeom>
+          <a:solidFill>
+            <a:srgbClr val="B06C8B"/>
           </a:solidFill>
           <a:ln>
             <a:noFill/>
@@ -7091,75 +7297,29 @@
           </a:fontRef>
         </p:style>
         <p:txBody>
-          <a:bodyPr rtlCol="0" anchor="ctr" wrap="none" lIns="50800" rIns="50800"/>
+          <a:bodyPr rtlCol="0" anchor="ctr"/>
           <a:lstStyle/>
           <a:p>
             <a:pPr algn="ctr"/>
-            <a:r>
-              <a:rPr sz="1100" b="1">
-                <a:solidFill>
-                  <a:srgbClr val="FFFFFF"/>
-                </a:solidFill>
-                <a:latin typeface="Calibri"/>
-              </a:rPr>
-              <a:t>EXTENDED KNOWLEDGE</a:t>
-            </a:r>
-          </a:p>
-        </p:txBody>
-      </p:sp>
-      <p:sp>
-        <p:nvSpPr>
-          <p:cNvPr id="3" name="TextBox 2"/>
-          <p:cNvSpPr txBox="1"/>
-          <p:nvPr/>
-        </p:nvSpPr>
-        <p:spPr>
-          <a:xfrm>
-            <a:off x="685800" y="1051560"/>
-            <a:ext cx="10607040" cy="822960"/>
-          </a:xfrm>
-          <a:prstGeom prst="rect">
+          </a:p>
+        </p:txBody>
+      </p:sp>
+      <p:sp>
+        <p:nvSpPr>
+          <p:cNvPr id="3" name="Oval 2"/>
+          <p:cNvSpPr/>
+          <p:nvPr/>
+        </p:nvSpPr>
+        <p:spPr>
+          <a:xfrm>
+            <a:off x="11064240" y="5852160"/>
+            <a:ext cx="1737360" cy="1737360"/>
+          </a:xfrm>
+          <a:prstGeom prst="ellipse">
             <a:avLst/>
           </a:prstGeom>
-          <a:noFill/>
-        </p:spPr>
-        <p:txBody>
-          <a:bodyPr wrap="square" anchor="t">
-            <a:spAutoFit/>
-          </a:bodyPr>
-          <a:lstStyle/>
-          <a:p>
-            <a:pPr algn="l"/>
-            <a:r>
-              <a:rPr sz="2700" b="1" i="0">
-                <a:solidFill>
-                  <a:srgbClr val="201F33"/>
-                </a:solidFill>
-                <a:latin typeface="Cambria"/>
-              </a:rPr>
-              <a:t>Folio and Portfolio Presentation</a:t>
-            </a:r>
-          </a:p>
-        </p:txBody>
-      </p:sp>
-      <p:sp>
-        <p:nvSpPr>
-          <p:cNvPr id="4" name="Rounded Rectangle 3"/>
-          <p:cNvSpPr/>
-          <p:nvPr/>
-        </p:nvSpPr>
-        <p:spPr>
-          <a:xfrm>
-            <a:off x="685800" y="1874519"/>
-            <a:ext cx="10607040" cy="4526280"/>
-          </a:xfrm>
-          <a:prstGeom prst="roundRect">
-            <a:avLst>
-              <a:gd name="adj" fmla="val 6000"/>
-            </a:avLst>
-          </a:prstGeom>
-          <a:solidFill>
-            <a:srgbClr val="E9E9EC"/>
+          <a:solidFill>
+            <a:srgbClr val="B06C8B"/>
           </a:solidFill>
           <a:ln>
             <a:noFill/>
@@ -7181,7 +7341,253 @@
           </a:fontRef>
         </p:style>
         <p:txBody>
-          <a:bodyPr rtlCol="0" anchor="ctr" lIns="330200" rIns="330200" tIns="254000" bIns="254000" wrap="square"/>
+          <a:bodyPr rtlCol="0" anchor="ctr"/>
+          <a:lstStyle/>
+          <a:p>
+            <a:pPr algn="ctr"/>
+          </a:p>
+        </p:txBody>
+      </p:sp>
+      <p:sp>
+        <p:nvSpPr>
+          <p:cNvPr id="4" name="Rounded Rectangle 3"/>
+          <p:cNvSpPr/>
+          <p:nvPr/>
+        </p:nvSpPr>
+        <p:spPr>
+          <a:xfrm>
+            <a:off x="685800" y="457200"/>
+            <a:ext cx="1033271" cy="502920"/>
+          </a:xfrm>
+          <a:prstGeom prst="roundRect">
+            <a:avLst>
+              <a:gd name="adj" fmla="val 50000"/>
+            </a:avLst>
+          </a:prstGeom>
+          <a:solidFill>
+            <a:srgbClr val="FFFFFF"/>
+          </a:solidFill>
+          <a:ln>
+            <a:noFill/>
+          </a:ln>
+          <a:effectLst/>
+        </p:spPr>
+        <p:style>
+          <a:lnRef idx="1">
+            <a:schemeClr val="accent1"/>
+          </a:lnRef>
+          <a:fillRef idx="3">
+            <a:schemeClr val="accent1"/>
+          </a:fillRef>
+          <a:effectRef idx="2">
+            <a:schemeClr val="accent1"/>
+          </a:effectRef>
+          <a:fontRef idx="minor">
+            <a:schemeClr val="lt1"/>
+          </a:fontRef>
+        </p:style>
+        <p:txBody>
+          <a:bodyPr rtlCol="0" anchor="ctr"/>
+          <a:lstStyle/>
+          <a:p>
+            <a:pPr algn="ctr"/>
+            <a:r>
+              <a:rPr b="1" sz="1400">
+                <a:solidFill>
+                  <a:srgbClr val="824F66"/>
+                </a:solidFill>
+                <a:latin typeface="Calibri"/>
+              </a:rPr>
+              <a:t>QUIZ</a:t>
+            </a:r>
+          </a:p>
+        </p:txBody>
+      </p:sp>
+      <p:sp>
+        <p:nvSpPr>
+          <p:cNvPr id="5" name="TextBox 4"/>
+          <p:cNvSpPr txBox="1"/>
+          <p:nvPr/>
+        </p:nvSpPr>
+        <p:spPr>
+          <a:xfrm>
+            <a:off x="685800" y="1143000"/>
+            <a:ext cx="10607040" cy="914400"/>
+          </a:xfrm>
+          <a:prstGeom prst="rect">
+            <a:avLst/>
+          </a:prstGeom>
+          <a:noFill/>
+        </p:spPr>
+        <p:txBody>
+          <a:bodyPr wrap="square" anchor="t">
+            <a:spAutoFit/>
+          </a:bodyPr>
+          <a:lstStyle/>
+          <a:p>
+            <a:pPr algn="l"/>
+            <a:r>
+              <a:rPr sz="3000" b="1" i="0">
+                <a:solidFill>
+                  <a:srgbClr val="FFFFFF"/>
+                </a:solidFill>
+                <a:latin typeface="Cambria"/>
+              </a:rPr>
+              <a:t>Command Word Countdown</a:t>
+            </a:r>
+          </a:p>
+        </p:txBody>
+      </p:sp>
+      <p:sp>
+        <p:nvSpPr>
+          <p:cNvPr id="6" name="Rounded Rectangle 5"/>
+          <p:cNvSpPr/>
+          <p:nvPr/>
+        </p:nvSpPr>
+        <p:spPr>
+          <a:xfrm>
+            <a:off x="685800" y="2148840"/>
+            <a:ext cx="960120" cy="411480"/>
+          </a:xfrm>
+          <a:prstGeom prst="roundRect">
+            <a:avLst>
+              <a:gd name="adj" fmla="val 50000"/>
+            </a:avLst>
+          </a:prstGeom>
+          <a:solidFill>
+            <a:srgbClr val="965C76"/>
+          </a:solidFill>
+          <a:ln>
+            <a:noFill/>
+          </a:ln>
+          <a:effectLst/>
+        </p:spPr>
+        <p:style>
+          <a:lnRef idx="1">
+            <a:schemeClr val="accent1"/>
+          </a:lnRef>
+          <a:fillRef idx="3">
+            <a:schemeClr val="accent1"/>
+          </a:fillRef>
+          <a:effectRef idx="2">
+            <a:schemeClr val="accent1"/>
+          </a:effectRef>
+          <a:fontRef idx="minor">
+            <a:schemeClr val="lt1"/>
+          </a:fontRef>
+        </p:style>
+        <p:txBody>
+          <a:bodyPr rtlCol="0" anchor="ctr" wrap="none" lIns="50800" rIns="50800"/>
+          <a:lstStyle/>
+          <a:p>
+            <a:pPr algn="ctr"/>
+            <a:r>
+              <a:rPr sz="1050" b="1">
+                <a:solidFill>
+                  <a:srgbClr val="FFFFFF"/>
+                </a:solidFill>
+                <a:latin typeface="Calibri"/>
+              </a:rPr>
+              <a:t>5 MIN</a:t>
+            </a:r>
+          </a:p>
+        </p:txBody>
+      </p:sp>
+      <p:sp>
+        <p:nvSpPr>
+          <p:cNvPr id="7" name="Rounded Rectangle 6"/>
+          <p:cNvSpPr/>
+          <p:nvPr/>
+        </p:nvSpPr>
+        <p:spPr>
+          <a:xfrm>
+            <a:off x="1783080" y="2148840"/>
+            <a:ext cx="1563624" cy="411480"/>
+          </a:xfrm>
+          <a:prstGeom prst="roundRect">
+            <a:avLst>
+              <a:gd name="adj" fmla="val 50000"/>
+            </a:avLst>
+          </a:prstGeom>
+          <a:solidFill>
+            <a:srgbClr val="965C76"/>
+          </a:solidFill>
+          <a:ln>
+            <a:noFill/>
+          </a:ln>
+          <a:effectLst/>
+        </p:spPr>
+        <p:style>
+          <a:lnRef idx="1">
+            <a:schemeClr val="accent1"/>
+          </a:lnRef>
+          <a:fillRef idx="3">
+            <a:schemeClr val="accent1"/>
+          </a:fillRef>
+          <a:effectRef idx="2">
+            <a:schemeClr val="accent1"/>
+          </a:effectRef>
+          <a:fontRef idx="minor">
+            <a:schemeClr val="lt1"/>
+          </a:fontRef>
+        </p:style>
+        <p:txBody>
+          <a:bodyPr rtlCol="0" anchor="ctr" wrap="none" lIns="50800" rIns="50800"/>
+          <a:lstStyle/>
+          <a:p>
+            <a:pPr algn="ctr"/>
+            <a:r>
+              <a:rPr sz="1050" b="1">
+                <a:solidFill>
+                  <a:srgbClr val="FFFFFF"/>
+                </a:solidFill>
+                <a:latin typeface="Calibri"/>
+              </a:rPr>
+              <a:t>WHOLE CLASS</a:t>
+            </a:r>
+          </a:p>
+        </p:txBody>
+      </p:sp>
+      <p:sp>
+        <p:nvSpPr>
+          <p:cNvPr id="8" name="Rounded Rectangle 7"/>
+          <p:cNvSpPr/>
+          <p:nvPr/>
+        </p:nvSpPr>
+        <p:spPr>
+          <a:xfrm>
+            <a:off x="685800" y="2788920"/>
+            <a:ext cx="10607040" cy="3246120"/>
+          </a:xfrm>
+          <a:prstGeom prst="roundRect">
+            <a:avLst>
+              <a:gd name="adj" fmla="val 8000"/>
+            </a:avLst>
+          </a:prstGeom>
+          <a:solidFill>
+            <a:srgbClr val="FFFFFF"/>
+          </a:solidFill>
+          <a:ln>
+            <a:noFill/>
+          </a:ln>
+          <a:effectLst/>
+        </p:spPr>
+        <p:style>
+          <a:lnRef idx="1">
+            <a:schemeClr val="accent1"/>
+          </a:lnRef>
+          <a:fillRef idx="3">
+            <a:schemeClr val="accent1"/>
+          </a:fillRef>
+          <a:effectRef idx="2">
+            <a:schemeClr val="accent1"/>
+          </a:effectRef>
+          <a:fontRef idx="minor">
+            <a:schemeClr val="lt1"/>
+          </a:fontRef>
+        </p:style>
+        <p:txBody>
+          <a:bodyPr rtlCol="0" anchor="ctr" lIns="304800" rIns="304800" tIns="203200" bIns="203200" wrap="square"/>
           <a:lstStyle/>
           <a:p>
             <a:pPr algn="ctr" indent="-203200" marL="203200">
@@ -7189,20 +7595,20 @@
                 <a:spcPts val="900"/>
               </a:spcAft>
               <a:buClr>
-                <a:srgbClr val="2B2A4A"/>
+                <a:srgbClr val="C97B9E"/>
               </a:buClr>
               <a:buSzPct val="90000"/>
               <a:buFont typeface="Arial"/>
               <a:buChar char="●"/>
             </a:pPr>
             <a:r>
-              <a:rPr sz="1500" b="1" i="0">
-                <a:solidFill>
-                  <a:srgbClr val="24233E"/>
-                </a:solidFill>
-                <a:latin typeface="Calibri"/>
-              </a:rPr>
-              <a:t>Beyond the VCE folio</a:t>
+              <a:rPr sz="1450" b="0" i="0">
+                <a:solidFill>
+                  <a:srgbClr val="201F33"/>
+                </a:solidFill>
+                <a:latin typeface="Calibri"/>
+              </a:rPr>
+              <a:t>Rapid-fire definitions: identify, describe, explain, analyse, evaluate.</a:t>
             </a:r>
           </a:p>
           <a:p>
@@ -7211,109 +7617,56 @@
                 <a:spcPts val="900"/>
               </a:spcAft>
               <a:buClr>
-                <a:srgbClr val="2B2A4A"/>
+                <a:srgbClr val="C97B9E"/>
               </a:buClr>
               <a:buSzPct val="90000"/>
               <a:buFont typeface="Arial"/>
-              <a:buChar char="–"/>
+              <a:buChar char="●"/>
             </a:pPr>
             <a:r>
-              <a:rPr sz="1350" b="0" i="0">
-                <a:solidFill>
-                  <a:srgbClr val="201F33"/>
-                </a:solidFill>
-                <a:latin typeface="Calibri"/>
-              </a:rPr>
-              <a:t>Presentation boards — large-format physical boards used for exhibitions and client pitches</a:t>
-            </a:r>
-          </a:p>
-          <a:p>
-            <a:pPr indent="-203200" marL="203200">
-              <a:spcAft>
-                <a:spcPts val="900"/>
-              </a:spcAft>
-              <a:buClr>
-                <a:srgbClr val="2B2A4A"/>
-              </a:buClr>
-              <a:buSzPct val="90000"/>
-              <a:buFont typeface="Arial"/>
-              <a:buChar char="–"/>
-            </a:pPr>
-            <a:r>
-              <a:rPr sz="1350" b="0" i="0">
-                <a:solidFill>
-                  <a:srgbClr val="201F33"/>
-                </a:solidFill>
-                <a:latin typeface="Calibri"/>
-              </a:rPr>
-              <a:t>Digital portfolios — platforms such as Behance or a personal website for showcasing work beyond school</a:t>
-            </a:r>
-          </a:p>
-          <a:p>
-            <a:pPr indent="-203200" marL="203200">
-              <a:spcAft>
-                <a:spcPts val="900"/>
-              </a:spcAft>
-              <a:buClr>
-                <a:srgbClr val="2B2A4A"/>
-              </a:buClr>
-              <a:buSzPct val="90000"/>
-              <a:buFont typeface="Arial"/>
-              <a:buChar char="–"/>
-            </a:pPr>
-            <a:r>
-              <a:rPr sz="1350" b="0" i="0">
-                <a:solidFill>
-                  <a:srgbClr val="201F33"/>
-                </a:solidFill>
-                <a:latin typeface="Calibri"/>
-              </a:rPr>
-              <a:t>Consistent visual presentation (typography, layout, colour) across folio pages signals professionalism</a:t>
-            </a:r>
-          </a:p>
-        </p:txBody>
-      </p:sp>
-      <p:sp>
-        <p:nvSpPr>
-          <p:cNvPr id="5" name="Oval 4"/>
-          <p:cNvSpPr/>
-          <p:nvPr/>
-        </p:nvSpPr>
-        <p:spPr>
-          <a:xfrm>
-            <a:off x="10881360" y="5943600"/>
-            <a:ext cx="1005840" cy="1005840"/>
-          </a:xfrm>
-          <a:prstGeom prst="ellipse">
+              <a:rPr sz="1450" b="0" i="0">
+                <a:solidFill>
+                  <a:srgbClr val="201F33"/>
+                </a:solidFill>
+                <a:latin typeface="Calibri"/>
+              </a:rPr>
+              <a:t>Teacher calls a command word; first correct definition wins the point.</a:t>
+            </a:r>
+          </a:p>
+        </p:txBody>
+      </p:sp>
+      <p:sp>
+        <p:nvSpPr>
+          <p:cNvPr id="9" name="TextBox 8"/>
+          <p:cNvSpPr txBox="1"/>
+          <p:nvPr/>
+        </p:nvSpPr>
+        <p:spPr>
+          <a:xfrm>
+            <a:off x="685800" y="6217920"/>
+            <a:ext cx="10607040" cy="502920"/>
+          </a:xfrm>
+          <a:prstGeom prst="rect">
             <a:avLst/>
           </a:prstGeom>
-          <a:solidFill>
-            <a:srgbClr val="E6C3D3"/>
-          </a:solidFill>
-          <a:ln>
-            <a:noFill/>
-          </a:ln>
-          <a:effectLst/>
-        </p:spPr>
-        <p:style>
-          <a:lnRef idx="1">
-            <a:schemeClr val="accent1"/>
-          </a:lnRef>
-          <a:fillRef idx="3">
-            <a:schemeClr val="accent1"/>
-          </a:fillRef>
-          <a:effectRef idx="2">
-            <a:schemeClr val="accent1"/>
-          </a:effectRef>
-          <a:fontRef idx="minor">
-            <a:schemeClr val="lt1"/>
-          </a:fontRef>
-        </p:style>
-        <p:txBody>
-          <a:bodyPr rtlCol="0" anchor="ctr"/>
-          <a:lstStyle/>
-          <a:p>
-            <a:pPr algn="ctr"/>
+          <a:noFill/>
+        </p:spPr>
+        <p:txBody>
+          <a:bodyPr wrap="square" anchor="t">
+            <a:spAutoFit/>
+          </a:bodyPr>
+          <a:lstStyle/>
+          <a:p>
+            <a:pPr algn="l"/>
+            <a:r>
+              <a:rPr sz="1250" b="0" i="1">
+                <a:solidFill>
+                  <a:srgbClr val="FFFFFF"/>
+                </a:solidFill>
+                <a:latin typeface="Calibri"/>
+              </a:rPr>
+              <a:t>Debrief: Which command word is most often confused with another?</a:t>
+            </a:r>
           </a:p>
         </p:txBody>
       </p:sp>
@@ -7616,7 +7969,7 @@
     <p:bg>
       <p:bgPr>
         <a:solidFill>
-          <a:srgbClr val="F8F6FB"/>
+          <a:srgbClr val="D9A441"/>
         </a:solidFill>
         <a:effectLst/>
       </p:bgPr>
@@ -7630,22 +7983,20 @@
       <p:grpSpPr/>
       <p:sp>
         <p:nvSpPr>
-          <p:cNvPr id="2" name="Rounded Rectangle 1"/>
+          <p:cNvPr id="2" name="Oval 1"/>
           <p:cNvSpPr/>
           <p:nvPr/>
         </p:nvSpPr>
         <p:spPr>
           <a:xfrm>
-            <a:off x="685800" y="502920"/>
-            <a:ext cx="3291840" cy="457200"/>
-          </a:xfrm>
-          <a:prstGeom prst="roundRect">
-            <a:avLst>
-              <a:gd name="adj" fmla="val 50000"/>
-            </a:avLst>
-          </a:prstGeom>
-          <a:solidFill>
-            <a:srgbClr val="2B2A4A"/>
+            <a:off x="9692640" y="-914400"/>
+            <a:ext cx="2926080" cy="2926080"/>
+          </a:xfrm>
+          <a:prstGeom prst="ellipse">
+            <a:avLst/>
+          </a:prstGeom>
+          <a:solidFill>
+            <a:srgbClr val="BE9039"/>
           </a:solidFill>
           <a:ln>
             <a:noFill/>
@@ -7667,75 +8018,29 @@
           </a:fontRef>
         </p:style>
         <p:txBody>
-          <a:bodyPr rtlCol="0" anchor="ctr" wrap="none" lIns="50800" rIns="50800"/>
+          <a:bodyPr rtlCol="0" anchor="ctr"/>
           <a:lstStyle/>
           <a:p>
             <a:pPr algn="ctr"/>
-            <a:r>
-              <a:rPr sz="1100" b="1">
-                <a:solidFill>
-                  <a:srgbClr val="FFFFFF"/>
-                </a:solidFill>
-                <a:latin typeface="Calibri"/>
-              </a:rPr>
-              <a:t>EXTENDED KNOWLEDGE</a:t>
-            </a:r>
-          </a:p>
-        </p:txBody>
-      </p:sp>
-      <p:sp>
-        <p:nvSpPr>
-          <p:cNvPr id="3" name="TextBox 2"/>
-          <p:cNvSpPr txBox="1"/>
-          <p:nvPr/>
-        </p:nvSpPr>
-        <p:spPr>
-          <a:xfrm>
-            <a:off x="685800" y="1051560"/>
-            <a:ext cx="10607040" cy="822960"/>
-          </a:xfrm>
-          <a:prstGeom prst="rect">
+          </a:p>
+        </p:txBody>
+      </p:sp>
+      <p:sp>
+        <p:nvSpPr>
+          <p:cNvPr id="3" name="Oval 2"/>
+          <p:cNvSpPr/>
+          <p:nvPr/>
+        </p:nvSpPr>
+        <p:spPr>
+          <a:xfrm>
+            <a:off x="-914400" y="4937760"/>
+            <a:ext cx="2377440" cy="2377440"/>
+          </a:xfrm>
+          <a:prstGeom prst="ellipse">
             <a:avLst/>
           </a:prstGeom>
-          <a:noFill/>
-        </p:spPr>
-        <p:txBody>
-          <a:bodyPr wrap="square" anchor="t">
-            <a:spAutoFit/>
-          </a:bodyPr>
-          <a:lstStyle/>
-          <a:p>
-            <a:pPr algn="l"/>
-            <a:r>
-              <a:rPr sz="2700" b="1" i="0">
-                <a:solidFill>
-                  <a:srgbClr val="201F33"/>
-                </a:solidFill>
-                <a:latin typeface="Cambria"/>
-              </a:rPr>
-              <a:t>Evaluation Frameworks Beyond VCAA</a:t>
-            </a:r>
-          </a:p>
-        </p:txBody>
-      </p:sp>
-      <p:sp>
-        <p:nvSpPr>
-          <p:cNvPr id="4" name="Rounded Rectangle 3"/>
-          <p:cNvSpPr/>
-          <p:nvPr/>
-        </p:nvSpPr>
-        <p:spPr>
-          <a:xfrm>
-            <a:off x="685800" y="1874519"/>
-            <a:ext cx="10607040" cy="4526280"/>
-          </a:xfrm>
-          <a:prstGeom prst="roundRect">
-            <a:avLst>
-              <a:gd name="adj" fmla="val 6000"/>
-            </a:avLst>
-          </a:prstGeom>
-          <a:solidFill>
-            <a:srgbClr val="E9E9EC"/>
+          <a:solidFill>
+            <a:srgbClr val="BE9039"/>
           </a:solidFill>
           <a:ln>
             <a:noFill/>
@@ -7757,114 +8062,31 @@
           </a:fontRef>
         </p:style>
         <p:txBody>
-          <a:bodyPr rtlCol="0" anchor="ctr" lIns="330200" rIns="330200" tIns="254000" bIns="254000" wrap="square"/>
-          <a:lstStyle/>
-          <a:p>
-            <a:pPr algn="ctr" indent="-203200" marL="203200">
-              <a:spcAft>
-                <a:spcPts val="900"/>
-              </a:spcAft>
-              <a:buClr>
-                <a:srgbClr val="2B2A4A"/>
-              </a:buClr>
-              <a:buSzPct val="90000"/>
-              <a:buFont typeface="Arial"/>
-              <a:buChar char="●"/>
-            </a:pPr>
-            <a:r>
-              <a:rPr sz="1500" b="1" i="0">
-                <a:solidFill>
-                  <a:srgbClr val="24233E"/>
-                </a:solidFill>
-                <a:latin typeface="Calibri"/>
-              </a:rPr>
-              <a:t>Methods used in industry</a:t>
-            </a:r>
-          </a:p>
-          <a:p>
-            <a:pPr indent="-203200" marL="203200">
-              <a:spcAft>
-                <a:spcPts val="900"/>
-              </a:spcAft>
-              <a:buClr>
-                <a:srgbClr val="2B2A4A"/>
-              </a:buClr>
-              <a:buSzPct val="90000"/>
-              <a:buFont typeface="Arial"/>
-              <a:buChar char="–"/>
-            </a:pPr>
-            <a:r>
-              <a:rPr sz="1350" b="0" i="0">
-                <a:solidFill>
-                  <a:srgbClr val="201F33"/>
-                </a:solidFill>
-                <a:latin typeface="Calibri"/>
-              </a:rPr>
-              <a:t>Heuristic evaluation — assessing a design against established usability principles</a:t>
-            </a:r>
-          </a:p>
-          <a:p>
-            <a:pPr indent="-203200" marL="203200">
-              <a:spcAft>
-                <a:spcPts val="900"/>
-              </a:spcAft>
-              <a:buClr>
-                <a:srgbClr val="2B2A4A"/>
-              </a:buClr>
-              <a:buSzPct val="90000"/>
-              <a:buFont typeface="Arial"/>
-              <a:buChar char="–"/>
-            </a:pPr>
-            <a:r>
-              <a:rPr sz="1350" b="0" i="0">
-                <a:solidFill>
-                  <a:srgbClr val="201F33"/>
-                </a:solidFill>
-                <a:latin typeface="Calibri"/>
-              </a:rPr>
-              <a:t>A/B testing — comparing two versions of a design with real users to see which performs better</a:t>
-            </a:r>
-          </a:p>
-          <a:p>
-            <a:pPr indent="-203200" marL="203200">
-              <a:spcAft>
-                <a:spcPts val="900"/>
-              </a:spcAft>
-              <a:buClr>
-                <a:srgbClr val="2B2A4A"/>
-              </a:buClr>
-              <a:buSzPct val="90000"/>
-              <a:buFont typeface="Arial"/>
-              <a:buChar char="–"/>
-            </a:pPr>
-            <a:r>
-              <a:rPr sz="1350" b="0" i="0">
-                <a:solidFill>
-                  <a:srgbClr val="201F33"/>
-                </a:solidFill>
-                <a:latin typeface="Calibri"/>
-              </a:rPr>
-              <a:t>'I like / I wish / What if' — a simple, structured feedback framework for peer critique</a:t>
-            </a:r>
-          </a:p>
-        </p:txBody>
-      </p:sp>
-      <p:sp>
-        <p:nvSpPr>
-          <p:cNvPr id="5" name="Oval 4"/>
+          <a:bodyPr rtlCol="0" anchor="ctr"/>
+          <a:lstStyle/>
+          <a:p>
+            <a:pPr algn="ctr"/>
+          </a:p>
+        </p:txBody>
+      </p:sp>
+      <p:sp>
+        <p:nvSpPr>
+          <p:cNvPr id="4" name="Rounded Rectangle 3"/>
           <p:cNvSpPr/>
           <p:nvPr/>
         </p:nvSpPr>
         <p:spPr>
           <a:xfrm>
-            <a:off x="10881360" y="5943600"/>
-            <a:ext cx="1005840" cy="1005840"/>
-          </a:xfrm>
-          <a:prstGeom prst="ellipse">
-            <a:avLst/>
-          </a:prstGeom>
-          <a:solidFill>
-            <a:srgbClr val="E6C3D3"/>
+            <a:off x="822960" y="1051560"/>
+            <a:ext cx="1188720" cy="502920"/>
+          </a:xfrm>
+          <a:prstGeom prst="roundRect">
+            <a:avLst>
+              <a:gd name="adj" fmla="val 50000"/>
+            </a:avLst>
+          </a:prstGeom>
+          <a:solidFill>
+            <a:srgbClr val="FFFFFF"/>
           </a:solidFill>
           <a:ln>
             <a:noFill/>
@@ -7886,10 +8108,135 @@
           </a:fontRef>
         </p:style>
         <p:txBody>
+          <a:bodyPr rtlCol="0" anchor="ctr" wrap="none" lIns="50800" rIns="50800"/>
+          <a:lstStyle/>
+          <a:p>
+            <a:pPr algn="ctr"/>
+            <a:r>
+              <a:rPr sz="1400" b="1">
+                <a:solidFill>
+                  <a:srgbClr val="AD8334"/>
+                </a:solidFill>
+                <a:latin typeface="Calibri"/>
+              </a:rPr>
+              <a:t>03</a:t>
+            </a:r>
+          </a:p>
+        </p:txBody>
+      </p:sp>
+      <p:sp>
+        <p:nvSpPr>
+          <p:cNvPr id="5" name="Rounded Rectangle 4"/>
+          <p:cNvSpPr/>
+          <p:nvPr/>
+        </p:nvSpPr>
+        <p:spPr>
+          <a:xfrm>
+            <a:off x="822960" y="2011680"/>
+            <a:ext cx="10515600" cy="2834640"/>
+          </a:xfrm>
+          <a:prstGeom prst="roundRect">
+            <a:avLst>
+              <a:gd name="adj" fmla="val 18000"/>
+            </a:avLst>
+          </a:prstGeom>
+          <a:solidFill>
+            <a:srgbClr val="FFFFFF"/>
+          </a:solidFill>
+          <a:ln>
+            <a:noFill/>
+          </a:ln>
+          <a:effectLst/>
+        </p:spPr>
+        <p:style>
+          <a:lnRef idx="1">
+            <a:schemeClr val="accent1"/>
+          </a:lnRef>
+          <a:fillRef idx="3">
+            <a:schemeClr val="accent1"/>
+          </a:fillRef>
+          <a:effectRef idx="2">
+            <a:schemeClr val="accent1"/>
+          </a:effectRef>
+          <a:fontRef idx="minor">
+            <a:schemeClr val="lt1"/>
+          </a:fontRef>
+        </p:style>
+        <p:txBody>
           <a:bodyPr rtlCol="0" anchor="ctr"/>
           <a:lstStyle/>
           <a:p>
             <a:pPr algn="ctr"/>
+          </a:p>
+        </p:txBody>
+      </p:sp>
+      <p:sp>
+        <p:nvSpPr>
+          <p:cNvPr id="6" name="TextBox 5"/>
+          <p:cNvSpPr txBox="1"/>
+          <p:nvPr/>
+        </p:nvSpPr>
+        <p:spPr>
+          <a:xfrm>
+            <a:off x="1280160" y="2697480"/>
+            <a:ext cx="9601200" cy="1097280"/>
+          </a:xfrm>
+          <a:prstGeom prst="rect">
+            <a:avLst/>
+          </a:prstGeom>
+          <a:noFill/>
+        </p:spPr>
+        <p:txBody>
+          <a:bodyPr wrap="square" anchor="t">
+            <a:spAutoFit/>
+          </a:bodyPr>
+          <a:lstStyle/>
+          <a:p>
+            <a:pPr algn="l"/>
+            <a:r>
+              <a:rPr sz="3400" b="1" i="0">
+                <a:solidFill>
+                  <a:srgbClr val="B88B37"/>
+                </a:solidFill>
+                <a:latin typeface="Cambria"/>
+              </a:rPr>
+              <a:t>Extended Knowledge</a:t>
+            </a:r>
+          </a:p>
+        </p:txBody>
+      </p:sp>
+      <p:sp>
+        <p:nvSpPr>
+          <p:cNvPr id="7" name="TextBox 6"/>
+          <p:cNvSpPr txBox="1"/>
+          <p:nvPr/>
+        </p:nvSpPr>
+        <p:spPr>
+          <a:xfrm>
+            <a:off x="1280160" y="3657600"/>
+            <a:ext cx="9601200" cy="548640"/>
+          </a:xfrm>
+          <a:prstGeom prst="rect">
+            <a:avLst/>
+          </a:prstGeom>
+          <a:noFill/>
+        </p:spPr>
+        <p:txBody>
+          <a:bodyPr wrap="square" anchor="t">
+            <a:spAutoFit/>
+          </a:bodyPr>
+          <a:lstStyle/>
+          <a:p>
+            <a:pPr algn="l"/>
+            <a:r>
+              <a:rPr sz="1500" b="0" i="0">
+                <a:solidFill>
+                  <a:srgbClr val="6B6B6B"/>
+                </a:solidFill>
+                <a:latin typeface="Calibri"/>
+              </a:rPr>
+              <a:t>Beyond the study design</a:t>
+            </a:r>
           </a:p>
         </p:txBody>
       </p:sp>
@@ -8004,7 +8351,7 @@
                 </a:solidFill>
                 <a:latin typeface="Cambria"/>
               </a:rPr>
-              <a:t>Career Pathways in Design</a:t>
+              <a:t>Materials and Manufacturing Processes</a:t>
             </a:r>
           </a:p>
         </p:txBody>
@@ -8069,7 +8416,7 @@
                 </a:solidFill>
                 <a:latin typeface="Calibri"/>
               </a:rPr>
-              <a:t>Where VCD can lead</a:t>
+              <a:t>Common processes worth knowing</a:t>
             </a:r>
           </a:p>
           <a:p>
@@ -8091,7 +8438,7 @@
                 </a:solidFill>
                 <a:latin typeface="Calibri"/>
               </a:rPr>
-              <a:t>University pathways — Bachelor of Design/Communication Design/Industrial Design programs</a:t>
+              <a:t>Injection moulding — mass production of plastic products via molten plastic injected into a mould</a:t>
             </a:r>
           </a:p>
           <a:p>
@@ -8113,7 +8460,7 @@
                 </a:solidFill>
                 <a:latin typeface="Calibri"/>
               </a:rPr>
-              <a:t>TAFE and apprenticeship pathways into trades connected to design (signage, cabinetmaking, print)</a:t>
+              <a:t>Offset vs digital printing — offset suits large runs at low unit cost; digital suits short runs and personalisation</a:t>
             </a:r>
           </a:p>
           <a:p>
@@ -8135,7 +8482,29 @@
                 </a:solidFill>
                 <a:latin typeface="Calibri"/>
               </a:rPr>
-              <a:t>Industry roles — graphic designer, UX/UI designer, industrial designer, exhibition designer, art director</a:t>
+              <a:t>Laser cutting — precise cutting/engraving of sheet materials, common in packaging prototyping</a:t>
+            </a:r>
+          </a:p>
+          <a:p>
+            <a:pPr indent="-203200" marL="203200">
+              <a:spcAft>
+                <a:spcPts val="900"/>
+              </a:spcAft>
+              <a:buClr>
+                <a:srgbClr val="2B2A4A"/>
+              </a:buClr>
+              <a:buSzPct val="90000"/>
+              <a:buFont typeface="Arial"/>
+              <a:buChar char="–"/>
+            </a:pPr>
+            <a:r>
+              <a:rPr sz="1350" b="0" i="0">
+                <a:solidFill>
+                  <a:srgbClr val="201F33"/>
+                </a:solidFill>
+                <a:latin typeface="Calibri"/>
+              </a:rPr>
+              <a:t>3D printing / additive manufacturing — building objects layer by layer from a digital model</a:t>
             </a:r>
           </a:p>
           <a:p>
@@ -8157,7 +8526,7 @@
                 </a:solidFill>
                 <a:latin typeface="Calibri"/>
               </a:rPr>
-              <a:t>Tertiary folio requirements</a:t>
+              <a:t>Sustainable material choices</a:t>
             </a:r>
           </a:p>
           <a:p>
@@ -8179,7 +8548,7 @@
                 </a:solidFill>
                 <a:latin typeface="Calibri"/>
               </a:rPr>
-              <a:t>Many design degrees require a submitted folio as part of entry — the analytical and process-documentation habits built in VCE VCD directly prepare students for this.</a:t>
+              <a:t>Recycled and recyclable substrates, biodegradable plastics, FSC-certified paper stock, and designing for minimal material use are all increasingly expected in professional practice and make for strong evaluation discussion points.</a:t>
             </a:r>
           </a:p>
         </p:txBody>
@@ -8339,7 +8708,7 @@
                 </a:solidFill>
                 <a:latin typeface="Cambria"/>
               </a:rPr>
-              <a:t>Exam Preparation Strategies</a:t>
+              <a:t>Advanced Rendering and Presentation Techniques</a:t>
             </a:r>
           </a:p>
         </p:txBody>
@@ -8404,7 +8773,7 @@
                 </a:solidFill>
                 <a:latin typeface="Calibri"/>
               </a:rPr>
-              <a:t>Revising effectively</a:t>
+              <a:t>Manual rendering</a:t>
             </a:r>
           </a:p>
           <a:p>
@@ -8426,7 +8795,7 @@
                 </a:solidFill>
                 <a:latin typeface="Calibri"/>
               </a:rPr>
-              <a:t>Revisit the command word glossary (identify, describe, explain, analyse, discuss, evaluate)</a:t>
+              <a:t>Layering marker strokes from light to dark builds convincing tone and form</a:t>
             </a:r>
           </a:p>
           <a:p>
@@ -8448,7 +8817,7 @@
                 </a:solidFill>
                 <a:latin typeface="Calibri"/>
               </a:rPr>
-              <a:t>Practise full past exam papers under timed conditions, not just isolated questions</a:t>
+              <a:t>A consistent light source direction across a rendering keeps shading believable</a:t>
             </a:r>
           </a:p>
           <a:p>
@@ -8470,7 +8839,29 @@
                 </a:solidFill>
                 <a:latin typeface="Calibri"/>
               </a:rPr>
-              <a:t>Review Unit 3 &amp; 4 key knowledge systematically rather than only re-reading notes passively</a:t>
+              <a:t>Photorealistic vs stylised rendering — choose the approach that best suits the brief and audience</a:t>
+            </a:r>
+          </a:p>
+          <a:p>
+            <a:pPr indent="-203200" marL="203200">
+              <a:spcAft>
+                <a:spcPts val="900"/>
+              </a:spcAft>
+              <a:buClr>
+                <a:srgbClr val="2B2A4A"/>
+              </a:buClr>
+              <a:buSzPct val="90000"/>
+              <a:buFont typeface="Arial"/>
+              <a:buChar char="●"/>
+            </a:pPr>
+            <a:r>
+              <a:rPr sz="1500" b="1" i="0">
+                <a:solidFill>
+                  <a:srgbClr val="24233E"/>
+                </a:solidFill>
+                <a:latin typeface="Calibri"/>
+              </a:rPr>
+              <a:t>Digital rendering</a:t>
             </a:r>
           </a:p>
           <a:p>
@@ -8492,7 +8883,7 @@
                 </a:solidFill>
                 <a:latin typeface="Calibri"/>
               </a:rPr>
-              <a:t>Time-box each exam question during practice so pacing becomes automatic</a:t>
+              <a:t>Basic familiarity with digital mockup techniques (placing a design onto a photographed product/environment) can significantly lift the perceived professionalism of a final presentation.</a:t>
             </a:r>
           </a:p>
         </p:txBody>
@@ -8555,7 +8946,7 @@
     <p:bg>
       <p:bgPr>
         <a:solidFill>
-          <a:srgbClr val="2B2A4A"/>
+          <a:srgbClr val="F8F6FB"/>
         </a:solidFill>
         <a:effectLst/>
       </p:bgPr>
@@ -8569,20 +8960,22 @@
       <p:grpSpPr/>
       <p:sp>
         <p:nvSpPr>
-          <p:cNvPr id="2" name="Oval 1"/>
+          <p:cNvPr id="2" name="Rounded Rectangle 1"/>
           <p:cNvSpPr/>
           <p:nvPr/>
         </p:nvSpPr>
         <p:spPr>
           <a:xfrm>
-            <a:off x="9692640" y="-914400"/>
-            <a:ext cx="2926080" cy="2926080"/>
-          </a:xfrm>
-          <a:prstGeom prst="ellipse">
-            <a:avLst/>
-          </a:prstGeom>
-          <a:solidFill>
-            <a:srgbClr val="252441"/>
+            <a:off x="685800" y="502920"/>
+            <a:ext cx="3291840" cy="457200"/>
+          </a:xfrm>
+          <a:prstGeom prst="roundRect">
+            <a:avLst>
+              <a:gd name="adj" fmla="val 50000"/>
+            </a:avLst>
+          </a:prstGeom>
+          <a:solidFill>
+            <a:srgbClr val="2B2A4A"/>
           </a:solidFill>
           <a:ln>
             <a:noFill/>
@@ -8604,29 +8997,75 @@
           </a:fontRef>
         </p:style>
         <p:txBody>
-          <a:bodyPr rtlCol="0" anchor="ctr"/>
+          <a:bodyPr rtlCol="0" anchor="ctr" wrap="none" lIns="50800" rIns="50800"/>
           <a:lstStyle/>
           <a:p>
             <a:pPr algn="ctr"/>
-          </a:p>
-        </p:txBody>
-      </p:sp>
-      <p:sp>
-        <p:nvSpPr>
-          <p:cNvPr id="3" name="Oval 2"/>
+            <a:r>
+              <a:rPr sz="1100" b="1">
+                <a:solidFill>
+                  <a:srgbClr val="FFFFFF"/>
+                </a:solidFill>
+                <a:latin typeface="Calibri"/>
+              </a:rPr>
+              <a:t>EXTENDED KNOWLEDGE</a:t>
+            </a:r>
+          </a:p>
+        </p:txBody>
+      </p:sp>
+      <p:sp>
+        <p:nvSpPr>
+          <p:cNvPr id="3" name="TextBox 2"/>
+          <p:cNvSpPr txBox="1"/>
+          <p:nvPr/>
+        </p:nvSpPr>
+        <p:spPr>
+          <a:xfrm>
+            <a:off x="685800" y="1051560"/>
+            <a:ext cx="10607040" cy="822960"/>
+          </a:xfrm>
+          <a:prstGeom prst="rect">
+            <a:avLst/>
+          </a:prstGeom>
+          <a:noFill/>
+        </p:spPr>
+        <p:txBody>
+          <a:bodyPr wrap="square" anchor="t">
+            <a:spAutoFit/>
+          </a:bodyPr>
+          <a:lstStyle/>
+          <a:p>
+            <a:pPr algn="l"/>
+            <a:r>
+              <a:rPr sz="2700" b="1" i="0">
+                <a:solidFill>
+                  <a:srgbClr val="201F33"/>
+                </a:solidFill>
+                <a:latin typeface="Cambria"/>
+              </a:rPr>
+              <a:t>Folio and Portfolio Presentation</a:t>
+            </a:r>
+          </a:p>
+        </p:txBody>
+      </p:sp>
+      <p:sp>
+        <p:nvSpPr>
+          <p:cNvPr id="4" name="Rounded Rectangle 3"/>
           <p:cNvSpPr/>
           <p:nvPr/>
         </p:nvSpPr>
         <p:spPr>
           <a:xfrm>
-            <a:off x="-914400" y="4937760"/>
-            <a:ext cx="2377440" cy="2377440"/>
-          </a:xfrm>
-          <a:prstGeom prst="ellipse">
-            <a:avLst/>
-          </a:prstGeom>
-          <a:solidFill>
-            <a:srgbClr val="252441"/>
+            <a:off x="685800" y="1874519"/>
+            <a:ext cx="10607040" cy="4526280"/>
+          </a:xfrm>
+          <a:prstGeom prst="roundRect">
+            <a:avLst>
+              <a:gd name="adj" fmla="val 6000"/>
+            </a:avLst>
+          </a:prstGeom>
+          <a:solidFill>
+            <a:srgbClr val="E9E9EC"/>
           </a:solidFill>
           <a:ln>
             <a:noFill/>
@@ -8648,31 +9087,114 @@
           </a:fontRef>
         </p:style>
         <p:txBody>
-          <a:bodyPr rtlCol="0" anchor="ctr"/>
-          <a:lstStyle/>
-          <a:p>
-            <a:pPr algn="ctr"/>
-          </a:p>
-        </p:txBody>
-      </p:sp>
-      <p:sp>
-        <p:nvSpPr>
-          <p:cNvPr id="4" name="Rounded Rectangle 3"/>
+          <a:bodyPr rtlCol="0" anchor="ctr" lIns="330200" rIns="330200" tIns="254000" bIns="254000" wrap="square"/>
+          <a:lstStyle/>
+          <a:p>
+            <a:pPr algn="ctr" indent="-203200" marL="203200">
+              <a:spcAft>
+                <a:spcPts val="900"/>
+              </a:spcAft>
+              <a:buClr>
+                <a:srgbClr val="2B2A4A"/>
+              </a:buClr>
+              <a:buSzPct val="90000"/>
+              <a:buFont typeface="Arial"/>
+              <a:buChar char="●"/>
+            </a:pPr>
+            <a:r>
+              <a:rPr sz="1500" b="1" i="0">
+                <a:solidFill>
+                  <a:srgbClr val="24233E"/>
+                </a:solidFill>
+                <a:latin typeface="Calibri"/>
+              </a:rPr>
+              <a:t>Beyond the VCE folio</a:t>
+            </a:r>
+          </a:p>
+          <a:p>
+            <a:pPr indent="-203200" marL="203200">
+              <a:spcAft>
+                <a:spcPts val="900"/>
+              </a:spcAft>
+              <a:buClr>
+                <a:srgbClr val="2B2A4A"/>
+              </a:buClr>
+              <a:buSzPct val="90000"/>
+              <a:buFont typeface="Arial"/>
+              <a:buChar char="–"/>
+            </a:pPr>
+            <a:r>
+              <a:rPr sz="1350" b="0" i="0">
+                <a:solidFill>
+                  <a:srgbClr val="201F33"/>
+                </a:solidFill>
+                <a:latin typeface="Calibri"/>
+              </a:rPr>
+              <a:t>Presentation boards — large-format physical boards used for exhibitions and client pitches</a:t>
+            </a:r>
+          </a:p>
+          <a:p>
+            <a:pPr indent="-203200" marL="203200">
+              <a:spcAft>
+                <a:spcPts val="900"/>
+              </a:spcAft>
+              <a:buClr>
+                <a:srgbClr val="2B2A4A"/>
+              </a:buClr>
+              <a:buSzPct val="90000"/>
+              <a:buFont typeface="Arial"/>
+              <a:buChar char="–"/>
+            </a:pPr>
+            <a:r>
+              <a:rPr sz="1350" b="0" i="0">
+                <a:solidFill>
+                  <a:srgbClr val="201F33"/>
+                </a:solidFill>
+                <a:latin typeface="Calibri"/>
+              </a:rPr>
+              <a:t>Digital portfolios — platforms such as Behance or a personal website for showcasing work beyond school</a:t>
+            </a:r>
+          </a:p>
+          <a:p>
+            <a:pPr indent="-203200" marL="203200">
+              <a:spcAft>
+                <a:spcPts val="900"/>
+              </a:spcAft>
+              <a:buClr>
+                <a:srgbClr val="2B2A4A"/>
+              </a:buClr>
+              <a:buSzPct val="90000"/>
+              <a:buFont typeface="Arial"/>
+              <a:buChar char="–"/>
+            </a:pPr>
+            <a:r>
+              <a:rPr sz="1350" b="0" i="0">
+                <a:solidFill>
+                  <a:srgbClr val="201F33"/>
+                </a:solidFill>
+                <a:latin typeface="Calibri"/>
+              </a:rPr>
+              <a:t>Consistent visual presentation (typography, layout, colour) across folio pages signals professionalism</a:t>
+            </a:r>
+          </a:p>
+        </p:txBody>
+      </p:sp>
+      <p:sp>
+        <p:nvSpPr>
+          <p:cNvPr id="5" name="Oval 4"/>
           <p:cNvSpPr/>
           <p:nvPr/>
         </p:nvSpPr>
         <p:spPr>
           <a:xfrm>
-            <a:off x="822960" y="1051560"/>
-            <a:ext cx="1188720" cy="502920"/>
-          </a:xfrm>
-          <a:prstGeom prst="roundRect">
-            <a:avLst>
-              <a:gd name="adj" fmla="val 50000"/>
-            </a:avLst>
-          </a:prstGeom>
-          <a:solidFill>
-            <a:srgbClr val="FFFFFF"/>
+            <a:off x="10881360" y="5943600"/>
+            <a:ext cx="1005840" cy="1005840"/>
+          </a:xfrm>
+          <a:prstGeom prst="ellipse">
+            <a:avLst/>
+          </a:prstGeom>
+          <a:solidFill>
+            <a:srgbClr val="E6C3D3"/>
           </a:solidFill>
           <a:ln>
             <a:noFill/>
@@ -8694,135 +9216,10 @@
           </a:fontRef>
         </p:style>
         <p:txBody>
-          <a:bodyPr rtlCol="0" anchor="ctr" wrap="none" lIns="50800" rIns="50800"/>
+          <a:bodyPr rtlCol="0" anchor="ctr"/>
           <a:lstStyle/>
           <a:p>
             <a:pPr algn="ctr"/>
-            <a:r>
-              <a:rPr sz="1400" b="1">
-                <a:solidFill>
-                  <a:srgbClr val="22213B"/>
-                </a:solidFill>
-                <a:latin typeface="Calibri"/>
-              </a:rPr>
-              <a:t>04</a:t>
-            </a:r>
-          </a:p>
-        </p:txBody>
-      </p:sp>
-      <p:sp>
-        <p:nvSpPr>
-          <p:cNvPr id="5" name="Rounded Rectangle 4"/>
-          <p:cNvSpPr/>
-          <p:nvPr/>
-        </p:nvSpPr>
-        <p:spPr>
-          <a:xfrm>
-            <a:off x="822960" y="2011680"/>
-            <a:ext cx="10515600" cy="2834640"/>
-          </a:xfrm>
-          <a:prstGeom prst="roundRect">
-            <a:avLst>
-              <a:gd name="adj" fmla="val 18000"/>
-            </a:avLst>
-          </a:prstGeom>
-          <a:solidFill>
-            <a:srgbClr val="FFFFFF"/>
-          </a:solidFill>
-          <a:ln>
-            <a:noFill/>
-          </a:ln>
-          <a:effectLst/>
-        </p:spPr>
-        <p:style>
-          <a:lnRef idx="1">
-            <a:schemeClr val="accent1"/>
-          </a:lnRef>
-          <a:fillRef idx="3">
-            <a:schemeClr val="accent1"/>
-          </a:fillRef>
-          <a:effectRef idx="2">
-            <a:schemeClr val="accent1"/>
-          </a:effectRef>
-          <a:fontRef idx="minor">
-            <a:schemeClr val="lt1"/>
-          </a:fontRef>
-        </p:style>
-        <p:txBody>
-          <a:bodyPr rtlCol="0" anchor="ctr"/>
-          <a:lstStyle/>
-          <a:p>
-            <a:pPr algn="ctr"/>
-          </a:p>
-        </p:txBody>
-      </p:sp>
-      <p:sp>
-        <p:nvSpPr>
-          <p:cNvPr id="6" name="TextBox 5"/>
-          <p:cNvSpPr txBox="1"/>
-          <p:nvPr/>
-        </p:nvSpPr>
-        <p:spPr>
-          <a:xfrm>
-            <a:off x="1280160" y="2697480"/>
-            <a:ext cx="9601200" cy="1097280"/>
-          </a:xfrm>
-          <a:prstGeom prst="rect">
-            <a:avLst/>
-          </a:prstGeom>
-          <a:noFill/>
-        </p:spPr>
-        <p:txBody>
-          <a:bodyPr wrap="square" anchor="t">
-            <a:spAutoFit/>
-          </a:bodyPr>
-          <a:lstStyle/>
-          <a:p>
-            <a:pPr algn="l"/>
-            <a:r>
-              <a:rPr sz="3400" b="1" i="0">
-                <a:solidFill>
-                  <a:srgbClr val="24233E"/>
-                </a:solidFill>
-                <a:latin typeface="Cambria"/>
-              </a:rPr>
-              <a:t>SAC Briefing</a:t>
-            </a:r>
-          </a:p>
-        </p:txBody>
-      </p:sp>
-      <p:sp>
-        <p:nvSpPr>
-          <p:cNvPr id="7" name="TextBox 6"/>
-          <p:cNvSpPr txBox="1"/>
-          <p:nvPr/>
-        </p:nvSpPr>
-        <p:spPr>
-          <a:xfrm>
-            <a:off x="1280160" y="3657600"/>
-            <a:ext cx="9601200" cy="548640"/>
-          </a:xfrm>
-          <a:prstGeom prst="rect">
-            <a:avLst/>
-          </a:prstGeom>
-          <a:noFill/>
-        </p:spPr>
-        <p:txBody>
-          <a:bodyPr wrap="square" anchor="t">
-            <a:spAutoFit/>
-          </a:bodyPr>
-          <a:lstStyle/>
-          <a:p>
-            <a:pPr algn="l"/>
-            <a:r>
-              <a:rPr sz="1500" b="0" i="0">
-                <a:solidFill>
-                  <a:srgbClr val="6B6B6B"/>
-                </a:solidFill>
-                <a:latin typeface="Calibri"/>
-              </a:rPr>
-              <a:t>Draft — confirm against your school’s SAC schedule</a:t>
-            </a:r>
           </a:p>
         </p:txBody>
       </p:sp>
@@ -8902,7 +9299,7 @@
                 </a:solidFill>
                 <a:latin typeface="Calibri"/>
               </a:rPr>
-              <a:t>SAC BRIEFING</a:t>
+              <a:t>EXTENDED KNOWLEDGE</a:t>
             </a:r>
           </a:p>
         </p:txBody>
@@ -8937,7 +9334,7 @@
                 </a:solidFill>
                 <a:latin typeface="Cambria"/>
               </a:rPr>
-              <a:t>Outcome 1 (AOS 1) — Development and Resolution of Designs</a:t>
+              <a:t>Evaluation Frameworks Beyond VCAA</a:t>
             </a:r>
           </a:p>
         </p:txBody>
@@ -9002,7 +9399,7 @@
                 </a:solidFill>
                 <a:latin typeface="Calibri"/>
               </a:rPr>
-              <a:t>Task</a:t>
+              <a:t>Methods used in industry</a:t>
             </a:r>
           </a:p>
           <a:p>
@@ -9024,29 +9421,7 @@
                 </a:solidFill>
                 <a:latin typeface="Calibri"/>
               </a:rPr>
-              <a:t>Using the two concepts generated in Unit 3, further develop each through relevant trials (type, colour, material, layout) and feedback, then select and justify ONE concept to resolve into a presentation-ready final design.</a:t>
-            </a:r>
-          </a:p>
-          <a:p>
-            <a:pPr indent="-203200" marL="203200">
-              <a:spcAft>
-                <a:spcPts val="900"/>
-              </a:spcAft>
-              <a:buClr>
-                <a:srgbClr val="2B2A4A"/>
-              </a:buClr>
-              <a:buSzPct val="90000"/>
-              <a:buFont typeface="Arial"/>
-              <a:buChar char="●"/>
-            </a:pPr>
-            <a:r>
-              <a:rPr sz="1500" b="1" i="0">
-                <a:solidFill>
-                  <a:srgbClr val="24233E"/>
-                </a:solidFill>
-                <a:latin typeface="Calibri"/>
-              </a:rPr>
-              <a:t>Conditions</a:t>
+              <a:t>Heuristic evaluation — assessing a design against established usability principles</a:t>
             </a:r>
           </a:p>
           <a:p>
@@ -9068,7 +9443,7 @@
                 </a:solidFill>
                 <a:latin typeface="Calibri"/>
               </a:rPr>
-              <a:t>Completed over approximately 5-6 weeks</a:t>
+              <a:t>A/B testing — comparing two versions of a design with real users to see which performs better</a:t>
             </a:r>
           </a:p>
           <a:p>
@@ -9090,161 +9465,7 @@
                 </a:solidFill>
                 <a:latin typeface="Calibri"/>
               </a:rPr>
-              <a:t>Folio submission (development pages and the resolved design)</a:t>
-            </a:r>
-          </a:p>
-          <a:p>
-            <a:pPr indent="-203200" marL="203200">
-              <a:spcAft>
-                <a:spcPts val="900"/>
-              </a:spcAft>
-              <a:buClr>
-                <a:srgbClr val="2B2A4A"/>
-              </a:buClr>
-              <a:buSzPct val="90000"/>
-              <a:buFont typeface="Arial"/>
-              <a:buChar char="–"/>
-            </a:pPr>
-            <a:r>
-              <a:rPr sz="1350" b="0" i="0">
-                <a:solidFill>
-                  <a:srgbClr val="201F33"/>
-                </a:solidFill>
-                <a:latin typeface="Calibri"/>
-              </a:rPr>
-              <a:t>Individual work</a:t>
-            </a:r>
-          </a:p>
-          <a:p>
-            <a:pPr indent="-203200" marL="203200">
-              <a:spcAft>
-                <a:spcPts val="900"/>
-              </a:spcAft>
-              <a:buClr>
-                <a:srgbClr val="2B2A4A"/>
-              </a:buClr>
-              <a:buSzPct val="90000"/>
-              <a:buFont typeface="Arial"/>
-              <a:buChar char="●"/>
-            </a:pPr>
-            <a:r>
-              <a:rPr sz="1500" b="1" i="0">
-                <a:solidFill>
-                  <a:srgbClr val="24233E"/>
-                </a:solidFill>
-                <a:latin typeface="Calibri"/>
-              </a:rPr>
-              <a:t>Assessment Criteria (/70)</a:t>
-            </a:r>
-          </a:p>
-          <a:p>
-            <a:pPr indent="-203200" marL="203200">
-              <a:spcAft>
-                <a:spcPts val="900"/>
-              </a:spcAft>
-              <a:buClr>
-                <a:srgbClr val="2B2A4A"/>
-              </a:buClr>
-              <a:buSzPct val="90000"/>
-              <a:buFont typeface="Arial"/>
-              <a:buChar char="–"/>
-            </a:pPr>
-            <a:r>
-              <a:rPr sz="1350" b="0" i="0">
-                <a:solidFill>
-                  <a:srgbClr val="201F33"/>
-                </a:solidFill>
-                <a:latin typeface="Calibri"/>
-              </a:rPr>
-              <a:t>Breadth and quality of development across both concepts — 25 marks</a:t>
-            </a:r>
-          </a:p>
-          <a:p>
-            <a:pPr indent="-203200" marL="203200">
-              <a:spcAft>
-                <a:spcPts val="900"/>
-              </a:spcAft>
-              <a:buClr>
-                <a:srgbClr val="2B2A4A"/>
-              </a:buClr>
-              <a:buSzPct val="90000"/>
-              <a:buFont typeface="Arial"/>
-              <a:buChar char="–"/>
-            </a:pPr>
-            <a:r>
-              <a:rPr sz="1350" b="0" i="0">
-                <a:solidFill>
-                  <a:srgbClr val="201F33"/>
-                </a:solidFill>
-                <a:latin typeface="Calibri"/>
-              </a:rPr>
-              <a:t>Use of feedback to refine ideas — 10 marks</a:t>
-            </a:r>
-          </a:p>
-          <a:p>
-            <a:pPr indent="-203200" marL="203200">
-              <a:spcAft>
-                <a:spcPts val="900"/>
-              </a:spcAft>
-              <a:buClr>
-                <a:srgbClr val="2B2A4A"/>
-              </a:buClr>
-              <a:buSzPct val="90000"/>
-              <a:buFont typeface="Arial"/>
-              <a:buChar char="–"/>
-            </a:pPr>
-            <a:r>
-              <a:rPr sz="1350" b="0" i="0">
-                <a:solidFill>
-                  <a:srgbClr val="201F33"/>
-                </a:solidFill>
-                <a:latin typeface="Calibri"/>
-              </a:rPr>
-              <a:t>Justification of the selected direction — 10 marks</a:t>
-            </a:r>
-          </a:p>
-          <a:p>
-            <a:pPr indent="-203200" marL="203200">
-              <a:spcAft>
-                <a:spcPts val="900"/>
-              </a:spcAft>
-              <a:buClr>
-                <a:srgbClr val="2B2A4A"/>
-              </a:buClr>
-              <a:buSzPct val="90000"/>
-              <a:buFont typeface="Arial"/>
-              <a:buChar char="–"/>
-            </a:pPr>
-            <a:r>
-              <a:rPr sz="1350" b="0" i="0">
-                <a:solidFill>
-                  <a:srgbClr val="201F33"/>
-                </a:solidFill>
-                <a:latin typeface="Calibri"/>
-              </a:rPr>
-              <a:t>Quality and accuracy of the resolved design — 20 marks</a:t>
-            </a:r>
-          </a:p>
-          <a:p>
-            <a:pPr indent="-203200" marL="203200">
-              <a:spcAft>
-                <a:spcPts val="900"/>
-              </a:spcAft>
-              <a:buClr>
-                <a:srgbClr val="2B2A4A"/>
-              </a:buClr>
-              <a:buSzPct val="90000"/>
-              <a:buFont typeface="Arial"/>
-              <a:buChar char="–"/>
-            </a:pPr>
-            <a:r>
-              <a:rPr sz="1350" b="0" i="0">
-                <a:solidFill>
-                  <a:srgbClr val="201F33"/>
-                </a:solidFill>
-                <a:latin typeface="Calibri"/>
-              </a:rPr>
-              <a:t>Folio documentation — 5 marks</a:t>
+              <a:t>'I like / I wish / What if' — a simple, structured feedback framework for peer critique</a:t>
             </a:r>
           </a:p>
         </p:txBody>
@@ -9369,7 +9590,7 @@
                 </a:solidFill>
                 <a:latin typeface="Calibri"/>
               </a:rPr>
-              <a:t>SAC BRIEFING</a:t>
+              <a:t>EXTENDED KNOWLEDGE</a:t>
             </a:r>
           </a:p>
         </p:txBody>
@@ -9404,7 +9625,7 @@
                 </a:solidFill>
                 <a:latin typeface="Cambria"/>
               </a:rPr>
-              <a:t>Outcome 2 (AOS 2) — Evaluation, Refinement and Presentation</a:t>
+              <a:t>Career Pathways in Design</a:t>
             </a:r>
           </a:p>
         </p:txBody>
@@ -9469,7 +9690,7 @@
                 </a:solidFill>
                 <a:latin typeface="Calibri"/>
               </a:rPr>
-              <a:t>Task</a:t>
+              <a:t>Where VCD can lead</a:t>
             </a:r>
           </a:p>
           <a:p>
@@ -9491,7 +9712,51 @@
                 </a:solidFill>
                 <a:latin typeface="Calibri"/>
               </a:rPr>
-              <a:t>Refine your resolved design to a professional presentation standard using appropriate methods. Write an evaluation of approximately 600-800 words assessing the final design against your original brief (purpose, audience, constraints, obligatory fields).</a:t>
+              <a:t>University pathways — Bachelor of Design/Communication Design/Industrial Design programs</a:t>
+            </a:r>
+          </a:p>
+          <a:p>
+            <a:pPr indent="-203200" marL="203200">
+              <a:spcAft>
+                <a:spcPts val="900"/>
+              </a:spcAft>
+              <a:buClr>
+                <a:srgbClr val="2B2A4A"/>
+              </a:buClr>
+              <a:buSzPct val="90000"/>
+              <a:buFont typeface="Arial"/>
+              <a:buChar char="–"/>
+            </a:pPr>
+            <a:r>
+              <a:rPr sz="1350" b="0" i="0">
+                <a:solidFill>
+                  <a:srgbClr val="201F33"/>
+                </a:solidFill>
+                <a:latin typeface="Calibri"/>
+              </a:rPr>
+              <a:t>TAFE and apprenticeship pathways into trades connected to design (signage, cabinetmaking, print)</a:t>
+            </a:r>
+          </a:p>
+          <a:p>
+            <a:pPr indent="-203200" marL="203200">
+              <a:spcAft>
+                <a:spcPts val="900"/>
+              </a:spcAft>
+              <a:buClr>
+                <a:srgbClr val="2B2A4A"/>
+              </a:buClr>
+              <a:buSzPct val="90000"/>
+              <a:buFont typeface="Arial"/>
+              <a:buChar char="–"/>
+            </a:pPr>
+            <a:r>
+              <a:rPr sz="1350" b="0" i="0">
+                <a:solidFill>
+                  <a:srgbClr val="201F33"/>
+                </a:solidFill>
+                <a:latin typeface="Calibri"/>
+              </a:rPr>
+              <a:t>Industry roles — graphic designer, UX/UI designer, industrial designer, exhibition designer, art director</a:t>
             </a:r>
           </a:p>
           <a:p>
@@ -9513,7 +9778,7 @@
                 </a:solidFill>
                 <a:latin typeface="Calibri"/>
               </a:rPr>
-              <a:t>Conditions</a:t>
+              <a:t>Tertiary folio requirements</a:t>
             </a:r>
           </a:p>
           <a:p>
@@ -9535,7 +9800,232 @@
                 </a:solidFill>
                 <a:latin typeface="Calibri"/>
               </a:rPr>
-              <a:t>Completed over approximately 3-4 weeks</a:t>
+              <a:t>Many design degrees require a submitted folio as part of entry — the analytical and process-documentation habits built in VCE VCD directly prepare students for this.</a:t>
+            </a:r>
+          </a:p>
+        </p:txBody>
+      </p:sp>
+      <p:sp>
+        <p:nvSpPr>
+          <p:cNvPr id="5" name="Oval 4"/>
+          <p:cNvSpPr/>
+          <p:nvPr/>
+        </p:nvSpPr>
+        <p:spPr>
+          <a:xfrm>
+            <a:off x="10881360" y="5943600"/>
+            <a:ext cx="1005840" cy="1005840"/>
+          </a:xfrm>
+          <a:prstGeom prst="ellipse">
+            <a:avLst/>
+          </a:prstGeom>
+          <a:solidFill>
+            <a:srgbClr val="E6C3D3"/>
+          </a:solidFill>
+          <a:ln>
+            <a:noFill/>
+          </a:ln>
+          <a:effectLst/>
+        </p:spPr>
+        <p:style>
+          <a:lnRef idx="1">
+            <a:schemeClr val="accent1"/>
+          </a:lnRef>
+          <a:fillRef idx="3">
+            <a:schemeClr val="accent1"/>
+          </a:fillRef>
+          <a:effectRef idx="2">
+            <a:schemeClr val="accent1"/>
+          </a:effectRef>
+          <a:fontRef idx="minor">
+            <a:schemeClr val="lt1"/>
+          </a:fontRef>
+        </p:style>
+        <p:txBody>
+          <a:bodyPr rtlCol="0" anchor="ctr"/>
+          <a:lstStyle/>
+          <a:p>
+            <a:pPr algn="ctr"/>
+          </a:p>
+        </p:txBody>
+      </p:sp>
+    </p:spTree>
+  </p:cSld>
+  <p:clrMapOvr>
+    <a:masterClrMapping/>
+  </p:clrMapOvr>
+</p:sld>
+</file>
+
+<file path=ppt/slides/slide26.xml><?xml version="1.0" encoding="utf-8"?>
+<p:sld xmlns:a="http://schemas.openxmlformats.org/drawingml/2006/main" xmlns:p="http://schemas.openxmlformats.org/presentationml/2006/main" xmlns:r="http://schemas.openxmlformats.org/officeDocument/2006/relationships">
+  <p:cSld>
+    <p:bg>
+      <p:bgPr>
+        <a:solidFill>
+          <a:srgbClr val="F8F6FB"/>
+        </a:solidFill>
+        <a:effectLst/>
+      </p:bgPr>
+    </p:bg>
+    <p:spTree>
+      <p:nvGrpSpPr>
+        <p:cNvPr id="1" name=""/>
+        <p:cNvGrpSpPr/>
+        <p:nvPr/>
+      </p:nvGrpSpPr>
+      <p:grpSpPr/>
+      <p:sp>
+        <p:nvSpPr>
+          <p:cNvPr id="2" name="Rounded Rectangle 1"/>
+          <p:cNvSpPr/>
+          <p:nvPr/>
+        </p:nvSpPr>
+        <p:spPr>
+          <a:xfrm>
+            <a:off x="685800" y="502920"/>
+            <a:ext cx="3291840" cy="457200"/>
+          </a:xfrm>
+          <a:prstGeom prst="roundRect">
+            <a:avLst>
+              <a:gd name="adj" fmla="val 50000"/>
+            </a:avLst>
+          </a:prstGeom>
+          <a:solidFill>
+            <a:srgbClr val="2B2A4A"/>
+          </a:solidFill>
+          <a:ln>
+            <a:noFill/>
+          </a:ln>
+          <a:effectLst/>
+        </p:spPr>
+        <p:style>
+          <a:lnRef idx="1">
+            <a:schemeClr val="accent1"/>
+          </a:lnRef>
+          <a:fillRef idx="3">
+            <a:schemeClr val="accent1"/>
+          </a:fillRef>
+          <a:effectRef idx="2">
+            <a:schemeClr val="accent1"/>
+          </a:effectRef>
+          <a:fontRef idx="minor">
+            <a:schemeClr val="lt1"/>
+          </a:fontRef>
+        </p:style>
+        <p:txBody>
+          <a:bodyPr rtlCol="0" anchor="ctr" wrap="none" lIns="50800" rIns="50800"/>
+          <a:lstStyle/>
+          <a:p>
+            <a:pPr algn="ctr"/>
+            <a:r>
+              <a:rPr sz="1100" b="1">
+                <a:solidFill>
+                  <a:srgbClr val="FFFFFF"/>
+                </a:solidFill>
+                <a:latin typeface="Calibri"/>
+              </a:rPr>
+              <a:t>EXTENDED KNOWLEDGE</a:t>
+            </a:r>
+          </a:p>
+        </p:txBody>
+      </p:sp>
+      <p:sp>
+        <p:nvSpPr>
+          <p:cNvPr id="3" name="TextBox 2"/>
+          <p:cNvSpPr txBox="1"/>
+          <p:nvPr/>
+        </p:nvSpPr>
+        <p:spPr>
+          <a:xfrm>
+            <a:off x="685800" y="1051560"/>
+            <a:ext cx="10607040" cy="822960"/>
+          </a:xfrm>
+          <a:prstGeom prst="rect">
+            <a:avLst/>
+          </a:prstGeom>
+          <a:noFill/>
+        </p:spPr>
+        <p:txBody>
+          <a:bodyPr wrap="square" anchor="t">
+            <a:spAutoFit/>
+          </a:bodyPr>
+          <a:lstStyle/>
+          <a:p>
+            <a:pPr algn="l"/>
+            <a:r>
+              <a:rPr sz="2700" b="1" i="0">
+                <a:solidFill>
+                  <a:srgbClr val="201F33"/>
+                </a:solidFill>
+                <a:latin typeface="Cambria"/>
+              </a:rPr>
+              <a:t>Exam Preparation Strategies</a:t>
+            </a:r>
+          </a:p>
+        </p:txBody>
+      </p:sp>
+      <p:sp>
+        <p:nvSpPr>
+          <p:cNvPr id="4" name="Rounded Rectangle 3"/>
+          <p:cNvSpPr/>
+          <p:nvPr/>
+        </p:nvSpPr>
+        <p:spPr>
+          <a:xfrm>
+            <a:off x="685800" y="1874519"/>
+            <a:ext cx="10607040" cy="4526280"/>
+          </a:xfrm>
+          <a:prstGeom prst="roundRect">
+            <a:avLst>
+              <a:gd name="adj" fmla="val 6000"/>
+            </a:avLst>
+          </a:prstGeom>
+          <a:solidFill>
+            <a:srgbClr val="E9E9EC"/>
+          </a:solidFill>
+          <a:ln>
+            <a:noFill/>
+          </a:ln>
+          <a:effectLst/>
+        </p:spPr>
+        <p:style>
+          <a:lnRef idx="1">
+            <a:schemeClr val="accent1"/>
+          </a:lnRef>
+          <a:fillRef idx="3">
+            <a:schemeClr val="accent1"/>
+          </a:fillRef>
+          <a:effectRef idx="2">
+            <a:schemeClr val="accent1"/>
+          </a:effectRef>
+          <a:fontRef idx="minor">
+            <a:schemeClr val="lt1"/>
+          </a:fontRef>
+        </p:style>
+        <p:txBody>
+          <a:bodyPr rtlCol="0" anchor="ctr" lIns="330200" rIns="330200" tIns="254000" bIns="254000" wrap="square"/>
+          <a:lstStyle/>
+          <a:p>
+            <a:pPr algn="ctr" indent="-203200" marL="203200">
+              <a:spcAft>
+                <a:spcPts val="900"/>
+              </a:spcAft>
+              <a:buClr>
+                <a:srgbClr val="2B2A4A"/>
+              </a:buClr>
+              <a:buSzPct val="90000"/>
+              <a:buFont typeface="Arial"/>
+              <a:buChar char="●"/>
+            </a:pPr>
+            <a:r>
+              <a:rPr sz="1500" b="1" i="0">
+                <a:solidFill>
+                  <a:srgbClr val="24233E"/>
+                </a:solidFill>
+                <a:latin typeface="Calibri"/>
+              </a:rPr>
+              <a:t>Revising effectively</a:t>
             </a:r>
           </a:p>
           <a:p>
@@ -9557,7 +10047,7 @@
                 </a:solidFill>
                 <a:latin typeface="Calibri"/>
               </a:rPr>
-              <a:t>Folio and written evaluation submission</a:t>
+              <a:t>Revisit the command word glossary (identify, describe, explain, analyse, discuss, evaluate)</a:t>
             </a:r>
           </a:p>
           <a:p>
@@ -9579,29 +10069,7 @@
                 </a:solidFill>
                 <a:latin typeface="Calibri"/>
               </a:rPr>
-              <a:t>Individual work</a:t>
-            </a:r>
-          </a:p>
-          <a:p>
-            <a:pPr indent="-203200" marL="203200">
-              <a:spcAft>
-                <a:spcPts val="900"/>
-              </a:spcAft>
-              <a:buClr>
-                <a:srgbClr val="2B2A4A"/>
-              </a:buClr>
-              <a:buSzPct val="90000"/>
-              <a:buFont typeface="Arial"/>
-              <a:buChar char="●"/>
-            </a:pPr>
-            <a:r>
-              <a:rPr sz="1500" b="1" i="0">
-                <a:solidFill>
-                  <a:srgbClr val="24233E"/>
-                </a:solidFill>
-                <a:latin typeface="Calibri"/>
-              </a:rPr>
-              <a:t>Assessment Criteria (/50)</a:t>
+              <a:t>Practise full past exam papers under timed conditions, not just isolated questions</a:t>
             </a:r>
           </a:p>
           <a:p>
@@ -9623,7 +10091,7 @@
                 </a:solidFill>
                 <a:latin typeface="Calibri"/>
               </a:rPr>
-              <a:t>Presentation standard: accuracy, rendering, craftsmanship — 20 marks</a:t>
+              <a:t>Review Unit 3 &amp; 4 key knowledge systematically rather than only re-reading notes passively</a:t>
             </a:r>
           </a:p>
           <a:p>
@@ -9645,29 +10113,7 @@
                 </a:solidFill>
                 <a:latin typeface="Calibri"/>
               </a:rPr>
-              <a:t>Quality and balance of the written evaluation — 20 marks</a:t>
-            </a:r>
-          </a:p>
-          <a:p>
-            <a:pPr indent="-203200" marL="203200">
-              <a:spcAft>
-                <a:spcPts val="900"/>
-              </a:spcAft>
-              <a:buClr>
-                <a:srgbClr val="2B2A4A"/>
-              </a:buClr>
-              <a:buSzPct val="90000"/>
-              <a:buFont typeface="Arial"/>
-              <a:buChar char="–"/>
-            </a:pPr>
-            <a:r>
-              <a:rPr sz="1350" b="0" i="0">
-                <a:solidFill>
-                  <a:srgbClr val="201F33"/>
-                </a:solidFill>
-                <a:latin typeface="Calibri"/>
-              </a:rPr>
-              <a:t>Specific reference to brief criteria — 10 marks</a:t>
+              <a:t>Time-box each exam question during practice so pacing becomes automatic</a:t>
             </a:r>
           </a:p>
         </p:txBody>
@@ -9724,7 +10170,443 @@
 </p:sld>
 </file>
 
-<file path=ppt/slides/slide26.xml><?xml version="1.0" encoding="utf-8"?>
+<file path=ppt/slides/slide27.xml><?xml version="1.0" encoding="utf-8"?>
+<p:sld xmlns:a="http://schemas.openxmlformats.org/drawingml/2006/main" xmlns:p="http://schemas.openxmlformats.org/presentationml/2006/main" xmlns:r="http://schemas.openxmlformats.org/officeDocument/2006/relationships">
+  <p:cSld>
+    <p:bg>
+      <p:bgPr>
+        <a:solidFill>
+          <a:srgbClr val="C97B9E"/>
+        </a:solidFill>
+        <a:effectLst/>
+      </p:bgPr>
+    </p:bg>
+    <p:spTree>
+      <p:nvGrpSpPr>
+        <p:cNvPr id="1" name=""/>
+        <p:cNvGrpSpPr/>
+        <p:nvPr/>
+      </p:nvGrpSpPr>
+      <p:grpSpPr/>
+      <p:sp>
+        <p:nvSpPr>
+          <p:cNvPr id="2" name="Oval 1"/>
+          <p:cNvSpPr/>
+          <p:nvPr/>
+        </p:nvSpPr>
+        <p:spPr>
+          <a:xfrm>
+            <a:off x="-914400" y="-914400"/>
+            <a:ext cx="2103120" cy="2103120"/>
+          </a:xfrm>
+          <a:prstGeom prst="ellipse">
+            <a:avLst/>
+          </a:prstGeom>
+          <a:solidFill>
+            <a:srgbClr val="B06C8B"/>
+          </a:solidFill>
+          <a:ln>
+            <a:noFill/>
+          </a:ln>
+          <a:effectLst/>
+        </p:spPr>
+        <p:style>
+          <a:lnRef idx="1">
+            <a:schemeClr val="accent1"/>
+          </a:lnRef>
+          <a:fillRef idx="3">
+            <a:schemeClr val="accent1"/>
+          </a:fillRef>
+          <a:effectRef idx="2">
+            <a:schemeClr val="accent1"/>
+          </a:effectRef>
+          <a:fontRef idx="minor">
+            <a:schemeClr val="lt1"/>
+          </a:fontRef>
+        </p:style>
+        <p:txBody>
+          <a:bodyPr rtlCol="0" anchor="ctr"/>
+          <a:lstStyle/>
+          <a:p>
+            <a:pPr algn="ctr"/>
+          </a:p>
+        </p:txBody>
+      </p:sp>
+      <p:sp>
+        <p:nvSpPr>
+          <p:cNvPr id="3" name="Oval 2"/>
+          <p:cNvSpPr/>
+          <p:nvPr/>
+        </p:nvSpPr>
+        <p:spPr>
+          <a:xfrm>
+            <a:off x="11064240" y="5852160"/>
+            <a:ext cx="1737360" cy="1737360"/>
+          </a:xfrm>
+          <a:prstGeom prst="ellipse">
+            <a:avLst/>
+          </a:prstGeom>
+          <a:solidFill>
+            <a:srgbClr val="B06C8B"/>
+          </a:solidFill>
+          <a:ln>
+            <a:noFill/>
+          </a:ln>
+          <a:effectLst/>
+        </p:spPr>
+        <p:style>
+          <a:lnRef idx="1">
+            <a:schemeClr val="accent1"/>
+          </a:lnRef>
+          <a:fillRef idx="3">
+            <a:schemeClr val="accent1"/>
+          </a:fillRef>
+          <a:effectRef idx="2">
+            <a:schemeClr val="accent1"/>
+          </a:effectRef>
+          <a:fontRef idx="minor">
+            <a:schemeClr val="lt1"/>
+          </a:fontRef>
+        </p:style>
+        <p:txBody>
+          <a:bodyPr rtlCol="0" anchor="ctr"/>
+          <a:lstStyle/>
+          <a:p>
+            <a:pPr algn="ctr"/>
+          </a:p>
+        </p:txBody>
+      </p:sp>
+      <p:sp>
+        <p:nvSpPr>
+          <p:cNvPr id="4" name="Rounded Rectangle 3"/>
+          <p:cNvSpPr/>
+          <p:nvPr/>
+        </p:nvSpPr>
+        <p:spPr>
+          <a:xfrm>
+            <a:off x="685800" y="457200"/>
+            <a:ext cx="1033271" cy="502920"/>
+          </a:xfrm>
+          <a:prstGeom prst="roundRect">
+            <a:avLst>
+              <a:gd name="adj" fmla="val 50000"/>
+            </a:avLst>
+          </a:prstGeom>
+          <a:solidFill>
+            <a:srgbClr val="FFFFFF"/>
+          </a:solidFill>
+          <a:ln>
+            <a:noFill/>
+          </a:ln>
+          <a:effectLst/>
+        </p:spPr>
+        <p:style>
+          <a:lnRef idx="1">
+            <a:schemeClr val="accent1"/>
+          </a:lnRef>
+          <a:fillRef idx="3">
+            <a:schemeClr val="accent1"/>
+          </a:fillRef>
+          <a:effectRef idx="2">
+            <a:schemeClr val="accent1"/>
+          </a:effectRef>
+          <a:fontRef idx="minor">
+            <a:schemeClr val="lt1"/>
+          </a:fontRef>
+        </p:style>
+        <p:txBody>
+          <a:bodyPr rtlCol="0" anchor="ctr"/>
+          <a:lstStyle/>
+          <a:p>
+            <a:pPr algn="ctr"/>
+            <a:r>
+              <a:rPr b="1" sz="1400">
+                <a:solidFill>
+                  <a:srgbClr val="824F66"/>
+                </a:solidFill>
+                <a:latin typeface="Calibri"/>
+              </a:rPr>
+              <a:t>GAME</a:t>
+            </a:r>
+          </a:p>
+        </p:txBody>
+      </p:sp>
+      <p:sp>
+        <p:nvSpPr>
+          <p:cNvPr id="5" name="TextBox 4"/>
+          <p:cNvSpPr txBox="1"/>
+          <p:nvPr/>
+        </p:nvSpPr>
+        <p:spPr>
+          <a:xfrm>
+            <a:off x="685800" y="1143000"/>
+            <a:ext cx="10607040" cy="914400"/>
+          </a:xfrm>
+          <a:prstGeom prst="rect">
+            <a:avLst/>
+          </a:prstGeom>
+          <a:noFill/>
+        </p:spPr>
+        <p:txBody>
+          <a:bodyPr wrap="square" anchor="t">
+            <a:spAutoFit/>
+          </a:bodyPr>
+          <a:lstStyle/>
+          <a:p>
+            <a:pPr algn="l"/>
+            <a:r>
+              <a:rPr sz="3000" b="1" i="0">
+                <a:solidFill>
+                  <a:srgbClr val="FFFFFF"/>
+                </a:solidFill>
+                <a:latin typeface="Cambria"/>
+              </a:rPr>
+              <a:t>Materials Match-Up</a:t>
+            </a:r>
+          </a:p>
+        </p:txBody>
+      </p:sp>
+      <p:sp>
+        <p:nvSpPr>
+          <p:cNvPr id="6" name="Rounded Rectangle 5"/>
+          <p:cNvSpPr/>
+          <p:nvPr/>
+        </p:nvSpPr>
+        <p:spPr>
+          <a:xfrm>
+            <a:off x="685800" y="2148840"/>
+            <a:ext cx="960120" cy="411480"/>
+          </a:xfrm>
+          <a:prstGeom prst="roundRect">
+            <a:avLst>
+              <a:gd name="adj" fmla="val 50000"/>
+            </a:avLst>
+          </a:prstGeom>
+          <a:solidFill>
+            <a:srgbClr val="965C76"/>
+          </a:solidFill>
+          <a:ln>
+            <a:noFill/>
+          </a:ln>
+          <a:effectLst/>
+        </p:spPr>
+        <p:style>
+          <a:lnRef idx="1">
+            <a:schemeClr val="accent1"/>
+          </a:lnRef>
+          <a:fillRef idx="3">
+            <a:schemeClr val="accent1"/>
+          </a:fillRef>
+          <a:effectRef idx="2">
+            <a:schemeClr val="accent1"/>
+          </a:effectRef>
+          <a:fontRef idx="minor">
+            <a:schemeClr val="lt1"/>
+          </a:fontRef>
+        </p:style>
+        <p:txBody>
+          <a:bodyPr rtlCol="0" anchor="ctr" wrap="none" lIns="50800" rIns="50800"/>
+          <a:lstStyle/>
+          <a:p>
+            <a:pPr algn="ctr"/>
+            <a:r>
+              <a:rPr sz="1050" b="1">
+                <a:solidFill>
+                  <a:srgbClr val="FFFFFF"/>
+                </a:solidFill>
+                <a:latin typeface="Calibri"/>
+              </a:rPr>
+              <a:t>6 MIN</a:t>
+            </a:r>
+          </a:p>
+        </p:txBody>
+      </p:sp>
+      <p:sp>
+        <p:nvSpPr>
+          <p:cNvPr id="7" name="Rounded Rectangle 6"/>
+          <p:cNvSpPr/>
+          <p:nvPr/>
+        </p:nvSpPr>
+        <p:spPr>
+          <a:xfrm>
+            <a:off x="1783080" y="2148840"/>
+            <a:ext cx="960120" cy="411480"/>
+          </a:xfrm>
+          <a:prstGeom prst="roundRect">
+            <a:avLst>
+              <a:gd name="adj" fmla="val 50000"/>
+            </a:avLst>
+          </a:prstGeom>
+          <a:solidFill>
+            <a:srgbClr val="965C76"/>
+          </a:solidFill>
+          <a:ln>
+            <a:noFill/>
+          </a:ln>
+          <a:effectLst/>
+        </p:spPr>
+        <p:style>
+          <a:lnRef idx="1">
+            <a:schemeClr val="accent1"/>
+          </a:lnRef>
+          <a:fillRef idx="3">
+            <a:schemeClr val="accent1"/>
+          </a:fillRef>
+          <a:effectRef idx="2">
+            <a:schemeClr val="accent1"/>
+          </a:effectRef>
+          <a:fontRef idx="minor">
+            <a:schemeClr val="lt1"/>
+          </a:fontRef>
+        </p:style>
+        <p:txBody>
+          <a:bodyPr rtlCol="0" anchor="ctr" wrap="none" lIns="50800" rIns="50800"/>
+          <a:lstStyle/>
+          <a:p>
+            <a:pPr algn="ctr"/>
+            <a:r>
+              <a:rPr sz="1050" b="1">
+                <a:solidFill>
+                  <a:srgbClr val="FFFFFF"/>
+                </a:solidFill>
+                <a:latin typeface="Calibri"/>
+              </a:rPr>
+              <a:t>PAIRS</a:t>
+            </a:r>
+          </a:p>
+        </p:txBody>
+      </p:sp>
+      <p:sp>
+        <p:nvSpPr>
+          <p:cNvPr id="8" name="Rounded Rectangle 7"/>
+          <p:cNvSpPr/>
+          <p:nvPr/>
+        </p:nvSpPr>
+        <p:spPr>
+          <a:xfrm>
+            <a:off x="685800" y="2788920"/>
+            <a:ext cx="10607040" cy="3246120"/>
+          </a:xfrm>
+          <a:prstGeom prst="roundRect">
+            <a:avLst>
+              <a:gd name="adj" fmla="val 8000"/>
+            </a:avLst>
+          </a:prstGeom>
+          <a:solidFill>
+            <a:srgbClr val="FFFFFF"/>
+          </a:solidFill>
+          <a:ln>
+            <a:noFill/>
+          </a:ln>
+          <a:effectLst/>
+        </p:spPr>
+        <p:style>
+          <a:lnRef idx="1">
+            <a:schemeClr val="accent1"/>
+          </a:lnRef>
+          <a:fillRef idx="3">
+            <a:schemeClr val="accent1"/>
+          </a:fillRef>
+          <a:effectRef idx="2">
+            <a:schemeClr val="accent1"/>
+          </a:effectRef>
+          <a:fontRef idx="minor">
+            <a:schemeClr val="lt1"/>
+          </a:fontRef>
+        </p:style>
+        <p:txBody>
+          <a:bodyPr rtlCol="0" anchor="ctr" lIns="304800" rIns="304800" tIns="203200" bIns="203200" wrap="square"/>
+          <a:lstStyle/>
+          <a:p>
+            <a:pPr algn="ctr" indent="-203200" marL="203200">
+              <a:spcAft>
+                <a:spcPts val="900"/>
+              </a:spcAft>
+              <a:buClr>
+                <a:srgbClr val="C97B9E"/>
+              </a:buClr>
+              <a:buSzPct val="90000"/>
+              <a:buFont typeface="Arial"/>
+              <a:buChar char="●"/>
+            </a:pPr>
+            <a:r>
+              <a:rPr sz="1450" b="0" i="0">
+                <a:solidFill>
+                  <a:srgbClr val="201F33"/>
+                </a:solidFill>
+                <a:latin typeface="Calibri"/>
+              </a:rPr>
+              <a:t>Match each manufacturing process (injection moulding, offset printing, laser cutting, 3D printing) to a product example.</a:t>
+            </a:r>
+          </a:p>
+          <a:p>
+            <a:pPr indent="-203200" marL="203200">
+              <a:spcAft>
+                <a:spcPts val="900"/>
+              </a:spcAft>
+              <a:buClr>
+                <a:srgbClr val="C97B9E"/>
+              </a:buClr>
+              <a:buSzPct val="90000"/>
+              <a:buFont typeface="Arial"/>
+              <a:buChar char="●"/>
+            </a:pPr>
+            <a:r>
+              <a:rPr sz="1450" b="0" i="0">
+                <a:solidFill>
+                  <a:srgbClr val="201F33"/>
+                </a:solidFill>
+                <a:latin typeface="Calibri"/>
+              </a:rPr>
+              <a:t>Discuss which process would suit a one-off prototype vs mass production.</a:t>
+            </a:r>
+          </a:p>
+        </p:txBody>
+      </p:sp>
+      <p:sp>
+        <p:nvSpPr>
+          <p:cNvPr id="9" name="TextBox 8"/>
+          <p:cNvSpPr txBox="1"/>
+          <p:nvPr/>
+        </p:nvSpPr>
+        <p:spPr>
+          <a:xfrm>
+            <a:off x="685800" y="6217920"/>
+            <a:ext cx="10607040" cy="502920"/>
+          </a:xfrm>
+          <a:prstGeom prst="rect">
+            <a:avLst/>
+          </a:prstGeom>
+          <a:noFill/>
+        </p:spPr>
+        <p:txBody>
+          <a:bodyPr wrap="square" anchor="t">
+            <a:spAutoFit/>
+          </a:bodyPr>
+          <a:lstStyle/>
+          <a:p>
+            <a:pPr algn="l"/>
+            <a:r>
+              <a:rPr sz="1250" b="0" i="1">
+                <a:solidFill>
+                  <a:srgbClr val="FFFFFF"/>
+                </a:solidFill>
+                <a:latin typeface="Calibri"/>
+              </a:rPr>
+              <a:t>Debrief: Which process would best suit your own resolved design, and why?</a:t>
+            </a:r>
+          </a:p>
+        </p:txBody>
+      </p:sp>
+    </p:spTree>
+  </p:cSld>
+  <p:clrMapOvr>
+    <a:masterClrMapping/>
+  </p:clrMapOvr>
+</p:sld>
+</file>
+
+<file path=ppt/slides/slide28.xml><?xml version="1.0" encoding="utf-8"?>
 <p:sld xmlns:a="http://schemas.openxmlformats.org/drawingml/2006/main" xmlns:p="http://schemas.openxmlformats.org/presentationml/2006/main" xmlns:r="http://schemas.openxmlformats.org/officeDocument/2006/relationships">
   <p:cSld>
     <p:bg>
@@ -9750,8 +10632,8 @@
         </p:nvSpPr>
         <p:spPr>
           <a:xfrm>
-            <a:off x="-1097280" y="4114800"/>
-            <a:ext cx="3108960" cy="3108960"/>
+            <a:off x="9692640" y="-914400"/>
+            <a:ext cx="2926080" cy="2926080"/>
           </a:xfrm>
           <a:prstGeom prst="ellipse">
             <a:avLst/>
@@ -9794,14 +10676,14 @@
         </p:nvSpPr>
         <p:spPr>
           <a:xfrm>
-            <a:off x="9875520" y="-1188720"/>
-            <a:ext cx="2743200" cy="2743200"/>
+            <a:off x="-914400" y="4937760"/>
+            <a:ext cx="2377440" cy="2377440"/>
           </a:xfrm>
           <a:prstGeom prst="ellipse">
             <a:avLst/>
           </a:prstGeom>
           <a:solidFill>
-            <a:srgbClr val="D9A441"/>
+            <a:srgbClr val="252441"/>
           </a:solidFill>
           <a:ln>
             <a:noFill/>
@@ -9838,12 +10720,12 @@
         </p:nvSpPr>
         <p:spPr>
           <a:xfrm>
-            <a:off x="1920240" y="2286000"/>
-            <a:ext cx="8321040" cy="2377440"/>
+            <a:off x="822960" y="1051560"/>
+            <a:ext cx="1188720" cy="502920"/>
           </a:xfrm>
           <a:prstGeom prst="roundRect">
             <a:avLst>
-              <a:gd name="adj" fmla="val 20000"/>
+              <a:gd name="adj" fmla="val 50000"/>
             </a:avLst>
           </a:prstGeom>
           <a:solidFill>
@@ -9869,30 +10751,602 @@
           </a:fontRef>
         </p:style>
         <p:txBody>
+          <a:bodyPr rtlCol="0" anchor="ctr" wrap="none" lIns="50800" rIns="50800"/>
+          <a:lstStyle/>
+          <a:p>
+            <a:pPr algn="ctr"/>
+            <a:r>
+              <a:rPr sz="1400" b="1">
+                <a:solidFill>
+                  <a:srgbClr val="22213B"/>
+                </a:solidFill>
+                <a:latin typeface="Calibri"/>
+              </a:rPr>
+              <a:t>04</a:t>
+            </a:r>
+          </a:p>
+        </p:txBody>
+      </p:sp>
+      <p:sp>
+        <p:nvSpPr>
+          <p:cNvPr id="5" name="Rounded Rectangle 4"/>
+          <p:cNvSpPr/>
+          <p:nvPr/>
+        </p:nvSpPr>
+        <p:spPr>
+          <a:xfrm>
+            <a:off x="822960" y="2011680"/>
+            <a:ext cx="10515600" cy="2834640"/>
+          </a:xfrm>
+          <a:prstGeom prst="roundRect">
+            <a:avLst>
+              <a:gd name="adj" fmla="val 18000"/>
+            </a:avLst>
+          </a:prstGeom>
+          <a:solidFill>
+            <a:srgbClr val="FFFFFF"/>
+          </a:solidFill>
+          <a:ln>
+            <a:noFill/>
+          </a:ln>
+          <a:effectLst/>
+        </p:spPr>
+        <p:style>
+          <a:lnRef idx="1">
+            <a:schemeClr val="accent1"/>
+          </a:lnRef>
+          <a:fillRef idx="3">
+            <a:schemeClr val="accent1"/>
+          </a:fillRef>
+          <a:effectRef idx="2">
+            <a:schemeClr val="accent1"/>
+          </a:effectRef>
+          <a:fontRef idx="minor">
+            <a:schemeClr val="lt1"/>
+          </a:fontRef>
+        </p:style>
+        <p:txBody>
           <a:bodyPr rtlCol="0" anchor="ctr"/>
           <a:lstStyle/>
           <a:p>
             <a:pPr algn="ctr"/>
-            <a:r>
-              <a:rPr b="1" sz="3000">
-                <a:solidFill>
-                  <a:srgbClr val="2B2A4A"/>
+          </a:p>
+        </p:txBody>
+      </p:sp>
+      <p:sp>
+        <p:nvSpPr>
+          <p:cNvPr id="6" name="TextBox 5"/>
+          <p:cNvSpPr txBox="1"/>
+          <p:nvPr/>
+        </p:nvSpPr>
+        <p:spPr>
+          <a:xfrm>
+            <a:off x="1280160" y="2697480"/>
+            <a:ext cx="9601200" cy="1097280"/>
+          </a:xfrm>
+          <a:prstGeom prst="rect">
+            <a:avLst/>
+          </a:prstGeom>
+          <a:noFill/>
+        </p:spPr>
+        <p:txBody>
+          <a:bodyPr wrap="square" anchor="t">
+            <a:spAutoFit/>
+          </a:bodyPr>
+          <a:lstStyle/>
+          <a:p>
+            <a:pPr algn="l"/>
+            <a:r>
+              <a:rPr sz="3400" b="1" i="0">
+                <a:solidFill>
+                  <a:srgbClr val="24233E"/>
                 </a:solidFill>
                 <a:latin typeface="Cambria"/>
               </a:rPr>
-              <a:t>End of Unit 4</a:t>
-            </a:r>
-          </a:p>
+              <a:t>SAC Briefing</a:t>
+            </a:r>
+          </a:p>
+        </p:txBody>
+      </p:sp>
+      <p:sp>
+        <p:nvSpPr>
+          <p:cNvPr id="7" name="TextBox 6"/>
+          <p:cNvSpPr txBox="1"/>
+          <p:nvPr/>
+        </p:nvSpPr>
+        <p:spPr>
+          <a:xfrm>
+            <a:off x="1280160" y="3657600"/>
+            <a:ext cx="9601200" cy="548640"/>
+          </a:xfrm>
+          <a:prstGeom prst="rect">
+            <a:avLst/>
+          </a:prstGeom>
+          <a:noFill/>
+        </p:spPr>
+        <p:txBody>
+          <a:bodyPr wrap="square" anchor="t">
+            <a:spAutoFit/>
+          </a:bodyPr>
+          <a:lstStyle/>
+          <a:p>
+            <a:pPr algn="l"/>
+            <a:r>
+              <a:rPr sz="1500" b="0" i="0">
+                <a:solidFill>
+                  <a:srgbClr val="6B6B6B"/>
+                </a:solidFill>
+                <a:latin typeface="Calibri"/>
+              </a:rPr>
+              <a:t>Draft — confirm against your school’s SAC schedule</a:t>
+            </a:r>
+          </a:p>
+        </p:txBody>
+      </p:sp>
+    </p:spTree>
+  </p:cSld>
+  <p:clrMapOvr>
+    <a:masterClrMapping/>
+  </p:clrMapOvr>
+</p:sld>
+</file>
+
+<file path=ppt/slides/slide29.xml><?xml version="1.0" encoding="utf-8"?>
+<p:sld xmlns:a="http://schemas.openxmlformats.org/drawingml/2006/main" xmlns:p="http://schemas.openxmlformats.org/presentationml/2006/main" xmlns:r="http://schemas.openxmlformats.org/officeDocument/2006/relationships">
+  <p:cSld>
+    <p:bg>
+      <p:bgPr>
+        <a:solidFill>
+          <a:srgbClr val="F8F6FB"/>
+        </a:solidFill>
+        <a:effectLst/>
+      </p:bgPr>
+    </p:bg>
+    <p:spTree>
+      <p:nvGrpSpPr>
+        <p:cNvPr id="1" name=""/>
+        <p:cNvGrpSpPr/>
+        <p:nvPr/>
+      </p:nvGrpSpPr>
+      <p:grpSpPr/>
+      <p:sp>
+        <p:nvSpPr>
+          <p:cNvPr id="2" name="Rounded Rectangle 1"/>
+          <p:cNvSpPr/>
+          <p:nvPr/>
+        </p:nvSpPr>
+        <p:spPr>
+          <a:xfrm>
+            <a:off x="685800" y="502920"/>
+            <a:ext cx="3291840" cy="457200"/>
+          </a:xfrm>
+          <a:prstGeom prst="roundRect">
+            <a:avLst>
+              <a:gd name="adj" fmla="val 50000"/>
+            </a:avLst>
+          </a:prstGeom>
+          <a:solidFill>
+            <a:srgbClr val="2B2A4A"/>
+          </a:solidFill>
+          <a:ln>
+            <a:noFill/>
+          </a:ln>
+          <a:effectLst/>
+        </p:spPr>
+        <p:style>
+          <a:lnRef idx="1">
+            <a:schemeClr val="accent1"/>
+          </a:lnRef>
+          <a:fillRef idx="3">
+            <a:schemeClr val="accent1"/>
+          </a:fillRef>
+          <a:effectRef idx="2">
+            <a:schemeClr val="accent1"/>
+          </a:effectRef>
+          <a:fontRef idx="minor">
+            <a:schemeClr val="lt1"/>
+          </a:fontRef>
+        </p:style>
+        <p:txBody>
+          <a:bodyPr rtlCol="0" anchor="ctr" wrap="none" lIns="50800" rIns="50800"/>
+          <a:lstStyle/>
           <a:p>
             <a:pPr algn="ctr"/>
             <a:r>
-              <a:rPr sz="1400">
-                <a:solidFill>
-                  <a:srgbClr val="595959"/>
-                </a:solidFill>
-              </a:rPr>
-              <a:t>Review the matching workbook to consolidate what you have learnt.</a:t>
-            </a:r>
+              <a:rPr sz="1100" b="1">
+                <a:solidFill>
+                  <a:srgbClr val="FFFFFF"/>
+                </a:solidFill>
+                <a:latin typeface="Calibri"/>
+              </a:rPr>
+              <a:t>SAC BRIEFING</a:t>
+            </a:r>
+          </a:p>
+        </p:txBody>
+      </p:sp>
+      <p:sp>
+        <p:nvSpPr>
+          <p:cNvPr id="3" name="TextBox 2"/>
+          <p:cNvSpPr txBox="1"/>
+          <p:nvPr/>
+        </p:nvSpPr>
+        <p:spPr>
+          <a:xfrm>
+            <a:off x="685800" y="1051560"/>
+            <a:ext cx="10607040" cy="822960"/>
+          </a:xfrm>
+          <a:prstGeom prst="rect">
+            <a:avLst/>
+          </a:prstGeom>
+          <a:noFill/>
+        </p:spPr>
+        <p:txBody>
+          <a:bodyPr wrap="square" anchor="t">
+            <a:spAutoFit/>
+          </a:bodyPr>
+          <a:lstStyle/>
+          <a:p>
+            <a:pPr algn="l"/>
+            <a:r>
+              <a:rPr sz="2700" b="1" i="0">
+                <a:solidFill>
+                  <a:srgbClr val="201F33"/>
+                </a:solidFill>
+                <a:latin typeface="Cambria"/>
+              </a:rPr>
+              <a:t>Outcome 1 (AOS 1) — Development and Resolution of Designs</a:t>
+            </a:r>
+          </a:p>
+        </p:txBody>
+      </p:sp>
+      <p:sp>
+        <p:nvSpPr>
+          <p:cNvPr id="4" name="Rounded Rectangle 3"/>
+          <p:cNvSpPr/>
+          <p:nvPr/>
+        </p:nvSpPr>
+        <p:spPr>
+          <a:xfrm>
+            <a:off x="685800" y="1874519"/>
+            <a:ext cx="10607040" cy="4526280"/>
+          </a:xfrm>
+          <a:prstGeom prst="roundRect">
+            <a:avLst>
+              <a:gd name="adj" fmla="val 6000"/>
+            </a:avLst>
+          </a:prstGeom>
+          <a:solidFill>
+            <a:srgbClr val="E9E9EC"/>
+          </a:solidFill>
+          <a:ln>
+            <a:noFill/>
+          </a:ln>
+          <a:effectLst/>
+        </p:spPr>
+        <p:style>
+          <a:lnRef idx="1">
+            <a:schemeClr val="accent1"/>
+          </a:lnRef>
+          <a:fillRef idx="3">
+            <a:schemeClr val="accent1"/>
+          </a:fillRef>
+          <a:effectRef idx="2">
+            <a:schemeClr val="accent1"/>
+          </a:effectRef>
+          <a:fontRef idx="minor">
+            <a:schemeClr val="lt1"/>
+          </a:fontRef>
+        </p:style>
+        <p:txBody>
+          <a:bodyPr rtlCol="0" anchor="ctr" lIns="330200" rIns="330200" tIns="254000" bIns="254000" wrap="square"/>
+          <a:lstStyle/>
+          <a:p>
+            <a:pPr algn="ctr" indent="-203200" marL="203200">
+              <a:spcAft>
+                <a:spcPts val="900"/>
+              </a:spcAft>
+              <a:buClr>
+                <a:srgbClr val="2B2A4A"/>
+              </a:buClr>
+              <a:buSzPct val="90000"/>
+              <a:buFont typeface="Arial"/>
+              <a:buChar char="●"/>
+            </a:pPr>
+            <a:r>
+              <a:rPr sz="1500" b="1" i="0">
+                <a:solidFill>
+                  <a:srgbClr val="24233E"/>
+                </a:solidFill>
+                <a:latin typeface="Calibri"/>
+              </a:rPr>
+              <a:t>Task</a:t>
+            </a:r>
+          </a:p>
+          <a:p>
+            <a:pPr indent="-203200" marL="203200">
+              <a:spcAft>
+                <a:spcPts val="900"/>
+              </a:spcAft>
+              <a:buClr>
+                <a:srgbClr val="2B2A4A"/>
+              </a:buClr>
+              <a:buSzPct val="90000"/>
+              <a:buFont typeface="Arial"/>
+              <a:buChar char="–"/>
+            </a:pPr>
+            <a:r>
+              <a:rPr sz="1350" b="0" i="0">
+                <a:solidFill>
+                  <a:srgbClr val="201F33"/>
+                </a:solidFill>
+                <a:latin typeface="Calibri"/>
+              </a:rPr>
+              <a:t>Using the two concepts generated in Unit 3, further develop each through relevant trials (type, colour, material, layout) and feedback, then select and justify ONE concept to resolve into a presentation-ready final design.</a:t>
+            </a:r>
+          </a:p>
+          <a:p>
+            <a:pPr indent="-203200" marL="203200">
+              <a:spcAft>
+                <a:spcPts val="900"/>
+              </a:spcAft>
+              <a:buClr>
+                <a:srgbClr val="2B2A4A"/>
+              </a:buClr>
+              <a:buSzPct val="90000"/>
+              <a:buFont typeface="Arial"/>
+              <a:buChar char="●"/>
+            </a:pPr>
+            <a:r>
+              <a:rPr sz="1500" b="1" i="0">
+                <a:solidFill>
+                  <a:srgbClr val="24233E"/>
+                </a:solidFill>
+                <a:latin typeface="Calibri"/>
+              </a:rPr>
+              <a:t>Conditions</a:t>
+            </a:r>
+          </a:p>
+          <a:p>
+            <a:pPr indent="-203200" marL="203200">
+              <a:spcAft>
+                <a:spcPts val="900"/>
+              </a:spcAft>
+              <a:buClr>
+                <a:srgbClr val="2B2A4A"/>
+              </a:buClr>
+              <a:buSzPct val="90000"/>
+              <a:buFont typeface="Arial"/>
+              <a:buChar char="–"/>
+            </a:pPr>
+            <a:r>
+              <a:rPr sz="1350" b="0" i="0">
+                <a:solidFill>
+                  <a:srgbClr val="201F33"/>
+                </a:solidFill>
+                <a:latin typeface="Calibri"/>
+              </a:rPr>
+              <a:t>Completed over approximately 5-6 weeks</a:t>
+            </a:r>
+          </a:p>
+          <a:p>
+            <a:pPr indent="-203200" marL="203200">
+              <a:spcAft>
+                <a:spcPts val="900"/>
+              </a:spcAft>
+              <a:buClr>
+                <a:srgbClr val="2B2A4A"/>
+              </a:buClr>
+              <a:buSzPct val="90000"/>
+              <a:buFont typeface="Arial"/>
+              <a:buChar char="–"/>
+            </a:pPr>
+            <a:r>
+              <a:rPr sz="1350" b="0" i="0">
+                <a:solidFill>
+                  <a:srgbClr val="201F33"/>
+                </a:solidFill>
+                <a:latin typeface="Calibri"/>
+              </a:rPr>
+              <a:t>Folio submission (development pages and the resolved design)</a:t>
+            </a:r>
+          </a:p>
+          <a:p>
+            <a:pPr indent="-203200" marL="203200">
+              <a:spcAft>
+                <a:spcPts val="900"/>
+              </a:spcAft>
+              <a:buClr>
+                <a:srgbClr val="2B2A4A"/>
+              </a:buClr>
+              <a:buSzPct val="90000"/>
+              <a:buFont typeface="Arial"/>
+              <a:buChar char="–"/>
+            </a:pPr>
+            <a:r>
+              <a:rPr sz="1350" b="0" i="0">
+                <a:solidFill>
+                  <a:srgbClr val="201F33"/>
+                </a:solidFill>
+                <a:latin typeface="Calibri"/>
+              </a:rPr>
+              <a:t>Individual work</a:t>
+            </a:r>
+          </a:p>
+          <a:p>
+            <a:pPr indent="-203200" marL="203200">
+              <a:spcAft>
+                <a:spcPts val="900"/>
+              </a:spcAft>
+              <a:buClr>
+                <a:srgbClr val="2B2A4A"/>
+              </a:buClr>
+              <a:buSzPct val="90000"/>
+              <a:buFont typeface="Arial"/>
+              <a:buChar char="●"/>
+            </a:pPr>
+            <a:r>
+              <a:rPr sz="1500" b="1" i="0">
+                <a:solidFill>
+                  <a:srgbClr val="24233E"/>
+                </a:solidFill>
+                <a:latin typeface="Calibri"/>
+              </a:rPr>
+              <a:t>Assessment Criteria (/70)</a:t>
+            </a:r>
+          </a:p>
+          <a:p>
+            <a:pPr indent="-203200" marL="203200">
+              <a:spcAft>
+                <a:spcPts val="900"/>
+              </a:spcAft>
+              <a:buClr>
+                <a:srgbClr val="2B2A4A"/>
+              </a:buClr>
+              <a:buSzPct val="90000"/>
+              <a:buFont typeface="Arial"/>
+              <a:buChar char="–"/>
+            </a:pPr>
+            <a:r>
+              <a:rPr sz="1350" b="0" i="0">
+                <a:solidFill>
+                  <a:srgbClr val="201F33"/>
+                </a:solidFill>
+                <a:latin typeface="Calibri"/>
+              </a:rPr>
+              <a:t>Breadth and quality of development across both concepts — 25 marks</a:t>
+            </a:r>
+          </a:p>
+          <a:p>
+            <a:pPr indent="-203200" marL="203200">
+              <a:spcAft>
+                <a:spcPts val="900"/>
+              </a:spcAft>
+              <a:buClr>
+                <a:srgbClr val="2B2A4A"/>
+              </a:buClr>
+              <a:buSzPct val="90000"/>
+              <a:buFont typeface="Arial"/>
+              <a:buChar char="–"/>
+            </a:pPr>
+            <a:r>
+              <a:rPr sz="1350" b="0" i="0">
+                <a:solidFill>
+                  <a:srgbClr val="201F33"/>
+                </a:solidFill>
+                <a:latin typeface="Calibri"/>
+              </a:rPr>
+              <a:t>Use of feedback to refine ideas — 10 marks</a:t>
+            </a:r>
+          </a:p>
+          <a:p>
+            <a:pPr indent="-203200" marL="203200">
+              <a:spcAft>
+                <a:spcPts val="900"/>
+              </a:spcAft>
+              <a:buClr>
+                <a:srgbClr val="2B2A4A"/>
+              </a:buClr>
+              <a:buSzPct val="90000"/>
+              <a:buFont typeface="Arial"/>
+              <a:buChar char="–"/>
+            </a:pPr>
+            <a:r>
+              <a:rPr sz="1350" b="0" i="0">
+                <a:solidFill>
+                  <a:srgbClr val="201F33"/>
+                </a:solidFill>
+                <a:latin typeface="Calibri"/>
+              </a:rPr>
+              <a:t>Justification of the selected direction — 10 marks</a:t>
+            </a:r>
+          </a:p>
+          <a:p>
+            <a:pPr indent="-203200" marL="203200">
+              <a:spcAft>
+                <a:spcPts val="900"/>
+              </a:spcAft>
+              <a:buClr>
+                <a:srgbClr val="2B2A4A"/>
+              </a:buClr>
+              <a:buSzPct val="90000"/>
+              <a:buFont typeface="Arial"/>
+              <a:buChar char="–"/>
+            </a:pPr>
+            <a:r>
+              <a:rPr sz="1350" b="0" i="0">
+                <a:solidFill>
+                  <a:srgbClr val="201F33"/>
+                </a:solidFill>
+                <a:latin typeface="Calibri"/>
+              </a:rPr>
+              <a:t>Quality and accuracy of the resolved design — 20 marks</a:t>
+            </a:r>
+          </a:p>
+          <a:p>
+            <a:pPr indent="-203200" marL="203200">
+              <a:spcAft>
+                <a:spcPts val="900"/>
+              </a:spcAft>
+              <a:buClr>
+                <a:srgbClr val="2B2A4A"/>
+              </a:buClr>
+              <a:buSzPct val="90000"/>
+              <a:buFont typeface="Arial"/>
+              <a:buChar char="–"/>
+            </a:pPr>
+            <a:r>
+              <a:rPr sz="1350" b="0" i="0">
+                <a:solidFill>
+                  <a:srgbClr val="201F33"/>
+                </a:solidFill>
+                <a:latin typeface="Calibri"/>
+              </a:rPr>
+              <a:t>Folio documentation — 5 marks</a:t>
+            </a:r>
+          </a:p>
+        </p:txBody>
+      </p:sp>
+      <p:sp>
+        <p:nvSpPr>
+          <p:cNvPr id="5" name="Oval 4"/>
+          <p:cNvSpPr/>
+          <p:nvPr/>
+        </p:nvSpPr>
+        <p:spPr>
+          <a:xfrm>
+            <a:off x="10881360" y="5943600"/>
+            <a:ext cx="1005840" cy="1005840"/>
+          </a:xfrm>
+          <a:prstGeom prst="ellipse">
+            <a:avLst/>
+          </a:prstGeom>
+          <a:solidFill>
+            <a:srgbClr val="E6C3D3"/>
+          </a:solidFill>
+          <a:ln>
+            <a:noFill/>
+          </a:ln>
+          <a:effectLst/>
+        </p:spPr>
+        <p:style>
+          <a:lnRef idx="1">
+            <a:schemeClr val="accent1"/>
+          </a:lnRef>
+          <a:fillRef idx="3">
+            <a:schemeClr val="accent1"/>
+          </a:fillRef>
+          <a:effectRef idx="2">
+            <a:schemeClr val="accent1"/>
+          </a:effectRef>
+          <a:fontRef idx="minor">
+            <a:schemeClr val="lt1"/>
+          </a:fontRef>
+        </p:style>
+        <p:txBody>
+          <a:bodyPr rtlCol="0" anchor="ctr"/>
+          <a:lstStyle/>
+          <a:p>
+            <a:pPr algn="ctr"/>
           </a:p>
         </p:txBody>
       </p:sp>
@@ -10322,6 +11776,1067 @@
 </p:sld>
 </file>
 
+<file path=ppt/slides/slide30.xml><?xml version="1.0" encoding="utf-8"?>
+<p:sld xmlns:a="http://schemas.openxmlformats.org/drawingml/2006/main" xmlns:p="http://schemas.openxmlformats.org/presentationml/2006/main" xmlns:r="http://schemas.openxmlformats.org/officeDocument/2006/relationships">
+  <p:cSld>
+    <p:bg>
+      <p:bgPr>
+        <a:solidFill>
+          <a:srgbClr val="F8F6FB"/>
+        </a:solidFill>
+        <a:effectLst/>
+      </p:bgPr>
+    </p:bg>
+    <p:spTree>
+      <p:nvGrpSpPr>
+        <p:cNvPr id="1" name=""/>
+        <p:cNvGrpSpPr/>
+        <p:nvPr/>
+      </p:nvGrpSpPr>
+      <p:grpSpPr/>
+      <p:sp>
+        <p:nvSpPr>
+          <p:cNvPr id="2" name="Rounded Rectangle 1"/>
+          <p:cNvSpPr/>
+          <p:nvPr/>
+        </p:nvSpPr>
+        <p:spPr>
+          <a:xfrm>
+            <a:off x="685800" y="502920"/>
+            <a:ext cx="3291840" cy="457200"/>
+          </a:xfrm>
+          <a:prstGeom prst="roundRect">
+            <a:avLst>
+              <a:gd name="adj" fmla="val 50000"/>
+            </a:avLst>
+          </a:prstGeom>
+          <a:solidFill>
+            <a:srgbClr val="2B2A4A"/>
+          </a:solidFill>
+          <a:ln>
+            <a:noFill/>
+          </a:ln>
+          <a:effectLst/>
+        </p:spPr>
+        <p:style>
+          <a:lnRef idx="1">
+            <a:schemeClr val="accent1"/>
+          </a:lnRef>
+          <a:fillRef idx="3">
+            <a:schemeClr val="accent1"/>
+          </a:fillRef>
+          <a:effectRef idx="2">
+            <a:schemeClr val="accent1"/>
+          </a:effectRef>
+          <a:fontRef idx="minor">
+            <a:schemeClr val="lt1"/>
+          </a:fontRef>
+        </p:style>
+        <p:txBody>
+          <a:bodyPr rtlCol="0" anchor="ctr" wrap="none" lIns="50800" rIns="50800"/>
+          <a:lstStyle/>
+          <a:p>
+            <a:pPr algn="ctr"/>
+            <a:r>
+              <a:rPr sz="1100" b="1">
+                <a:solidFill>
+                  <a:srgbClr val="FFFFFF"/>
+                </a:solidFill>
+                <a:latin typeface="Calibri"/>
+              </a:rPr>
+              <a:t>SAC BRIEFING</a:t>
+            </a:r>
+          </a:p>
+        </p:txBody>
+      </p:sp>
+      <p:sp>
+        <p:nvSpPr>
+          <p:cNvPr id="3" name="TextBox 2"/>
+          <p:cNvSpPr txBox="1"/>
+          <p:nvPr/>
+        </p:nvSpPr>
+        <p:spPr>
+          <a:xfrm>
+            <a:off x="685800" y="1051560"/>
+            <a:ext cx="10607040" cy="822960"/>
+          </a:xfrm>
+          <a:prstGeom prst="rect">
+            <a:avLst/>
+          </a:prstGeom>
+          <a:noFill/>
+        </p:spPr>
+        <p:txBody>
+          <a:bodyPr wrap="square" anchor="t">
+            <a:spAutoFit/>
+          </a:bodyPr>
+          <a:lstStyle/>
+          <a:p>
+            <a:pPr algn="l"/>
+            <a:r>
+              <a:rPr sz="2700" b="1" i="0">
+                <a:solidFill>
+                  <a:srgbClr val="201F33"/>
+                </a:solidFill>
+                <a:latin typeface="Cambria"/>
+              </a:rPr>
+              <a:t>Outcome 2 (AOS 2) — Evaluation, Refinement and Presentation</a:t>
+            </a:r>
+          </a:p>
+        </p:txBody>
+      </p:sp>
+      <p:sp>
+        <p:nvSpPr>
+          <p:cNvPr id="4" name="Rounded Rectangle 3"/>
+          <p:cNvSpPr/>
+          <p:nvPr/>
+        </p:nvSpPr>
+        <p:spPr>
+          <a:xfrm>
+            <a:off x="685800" y="1874519"/>
+            <a:ext cx="10607040" cy="4526280"/>
+          </a:xfrm>
+          <a:prstGeom prst="roundRect">
+            <a:avLst>
+              <a:gd name="adj" fmla="val 6000"/>
+            </a:avLst>
+          </a:prstGeom>
+          <a:solidFill>
+            <a:srgbClr val="E9E9EC"/>
+          </a:solidFill>
+          <a:ln>
+            <a:noFill/>
+          </a:ln>
+          <a:effectLst/>
+        </p:spPr>
+        <p:style>
+          <a:lnRef idx="1">
+            <a:schemeClr val="accent1"/>
+          </a:lnRef>
+          <a:fillRef idx="3">
+            <a:schemeClr val="accent1"/>
+          </a:fillRef>
+          <a:effectRef idx="2">
+            <a:schemeClr val="accent1"/>
+          </a:effectRef>
+          <a:fontRef idx="minor">
+            <a:schemeClr val="lt1"/>
+          </a:fontRef>
+        </p:style>
+        <p:txBody>
+          <a:bodyPr rtlCol="0" anchor="ctr" lIns="330200" rIns="330200" tIns="254000" bIns="254000" wrap="square"/>
+          <a:lstStyle/>
+          <a:p>
+            <a:pPr algn="ctr" indent="-203200" marL="203200">
+              <a:spcAft>
+                <a:spcPts val="900"/>
+              </a:spcAft>
+              <a:buClr>
+                <a:srgbClr val="2B2A4A"/>
+              </a:buClr>
+              <a:buSzPct val="90000"/>
+              <a:buFont typeface="Arial"/>
+              <a:buChar char="●"/>
+            </a:pPr>
+            <a:r>
+              <a:rPr sz="1500" b="1" i="0">
+                <a:solidFill>
+                  <a:srgbClr val="24233E"/>
+                </a:solidFill>
+                <a:latin typeface="Calibri"/>
+              </a:rPr>
+              <a:t>Task</a:t>
+            </a:r>
+          </a:p>
+          <a:p>
+            <a:pPr indent="-203200" marL="203200">
+              <a:spcAft>
+                <a:spcPts val="900"/>
+              </a:spcAft>
+              <a:buClr>
+                <a:srgbClr val="2B2A4A"/>
+              </a:buClr>
+              <a:buSzPct val="90000"/>
+              <a:buFont typeface="Arial"/>
+              <a:buChar char="–"/>
+            </a:pPr>
+            <a:r>
+              <a:rPr sz="1350" b="0" i="0">
+                <a:solidFill>
+                  <a:srgbClr val="201F33"/>
+                </a:solidFill>
+                <a:latin typeface="Calibri"/>
+              </a:rPr>
+              <a:t>Refine your resolved design to a professional presentation standard using appropriate methods. Write an evaluation of approximately 600-800 words assessing the final design against your original brief (purpose, audience, constraints, obligatory fields).</a:t>
+            </a:r>
+          </a:p>
+          <a:p>
+            <a:pPr indent="-203200" marL="203200">
+              <a:spcAft>
+                <a:spcPts val="900"/>
+              </a:spcAft>
+              <a:buClr>
+                <a:srgbClr val="2B2A4A"/>
+              </a:buClr>
+              <a:buSzPct val="90000"/>
+              <a:buFont typeface="Arial"/>
+              <a:buChar char="●"/>
+            </a:pPr>
+            <a:r>
+              <a:rPr sz="1500" b="1" i="0">
+                <a:solidFill>
+                  <a:srgbClr val="24233E"/>
+                </a:solidFill>
+                <a:latin typeface="Calibri"/>
+              </a:rPr>
+              <a:t>Conditions</a:t>
+            </a:r>
+          </a:p>
+          <a:p>
+            <a:pPr indent="-203200" marL="203200">
+              <a:spcAft>
+                <a:spcPts val="900"/>
+              </a:spcAft>
+              <a:buClr>
+                <a:srgbClr val="2B2A4A"/>
+              </a:buClr>
+              <a:buSzPct val="90000"/>
+              <a:buFont typeface="Arial"/>
+              <a:buChar char="–"/>
+            </a:pPr>
+            <a:r>
+              <a:rPr sz="1350" b="0" i="0">
+                <a:solidFill>
+                  <a:srgbClr val="201F33"/>
+                </a:solidFill>
+                <a:latin typeface="Calibri"/>
+              </a:rPr>
+              <a:t>Completed over approximately 3-4 weeks</a:t>
+            </a:r>
+          </a:p>
+          <a:p>
+            <a:pPr indent="-203200" marL="203200">
+              <a:spcAft>
+                <a:spcPts val="900"/>
+              </a:spcAft>
+              <a:buClr>
+                <a:srgbClr val="2B2A4A"/>
+              </a:buClr>
+              <a:buSzPct val="90000"/>
+              <a:buFont typeface="Arial"/>
+              <a:buChar char="–"/>
+            </a:pPr>
+            <a:r>
+              <a:rPr sz="1350" b="0" i="0">
+                <a:solidFill>
+                  <a:srgbClr val="201F33"/>
+                </a:solidFill>
+                <a:latin typeface="Calibri"/>
+              </a:rPr>
+              <a:t>Folio and written evaluation submission</a:t>
+            </a:r>
+          </a:p>
+          <a:p>
+            <a:pPr indent="-203200" marL="203200">
+              <a:spcAft>
+                <a:spcPts val="900"/>
+              </a:spcAft>
+              <a:buClr>
+                <a:srgbClr val="2B2A4A"/>
+              </a:buClr>
+              <a:buSzPct val="90000"/>
+              <a:buFont typeface="Arial"/>
+              <a:buChar char="–"/>
+            </a:pPr>
+            <a:r>
+              <a:rPr sz="1350" b="0" i="0">
+                <a:solidFill>
+                  <a:srgbClr val="201F33"/>
+                </a:solidFill>
+                <a:latin typeface="Calibri"/>
+              </a:rPr>
+              <a:t>Individual work</a:t>
+            </a:r>
+          </a:p>
+          <a:p>
+            <a:pPr indent="-203200" marL="203200">
+              <a:spcAft>
+                <a:spcPts val="900"/>
+              </a:spcAft>
+              <a:buClr>
+                <a:srgbClr val="2B2A4A"/>
+              </a:buClr>
+              <a:buSzPct val="90000"/>
+              <a:buFont typeface="Arial"/>
+              <a:buChar char="●"/>
+            </a:pPr>
+            <a:r>
+              <a:rPr sz="1500" b="1" i="0">
+                <a:solidFill>
+                  <a:srgbClr val="24233E"/>
+                </a:solidFill>
+                <a:latin typeface="Calibri"/>
+              </a:rPr>
+              <a:t>Assessment Criteria (/50)</a:t>
+            </a:r>
+          </a:p>
+          <a:p>
+            <a:pPr indent="-203200" marL="203200">
+              <a:spcAft>
+                <a:spcPts val="900"/>
+              </a:spcAft>
+              <a:buClr>
+                <a:srgbClr val="2B2A4A"/>
+              </a:buClr>
+              <a:buSzPct val="90000"/>
+              <a:buFont typeface="Arial"/>
+              <a:buChar char="–"/>
+            </a:pPr>
+            <a:r>
+              <a:rPr sz="1350" b="0" i="0">
+                <a:solidFill>
+                  <a:srgbClr val="201F33"/>
+                </a:solidFill>
+                <a:latin typeface="Calibri"/>
+              </a:rPr>
+              <a:t>Presentation standard: accuracy, rendering, craftsmanship — 20 marks</a:t>
+            </a:r>
+          </a:p>
+          <a:p>
+            <a:pPr indent="-203200" marL="203200">
+              <a:spcAft>
+                <a:spcPts val="900"/>
+              </a:spcAft>
+              <a:buClr>
+                <a:srgbClr val="2B2A4A"/>
+              </a:buClr>
+              <a:buSzPct val="90000"/>
+              <a:buFont typeface="Arial"/>
+              <a:buChar char="–"/>
+            </a:pPr>
+            <a:r>
+              <a:rPr sz="1350" b="0" i="0">
+                <a:solidFill>
+                  <a:srgbClr val="201F33"/>
+                </a:solidFill>
+                <a:latin typeface="Calibri"/>
+              </a:rPr>
+              <a:t>Quality and balance of the written evaluation — 20 marks</a:t>
+            </a:r>
+          </a:p>
+          <a:p>
+            <a:pPr indent="-203200" marL="203200">
+              <a:spcAft>
+                <a:spcPts val="900"/>
+              </a:spcAft>
+              <a:buClr>
+                <a:srgbClr val="2B2A4A"/>
+              </a:buClr>
+              <a:buSzPct val="90000"/>
+              <a:buFont typeface="Arial"/>
+              <a:buChar char="–"/>
+            </a:pPr>
+            <a:r>
+              <a:rPr sz="1350" b="0" i="0">
+                <a:solidFill>
+                  <a:srgbClr val="201F33"/>
+                </a:solidFill>
+                <a:latin typeface="Calibri"/>
+              </a:rPr>
+              <a:t>Specific reference to brief criteria — 10 marks</a:t>
+            </a:r>
+          </a:p>
+        </p:txBody>
+      </p:sp>
+      <p:sp>
+        <p:nvSpPr>
+          <p:cNvPr id="5" name="Oval 4"/>
+          <p:cNvSpPr/>
+          <p:nvPr/>
+        </p:nvSpPr>
+        <p:spPr>
+          <a:xfrm>
+            <a:off x="10881360" y="5943600"/>
+            <a:ext cx="1005840" cy="1005840"/>
+          </a:xfrm>
+          <a:prstGeom prst="ellipse">
+            <a:avLst/>
+          </a:prstGeom>
+          <a:solidFill>
+            <a:srgbClr val="E6C3D3"/>
+          </a:solidFill>
+          <a:ln>
+            <a:noFill/>
+          </a:ln>
+          <a:effectLst/>
+        </p:spPr>
+        <p:style>
+          <a:lnRef idx="1">
+            <a:schemeClr val="accent1"/>
+          </a:lnRef>
+          <a:fillRef idx="3">
+            <a:schemeClr val="accent1"/>
+          </a:fillRef>
+          <a:effectRef idx="2">
+            <a:schemeClr val="accent1"/>
+          </a:effectRef>
+          <a:fontRef idx="minor">
+            <a:schemeClr val="lt1"/>
+          </a:fontRef>
+        </p:style>
+        <p:txBody>
+          <a:bodyPr rtlCol="0" anchor="ctr"/>
+          <a:lstStyle/>
+          <a:p>
+            <a:pPr algn="ctr"/>
+          </a:p>
+        </p:txBody>
+      </p:sp>
+    </p:spTree>
+  </p:cSld>
+  <p:clrMapOvr>
+    <a:masterClrMapping/>
+  </p:clrMapOvr>
+</p:sld>
+</file>
+
+<file path=ppt/slides/slide31.xml><?xml version="1.0" encoding="utf-8"?>
+<p:sld xmlns:a="http://schemas.openxmlformats.org/drawingml/2006/main" xmlns:p="http://schemas.openxmlformats.org/presentationml/2006/main" xmlns:r="http://schemas.openxmlformats.org/officeDocument/2006/relationships">
+  <p:cSld>
+    <p:bg>
+      <p:bgPr>
+        <a:solidFill>
+          <a:srgbClr val="C97B9E"/>
+        </a:solidFill>
+        <a:effectLst/>
+      </p:bgPr>
+    </p:bg>
+    <p:spTree>
+      <p:nvGrpSpPr>
+        <p:cNvPr id="1" name=""/>
+        <p:cNvGrpSpPr/>
+        <p:nvPr/>
+      </p:nvGrpSpPr>
+      <p:grpSpPr/>
+      <p:sp>
+        <p:nvSpPr>
+          <p:cNvPr id="2" name="Oval 1"/>
+          <p:cNvSpPr/>
+          <p:nvPr/>
+        </p:nvSpPr>
+        <p:spPr>
+          <a:xfrm>
+            <a:off x="-914400" y="-914400"/>
+            <a:ext cx="2103120" cy="2103120"/>
+          </a:xfrm>
+          <a:prstGeom prst="ellipse">
+            <a:avLst/>
+          </a:prstGeom>
+          <a:solidFill>
+            <a:srgbClr val="B06C8B"/>
+          </a:solidFill>
+          <a:ln>
+            <a:noFill/>
+          </a:ln>
+          <a:effectLst/>
+        </p:spPr>
+        <p:style>
+          <a:lnRef idx="1">
+            <a:schemeClr val="accent1"/>
+          </a:lnRef>
+          <a:fillRef idx="3">
+            <a:schemeClr val="accent1"/>
+          </a:fillRef>
+          <a:effectRef idx="2">
+            <a:schemeClr val="accent1"/>
+          </a:effectRef>
+          <a:fontRef idx="minor">
+            <a:schemeClr val="lt1"/>
+          </a:fontRef>
+        </p:style>
+        <p:txBody>
+          <a:bodyPr rtlCol="0" anchor="ctr"/>
+          <a:lstStyle/>
+          <a:p>
+            <a:pPr algn="ctr"/>
+          </a:p>
+        </p:txBody>
+      </p:sp>
+      <p:sp>
+        <p:nvSpPr>
+          <p:cNvPr id="3" name="Oval 2"/>
+          <p:cNvSpPr/>
+          <p:nvPr/>
+        </p:nvSpPr>
+        <p:spPr>
+          <a:xfrm>
+            <a:off x="11064240" y="5852160"/>
+            <a:ext cx="1737360" cy="1737360"/>
+          </a:xfrm>
+          <a:prstGeom prst="ellipse">
+            <a:avLst/>
+          </a:prstGeom>
+          <a:solidFill>
+            <a:srgbClr val="B06C8B"/>
+          </a:solidFill>
+          <a:ln>
+            <a:noFill/>
+          </a:ln>
+          <a:effectLst/>
+        </p:spPr>
+        <p:style>
+          <a:lnRef idx="1">
+            <a:schemeClr val="accent1"/>
+          </a:lnRef>
+          <a:fillRef idx="3">
+            <a:schemeClr val="accent1"/>
+          </a:fillRef>
+          <a:effectRef idx="2">
+            <a:schemeClr val="accent1"/>
+          </a:effectRef>
+          <a:fontRef idx="minor">
+            <a:schemeClr val="lt1"/>
+          </a:fontRef>
+        </p:style>
+        <p:txBody>
+          <a:bodyPr rtlCol="0" anchor="ctr"/>
+          <a:lstStyle/>
+          <a:p>
+            <a:pPr algn="ctr"/>
+          </a:p>
+        </p:txBody>
+      </p:sp>
+      <p:sp>
+        <p:nvSpPr>
+          <p:cNvPr id="4" name="Rounded Rectangle 3"/>
+          <p:cNvSpPr/>
+          <p:nvPr/>
+        </p:nvSpPr>
+        <p:spPr>
+          <a:xfrm>
+            <a:off x="685800" y="457200"/>
+            <a:ext cx="1431036" cy="502920"/>
+          </a:xfrm>
+          <a:prstGeom prst="roundRect">
+            <a:avLst>
+              <a:gd name="adj" fmla="val 50000"/>
+            </a:avLst>
+          </a:prstGeom>
+          <a:solidFill>
+            <a:srgbClr val="FFFFFF"/>
+          </a:solidFill>
+          <a:ln>
+            <a:noFill/>
+          </a:ln>
+          <a:effectLst/>
+        </p:spPr>
+        <p:style>
+          <a:lnRef idx="1">
+            <a:schemeClr val="accent1"/>
+          </a:lnRef>
+          <a:fillRef idx="3">
+            <a:schemeClr val="accent1"/>
+          </a:fillRef>
+          <a:effectRef idx="2">
+            <a:schemeClr val="accent1"/>
+          </a:effectRef>
+          <a:fontRef idx="minor">
+            <a:schemeClr val="lt1"/>
+          </a:fontRef>
+        </p:style>
+        <p:txBody>
+          <a:bodyPr rtlCol="0" anchor="ctr"/>
+          <a:lstStyle/>
+          <a:p>
+            <a:pPr algn="ctr"/>
+            <a:r>
+              <a:rPr b="1" sz="1400">
+                <a:solidFill>
+                  <a:srgbClr val="824F66"/>
+                </a:solidFill>
+                <a:latin typeface="Calibri"/>
+              </a:rPr>
+              <a:t>DISCUSS</a:t>
+            </a:r>
+          </a:p>
+        </p:txBody>
+      </p:sp>
+      <p:sp>
+        <p:nvSpPr>
+          <p:cNvPr id="5" name="TextBox 4"/>
+          <p:cNvSpPr txBox="1"/>
+          <p:nvPr/>
+        </p:nvSpPr>
+        <p:spPr>
+          <a:xfrm>
+            <a:off x="685800" y="1143000"/>
+            <a:ext cx="10607040" cy="914400"/>
+          </a:xfrm>
+          <a:prstGeom prst="rect">
+            <a:avLst/>
+          </a:prstGeom>
+          <a:noFill/>
+        </p:spPr>
+        <p:txBody>
+          <a:bodyPr wrap="square" anchor="t">
+            <a:spAutoFit/>
+          </a:bodyPr>
+          <a:lstStyle/>
+          <a:p>
+            <a:pPr algn="l"/>
+            <a:r>
+              <a:rPr sz="3000" b="1" i="0">
+                <a:solidFill>
+                  <a:srgbClr val="FFFFFF"/>
+                </a:solidFill>
+                <a:latin typeface="Cambria"/>
+              </a:rPr>
+              <a:t>Exam Strategy Share</a:t>
+            </a:r>
+          </a:p>
+        </p:txBody>
+      </p:sp>
+      <p:sp>
+        <p:nvSpPr>
+          <p:cNvPr id="6" name="Rounded Rectangle 5"/>
+          <p:cNvSpPr/>
+          <p:nvPr/>
+        </p:nvSpPr>
+        <p:spPr>
+          <a:xfrm>
+            <a:off x="685800" y="2148840"/>
+            <a:ext cx="960120" cy="411480"/>
+          </a:xfrm>
+          <a:prstGeom prst="roundRect">
+            <a:avLst>
+              <a:gd name="adj" fmla="val 50000"/>
+            </a:avLst>
+          </a:prstGeom>
+          <a:solidFill>
+            <a:srgbClr val="965C76"/>
+          </a:solidFill>
+          <a:ln>
+            <a:noFill/>
+          </a:ln>
+          <a:effectLst/>
+        </p:spPr>
+        <p:style>
+          <a:lnRef idx="1">
+            <a:schemeClr val="accent1"/>
+          </a:lnRef>
+          <a:fillRef idx="3">
+            <a:schemeClr val="accent1"/>
+          </a:fillRef>
+          <a:effectRef idx="2">
+            <a:schemeClr val="accent1"/>
+          </a:effectRef>
+          <a:fontRef idx="minor">
+            <a:schemeClr val="lt1"/>
+          </a:fontRef>
+        </p:style>
+        <p:txBody>
+          <a:bodyPr rtlCol="0" anchor="ctr" wrap="none" lIns="50800" rIns="50800"/>
+          <a:lstStyle/>
+          <a:p>
+            <a:pPr algn="ctr"/>
+            <a:r>
+              <a:rPr sz="1050" b="1">
+                <a:solidFill>
+                  <a:srgbClr val="FFFFFF"/>
+                </a:solidFill>
+                <a:latin typeface="Calibri"/>
+              </a:rPr>
+              <a:t>5 MIN</a:t>
+            </a:r>
+          </a:p>
+        </p:txBody>
+      </p:sp>
+      <p:sp>
+        <p:nvSpPr>
+          <p:cNvPr id="7" name="Rounded Rectangle 6"/>
+          <p:cNvSpPr/>
+          <p:nvPr/>
+        </p:nvSpPr>
+        <p:spPr>
+          <a:xfrm>
+            <a:off x="1783080" y="2148840"/>
+            <a:ext cx="2066543" cy="411480"/>
+          </a:xfrm>
+          <a:prstGeom prst="roundRect">
+            <a:avLst>
+              <a:gd name="adj" fmla="val 50000"/>
+            </a:avLst>
+          </a:prstGeom>
+          <a:solidFill>
+            <a:srgbClr val="965C76"/>
+          </a:solidFill>
+          <a:ln>
+            <a:noFill/>
+          </a:ln>
+          <a:effectLst/>
+        </p:spPr>
+        <p:style>
+          <a:lnRef idx="1">
+            <a:schemeClr val="accent1"/>
+          </a:lnRef>
+          <a:fillRef idx="3">
+            <a:schemeClr val="accent1"/>
+          </a:fillRef>
+          <a:effectRef idx="2">
+            <a:schemeClr val="accent1"/>
+          </a:effectRef>
+          <a:fontRef idx="minor">
+            <a:schemeClr val="lt1"/>
+          </a:fontRef>
+        </p:style>
+        <p:txBody>
+          <a:bodyPr rtlCol="0" anchor="ctr" wrap="none" lIns="50800" rIns="50800"/>
+          <a:lstStyle/>
+          <a:p>
+            <a:pPr algn="ctr"/>
+            <a:r>
+              <a:rPr sz="1050" b="1">
+                <a:solidFill>
+                  <a:srgbClr val="FFFFFF"/>
+                </a:solidFill>
+                <a:latin typeface="Calibri"/>
+              </a:rPr>
+              <a:t>THINK-PAIR-SHARE</a:t>
+            </a:r>
+          </a:p>
+        </p:txBody>
+      </p:sp>
+      <p:sp>
+        <p:nvSpPr>
+          <p:cNvPr id="8" name="Rounded Rectangle 7"/>
+          <p:cNvSpPr/>
+          <p:nvPr/>
+        </p:nvSpPr>
+        <p:spPr>
+          <a:xfrm>
+            <a:off x="685800" y="2788920"/>
+            <a:ext cx="10607040" cy="3246120"/>
+          </a:xfrm>
+          <a:prstGeom prst="roundRect">
+            <a:avLst>
+              <a:gd name="adj" fmla="val 8000"/>
+            </a:avLst>
+          </a:prstGeom>
+          <a:solidFill>
+            <a:srgbClr val="FFFFFF"/>
+          </a:solidFill>
+          <a:ln>
+            <a:noFill/>
+          </a:ln>
+          <a:effectLst/>
+        </p:spPr>
+        <p:style>
+          <a:lnRef idx="1">
+            <a:schemeClr val="accent1"/>
+          </a:lnRef>
+          <a:fillRef idx="3">
+            <a:schemeClr val="accent1"/>
+          </a:fillRef>
+          <a:effectRef idx="2">
+            <a:schemeClr val="accent1"/>
+          </a:effectRef>
+          <a:fontRef idx="minor">
+            <a:schemeClr val="lt1"/>
+          </a:fontRef>
+        </p:style>
+        <p:txBody>
+          <a:bodyPr rtlCol="0" anchor="ctr" lIns="304800" rIns="304800" tIns="203200" bIns="203200" wrap="square"/>
+          <a:lstStyle/>
+          <a:p>
+            <a:pPr algn="ctr" indent="-203200" marL="203200">
+              <a:spcAft>
+                <a:spcPts val="900"/>
+              </a:spcAft>
+              <a:buClr>
+                <a:srgbClr val="C97B9E"/>
+              </a:buClr>
+              <a:buSzPct val="90000"/>
+              <a:buFont typeface="Arial"/>
+              <a:buChar char="●"/>
+            </a:pPr>
+            <a:r>
+              <a:rPr sz="1450" b="0" i="0">
+                <a:solidFill>
+                  <a:srgbClr val="201F33"/>
+                </a:solidFill>
+                <a:latin typeface="Calibri"/>
+              </a:rPr>
+              <a:t>Think: what is your biggest time-management risk in the Units 3 &amp; 4 exam?</a:t>
+            </a:r>
+          </a:p>
+          <a:p>
+            <a:pPr indent="-203200" marL="203200">
+              <a:spcAft>
+                <a:spcPts val="900"/>
+              </a:spcAft>
+              <a:buClr>
+                <a:srgbClr val="C97B9E"/>
+              </a:buClr>
+              <a:buSzPct val="90000"/>
+              <a:buFont typeface="Arial"/>
+              <a:buChar char="●"/>
+            </a:pPr>
+            <a:r>
+              <a:rPr sz="1450" b="0" i="0">
+                <a:solidFill>
+                  <a:srgbClr val="201F33"/>
+                </a:solidFill>
+                <a:latin typeface="Calibri"/>
+              </a:rPr>
+              <a:t>Pair: share strategies for managing that risk with a partner.</a:t>
+            </a:r>
+          </a:p>
+          <a:p>
+            <a:pPr indent="-203200" marL="203200">
+              <a:spcAft>
+                <a:spcPts val="900"/>
+              </a:spcAft>
+              <a:buClr>
+                <a:srgbClr val="C97B9E"/>
+              </a:buClr>
+              <a:buSzPct val="90000"/>
+              <a:buFont typeface="Arial"/>
+              <a:buChar char="●"/>
+            </a:pPr>
+            <a:r>
+              <a:rPr sz="1450" b="0" i="0">
+                <a:solidFill>
+                  <a:srgbClr val="201F33"/>
+                </a:solidFill>
+                <a:latin typeface="Calibri"/>
+              </a:rPr>
+              <a:t>Share: the class compiles a shared list of time-management tips.</a:t>
+            </a:r>
+          </a:p>
+        </p:txBody>
+      </p:sp>
+      <p:sp>
+        <p:nvSpPr>
+          <p:cNvPr id="9" name="TextBox 8"/>
+          <p:cNvSpPr txBox="1"/>
+          <p:nvPr/>
+        </p:nvSpPr>
+        <p:spPr>
+          <a:xfrm>
+            <a:off x="685800" y="6217920"/>
+            <a:ext cx="10607040" cy="502920"/>
+          </a:xfrm>
+          <a:prstGeom prst="rect">
+            <a:avLst/>
+          </a:prstGeom>
+          <a:noFill/>
+        </p:spPr>
+        <p:txBody>
+          <a:bodyPr wrap="square" anchor="t">
+            <a:spAutoFit/>
+          </a:bodyPr>
+          <a:lstStyle/>
+          <a:p>
+            <a:pPr algn="l"/>
+            <a:r>
+              <a:rPr sz="1250" b="0" i="1">
+                <a:solidFill>
+                  <a:srgbClr val="FFFFFF"/>
+                </a:solidFill>
+                <a:latin typeface="Calibri"/>
+              </a:rPr>
+              <a:t>Debrief: Time-boxing each question in practice exams makes pacing automatic.</a:t>
+            </a:r>
+          </a:p>
+        </p:txBody>
+      </p:sp>
+    </p:spTree>
+  </p:cSld>
+  <p:clrMapOvr>
+    <a:masterClrMapping/>
+  </p:clrMapOvr>
+</p:sld>
+</file>
+
+<file path=ppt/slides/slide32.xml><?xml version="1.0" encoding="utf-8"?>
+<p:sld xmlns:a="http://schemas.openxmlformats.org/drawingml/2006/main" xmlns:p="http://schemas.openxmlformats.org/presentationml/2006/main" xmlns:r="http://schemas.openxmlformats.org/officeDocument/2006/relationships">
+  <p:cSld>
+    <p:bg>
+      <p:bgPr>
+        <a:solidFill>
+          <a:srgbClr val="2B2A4A"/>
+        </a:solidFill>
+        <a:effectLst/>
+      </p:bgPr>
+    </p:bg>
+    <p:spTree>
+      <p:nvGrpSpPr>
+        <p:cNvPr id="1" name=""/>
+        <p:cNvGrpSpPr/>
+        <p:nvPr/>
+      </p:nvGrpSpPr>
+      <p:grpSpPr/>
+      <p:sp>
+        <p:nvSpPr>
+          <p:cNvPr id="2" name="Oval 1"/>
+          <p:cNvSpPr/>
+          <p:nvPr/>
+        </p:nvSpPr>
+        <p:spPr>
+          <a:xfrm>
+            <a:off x="-1097280" y="4114800"/>
+            <a:ext cx="3108960" cy="3108960"/>
+          </a:xfrm>
+          <a:prstGeom prst="ellipse">
+            <a:avLst/>
+          </a:prstGeom>
+          <a:solidFill>
+            <a:srgbClr val="252441"/>
+          </a:solidFill>
+          <a:ln>
+            <a:noFill/>
+          </a:ln>
+          <a:effectLst/>
+        </p:spPr>
+        <p:style>
+          <a:lnRef idx="1">
+            <a:schemeClr val="accent1"/>
+          </a:lnRef>
+          <a:fillRef idx="3">
+            <a:schemeClr val="accent1"/>
+          </a:fillRef>
+          <a:effectRef idx="2">
+            <a:schemeClr val="accent1"/>
+          </a:effectRef>
+          <a:fontRef idx="minor">
+            <a:schemeClr val="lt1"/>
+          </a:fontRef>
+        </p:style>
+        <p:txBody>
+          <a:bodyPr rtlCol="0" anchor="ctr"/>
+          <a:lstStyle/>
+          <a:p>
+            <a:pPr algn="ctr"/>
+          </a:p>
+        </p:txBody>
+      </p:sp>
+      <p:sp>
+        <p:nvSpPr>
+          <p:cNvPr id="3" name="Oval 2"/>
+          <p:cNvSpPr/>
+          <p:nvPr/>
+        </p:nvSpPr>
+        <p:spPr>
+          <a:xfrm>
+            <a:off x="9875520" y="-1188720"/>
+            <a:ext cx="2743200" cy="2743200"/>
+          </a:xfrm>
+          <a:prstGeom prst="ellipse">
+            <a:avLst/>
+          </a:prstGeom>
+          <a:solidFill>
+            <a:srgbClr val="D9A441"/>
+          </a:solidFill>
+          <a:ln>
+            <a:noFill/>
+          </a:ln>
+          <a:effectLst/>
+        </p:spPr>
+        <p:style>
+          <a:lnRef idx="1">
+            <a:schemeClr val="accent1"/>
+          </a:lnRef>
+          <a:fillRef idx="3">
+            <a:schemeClr val="accent1"/>
+          </a:fillRef>
+          <a:effectRef idx="2">
+            <a:schemeClr val="accent1"/>
+          </a:effectRef>
+          <a:fontRef idx="minor">
+            <a:schemeClr val="lt1"/>
+          </a:fontRef>
+        </p:style>
+        <p:txBody>
+          <a:bodyPr rtlCol="0" anchor="ctr"/>
+          <a:lstStyle/>
+          <a:p>
+            <a:pPr algn="ctr"/>
+          </a:p>
+        </p:txBody>
+      </p:sp>
+      <p:sp>
+        <p:nvSpPr>
+          <p:cNvPr id="4" name="Rounded Rectangle 3"/>
+          <p:cNvSpPr/>
+          <p:nvPr/>
+        </p:nvSpPr>
+        <p:spPr>
+          <a:xfrm>
+            <a:off x="1920240" y="2286000"/>
+            <a:ext cx="8321040" cy="2377440"/>
+          </a:xfrm>
+          <a:prstGeom prst="roundRect">
+            <a:avLst>
+              <a:gd name="adj" fmla="val 20000"/>
+            </a:avLst>
+          </a:prstGeom>
+          <a:solidFill>
+            <a:srgbClr val="FFFFFF"/>
+          </a:solidFill>
+          <a:ln>
+            <a:noFill/>
+          </a:ln>
+          <a:effectLst/>
+        </p:spPr>
+        <p:style>
+          <a:lnRef idx="1">
+            <a:schemeClr val="accent1"/>
+          </a:lnRef>
+          <a:fillRef idx="3">
+            <a:schemeClr val="accent1"/>
+          </a:fillRef>
+          <a:effectRef idx="2">
+            <a:schemeClr val="accent1"/>
+          </a:effectRef>
+          <a:fontRef idx="minor">
+            <a:schemeClr val="lt1"/>
+          </a:fontRef>
+        </p:style>
+        <p:txBody>
+          <a:bodyPr rtlCol="0" anchor="ctr"/>
+          <a:lstStyle/>
+          <a:p>
+            <a:pPr algn="ctr"/>
+            <a:r>
+              <a:rPr b="1" sz="3000">
+                <a:solidFill>
+                  <a:srgbClr val="2B2A4A"/>
+                </a:solidFill>
+                <a:latin typeface="Cambria"/>
+              </a:rPr>
+              <a:t>End of Unit 4</a:t>
+            </a:r>
+          </a:p>
+          <a:p>
+            <a:pPr algn="ctr"/>
+            <a:r>
+              <a:rPr sz="1400">
+                <a:solidFill>
+                  <a:srgbClr val="595959"/>
+                </a:solidFill>
+              </a:rPr>
+              <a:t>Review the matching workbook to consolidate what you have learnt.</a:t>
+            </a:r>
+          </a:p>
+        </p:txBody>
+      </p:sp>
+    </p:spTree>
+  </p:cSld>
+  <p:clrMapOvr>
+    <a:masterClrMapping/>
+  </p:clrMapOvr>
+</p:sld>
+</file>
+
 <file path=ppt/slides/slide4.xml><?xml version="1.0" encoding="utf-8"?>
 <p:sld xmlns:a="http://schemas.openxmlformats.org/drawingml/2006/main" xmlns:p="http://schemas.openxmlformats.org/presentationml/2006/main" xmlns:r="http://schemas.openxmlformats.org/officeDocument/2006/relationships">
   <p:cSld>
@@ -12522,7 +15037,7 @@
     <p:bg>
       <p:bgPr>
         <a:solidFill>
-          <a:srgbClr val="2B2A4A"/>
+          <a:srgbClr val="C97B9E"/>
         </a:solidFill>
         <a:effectLst/>
       </p:bgPr>
@@ -12542,14 +15057,14 @@
         </p:nvSpPr>
         <p:spPr>
           <a:xfrm>
-            <a:off x="9692640" y="-914400"/>
-            <a:ext cx="2926080" cy="2926080"/>
+            <a:off x="-914400" y="-914400"/>
+            <a:ext cx="2103120" cy="2103120"/>
           </a:xfrm>
           <a:prstGeom prst="ellipse">
             <a:avLst/>
           </a:prstGeom>
           <a:solidFill>
-            <a:srgbClr val="252441"/>
+            <a:srgbClr val="B06C8B"/>
           </a:solidFill>
           <a:ln>
             <a:noFill/>
@@ -12586,14 +15101,14 @@
         </p:nvSpPr>
         <p:spPr>
           <a:xfrm>
-            <a:off x="-914400" y="4937760"/>
-            <a:ext cx="2377440" cy="2377440"/>
+            <a:off x="11064240" y="5852160"/>
+            <a:ext cx="1737360" cy="1737360"/>
           </a:xfrm>
           <a:prstGeom prst="ellipse">
             <a:avLst/>
           </a:prstGeom>
           <a:solidFill>
-            <a:srgbClr val="252441"/>
+            <a:srgbClr val="B06C8B"/>
           </a:solidFill>
           <a:ln>
             <a:noFill/>
@@ -12630,8 +15145,8 @@
         </p:nvSpPr>
         <p:spPr>
           <a:xfrm>
-            <a:off x="822960" y="1051560"/>
-            <a:ext cx="1188720" cy="502920"/>
+            <a:off x="685800" y="457200"/>
+            <a:ext cx="1696212" cy="502920"/>
           </a:xfrm>
           <a:prstGeom prst="roundRect">
             <a:avLst>
@@ -12661,40 +15176,75 @@
           </a:fontRef>
         </p:style>
         <p:txBody>
-          <a:bodyPr rtlCol="0" anchor="ctr" wrap="none" lIns="50800" rIns="50800"/>
+          <a:bodyPr rtlCol="0" anchor="ctr"/>
           <a:lstStyle/>
           <a:p>
             <a:pPr algn="ctr"/>
             <a:r>
-              <a:rPr sz="1400" b="1">
-                <a:solidFill>
-                  <a:srgbClr val="22213B"/>
-                </a:solidFill>
-                <a:latin typeface="Calibri"/>
-              </a:rPr>
-              <a:t>02</a:t>
-            </a:r>
-          </a:p>
-        </p:txBody>
-      </p:sp>
-      <p:sp>
-        <p:nvSpPr>
-          <p:cNvPr id="5" name="Rounded Rectangle 4"/>
+              <a:rPr b="1" sz="1400">
+                <a:solidFill>
+                  <a:srgbClr val="824F66"/>
+                </a:solidFill>
+                <a:latin typeface="Calibri"/>
+              </a:rPr>
+              <a:t>CHALLENGE</a:t>
+            </a:r>
+          </a:p>
+        </p:txBody>
+      </p:sp>
+      <p:sp>
+        <p:nvSpPr>
+          <p:cNvPr id="5" name="TextBox 4"/>
+          <p:cNvSpPr txBox="1"/>
+          <p:nvPr/>
+        </p:nvSpPr>
+        <p:spPr>
+          <a:xfrm>
+            <a:off x="685800" y="1143000"/>
+            <a:ext cx="10607040" cy="914400"/>
+          </a:xfrm>
+          <a:prstGeom prst="rect">
+            <a:avLst/>
+          </a:prstGeom>
+          <a:noFill/>
+        </p:spPr>
+        <p:txBody>
+          <a:bodyPr wrap="square" anchor="t">
+            <a:spAutoFit/>
+          </a:bodyPr>
+          <a:lstStyle/>
+          <a:p>
+            <a:pPr algn="l"/>
+            <a:r>
+              <a:rPr sz="3000" b="1" i="0">
+                <a:solidFill>
+                  <a:srgbClr val="FFFFFF"/>
+                </a:solidFill>
+                <a:latin typeface="Cambria"/>
+              </a:rPr>
+              <a:t>Trial and Error</a:t>
+            </a:r>
+          </a:p>
+        </p:txBody>
+      </p:sp>
+      <p:sp>
+        <p:nvSpPr>
+          <p:cNvPr id="6" name="Rounded Rectangle 5"/>
           <p:cNvSpPr/>
           <p:nvPr/>
         </p:nvSpPr>
         <p:spPr>
           <a:xfrm>
-            <a:off x="822960" y="2011680"/>
-            <a:ext cx="10515600" cy="2834640"/>
+            <a:off x="685800" y="2148840"/>
+            <a:ext cx="960120" cy="411480"/>
           </a:xfrm>
           <a:prstGeom prst="roundRect">
             <a:avLst>
-              <a:gd name="adj" fmla="val 18000"/>
+              <a:gd name="adj" fmla="val 50000"/>
             </a:avLst>
           </a:prstGeom>
           <a:solidFill>
-            <a:srgbClr val="FFFFFF"/>
+            <a:srgbClr val="965C76"/>
           </a:solidFill>
           <a:ln>
             <a:noFill/>
@@ -12716,23 +15266,174 @@
           </a:fontRef>
         </p:style>
         <p:txBody>
-          <a:bodyPr rtlCol="0" anchor="ctr"/>
+          <a:bodyPr rtlCol="0" anchor="ctr" wrap="none" lIns="50800" rIns="50800"/>
           <a:lstStyle/>
           <a:p>
             <a:pPr algn="ctr"/>
-          </a:p>
-        </p:txBody>
-      </p:sp>
-      <p:sp>
-        <p:nvSpPr>
-          <p:cNvPr id="6" name="TextBox 5"/>
+            <a:r>
+              <a:rPr sz="1050" b="1">
+                <a:solidFill>
+                  <a:srgbClr val="FFFFFF"/>
+                </a:solidFill>
+                <a:latin typeface="Calibri"/>
+              </a:rPr>
+              <a:t>6 MIN</a:t>
+            </a:r>
+          </a:p>
+        </p:txBody>
+      </p:sp>
+      <p:sp>
+        <p:nvSpPr>
+          <p:cNvPr id="7" name="Rounded Rectangle 6"/>
+          <p:cNvSpPr/>
+          <p:nvPr/>
+        </p:nvSpPr>
+        <p:spPr>
+          <a:xfrm>
+            <a:off x="1783080" y="2148840"/>
+            <a:ext cx="1463040" cy="411480"/>
+          </a:xfrm>
+          <a:prstGeom prst="roundRect">
+            <a:avLst>
+              <a:gd name="adj" fmla="val 50000"/>
+            </a:avLst>
+          </a:prstGeom>
+          <a:solidFill>
+            <a:srgbClr val="965C76"/>
+          </a:solidFill>
+          <a:ln>
+            <a:noFill/>
+          </a:ln>
+          <a:effectLst/>
+        </p:spPr>
+        <p:style>
+          <a:lnRef idx="1">
+            <a:schemeClr val="accent1"/>
+          </a:lnRef>
+          <a:fillRef idx="3">
+            <a:schemeClr val="accent1"/>
+          </a:fillRef>
+          <a:effectRef idx="2">
+            <a:schemeClr val="accent1"/>
+          </a:effectRef>
+          <a:fontRef idx="minor">
+            <a:schemeClr val="lt1"/>
+          </a:fontRef>
+        </p:style>
+        <p:txBody>
+          <a:bodyPr rtlCol="0" anchor="ctr" wrap="none" lIns="50800" rIns="50800"/>
+          <a:lstStyle/>
+          <a:p>
+            <a:pPr algn="ctr"/>
+            <a:r>
+              <a:rPr sz="1050" b="1">
+                <a:solidFill>
+                  <a:srgbClr val="FFFFFF"/>
+                </a:solidFill>
+                <a:latin typeface="Calibri"/>
+              </a:rPr>
+              <a:t>INDIVIDUAL</a:t>
+            </a:r>
+          </a:p>
+        </p:txBody>
+      </p:sp>
+      <p:sp>
+        <p:nvSpPr>
+          <p:cNvPr id="8" name="Rounded Rectangle 7"/>
+          <p:cNvSpPr/>
+          <p:nvPr/>
+        </p:nvSpPr>
+        <p:spPr>
+          <a:xfrm>
+            <a:off x="685800" y="2788920"/>
+            <a:ext cx="10607040" cy="3246120"/>
+          </a:xfrm>
+          <a:prstGeom prst="roundRect">
+            <a:avLst>
+              <a:gd name="adj" fmla="val 8000"/>
+            </a:avLst>
+          </a:prstGeom>
+          <a:solidFill>
+            <a:srgbClr val="FFFFFF"/>
+          </a:solidFill>
+          <a:ln>
+            <a:noFill/>
+          </a:ln>
+          <a:effectLst/>
+        </p:spPr>
+        <p:style>
+          <a:lnRef idx="1">
+            <a:schemeClr val="accent1"/>
+          </a:lnRef>
+          <a:fillRef idx="3">
+            <a:schemeClr val="accent1"/>
+          </a:fillRef>
+          <a:effectRef idx="2">
+            <a:schemeClr val="accent1"/>
+          </a:effectRef>
+          <a:fontRef idx="minor">
+            <a:schemeClr val="lt1"/>
+          </a:fontRef>
+        </p:style>
+        <p:txBody>
+          <a:bodyPr rtlCol="0" anchor="ctr" lIns="304800" rIns="304800" tIns="203200" bIns="203200" wrap="square"/>
+          <a:lstStyle/>
+          <a:p>
+            <a:pPr algn="ctr" indent="-203200" marL="203200">
+              <a:spcAft>
+                <a:spcPts val="900"/>
+              </a:spcAft>
+              <a:buClr>
+                <a:srgbClr val="C97B9E"/>
+              </a:buClr>
+              <a:buSzPct val="90000"/>
+              <a:buFont typeface="Arial"/>
+              <a:buChar char="●"/>
+            </a:pPr>
+            <a:r>
+              <a:rPr sz="1450" b="0" i="0">
+                <a:solidFill>
+                  <a:srgbClr val="201F33"/>
+                </a:solidFill>
+                <a:latin typeface="Calibri"/>
+              </a:rPr>
+              <a:t>Take a single shape or word and produce 3 quick colour trials or 3 quick type trials.</a:t>
+            </a:r>
+          </a:p>
+          <a:p>
+            <a:pPr indent="-203200" marL="203200">
+              <a:spcAft>
+                <a:spcPts val="900"/>
+              </a:spcAft>
+              <a:buClr>
+                <a:srgbClr val="C97B9E"/>
+              </a:buClr>
+              <a:buSzPct val="90000"/>
+              <a:buFont typeface="Arial"/>
+              <a:buChar char="●"/>
+            </a:pPr>
+            <a:r>
+              <a:rPr sz="1450" b="0" i="0">
+                <a:solidFill>
+                  <a:srgbClr val="201F33"/>
+                </a:solidFill>
+                <a:latin typeface="Calibri"/>
+              </a:rPr>
+              <a:t>Annotate which one you'd choose and why.</a:t>
+            </a:r>
+          </a:p>
+        </p:txBody>
+      </p:sp>
+      <p:sp>
+        <p:nvSpPr>
+          <p:cNvPr id="9" name="TextBox 8"/>
           <p:cNvSpPr txBox="1"/>
           <p:nvPr/>
         </p:nvSpPr>
         <p:spPr>
           <a:xfrm>
-            <a:off x="1280160" y="2697480"/>
-            <a:ext cx="9601200" cy="1097280"/>
+            <a:off x="685800" y="6217920"/>
+            <a:ext cx="10607040" cy="502920"/>
           </a:xfrm>
           <a:prstGeom prst="rect">
             <a:avLst/>
@@ -12747,48 +15448,13 @@
           <a:p>
             <a:pPr algn="l"/>
             <a:r>
-              <a:rPr sz="3400" b="1" i="0">
-                <a:solidFill>
-                  <a:srgbClr val="24233E"/>
-                </a:solidFill>
-                <a:latin typeface="Cambria"/>
-              </a:rPr>
-              <a:t>Evaluation &amp; Presentation</a:t>
-            </a:r>
-          </a:p>
-        </p:txBody>
-      </p:sp>
-      <p:sp>
-        <p:nvSpPr>
-          <p:cNvPr id="7" name="TextBox 6"/>
-          <p:cNvSpPr txBox="1"/>
-          <p:nvPr/>
-        </p:nvSpPr>
-        <p:spPr>
-          <a:xfrm>
-            <a:off x="1280160" y="3657600"/>
-            <a:ext cx="9601200" cy="548640"/>
-          </a:xfrm>
-          <a:prstGeom prst="rect">
-            <a:avLst/>
-          </a:prstGeom>
-          <a:noFill/>
-        </p:spPr>
-        <p:txBody>
-          <a:bodyPr wrap="square" anchor="t">
-            <a:spAutoFit/>
-          </a:bodyPr>
-          <a:lstStyle/>
-          <a:p>
-            <a:pPr algn="l"/>
-            <a:r>
-              <a:rPr sz="1500" b="0" i="0">
-                <a:solidFill>
-                  <a:srgbClr val="6B6B6B"/>
-                </a:solidFill>
-                <a:latin typeface="Calibri"/>
-              </a:rPr>
-              <a:t>AOS 2 - Evaluation, Refinement and Presentation</a:t>
+              <a:rPr sz="1250" b="0" i="1">
+                <a:solidFill>
+                  <a:srgbClr val="FFFFFF"/>
+                </a:solidFill>
+                <a:latin typeface="Calibri"/>
+              </a:rPr>
+              <a:t>Debrief: Did your first instinct end up being your final choice?</a:t>
             </a:r>
           </a:p>
         </p:txBody>
